--- a/Presentation/Main_structure_backup.pptx
+++ b/Presentation/Main_structure_backup.pptx
@@ -8,16 +8,18 @@
     <p:sldId id="256" r:id="rId2"/>
     <p:sldId id="257" r:id="rId3"/>
     <p:sldId id="258" r:id="rId4"/>
-    <p:sldId id="260" r:id="rId5"/>
-    <p:sldId id="266" r:id="rId6"/>
-    <p:sldId id="259" r:id="rId7"/>
-    <p:sldId id="261" r:id="rId8"/>
-    <p:sldId id="267" r:id="rId9"/>
-    <p:sldId id="262" r:id="rId10"/>
-    <p:sldId id="268" r:id="rId11"/>
-    <p:sldId id="263" r:id="rId12"/>
-    <p:sldId id="264" r:id="rId13"/>
-    <p:sldId id="265" r:id="rId14"/>
+    <p:sldId id="269" r:id="rId5"/>
+    <p:sldId id="270" r:id="rId6"/>
+    <p:sldId id="260" r:id="rId7"/>
+    <p:sldId id="266" r:id="rId8"/>
+    <p:sldId id="259" r:id="rId9"/>
+    <p:sldId id="261" r:id="rId10"/>
+    <p:sldId id="267" r:id="rId11"/>
+    <p:sldId id="262" r:id="rId12"/>
+    <p:sldId id="265" r:id="rId13"/>
+    <p:sldId id="268" r:id="rId14"/>
+    <p:sldId id="264" r:id="rId15"/>
+    <p:sldId id="263" r:id="rId16"/>
   </p:sldIdLst>
   <p:sldSz cx="12192000" cy="6858000"/>
   <p:notesSz cx="6858000" cy="9144000"/>
@@ -271,7 +273,7 @@
           <a:p>
             <a:fld id="{D5A7CA8D-7759-4184-AF8C-A3C77124F794}" type="datetimeFigureOut">
               <a:rPr lang="en-US" smtClean="0"/>
-              <a:t>10/5/2026</a:t>
+              <a:t>10/12/2026</a:t>
             </a:fld>
             <a:endParaRPr lang="en-US"/>
           </a:p>
@@ -469,7 +471,7 @@
           <a:p>
             <a:fld id="{D5A7CA8D-7759-4184-AF8C-A3C77124F794}" type="datetimeFigureOut">
               <a:rPr lang="en-US" smtClean="0"/>
-              <a:t>10/5/2026</a:t>
+              <a:t>10/12/2026</a:t>
             </a:fld>
             <a:endParaRPr lang="en-US"/>
           </a:p>
@@ -677,7 +679,7 @@
           <a:p>
             <a:fld id="{D5A7CA8D-7759-4184-AF8C-A3C77124F794}" type="datetimeFigureOut">
               <a:rPr lang="en-US" smtClean="0"/>
-              <a:t>10/5/2026</a:t>
+              <a:t>10/12/2026</a:t>
             </a:fld>
             <a:endParaRPr lang="en-US"/>
           </a:p>
@@ -875,7 +877,7 @@
           <a:p>
             <a:fld id="{D5A7CA8D-7759-4184-AF8C-A3C77124F794}" type="datetimeFigureOut">
               <a:rPr lang="en-US" smtClean="0"/>
-              <a:t>10/5/2026</a:t>
+              <a:t>10/12/2026</a:t>
             </a:fld>
             <a:endParaRPr lang="en-US"/>
           </a:p>
@@ -1150,7 +1152,7 @@
           <a:p>
             <a:fld id="{D5A7CA8D-7759-4184-AF8C-A3C77124F794}" type="datetimeFigureOut">
               <a:rPr lang="en-US" smtClean="0"/>
-              <a:t>10/5/2026</a:t>
+              <a:t>10/12/2026</a:t>
             </a:fld>
             <a:endParaRPr lang="en-US"/>
           </a:p>
@@ -1415,7 +1417,7 @@
           <a:p>
             <a:fld id="{D5A7CA8D-7759-4184-AF8C-A3C77124F794}" type="datetimeFigureOut">
               <a:rPr lang="en-US" smtClean="0"/>
-              <a:t>10/5/2026</a:t>
+              <a:t>10/12/2026</a:t>
             </a:fld>
             <a:endParaRPr lang="en-US"/>
           </a:p>
@@ -1827,7 +1829,7 @@
           <a:p>
             <a:fld id="{D5A7CA8D-7759-4184-AF8C-A3C77124F794}" type="datetimeFigureOut">
               <a:rPr lang="en-US" smtClean="0"/>
-              <a:t>10/5/2026</a:t>
+              <a:t>10/12/2026</a:t>
             </a:fld>
             <a:endParaRPr lang="en-US"/>
           </a:p>
@@ -1968,7 +1970,7 @@
           <a:p>
             <a:fld id="{D5A7CA8D-7759-4184-AF8C-A3C77124F794}" type="datetimeFigureOut">
               <a:rPr lang="en-US" smtClean="0"/>
-              <a:t>10/5/2026</a:t>
+              <a:t>10/12/2026</a:t>
             </a:fld>
             <a:endParaRPr lang="en-US"/>
           </a:p>
@@ -2081,7 +2083,7 @@
           <a:p>
             <a:fld id="{D5A7CA8D-7759-4184-AF8C-A3C77124F794}" type="datetimeFigureOut">
               <a:rPr lang="en-US" smtClean="0"/>
-              <a:t>10/5/2026</a:t>
+              <a:t>10/12/2026</a:t>
             </a:fld>
             <a:endParaRPr lang="en-US"/>
           </a:p>
@@ -2392,7 +2394,7 @@
           <a:p>
             <a:fld id="{D5A7CA8D-7759-4184-AF8C-A3C77124F794}" type="datetimeFigureOut">
               <a:rPr lang="en-US" smtClean="0"/>
-              <a:t>10/5/2026</a:t>
+              <a:t>10/12/2026</a:t>
             </a:fld>
             <a:endParaRPr lang="en-US"/>
           </a:p>
@@ -2680,7 +2682,7 @@
           <a:p>
             <a:fld id="{D5A7CA8D-7759-4184-AF8C-A3C77124F794}" type="datetimeFigureOut">
               <a:rPr lang="en-US" smtClean="0"/>
-              <a:t>10/5/2026</a:t>
+              <a:t>10/12/2026</a:t>
             </a:fld>
             <a:endParaRPr lang="en-US"/>
           </a:p>
@@ -2921,7 +2923,7 @@
           <a:p>
             <a:fld id="{D5A7CA8D-7759-4184-AF8C-A3C77124F794}" type="datetimeFigureOut">
               <a:rPr lang="en-US" smtClean="0"/>
-              <a:t>10/5/2026</a:t>
+              <a:t>10/12/2026</a:t>
             </a:fld>
             <a:endParaRPr lang="en-US"/>
           </a:p>
@@ -3368,31 +3370,6 @@
           </a:p>
         </p:txBody>
       </p:sp>
-      <p:sp>
-        <p:nvSpPr>
-          <p:cNvPr id="3" name="Subtitle 2">
-            <a:extLst>
-              <a:ext uri="{FF2B5EF4-FFF2-40B4-BE49-F238E27FC236}">
-                <a16:creationId xmlns:a16="http://schemas.microsoft.com/office/drawing/2014/main" id="{0477F9E7-CAA5-BFF8-B3FB-07051CCE94BD}"/>
-              </a:ext>
-            </a:extLst>
-          </p:cNvPr>
-          <p:cNvSpPr>
-            <a:spLocks noGrp="1"/>
-          </p:cNvSpPr>
-          <p:nvPr>
-            <p:ph type="subTitle" idx="1"/>
-          </p:nvPr>
-        </p:nvSpPr>
-        <p:spPr/>
-        <p:txBody>
-          <a:bodyPr/>
-          <a:lstStyle/>
-          <a:p>
-            <a:endParaRPr lang="en-US"/>
-          </a:p>
-        </p:txBody>
-      </p:sp>
     </p:spTree>
     <p:extLst>
       <p:ext uri="{BB962C8B-B14F-4D97-AF65-F5344CB8AC3E}">
@@ -3428,7 +3405,7 @@
           <p:cNvPr id="2" name="Title 1">
             <a:extLst>
               <a:ext uri="{FF2B5EF4-FFF2-40B4-BE49-F238E27FC236}">
-                <a16:creationId xmlns:a16="http://schemas.microsoft.com/office/drawing/2014/main" id="{783C2165-D8E0-5031-DC45-2F60F85B9911}"/>
+                <a16:creationId xmlns:a16="http://schemas.microsoft.com/office/drawing/2014/main" id="{86DE510A-6AA9-6B8B-42D8-2BC8D8A9D144}"/>
               </a:ext>
             </a:extLst>
           </p:cNvPr>
@@ -3446,238 +3423,241 @@
           <a:p>
             <a:r>
               <a:rPr lang="en-US" dirty="0"/>
-              <a:t>Gaps</a:t>
-            </a:r>
-          </a:p>
-        </p:txBody>
-      </p:sp>
-      <p:sp>
-        <p:nvSpPr>
-          <p:cNvPr id="4" name="Rectangle 1">
-            <a:extLst>
-              <a:ext uri="{FF2B5EF4-FFF2-40B4-BE49-F238E27FC236}">
-                <a16:creationId xmlns:a16="http://schemas.microsoft.com/office/drawing/2014/main" id="{0A79D186-B878-DB23-D43F-FA193094EB83}"/>
-              </a:ext>
-            </a:extLst>
-          </p:cNvPr>
-          <p:cNvSpPr>
-            <a:spLocks noGrp="1" noChangeArrowheads="1"/>
+              <a:t>Adiabatic computation for </a:t>
+            </a:r>
+            <a:r>
+              <a:rPr lang="en-US" dirty="0" err="1"/>
+              <a:t>Ising</a:t>
+            </a:r>
+            <a:r>
+              <a:rPr lang="en-US" dirty="0"/>
+              <a:t> model</a:t>
+            </a:r>
+          </a:p>
+        </p:txBody>
+      </p:sp>
+      <p:sp>
+        <p:nvSpPr>
+          <p:cNvPr id="3" name="Content Placeholder 2">
+            <a:extLst>
+              <a:ext uri="{FF2B5EF4-FFF2-40B4-BE49-F238E27FC236}">
+                <a16:creationId xmlns:a16="http://schemas.microsoft.com/office/drawing/2014/main" id="{88E89AF9-AEEA-9C6F-796C-C5CBE82C257C}"/>
+              </a:ext>
+            </a:extLst>
+          </p:cNvPr>
+          <p:cNvSpPr>
+            <a:spLocks noGrp="1"/>
           </p:cNvSpPr>
           <p:nvPr>
             <p:ph idx="1"/>
           </p:nvPr>
         </p:nvSpPr>
-        <p:spPr bwMode="auto">
-          <a:xfrm>
-            <a:off x="838200" y="1786915"/>
-            <a:ext cx="3586238" cy="1477328"/>
+        <p:spPr/>
+        <p:txBody>
+          <a:bodyPr/>
+          <a:lstStyle/>
+          <a:p>
+            <a:r>
+              <a:rPr lang="en-US" dirty="0"/>
+              <a:t>For two spins</a:t>
+            </a:r>
+          </a:p>
+        </p:txBody>
+      </p:sp>
+      <p:pic>
+        <p:nvPicPr>
+          <p:cNvPr id="5" name="Picture 4">
+            <a:extLst>
+              <a:ext uri="{FF2B5EF4-FFF2-40B4-BE49-F238E27FC236}">
+                <a16:creationId xmlns:a16="http://schemas.microsoft.com/office/drawing/2014/main" id="{A41F6900-AFBE-4D2C-AAAF-327CFA2F28A8}"/>
+              </a:ext>
+            </a:extLst>
+          </p:cNvPr>
+          <p:cNvPicPr>
+            <a:picLocks noChangeAspect="1"/>
+          </p:cNvPicPr>
+          <p:nvPr/>
+        </p:nvPicPr>
+        <p:blipFill>
+          <a:blip r:embed="rId2"/>
+          <a:stretch>
+            <a:fillRect/>
+          </a:stretch>
+        </p:blipFill>
+        <p:spPr>
+          <a:xfrm>
+            <a:off x="3848666" y="2114503"/>
+            <a:ext cx="3009900" cy="3971925"/>
           </a:xfrm>
           <a:prstGeom prst="rect">
             <a:avLst/>
           </a:prstGeom>
-          <a:noFill/>
           <a:ln>
             <a:noFill/>
           </a:ln>
-          <a:effectLst/>
-          <a:extLst>
-            <a:ext uri="{909E8E84-426E-40DD-AFC4-6F175D3DCCD1}">
-              <a14:hiddenFill xmlns:a14="http://schemas.microsoft.com/office/drawing/2010/main">
-                <a:solidFill>
-                  <a:schemeClr val="accent1"/>
-                </a:solidFill>
-              </a14:hiddenFill>
-            </a:ext>
-            <a:ext uri="{91240B29-F687-4F45-9708-019B960494DF}">
-              <a14:hiddenLine xmlns:a14="http://schemas.microsoft.com/office/drawing/2010/main" w="9525">
-                <a:solidFill>
-                  <a:schemeClr val="tx1"/>
-                </a:solidFill>
-                <a:miter lim="800000"/>
-                <a:headEnd/>
-                <a:tailEnd/>
-              </a14:hiddenLine>
-            </a:ext>
-            <a:ext uri="{AF507438-7753-43E0-B8FC-AC1667EBCBE1}">
-              <a14:hiddenEffects xmlns:a14="http://schemas.microsoft.com/office/drawing/2010/main">
-                <a:effectLst>
-                  <a:outerShdw dist="35921" dir="2700000" algn="ctr" rotWithShape="0">
-                    <a:schemeClr val="bg2"/>
-                  </a:outerShdw>
-                </a:effectLst>
-              </a14:hiddenEffects>
-            </a:ext>
-          </a:extLst>
-        </p:spPr>
-        <p:txBody>
-          <a:bodyPr vert="horz" wrap="none" lIns="91440" tIns="45720" rIns="91440" bIns="45720" numCol="1" anchor="ctr" anchorCtr="0" compatLnSpc="1">
-            <a:prstTxWarp prst="textNoShape">
-              <a:avLst/>
-            </a:prstTxWarp>
-            <a:spAutoFit/>
-          </a:bodyPr>
-          <a:lstStyle/>
-          <a:p>
-            <a:pPr marL="0" marR="0" lvl="0" indent="0" algn="l" defTabSz="914400" rtl="0" eaLnBrk="0" fontAlgn="base" latinLnBrk="0" hangingPunct="0">
-              <a:lnSpc>
-                <a:spcPct val="100000"/>
-              </a:lnSpc>
-              <a:spcBef>
-                <a:spcPct val="0"/>
-              </a:spcBef>
-              <a:spcAft>
-                <a:spcPct val="0"/>
-              </a:spcAft>
-              <a:buClrTx/>
-              <a:buSzTx/>
-              <a:buFontTx/>
-              <a:buChar char="•"/>
-              <a:tabLst/>
-            </a:pPr>
-            <a:r>
-              <a:rPr kumimoji="0" lang="en-US" altLang="en-US" sz="1800" b="0" i="0" u="none" strike="noStrike" cap="none" normalizeH="0" baseline="0" dirty="0">
-                <a:ln>
-                  <a:noFill/>
-                </a:ln>
-                <a:solidFill>
-                  <a:schemeClr val="tx1"/>
-                </a:solidFill>
-                <a:effectLst/>
-                <a:latin typeface="Arial" panose="020B0604020202020204" pitchFamily="34" charset="0"/>
-              </a:rPr>
-              <a:t>instantaneous gap </a:t>
-            </a:r>
-          </a:p>
-          <a:p>
-            <a:pPr marL="0" marR="0" lvl="0" indent="0" algn="l" defTabSz="914400" rtl="0" eaLnBrk="0" fontAlgn="base" latinLnBrk="0" hangingPunct="0">
-              <a:lnSpc>
-                <a:spcPct val="100000"/>
-              </a:lnSpc>
-              <a:spcBef>
-                <a:spcPct val="0"/>
-              </a:spcBef>
-              <a:spcAft>
-                <a:spcPct val="0"/>
-              </a:spcAft>
-              <a:buClrTx/>
-              <a:buSzTx/>
-              <a:buFontTx/>
-              <a:buChar char="•"/>
-              <a:tabLst/>
-            </a:pPr>
-            <a:r>
-              <a:rPr kumimoji="0" lang="en-US" altLang="en-US" sz="1800" b="0" i="0" u="none" strike="noStrike" cap="none" normalizeH="0" baseline="0" dirty="0">
-                <a:ln>
-                  <a:noFill/>
-                </a:ln>
-                <a:solidFill>
-                  <a:schemeClr val="tx1"/>
-                </a:solidFill>
-                <a:effectLst/>
-                <a:latin typeface="Arial" panose="020B0604020202020204" pitchFamily="34" charset="0"/>
-              </a:rPr>
-              <a:t>minimum gap </a:t>
-            </a:r>
-          </a:p>
-          <a:p>
-            <a:pPr marL="0" marR="0" lvl="0" indent="0" algn="l" defTabSz="914400" rtl="0" eaLnBrk="0" fontAlgn="base" latinLnBrk="0" hangingPunct="0">
-              <a:lnSpc>
-                <a:spcPct val="100000"/>
-              </a:lnSpc>
-              <a:spcBef>
-                <a:spcPct val="0"/>
-              </a:spcBef>
-              <a:spcAft>
-                <a:spcPct val="0"/>
-              </a:spcAft>
-              <a:buClrTx/>
-              <a:buSzTx/>
-              <a:buFontTx/>
-              <a:buChar char="•"/>
-              <a:tabLst/>
-            </a:pPr>
-            <a:r>
-              <a:rPr kumimoji="0" lang="en-US" altLang="en-US" sz="1800" b="0" i="0" u="none" strike="noStrike" cap="none" normalizeH="0" baseline="0" dirty="0">
-                <a:ln>
-                  <a:noFill/>
-                </a:ln>
-                <a:solidFill>
-                  <a:schemeClr val="tx1"/>
-                </a:solidFill>
-                <a:effectLst/>
-                <a:latin typeface="Arial" panose="020B0604020202020204" pitchFamily="34" charset="0"/>
-              </a:rPr>
-              <a:t>avoided crossing </a:t>
-            </a:r>
-          </a:p>
-          <a:p>
-            <a:pPr marL="0" marR="0" lvl="0" indent="0" algn="l" defTabSz="914400" rtl="0" eaLnBrk="0" fontAlgn="base" latinLnBrk="0" hangingPunct="0">
-              <a:lnSpc>
-                <a:spcPct val="100000"/>
-              </a:lnSpc>
-              <a:spcBef>
-                <a:spcPct val="0"/>
-              </a:spcBef>
-              <a:spcAft>
-                <a:spcPct val="0"/>
-              </a:spcAft>
-              <a:buClrTx/>
-              <a:buSzTx/>
-              <a:buFontTx/>
-              <a:buChar char="•"/>
-              <a:tabLst/>
-            </a:pPr>
-            <a:r>
-              <a:rPr kumimoji="0" lang="en-US" altLang="en-US" sz="1800" b="0" i="0" u="none" strike="noStrike" cap="none" normalizeH="0" baseline="0" dirty="0">
-                <a:ln>
-                  <a:noFill/>
-                </a:ln>
-                <a:solidFill>
-                  <a:schemeClr val="tx1"/>
-                </a:solidFill>
-                <a:effectLst/>
-                <a:latin typeface="Arial" panose="020B0604020202020204" pitchFamily="34" charset="0"/>
-              </a:rPr>
-              <a:t>symmetry </a:t>
-            </a:r>
-          </a:p>
-          <a:p>
-            <a:pPr marL="0" marR="0" lvl="0" indent="0" algn="l" defTabSz="914400" rtl="0" eaLnBrk="0" fontAlgn="base" latinLnBrk="0" hangingPunct="0">
-              <a:lnSpc>
-                <a:spcPct val="100000"/>
-              </a:lnSpc>
-              <a:spcBef>
-                <a:spcPct val="0"/>
-              </a:spcBef>
-              <a:spcAft>
-                <a:spcPct val="0"/>
-              </a:spcAft>
-              <a:buClrTx/>
-              <a:buSzTx/>
-              <a:buFontTx/>
-              <a:buChar char="•"/>
-              <a:tabLst/>
-            </a:pPr>
-            <a:r>
-              <a:rPr kumimoji="0" lang="en-US" altLang="en-US" sz="1800" b="0" i="0" u="none" strike="noStrike" cap="none" normalizeH="0" baseline="0" dirty="0">
-                <a:ln>
-                  <a:noFill/>
-                </a:ln>
-                <a:solidFill>
-                  <a:schemeClr val="tx1"/>
-                </a:solidFill>
-                <a:effectLst/>
-                <a:latin typeface="Arial" panose="020B0604020202020204" pitchFamily="34" charset="0"/>
-              </a:rPr>
-              <a:t>three meanings of required time </a:t>
-            </a:r>
-          </a:p>
-        </p:txBody>
-      </p:sp>
+          <a:effectLst>
+            <a:outerShdw blurRad="190500" algn="tl" rotWithShape="0">
+              <a:srgbClr val="000000">
+                <a:alpha val="70000"/>
+              </a:srgbClr>
+            </a:outerShdw>
+          </a:effectLst>
+        </p:spPr>
+      </p:pic>
+      <p:pic>
+        <p:nvPicPr>
+          <p:cNvPr id="6" name="Picture 5">
+            <a:extLst>
+              <a:ext uri="{FF2B5EF4-FFF2-40B4-BE49-F238E27FC236}">
+                <a16:creationId xmlns:a16="http://schemas.microsoft.com/office/drawing/2014/main" id="{361B3122-D99A-7713-DBD1-E9A07D889EB2}"/>
+              </a:ext>
+            </a:extLst>
+          </p:cNvPr>
+          <p:cNvPicPr>
+            <a:picLocks noChangeAspect="1"/>
+          </p:cNvPicPr>
+          <p:nvPr/>
+        </p:nvPicPr>
+        <p:blipFill>
+          <a:blip r:embed="rId3"/>
+          <a:stretch>
+            <a:fillRect/>
+          </a:stretch>
+        </p:blipFill>
+        <p:spPr>
+          <a:xfrm>
+            <a:off x="10347672" y="3474138"/>
+            <a:ext cx="1360697" cy="776707"/>
+          </a:xfrm>
+          <a:prstGeom prst="rect">
+            <a:avLst/>
+          </a:prstGeom>
+        </p:spPr>
+      </p:pic>
+      <p:pic>
+        <p:nvPicPr>
+          <p:cNvPr id="8" name="Picture 7">
+            <a:extLst>
+              <a:ext uri="{FF2B5EF4-FFF2-40B4-BE49-F238E27FC236}">
+                <a16:creationId xmlns:a16="http://schemas.microsoft.com/office/drawing/2014/main" id="{67409BD3-59EF-B39B-CEC9-D611F1C1430E}"/>
+              </a:ext>
+            </a:extLst>
+          </p:cNvPr>
+          <p:cNvPicPr>
+            <a:picLocks noChangeAspect="1"/>
+          </p:cNvPicPr>
+          <p:nvPr/>
+        </p:nvPicPr>
+        <p:blipFill>
+          <a:blip r:embed="rId4"/>
+          <a:stretch>
+            <a:fillRect/>
+          </a:stretch>
+        </p:blipFill>
+        <p:spPr>
+          <a:xfrm>
+            <a:off x="7567704" y="2151927"/>
+            <a:ext cx="2371111" cy="268962"/>
+          </a:xfrm>
+          <a:prstGeom prst="rect">
+            <a:avLst/>
+          </a:prstGeom>
+        </p:spPr>
+      </p:pic>
+      <p:pic>
+        <p:nvPicPr>
+          <p:cNvPr id="10" name="Picture 9">
+            <a:extLst>
+              <a:ext uri="{FF2B5EF4-FFF2-40B4-BE49-F238E27FC236}">
+                <a16:creationId xmlns:a16="http://schemas.microsoft.com/office/drawing/2014/main" id="{49024B68-E077-BE68-7C61-DF8B5F1B22F2}"/>
+              </a:ext>
+            </a:extLst>
+          </p:cNvPr>
+          <p:cNvPicPr>
+            <a:picLocks noChangeAspect="1"/>
+          </p:cNvPicPr>
+          <p:nvPr/>
+        </p:nvPicPr>
+        <p:blipFill>
+          <a:blip r:embed="rId5"/>
+          <a:stretch>
+            <a:fillRect/>
+          </a:stretch>
+        </p:blipFill>
+        <p:spPr>
+          <a:xfrm>
+            <a:off x="10496814" y="1825625"/>
+            <a:ext cx="996106" cy="921567"/>
+          </a:xfrm>
+          <a:prstGeom prst="rect">
+            <a:avLst/>
+          </a:prstGeom>
+        </p:spPr>
+      </p:pic>
+      <p:pic>
+        <p:nvPicPr>
+          <p:cNvPr id="12" name="Picture 11">
+            <a:extLst>
+              <a:ext uri="{FF2B5EF4-FFF2-40B4-BE49-F238E27FC236}">
+                <a16:creationId xmlns:a16="http://schemas.microsoft.com/office/drawing/2014/main" id="{8378CA5C-E6FB-2C59-AF8D-5040ED231976}"/>
+              </a:ext>
+            </a:extLst>
+          </p:cNvPr>
+          <p:cNvPicPr>
+            <a:picLocks noChangeAspect="1"/>
+          </p:cNvPicPr>
+          <p:nvPr/>
+        </p:nvPicPr>
+        <p:blipFill>
+          <a:blip r:embed="rId6"/>
+          <a:stretch>
+            <a:fillRect/>
+          </a:stretch>
+        </p:blipFill>
+        <p:spPr>
+          <a:xfrm>
+            <a:off x="7450558" y="3134127"/>
+            <a:ext cx="2838541" cy="185753"/>
+          </a:xfrm>
+          <a:prstGeom prst="rect">
+            <a:avLst/>
+          </a:prstGeom>
+        </p:spPr>
+      </p:pic>
+      <p:pic>
+        <p:nvPicPr>
+          <p:cNvPr id="14" name="Picture 13">
+            <a:extLst>
+              <a:ext uri="{FF2B5EF4-FFF2-40B4-BE49-F238E27FC236}">
+                <a16:creationId xmlns:a16="http://schemas.microsoft.com/office/drawing/2014/main" id="{3D62D22C-4FDF-A686-62C7-3E0CBDBEE447}"/>
+              </a:ext>
+            </a:extLst>
+          </p:cNvPr>
+          <p:cNvPicPr>
+            <a:picLocks noChangeAspect="1"/>
+          </p:cNvPicPr>
+          <p:nvPr/>
+        </p:nvPicPr>
+        <p:blipFill>
+          <a:blip r:embed="rId7"/>
+          <a:stretch>
+            <a:fillRect/>
+          </a:stretch>
+        </p:blipFill>
+        <p:spPr>
+          <a:xfrm>
+            <a:off x="8266707" y="4605607"/>
+            <a:ext cx="2838542" cy="304130"/>
+          </a:xfrm>
+          <a:prstGeom prst="rect">
+            <a:avLst/>
+          </a:prstGeom>
+        </p:spPr>
+      </p:pic>
     </p:spTree>
     <p:extLst>
       <p:ext uri="{BB962C8B-B14F-4D97-AF65-F5344CB8AC3E}">
-        <p14:creationId xmlns:p14="http://schemas.microsoft.com/office/powerpoint/2010/main" val="1786286864"/>
+        <p14:creationId xmlns:p14="http://schemas.microsoft.com/office/powerpoint/2010/main" val="1324293167"/>
       </p:ext>
     </p:extLst>
   </p:cSld>
@@ -3709,7 +3689,7 @@
           <p:cNvPr id="2" name="Title 1">
             <a:extLst>
               <a:ext uri="{FF2B5EF4-FFF2-40B4-BE49-F238E27FC236}">
-                <a16:creationId xmlns:a16="http://schemas.microsoft.com/office/drawing/2014/main" id="{FFD5BCF9-B143-5051-11E7-F9D60F18D8A3}"/>
+                <a16:creationId xmlns:a16="http://schemas.microsoft.com/office/drawing/2014/main" id="{57DBC9D2-DB7A-EF6E-6380-5A1ED6D62E41}"/>
               </a:ext>
             </a:extLst>
           </p:cNvPr>
@@ -3726,50 +3706,39 @@
           <a:lstStyle/>
           <a:p>
             <a:r>
+              <a:rPr lang="en-US" dirty="0" err="1"/>
+              <a:t>Qiskit</a:t>
+            </a:r>
+            <a:r>
               <a:rPr lang="en-US" dirty="0"/>
-              <a:t>Scaling with System Size</a:t>
-            </a:r>
-          </a:p>
-        </p:txBody>
-      </p:sp>
-      <p:sp>
-        <p:nvSpPr>
-          <p:cNvPr id="3" name="Content Placeholder 2">
-            <a:extLst>
-              <a:ext uri="{FF2B5EF4-FFF2-40B4-BE49-F238E27FC236}">
-                <a16:creationId xmlns:a16="http://schemas.microsoft.com/office/drawing/2014/main" id="{1DEFFD76-C62E-659D-C71A-6A5B4AAEC1DD}"/>
-              </a:ext>
-            </a:extLst>
-          </p:cNvPr>
-          <p:cNvSpPr>
-            <a:spLocks noGrp="1"/>
-          </p:cNvSpPr>
-          <p:nvPr>
-            <p:ph idx="1"/>
-          </p:nvPr>
-        </p:nvSpPr>
-        <p:spPr/>
-        <p:txBody>
-          <a:bodyPr/>
-          <a:lstStyle/>
-          <a:p>
-            <a:endParaRPr lang="en-US" dirty="0"/>
+              <a:t> implementation for </a:t>
+            </a:r>
+            <a:r>
+              <a:rPr lang="en-US" dirty="0" err="1"/>
+              <a:t>Ising</a:t>
+            </a:r>
+            <a:r>
+              <a:rPr lang="en-US" dirty="0"/>
+              <a:t> model</a:t>
+            </a:r>
           </a:p>
         </p:txBody>
       </p:sp>
       <p:pic>
         <p:nvPicPr>
-          <p:cNvPr id="5" name="Picture 4">
-            <a:extLst>
-              <a:ext uri="{FF2B5EF4-FFF2-40B4-BE49-F238E27FC236}">
-                <a16:creationId xmlns:a16="http://schemas.microsoft.com/office/drawing/2014/main" id="{2B3CC239-DA59-CBC3-59F5-7E2BE422F694}"/>
+          <p:cNvPr id="7" name="Content Placeholder 6">
+            <a:extLst>
+              <a:ext uri="{FF2B5EF4-FFF2-40B4-BE49-F238E27FC236}">
+                <a16:creationId xmlns:a16="http://schemas.microsoft.com/office/drawing/2014/main" id="{D32BDB70-FD48-A0EE-277B-1AB0E4CB8C87}"/>
               </a:ext>
             </a:extLst>
           </p:cNvPr>
           <p:cNvPicPr>
-            <a:picLocks noChangeAspect="1"/>
+            <a:picLocks noGrp="1" noChangeAspect="1"/>
           </p:cNvPicPr>
-          <p:nvPr/>
+          <p:nvPr>
+            <p:ph idx="1"/>
+          </p:nvPr>
         </p:nvPicPr>
         <p:blipFill>
           <a:blip r:embed="rId2"/>
@@ -3779,20 +3748,17 @@
         </p:blipFill>
         <p:spPr>
           <a:xfrm>
-            <a:off x="838200" y="1825626"/>
-            <a:ext cx="8794687" cy="1596574"/>
-          </a:xfrm>
-          <a:prstGeom prst="rect">
-            <a:avLst/>
-          </a:prstGeom>
+            <a:off x="838200" y="3841147"/>
+            <a:ext cx="7520420" cy="2833670"/>
+          </a:xfrm>
         </p:spPr>
       </p:pic>
       <p:pic>
         <p:nvPicPr>
-          <p:cNvPr id="7" name="Picture 6">
-            <a:extLst>
-              <a:ext uri="{FF2B5EF4-FFF2-40B4-BE49-F238E27FC236}">
-                <a16:creationId xmlns:a16="http://schemas.microsoft.com/office/drawing/2014/main" id="{F9A248B5-254A-CDCC-082F-3D30BD89B0C2}"/>
+          <p:cNvPr id="5" name="Picture 4">
+            <a:extLst>
+              <a:ext uri="{FF2B5EF4-FFF2-40B4-BE49-F238E27FC236}">
+                <a16:creationId xmlns:a16="http://schemas.microsoft.com/office/drawing/2014/main" id="{E3D1F7B8-5706-674F-718F-32D6B6D3335F}"/>
               </a:ext>
             </a:extLst>
           </p:cNvPr>
@@ -3809,28 +3775,78 @@
         </p:blipFill>
         <p:spPr>
           <a:xfrm>
-            <a:off x="4218914" y="3527893"/>
-            <a:ext cx="4353855" cy="2955961"/>
+            <a:off x="519546" y="1455162"/>
+            <a:ext cx="5127550" cy="2202438"/>
           </a:xfrm>
           <a:prstGeom prst="rect">
             <a:avLst/>
           </a:prstGeom>
-          <a:ln>
-            <a:noFill/>
-          </a:ln>
-          <a:effectLst>
-            <a:outerShdw blurRad="190500" algn="tl" rotWithShape="0">
-              <a:srgbClr val="000000">
-                <a:alpha val="70000"/>
-              </a:srgbClr>
-            </a:outerShdw>
-          </a:effectLst>
+        </p:spPr>
+      </p:pic>
+      <p:pic>
+        <p:nvPicPr>
+          <p:cNvPr id="4" name="Picture 3">
+            <a:extLst>
+              <a:ext uri="{FF2B5EF4-FFF2-40B4-BE49-F238E27FC236}">
+                <a16:creationId xmlns:a16="http://schemas.microsoft.com/office/drawing/2014/main" id="{B62AC7AB-CD53-5D5B-2EA0-5D7F1AC1B8CE}"/>
+              </a:ext>
+            </a:extLst>
+          </p:cNvPr>
+          <p:cNvPicPr>
+            <a:picLocks noChangeAspect="1"/>
+          </p:cNvPicPr>
+          <p:nvPr/>
+        </p:nvPicPr>
+        <p:blipFill>
+          <a:blip r:embed="rId4"/>
+          <a:stretch>
+            <a:fillRect/>
+          </a:stretch>
+        </p:blipFill>
+        <p:spPr>
+          <a:xfrm>
+            <a:off x="8520528" y="5078570"/>
+            <a:ext cx="2833272" cy="231651"/>
+          </a:xfrm>
+          <a:prstGeom prst="rect">
+            <a:avLst/>
+          </a:prstGeom>
+        </p:spPr>
+      </p:pic>
+      <p:pic>
+        <p:nvPicPr>
+          <p:cNvPr id="8" name="Picture 7">
+            <a:extLst>
+              <a:ext uri="{FF2B5EF4-FFF2-40B4-BE49-F238E27FC236}">
+                <a16:creationId xmlns:a16="http://schemas.microsoft.com/office/drawing/2014/main" id="{C6F29AEE-4657-27AC-64A1-E48CCE7AEA50}"/>
+              </a:ext>
+            </a:extLst>
+          </p:cNvPr>
+          <p:cNvPicPr>
+            <a:picLocks noChangeAspect="1"/>
+          </p:cNvPicPr>
+          <p:nvPr/>
+        </p:nvPicPr>
+        <p:blipFill>
+          <a:blip r:embed="rId5"/>
+          <a:stretch>
+            <a:fillRect/>
+          </a:stretch>
+        </p:blipFill>
+        <p:spPr>
+          <a:xfrm>
+            <a:off x="6922360" y="1287713"/>
+            <a:ext cx="3965418" cy="2537336"/>
+          </a:xfrm>
+          <a:prstGeom prst="rect">
+            <a:avLst/>
+          </a:prstGeom>
         </p:spPr>
       </p:pic>
     </p:spTree>
     <p:extLst>
       <p:ext uri="{BB962C8B-B14F-4D97-AF65-F5344CB8AC3E}">
-        <p14:creationId xmlns:p14="http://schemas.microsoft.com/office/powerpoint/2010/main" val="1317525432"/>
+        <p14:creationId xmlns:p14="http://schemas.microsoft.com/office/powerpoint/2010/main" val="3304332057"/>
       </p:ext>
     </p:extLst>
   </p:cSld>
@@ -3862,7 +3878,7 @@
           <p:cNvPr id="2" name="Title 1">
             <a:extLst>
               <a:ext uri="{FF2B5EF4-FFF2-40B4-BE49-F238E27FC236}">
-                <a16:creationId xmlns:a16="http://schemas.microsoft.com/office/drawing/2014/main" id="{83D4F420-D02E-D9D1-80C8-D06E12AFE97D}"/>
+                <a16:creationId xmlns:a16="http://schemas.microsoft.com/office/drawing/2014/main" id="{C67CD37A-98B9-ABEB-64A0-967298078782}"/>
               </a:ext>
             </a:extLst>
           </p:cNvPr>
@@ -3880,31 +3896,54 @@
           <a:p>
             <a:r>
               <a:rPr lang="en-US" dirty="0"/>
-              <a:t>Scaling size and complexity </a:t>
-            </a:r>
-            <a:r>
-              <a:rPr lang="en-US" dirty="0" err="1"/>
-              <a:t>pararameters</a:t>
-            </a:r>
-            <a:endParaRPr lang="en-US" dirty="0"/>
+              <a:t>Challenges</a:t>
+            </a:r>
+          </a:p>
+        </p:txBody>
+      </p:sp>
+      <p:sp>
+        <p:nvSpPr>
+          <p:cNvPr id="3" name="Content Placeholder 2">
+            <a:extLst>
+              <a:ext uri="{FF2B5EF4-FFF2-40B4-BE49-F238E27FC236}">
+                <a16:creationId xmlns:a16="http://schemas.microsoft.com/office/drawing/2014/main" id="{0FD1C86C-C2EB-E9B5-81C1-EA8F880085F7}"/>
+              </a:ext>
+            </a:extLst>
+          </p:cNvPr>
+          <p:cNvSpPr>
+            <a:spLocks noGrp="1"/>
+          </p:cNvSpPr>
+          <p:nvPr>
+            <p:ph idx="1"/>
+          </p:nvPr>
+        </p:nvSpPr>
+        <p:spPr/>
+        <p:txBody>
+          <a:bodyPr>
+            <a:normAutofit/>
+          </a:bodyPr>
+          <a:lstStyle/>
+          <a:p>
+            <a:r>
+              <a:rPr lang="en-US" sz="2400" dirty="0"/>
+              <a:t>Linear Scheduling time: s(t)or nonlinear</a:t>
+            </a:r>
           </a:p>
         </p:txBody>
       </p:sp>
       <p:pic>
         <p:nvPicPr>
-          <p:cNvPr id="7" name="Content Placeholder 6">
-            <a:extLst>
-              <a:ext uri="{FF2B5EF4-FFF2-40B4-BE49-F238E27FC236}">
-                <a16:creationId xmlns:a16="http://schemas.microsoft.com/office/drawing/2014/main" id="{10250F81-CB35-A6E0-D08F-A1382C8BE5B2}"/>
+          <p:cNvPr id="5" name="Picture 4">
+            <a:extLst>
+              <a:ext uri="{FF2B5EF4-FFF2-40B4-BE49-F238E27FC236}">
+                <a16:creationId xmlns:a16="http://schemas.microsoft.com/office/drawing/2014/main" id="{FEFEA785-545A-F6E1-03D4-7C237A3CB346}"/>
               </a:ext>
             </a:extLst>
           </p:cNvPr>
           <p:cNvPicPr>
-            <a:picLocks noGrp="1" noChangeAspect="1"/>
+            <a:picLocks noChangeAspect="1"/>
           </p:cNvPicPr>
-          <p:nvPr>
-            <p:ph idx="1"/>
-          </p:nvPr>
+          <p:nvPr/>
         </p:nvPicPr>
         <p:blipFill>
           <a:blip r:embed="rId2"/>
@@ -3914,17 +3953,30 @@
         </p:blipFill>
         <p:spPr>
           <a:xfrm>
-            <a:off x="4186237" y="3170384"/>
-            <a:ext cx="3819525" cy="1209675"/>
-          </a:xfrm>
+            <a:off x="4576330" y="2541010"/>
+            <a:ext cx="3371850" cy="3133725"/>
+          </a:xfrm>
+          <a:prstGeom prst="rect">
+            <a:avLst/>
+          </a:prstGeom>
+          <a:ln>
+            <a:noFill/>
+          </a:ln>
+          <a:effectLst>
+            <a:outerShdw blurRad="190500" algn="tl" rotWithShape="0">
+              <a:srgbClr val="000000">
+                <a:alpha val="70000"/>
+              </a:srgbClr>
+            </a:outerShdw>
+          </a:effectLst>
         </p:spPr>
       </p:pic>
       <p:pic>
         <p:nvPicPr>
-          <p:cNvPr id="5" name="Picture 4">
-            <a:extLst>
-              <a:ext uri="{FF2B5EF4-FFF2-40B4-BE49-F238E27FC236}">
-                <a16:creationId xmlns:a16="http://schemas.microsoft.com/office/drawing/2014/main" id="{EE3C1065-1822-F93F-8851-8FA4E30884F4}"/>
+          <p:cNvPr id="7" name="Picture 6">
+            <a:extLst>
+              <a:ext uri="{FF2B5EF4-FFF2-40B4-BE49-F238E27FC236}">
+                <a16:creationId xmlns:a16="http://schemas.microsoft.com/office/drawing/2014/main" id="{FA424078-A66E-1AE8-87CF-DFE5AB3594EE}"/>
               </a:ext>
             </a:extLst>
           </p:cNvPr>
@@ -3941,54 +3993,18 @@
         </p:blipFill>
         <p:spPr>
           <a:xfrm>
-            <a:off x="5048699" y="1690688"/>
-            <a:ext cx="1831366" cy="1393681"/>
+            <a:off x="1488913" y="2646579"/>
+            <a:ext cx="1019175" cy="571500"/>
           </a:xfrm>
           <a:prstGeom prst="rect">
             <a:avLst/>
           </a:prstGeom>
         </p:spPr>
       </p:pic>
-      <p:cxnSp>
-        <p:nvCxnSpPr>
-          <p:cNvPr id="9" name="Straight Connector 8">
-            <a:extLst>
-              <a:ext uri="{FF2B5EF4-FFF2-40B4-BE49-F238E27FC236}">
-                <a16:creationId xmlns:a16="http://schemas.microsoft.com/office/drawing/2014/main" id="{670D4E61-3A32-5D7D-355C-7C3749EDE54E}"/>
-              </a:ext>
-            </a:extLst>
-          </p:cNvPr>
-          <p:cNvCxnSpPr/>
-          <p:nvPr/>
-        </p:nvCxnSpPr>
-        <p:spPr>
-          <a:xfrm>
-            <a:off x="3352800" y="3127376"/>
-            <a:ext cx="5223164" cy="0"/>
-          </a:xfrm>
-          <a:prstGeom prst="line">
-            <a:avLst/>
-          </a:prstGeom>
-        </p:spPr>
-        <p:style>
-          <a:lnRef idx="2">
-            <a:schemeClr val="accent1"/>
-          </a:lnRef>
-          <a:fillRef idx="0">
-            <a:schemeClr val="accent1"/>
-          </a:fillRef>
-          <a:effectRef idx="1">
-            <a:schemeClr val="accent1"/>
-          </a:effectRef>
-          <a:fontRef idx="minor">
-            <a:schemeClr val="tx1"/>
-          </a:fontRef>
-        </p:style>
-      </p:cxnSp>
     </p:spTree>
     <p:extLst>
       <p:ext uri="{BB962C8B-B14F-4D97-AF65-F5344CB8AC3E}">
-        <p14:creationId xmlns:p14="http://schemas.microsoft.com/office/powerpoint/2010/main" val="293211359"/>
+        <p14:creationId xmlns:p14="http://schemas.microsoft.com/office/powerpoint/2010/main" val="2231561434"/>
       </p:ext>
     </p:extLst>
   </p:cSld>
@@ -4020,7 +4036,7 @@
           <p:cNvPr id="2" name="Title 1">
             <a:extLst>
               <a:ext uri="{FF2B5EF4-FFF2-40B4-BE49-F238E27FC236}">
-                <a16:creationId xmlns:a16="http://schemas.microsoft.com/office/drawing/2014/main" id="{C67CD37A-98B9-ABEB-64A0-967298078782}"/>
+                <a16:creationId xmlns:a16="http://schemas.microsoft.com/office/drawing/2014/main" id="{783C2165-D8E0-5031-DC45-2F60F85B9911}"/>
               </a:ext>
             </a:extLst>
           </p:cNvPr>
@@ -4033,40 +4049,26 @@
         </p:nvSpPr>
         <p:spPr/>
         <p:txBody>
-          <a:bodyPr/>
-          <a:lstStyle/>
-          <a:p>
-            <a:r>
-              <a:rPr lang="en-US" dirty="0"/>
-              <a:t>Scheduling time: s(t)</a:t>
-            </a:r>
-          </a:p>
-        </p:txBody>
-      </p:sp>
-      <p:sp>
-        <p:nvSpPr>
-          <p:cNvPr id="3" name="Content Placeholder 2">
-            <a:extLst>
-              <a:ext uri="{FF2B5EF4-FFF2-40B4-BE49-F238E27FC236}">
-                <a16:creationId xmlns:a16="http://schemas.microsoft.com/office/drawing/2014/main" id="{0FD1C86C-C2EB-E9B5-81C1-EA8F880085F7}"/>
-              </a:ext>
-            </a:extLst>
-          </p:cNvPr>
-          <p:cNvSpPr>
-            <a:spLocks noGrp="1"/>
-          </p:cNvSpPr>
-          <p:nvPr>
-            <p:ph idx="1"/>
-          </p:nvPr>
-        </p:nvSpPr>
-        <p:spPr/>
-        <p:txBody>
-          <a:bodyPr/>
-          <a:lstStyle/>
-          <a:p>
-            <a:r>
-              <a:rPr lang="en-US" dirty="0"/>
-              <a:t>Linear or nonlinear</a:t>
+          <a:bodyPr>
+            <a:normAutofit/>
+          </a:bodyPr>
+          <a:lstStyle/>
+          <a:p>
+            <a:r>
+              <a:rPr lang="en-US" sz="3200" dirty="0" err="1"/>
+              <a:t>Qiskit</a:t>
+            </a:r>
+            <a:r>
+              <a:rPr lang="en-US" sz="3200" dirty="0"/>
+              <a:t> implementation for </a:t>
+            </a:r>
+            <a:r>
+              <a:rPr lang="en-US" sz="3200" dirty="0" err="1"/>
+              <a:t>Ising</a:t>
+            </a:r>
+            <a:r>
+              <a:rPr lang="en-US" sz="3200" dirty="0"/>
+              <a:t> model</a:t>
             </a:r>
           </a:p>
         </p:txBody>
@@ -4076,7 +4078,7 @@
           <p:cNvPr id="5" name="Picture 4">
             <a:extLst>
               <a:ext uri="{FF2B5EF4-FFF2-40B4-BE49-F238E27FC236}">
-                <a16:creationId xmlns:a16="http://schemas.microsoft.com/office/drawing/2014/main" id="{FEFEA785-545A-F6E1-03D4-7C237A3CB346}"/>
+                <a16:creationId xmlns:a16="http://schemas.microsoft.com/office/drawing/2014/main" id="{8F934B46-F878-83C8-66CB-BC3BF80A70FB}"/>
               </a:ext>
             </a:extLst>
           </p:cNvPr>
@@ -4093,8 +4095,464 @@
         </p:blipFill>
         <p:spPr>
           <a:xfrm>
-            <a:off x="4576330" y="2541010"/>
-            <a:ext cx="3371850" cy="3133725"/>
+            <a:off x="6419114" y="1659470"/>
+            <a:ext cx="4674870" cy="4747662"/>
+          </a:xfrm>
+          <a:prstGeom prst="rect">
+            <a:avLst/>
+          </a:prstGeom>
+        </p:spPr>
+      </p:pic>
+      <p:pic>
+        <p:nvPicPr>
+          <p:cNvPr id="7" name="Picture 6">
+            <a:extLst>
+              <a:ext uri="{FF2B5EF4-FFF2-40B4-BE49-F238E27FC236}">
+                <a16:creationId xmlns:a16="http://schemas.microsoft.com/office/drawing/2014/main" id="{F4CCA3CB-E8F1-E3E2-DD14-F547CB298A2F}"/>
+              </a:ext>
+            </a:extLst>
+          </p:cNvPr>
+          <p:cNvPicPr>
+            <a:picLocks noChangeAspect="1"/>
+          </p:cNvPicPr>
+          <p:nvPr/>
+        </p:nvPicPr>
+        <p:blipFill>
+          <a:blip r:embed="rId3"/>
+          <a:stretch>
+            <a:fillRect/>
+          </a:stretch>
+        </p:blipFill>
+        <p:spPr>
+          <a:xfrm>
+            <a:off x="10435251" y="1364289"/>
+            <a:ext cx="990600" cy="247650"/>
+          </a:xfrm>
+          <a:prstGeom prst="rect">
+            <a:avLst/>
+          </a:prstGeom>
+        </p:spPr>
+      </p:pic>
+      <p:pic>
+        <p:nvPicPr>
+          <p:cNvPr id="9" name="Picture 8">
+            <a:extLst>
+              <a:ext uri="{FF2B5EF4-FFF2-40B4-BE49-F238E27FC236}">
+                <a16:creationId xmlns:a16="http://schemas.microsoft.com/office/drawing/2014/main" id="{DD8282D9-C132-1423-2D3B-3BEA8E1B30B0}"/>
+              </a:ext>
+            </a:extLst>
+          </p:cNvPr>
+          <p:cNvPicPr>
+            <a:picLocks noChangeAspect="1"/>
+          </p:cNvPicPr>
+          <p:nvPr/>
+        </p:nvPicPr>
+        <p:blipFill>
+          <a:blip r:embed="rId4"/>
+          <a:stretch>
+            <a:fillRect/>
+          </a:stretch>
+        </p:blipFill>
+        <p:spPr>
+          <a:xfrm>
+            <a:off x="1669750" y="2130629"/>
+            <a:ext cx="3438525" cy="333375"/>
+          </a:xfrm>
+          <a:prstGeom prst="rect">
+            <a:avLst/>
+          </a:prstGeom>
+        </p:spPr>
+      </p:pic>
+      <p:pic>
+        <p:nvPicPr>
+          <p:cNvPr id="11" name="Picture 10">
+            <a:extLst>
+              <a:ext uri="{FF2B5EF4-FFF2-40B4-BE49-F238E27FC236}">
+                <a16:creationId xmlns:a16="http://schemas.microsoft.com/office/drawing/2014/main" id="{A3B25E86-02ED-25F7-A9A9-95F6C68DC9F7}"/>
+              </a:ext>
+            </a:extLst>
+          </p:cNvPr>
+          <p:cNvPicPr>
+            <a:picLocks noChangeAspect="1"/>
+          </p:cNvPicPr>
+          <p:nvPr/>
+        </p:nvPicPr>
+        <p:blipFill>
+          <a:blip r:embed="rId5"/>
+          <a:stretch>
+            <a:fillRect/>
+          </a:stretch>
+        </p:blipFill>
+        <p:spPr>
+          <a:xfrm>
+            <a:off x="1867252" y="3065067"/>
+            <a:ext cx="3170268" cy="646830"/>
+          </a:xfrm>
+          <a:prstGeom prst="rect">
+            <a:avLst/>
+          </a:prstGeom>
+        </p:spPr>
+      </p:pic>
+      <p:pic>
+        <p:nvPicPr>
+          <p:cNvPr id="12" name="Picture 11">
+            <a:extLst>
+              <a:ext uri="{FF2B5EF4-FFF2-40B4-BE49-F238E27FC236}">
+                <a16:creationId xmlns:a16="http://schemas.microsoft.com/office/drawing/2014/main" id="{662185D2-326B-29E1-C0A6-9851C5954E87}"/>
+              </a:ext>
+            </a:extLst>
+          </p:cNvPr>
+          <p:cNvPicPr>
+            <a:picLocks noChangeAspect="1"/>
+          </p:cNvPicPr>
+          <p:nvPr/>
+        </p:nvPicPr>
+        <p:blipFill>
+          <a:blip r:embed="rId6"/>
+          <a:stretch>
+            <a:fillRect/>
+          </a:stretch>
+        </p:blipFill>
+        <p:spPr>
+          <a:xfrm>
+            <a:off x="1197163" y="4189445"/>
+            <a:ext cx="4688845" cy="1965066"/>
+          </a:xfrm>
+          <a:prstGeom prst="rect">
+            <a:avLst/>
+          </a:prstGeom>
+        </p:spPr>
+      </p:pic>
+    </p:spTree>
+    <p:extLst>
+      <p:ext uri="{BB962C8B-B14F-4D97-AF65-F5344CB8AC3E}">
+        <p14:creationId xmlns:p14="http://schemas.microsoft.com/office/powerpoint/2010/main" val="1786286864"/>
+      </p:ext>
+    </p:extLst>
+  </p:cSld>
+  <p:clrMapOvr>
+    <a:masterClrMapping/>
+  </p:clrMapOvr>
+</p:sld>
+</file>
+
+<file path=ppt/slides/slide14.xml><?xml version="1.0" encoding="utf-8"?>
+<p:sld xmlns:a="http://schemas.openxmlformats.org/drawingml/2006/main" xmlns:r="http://schemas.openxmlformats.org/officeDocument/2006/relationships" xmlns:p="http://schemas.openxmlformats.org/presentationml/2006/main">
+  <p:cSld>
+    <p:spTree>
+      <p:nvGrpSpPr>
+        <p:cNvPr id="1" name=""/>
+        <p:cNvGrpSpPr/>
+        <p:nvPr/>
+      </p:nvGrpSpPr>
+      <p:grpSpPr>
+        <a:xfrm>
+          <a:off x="0" y="0"/>
+          <a:ext cx="0" cy="0"/>
+          <a:chOff x="0" y="0"/>
+          <a:chExt cx="0" cy="0"/>
+        </a:xfrm>
+      </p:grpSpPr>
+      <p:sp>
+        <p:nvSpPr>
+          <p:cNvPr id="2" name="Title 1">
+            <a:extLst>
+              <a:ext uri="{FF2B5EF4-FFF2-40B4-BE49-F238E27FC236}">
+                <a16:creationId xmlns:a16="http://schemas.microsoft.com/office/drawing/2014/main" id="{83D4F420-D02E-D9D1-80C8-D06E12AFE97D}"/>
+              </a:ext>
+            </a:extLst>
+          </p:cNvPr>
+          <p:cNvSpPr>
+            <a:spLocks noGrp="1"/>
+          </p:cNvSpPr>
+          <p:nvPr>
+            <p:ph type="title"/>
+          </p:nvPr>
+        </p:nvSpPr>
+        <p:spPr/>
+        <p:txBody>
+          <a:bodyPr/>
+          <a:lstStyle/>
+          <a:p>
+            <a:r>
+              <a:rPr lang="en-US" dirty="0"/>
+              <a:t>Complexity</a:t>
+            </a:r>
+          </a:p>
+        </p:txBody>
+      </p:sp>
+      <p:pic>
+        <p:nvPicPr>
+          <p:cNvPr id="7" name="Content Placeholder 6">
+            <a:extLst>
+              <a:ext uri="{FF2B5EF4-FFF2-40B4-BE49-F238E27FC236}">
+                <a16:creationId xmlns:a16="http://schemas.microsoft.com/office/drawing/2014/main" id="{10250F81-CB35-A6E0-D08F-A1382C8BE5B2}"/>
+              </a:ext>
+            </a:extLst>
+          </p:cNvPr>
+          <p:cNvPicPr>
+            <a:picLocks noGrp="1" noChangeAspect="1"/>
+          </p:cNvPicPr>
+          <p:nvPr>
+            <p:ph idx="1"/>
+          </p:nvPr>
+        </p:nvPicPr>
+        <p:blipFill>
+          <a:blip r:embed="rId2"/>
+          <a:stretch>
+            <a:fillRect/>
+          </a:stretch>
+        </p:blipFill>
+        <p:spPr>
+          <a:xfrm>
+            <a:off x="4186237" y="4075730"/>
+            <a:ext cx="3819525" cy="1209675"/>
+          </a:xfrm>
+        </p:spPr>
+      </p:pic>
+      <p:pic>
+        <p:nvPicPr>
+          <p:cNvPr id="5" name="Picture 4">
+            <a:extLst>
+              <a:ext uri="{FF2B5EF4-FFF2-40B4-BE49-F238E27FC236}">
+                <a16:creationId xmlns:a16="http://schemas.microsoft.com/office/drawing/2014/main" id="{EE3C1065-1822-F93F-8851-8FA4E30884F4}"/>
+              </a:ext>
+            </a:extLst>
+          </p:cNvPr>
+          <p:cNvPicPr>
+            <a:picLocks noChangeAspect="1"/>
+          </p:cNvPicPr>
+          <p:nvPr/>
+        </p:nvPicPr>
+        <p:blipFill>
+          <a:blip r:embed="rId3"/>
+          <a:stretch>
+            <a:fillRect/>
+          </a:stretch>
+        </p:blipFill>
+        <p:spPr>
+          <a:xfrm>
+            <a:off x="5048699" y="2309506"/>
+            <a:ext cx="1831366" cy="1393681"/>
+          </a:xfrm>
+          <a:prstGeom prst="rect">
+            <a:avLst/>
+          </a:prstGeom>
+        </p:spPr>
+      </p:pic>
+      <p:cxnSp>
+        <p:nvCxnSpPr>
+          <p:cNvPr id="9" name="Straight Connector 8">
+            <a:extLst>
+              <a:ext uri="{FF2B5EF4-FFF2-40B4-BE49-F238E27FC236}">
+                <a16:creationId xmlns:a16="http://schemas.microsoft.com/office/drawing/2014/main" id="{670D4E61-3A32-5D7D-355C-7C3749EDE54E}"/>
+              </a:ext>
+            </a:extLst>
+          </p:cNvPr>
+          <p:cNvCxnSpPr/>
+          <p:nvPr/>
+        </p:nvCxnSpPr>
+        <p:spPr>
+          <a:xfrm>
+            <a:off x="3352800" y="3851653"/>
+            <a:ext cx="5223164" cy="0"/>
+          </a:xfrm>
+          <a:prstGeom prst="line">
+            <a:avLst/>
+          </a:prstGeom>
+        </p:spPr>
+        <p:style>
+          <a:lnRef idx="2">
+            <a:schemeClr val="accent1"/>
+          </a:lnRef>
+          <a:fillRef idx="0">
+            <a:schemeClr val="accent1"/>
+          </a:fillRef>
+          <a:effectRef idx="1">
+            <a:schemeClr val="accent1"/>
+          </a:effectRef>
+          <a:fontRef idx="minor">
+            <a:schemeClr val="tx1"/>
+          </a:fontRef>
+        </p:style>
+      </p:cxnSp>
+      <p:sp>
+        <p:nvSpPr>
+          <p:cNvPr id="8" name="TextBox 7">
+            <a:extLst>
+              <a:ext uri="{FF2B5EF4-FFF2-40B4-BE49-F238E27FC236}">
+                <a16:creationId xmlns:a16="http://schemas.microsoft.com/office/drawing/2014/main" id="{3D8174EB-073A-8276-3FA6-FF99B292B287}"/>
+              </a:ext>
+            </a:extLst>
+          </p:cNvPr>
+          <p:cNvSpPr txBox="1"/>
+          <p:nvPr/>
+        </p:nvSpPr>
+        <p:spPr>
+          <a:xfrm>
+            <a:off x="965467" y="1364363"/>
+            <a:ext cx="6097508" cy="369332"/>
+          </a:xfrm>
+          <a:prstGeom prst="rect">
+            <a:avLst/>
+          </a:prstGeom>
+          <a:noFill/>
+        </p:spPr>
+        <p:txBody>
+          <a:bodyPr wrap="square">
+            <a:spAutoFit/>
+          </a:bodyPr>
+          <a:lstStyle/>
+          <a:p>
+            <a:r>
+              <a:rPr lang="en-US" dirty="0"/>
+              <a:t>Scaling size and complexity parameters</a:t>
+            </a:r>
+          </a:p>
+        </p:txBody>
+      </p:sp>
+    </p:spTree>
+    <p:extLst>
+      <p:ext uri="{BB962C8B-B14F-4D97-AF65-F5344CB8AC3E}">
+        <p14:creationId xmlns:p14="http://schemas.microsoft.com/office/powerpoint/2010/main" val="293211359"/>
+      </p:ext>
+    </p:extLst>
+  </p:cSld>
+  <p:clrMapOvr>
+    <a:masterClrMapping/>
+  </p:clrMapOvr>
+</p:sld>
+</file>
+
+<file path=ppt/slides/slide15.xml><?xml version="1.0" encoding="utf-8"?>
+<p:sld xmlns:a="http://schemas.openxmlformats.org/drawingml/2006/main" xmlns:r="http://schemas.openxmlformats.org/officeDocument/2006/relationships" xmlns:p="http://schemas.openxmlformats.org/presentationml/2006/main">
+  <p:cSld>
+    <p:spTree>
+      <p:nvGrpSpPr>
+        <p:cNvPr id="1" name=""/>
+        <p:cNvGrpSpPr/>
+        <p:nvPr/>
+      </p:nvGrpSpPr>
+      <p:grpSpPr>
+        <a:xfrm>
+          <a:off x="0" y="0"/>
+          <a:ext cx="0" cy="0"/>
+          <a:chOff x="0" y="0"/>
+          <a:chExt cx="0" cy="0"/>
+        </a:xfrm>
+      </p:grpSpPr>
+      <p:sp>
+        <p:nvSpPr>
+          <p:cNvPr id="2" name="Title 1">
+            <a:extLst>
+              <a:ext uri="{FF2B5EF4-FFF2-40B4-BE49-F238E27FC236}">
+                <a16:creationId xmlns:a16="http://schemas.microsoft.com/office/drawing/2014/main" id="{FFD5BCF9-B143-5051-11E7-F9D60F18D8A3}"/>
+              </a:ext>
+            </a:extLst>
+          </p:cNvPr>
+          <p:cNvSpPr>
+            <a:spLocks noGrp="1"/>
+          </p:cNvSpPr>
+          <p:nvPr>
+            <p:ph type="title"/>
+          </p:nvPr>
+        </p:nvSpPr>
+        <p:spPr/>
+        <p:txBody>
+          <a:bodyPr/>
+          <a:lstStyle/>
+          <a:p>
+            <a:r>
+              <a:rPr lang="en-US" dirty="0"/>
+              <a:t>Complexity</a:t>
+            </a:r>
+          </a:p>
+        </p:txBody>
+      </p:sp>
+      <p:sp>
+        <p:nvSpPr>
+          <p:cNvPr id="3" name="Content Placeholder 2">
+            <a:extLst>
+              <a:ext uri="{FF2B5EF4-FFF2-40B4-BE49-F238E27FC236}">
+                <a16:creationId xmlns:a16="http://schemas.microsoft.com/office/drawing/2014/main" id="{1DEFFD76-C62E-659D-C71A-6A5B4AAEC1DD}"/>
+              </a:ext>
+            </a:extLst>
+          </p:cNvPr>
+          <p:cNvSpPr>
+            <a:spLocks noGrp="1"/>
+          </p:cNvSpPr>
+          <p:nvPr>
+            <p:ph idx="1"/>
+          </p:nvPr>
+        </p:nvSpPr>
+        <p:spPr>
+          <a:xfrm>
+            <a:off x="838200" y="2408221"/>
+            <a:ext cx="10515600" cy="3768741"/>
+          </a:xfrm>
+        </p:spPr>
+        <p:txBody>
+          <a:bodyPr/>
+          <a:lstStyle/>
+          <a:p>
+            <a:endParaRPr lang="en-US" dirty="0"/>
+          </a:p>
+        </p:txBody>
+      </p:sp>
+      <p:pic>
+        <p:nvPicPr>
+          <p:cNvPr id="5" name="Picture 4">
+            <a:extLst>
+              <a:ext uri="{FF2B5EF4-FFF2-40B4-BE49-F238E27FC236}">
+                <a16:creationId xmlns:a16="http://schemas.microsoft.com/office/drawing/2014/main" id="{2B3CC239-DA59-CBC3-59F5-7E2BE422F694}"/>
+              </a:ext>
+            </a:extLst>
+          </p:cNvPr>
+          <p:cNvPicPr>
+            <a:picLocks noChangeAspect="1"/>
+          </p:cNvPicPr>
+          <p:nvPr/>
+        </p:nvPicPr>
+        <p:blipFill>
+          <a:blip r:embed="rId2"/>
+          <a:stretch>
+            <a:fillRect/>
+          </a:stretch>
+        </p:blipFill>
+        <p:spPr>
+          <a:xfrm>
+            <a:off x="838200" y="2408220"/>
+            <a:ext cx="6497526" cy="1179551"/>
+          </a:xfrm>
+          <a:prstGeom prst="rect">
+            <a:avLst/>
+          </a:prstGeom>
+        </p:spPr>
+      </p:pic>
+      <p:pic>
+        <p:nvPicPr>
+          <p:cNvPr id="7" name="Picture 6">
+            <a:extLst>
+              <a:ext uri="{FF2B5EF4-FFF2-40B4-BE49-F238E27FC236}">
+                <a16:creationId xmlns:a16="http://schemas.microsoft.com/office/drawing/2014/main" id="{F9A248B5-254A-CDCC-082F-3D30BD89B0C2}"/>
+              </a:ext>
+            </a:extLst>
+          </p:cNvPr>
+          <p:cNvPicPr>
+            <a:picLocks noChangeAspect="1"/>
+          </p:cNvPicPr>
+          <p:nvPr/>
+        </p:nvPicPr>
+        <p:blipFill>
+          <a:blip r:embed="rId3"/>
+          <a:stretch>
+            <a:fillRect/>
+          </a:stretch>
+        </p:blipFill>
+        <p:spPr>
+          <a:xfrm>
+            <a:off x="5398715" y="3693266"/>
+            <a:ext cx="3874021" cy="2630187"/>
           </a:xfrm>
           <a:prstGeom prst="rect">
             <a:avLst/>
@@ -4111,40 +4569,45 @@
           </a:effectLst>
         </p:spPr>
       </p:pic>
-      <p:pic>
-        <p:nvPicPr>
-          <p:cNvPr id="7" name="Picture 6">
-            <a:extLst>
-              <a:ext uri="{FF2B5EF4-FFF2-40B4-BE49-F238E27FC236}">
-                <a16:creationId xmlns:a16="http://schemas.microsoft.com/office/drawing/2014/main" id="{FA424078-A66E-1AE8-87CF-DFE5AB3594EE}"/>
-              </a:ext>
-            </a:extLst>
-          </p:cNvPr>
-          <p:cNvPicPr>
-            <a:picLocks noChangeAspect="1"/>
-          </p:cNvPicPr>
+      <p:sp>
+        <p:nvSpPr>
+          <p:cNvPr id="9" name="TextBox 8">
+            <a:extLst>
+              <a:ext uri="{FF2B5EF4-FFF2-40B4-BE49-F238E27FC236}">
+                <a16:creationId xmlns:a16="http://schemas.microsoft.com/office/drawing/2014/main" id="{67EA5BDF-3DA4-F102-0AB8-288139A89151}"/>
+              </a:ext>
+            </a:extLst>
+          </p:cNvPr>
+          <p:cNvSpPr txBox="1"/>
           <p:nvPr/>
-        </p:nvPicPr>
-        <p:blipFill>
-          <a:blip r:embed="rId3"/>
-          <a:stretch>
-            <a:fillRect/>
-          </a:stretch>
-        </p:blipFill>
-        <p:spPr>
-          <a:xfrm>
-            <a:off x="1688090" y="2617210"/>
-            <a:ext cx="1019175" cy="571500"/>
+        </p:nvSpPr>
+        <p:spPr>
+          <a:xfrm>
+            <a:off x="838200" y="1854222"/>
+            <a:ext cx="6097508" cy="369332"/>
           </a:xfrm>
           <a:prstGeom prst="rect">
             <a:avLst/>
           </a:prstGeom>
-        </p:spPr>
-      </p:pic>
+          <a:noFill/>
+        </p:spPr>
+        <p:txBody>
+          <a:bodyPr wrap="square">
+            <a:spAutoFit/>
+          </a:bodyPr>
+          <a:lstStyle/>
+          <a:p>
+            <a:r>
+              <a:rPr lang="en-US" dirty="0"/>
+              <a:t>Scaling with System Size</a:t>
+            </a:r>
+          </a:p>
+        </p:txBody>
+      </p:sp>
     </p:spTree>
     <p:extLst>
       <p:ext uri="{BB962C8B-B14F-4D97-AF65-F5344CB8AC3E}">
-        <p14:creationId xmlns:p14="http://schemas.microsoft.com/office/powerpoint/2010/main" val="2231561434"/>
+        <p14:creationId xmlns:p14="http://schemas.microsoft.com/office/powerpoint/2010/main" val="1317525432"/>
       </p:ext>
     </p:extLst>
   </p:cSld>
@@ -4223,7 +4686,7 @@
         </p:spPr>
         <p:txBody>
           <a:bodyPr>
-            <a:normAutofit lnSpcReduction="10000"/>
+            <a:normAutofit/>
           </a:bodyPr>
           <a:lstStyle/>
           <a:p>
@@ -4235,13 +4698,7 @@
           <a:p>
             <a:r>
               <a:rPr lang="en-US" dirty="0"/>
-              <a:t>Hamiltonian</a:t>
-            </a:r>
-          </a:p>
-          <a:p>
-            <a:r>
-              <a:rPr lang="en-US" dirty="0"/>
-              <a:t>Examples</a:t>
+              <a:t>What is Hamiltonian(Examples)?</a:t>
             </a:r>
           </a:p>
           <a:p>
@@ -4345,7 +4802,7 @@
           <a:p>
             <a:r>
               <a:rPr lang="en-US" dirty="0"/>
-              <a:t>About Quantum Simulation and a physical model</a:t>
+              <a:t>Introduction</a:t>
             </a:r>
           </a:p>
         </p:txBody>
@@ -4396,6 +4853,36 @@
           </a:p>
         </p:txBody>
       </p:sp>
+      <p:pic>
+        <p:nvPicPr>
+          <p:cNvPr id="5" name="Picture 4">
+            <a:extLst>
+              <a:ext uri="{FF2B5EF4-FFF2-40B4-BE49-F238E27FC236}">
+                <a16:creationId xmlns:a16="http://schemas.microsoft.com/office/drawing/2014/main" id="{330655B9-4AC3-7315-F079-5B11EB2247D5}"/>
+              </a:ext>
+            </a:extLst>
+          </p:cNvPr>
+          <p:cNvPicPr>
+            <a:picLocks noChangeAspect="1"/>
+          </p:cNvPicPr>
+          <p:nvPr/>
+        </p:nvPicPr>
+        <p:blipFill>
+          <a:blip r:embed="rId2"/>
+          <a:stretch>
+            <a:fillRect/>
+          </a:stretch>
+        </p:blipFill>
+        <p:spPr>
+          <a:xfrm>
+            <a:off x="5558412" y="1597260"/>
+            <a:ext cx="5795388" cy="4895615"/>
+          </a:xfrm>
+          <a:prstGeom prst="rect">
+            <a:avLst/>
+          </a:prstGeom>
+        </p:spPr>
+      </p:pic>
     </p:spTree>
     <p:extLst>
       <p:ext uri="{BB962C8B-B14F-4D97-AF65-F5344CB8AC3E}">
@@ -4431,7 +4918,7 @@
           <p:cNvPr id="2" name="Title 1">
             <a:extLst>
               <a:ext uri="{FF2B5EF4-FFF2-40B4-BE49-F238E27FC236}">
-                <a16:creationId xmlns:a16="http://schemas.microsoft.com/office/drawing/2014/main" id="{654A7263-3866-3A0D-B425-7DF1626DC632}"/>
+                <a16:creationId xmlns:a16="http://schemas.microsoft.com/office/drawing/2014/main" id="{5B0BBD5B-1B2B-F799-0497-BBD0104CA930}"/>
               </a:ext>
             </a:extLst>
           </p:cNvPr>
@@ -4449,7 +4936,7 @@
           <a:p>
             <a:r>
               <a:rPr lang="en-US" dirty="0"/>
-              <a:t>Choose Question</a:t>
+              <a:t>What is Hamiltonian?</a:t>
             </a:r>
           </a:p>
         </p:txBody>
@@ -4459,7 +4946,7 @@
           <p:cNvPr id="3" name="Content Placeholder 2">
             <a:extLst>
               <a:ext uri="{FF2B5EF4-FFF2-40B4-BE49-F238E27FC236}">
-                <a16:creationId xmlns:a16="http://schemas.microsoft.com/office/drawing/2014/main" id="{4E07A0D5-B9F4-BCEE-91F9-48171214ED53}"/>
+                <a16:creationId xmlns:a16="http://schemas.microsoft.com/office/drawing/2014/main" id="{52FF910F-7715-723B-91D4-378242AD9C0F}"/>
               </a:ext>
             </a:extLst>
           </p:cNvPr>
@@ -4472,13 +4959,104 @@
         </p:nvSpPr>
         <p:spPr/>
         <p:txBody>
-          <a:bodyPr/>
-          <a:lstStyle/>
-          <a:p>
-            <a:r>
-              <a:rPr lang="en-US" dirty="0"/>
-              <a:t>Dynamics or Statics?</a:t>
-            </a:r>
+          <a:bodyPr>
+            <a:normAutofit/>
+          </a:bodyPr>
+          <a:lstStyle/>
+          <a:p>
+            <a:pPr algn="r" rtl="1"/>
+            <a:r>
+              <a:rPr lang="fa-IR" sz="2000" dirty="0"/>
+              <a:t>در مکانیک تحلیلی وضعیت سیستم با مختصات تعمیم یافته مشخص می شود</a:t>
+            </a:r>
+          </a:p>
+          <a:p>
+            <a:pPr marL="0" indent="0" algn="r" rtl="1">
+              <a:buNone/>
+            </a:pPr>
+            <a:r>
+              <a:rPr lang="fa-IR" sz="2000" dirty="0" err="1"/>
+              <a:t>لاگرانژی</a:t>
+            </a:r>
+            <a:r>
+              <a:rPr lang="fa-IR" sz="2000" dirty="0"/>
+              <a:t> را از انرژی جنبشی و پتانسیل می سازیم، </a:t>
+            </a:r>
+            <a:r>
+              <a:rPr lang="fa-IR" sz="2000" dirty="0" err="1"/>
+              <a:t>هامیلتونی</a:t>
+            </a:r>
+            <a:r>
+              <a:rPr lang="fa-IR" sz="2000" dirty="0"/>
+              <a:t> تبدیل </a:t>
+            </a:r>
+            <a:r>
+              <a:rPr lang="fa-IR" sz="2000" dirty="0" err="1"/>
+              <a:t>لژاندر</a:t>
+            </a:r>
+            <a:r>
+              <a:rPr lang="fa-IR" sz="2000" dirty="0"/>
+              <a:t> آن است. </a:t>
+            </a:r>
+          </a:p>
+          <a:p>
+            <a:pPr marL="0" indent="0">
+              <a:buNone/>
+            </a:pPr>
+            <a:endParaRPr lang="en-US" sz="2000" dirty="0"/>
+          </a:p>
+          <a:p>
+            <a:endParaRPr lang="fa-IR" dirty="0"/>
+          </a:p>
+          <a:p>
+            <a:pPr algn="r" rtl="1"/>
+            <a:r>
+              <a:rPr lang="fa-IR" sz="2000" dirty="0"/>
+              <a:t>در سامانه </a:t>
+            </a:r>
+            <a:r>
+              <a:rPr lang="fa-IR" sz="2000" dirty="0" err="1"/>
+              <a:t>پایستار</a:t>
+            </a:r>
+            <a:r>
+              <a:rPr lang="fa-IR" sz="2000" dirty="0"/>
+              <a:t> </a:t>
+            </a:r>
+            <a:r>
+              <a:rPr lang="fa-IR" sz="2000" dirty="0" err="1"/>
+              <a:t>هامیلتونی</a:t>
+            </a:r>
+            <a:r>
+              <a:rPr lang="fa-IR" sz="2000" dirty="0"/>
+              <a:t> همان انرژی کل سیستم است</a:t>
+            </a:r>
+          </a:p>
+          <a:p>
+            <a:endParaRPr lang="fa-IR" dirty="0"/>
+          </a:p>
+          <a:p>
+            <a:endParaRPr lang="fa-IR" dirty="0"/>
+          </a:p>
+          <a:p>
+            <a:pPr marL="0" indent="0">
+              <a:buNone/>
+            </a:pPr>
+            <a:endParaRPr lang="en-US" dirty="0"/>
+          </a:p>
+          <a:p>
+            <a:pPr algn="r" rtl="1"/>
+            <a:r>
+              <a:rPr lang="fa-IR" sz="1700" dirty="0"/>
+              <a:t>انرژی روی فضای فاز </a:t>
+            </a:r>
+          </a:p>
+          <a:p>
+            <a:pPr algn="r" rtl="1"/>
+            <a:r>
+              <a:rPr lang="fa-IR" sz="1700" dirty="0"/>
+              <a:t>مولد تحول زمانی</a:t>
+            </a:r>
+            <a:endParaRPr lang="en-US" sz="1700" dirty="0"/>
           </a:p>
         </p:txBody>
       </p:sp>
@@ -4487,7 +5065,7 @@
           <p:cNvPr id="5" name="Picture 4">
             <a:extLst>
               <a:ext uri="{FF2B5EF4-FFF2-40B4-BE49-F238E27FC236}">
-                <a16:creationId xmlns:a16="http://schemas.microsoft.com/office/drawing/2014/main" id="{A9D2E4D1-7376-71DF-FD8F-B452D7ADAEAE}"/>
+                <a16:creationId xmlns:a16="http://schemas.microsoft.com/office/drawing/2014/main" id="{26DD7A16-04BD-3B66-BE71-AB6229E41EFA}"/>
               </a:ext>
             </a:extLst>
           </p:cNvPr>
@@ -4504,8 +5082,38 @@
         </p:blipFill>
         <p:spPr>
           <a:xfrm>
-            <a:off x="3962399" y="2827144"/>
-            <a:ext cx="7938655" cy="2770146"/>
+            <a:off x="4874206" y="2799973"/>
+            <a:ext cx="3457575" cy="590550"/>
+          </a:xfrm>
+          <a:prstGeom prst="rect">
+            <a:avLst/>
+          </a:prstGeom>
+        </p:spPr>
+      </p:pic>
+      <p:pic>
+        <p:nvPicPr>
+          <p:cNvPr id="7" name="Picture 6">
+            <a:extLst>
+              <a:ext uri="{FF2B5EF4-FFF2-40B4-BE49-F238E27FC236}">
+                <a16:creationId xmlns:a16="http://schemas.microsoft.com/office/drawing/2014/main" id="{0024838E-F524-1F05-A9C8-FF553999A4C6}"/>
+              </a:ext>
+            </a:extLst>
+          </p:cNvPr>
+          <p:cNvPicPr>
+            <a:picLocks noChangeAspect="1"/>
+          </p:cNvPicPr>
+          <p:nvPr/>
+        </p:nvPicPr>
+        <p:blipFill>
+          <a:blip r:embed="rId3"/>
+          <a:stretch>
+            <a:fillRect/>
+          </a:stretch>
+        </p:blipFill>
+        <p:spPr>
+          <a:xfrm>
+            <a:off x="5022599" y="4001294"/>
+            <a:ext cx="2400300" cy="647700"/>
           </a:xfrm>
           <a:prstGeom prst="rect">
             <a:avLst/>
@@ -4515,7 +5123,7 @@
     </p:spTree>
     <p:extLst>
       <p:ext uri="{BB962C8B-B14F-4D97-AF65-F5344CB8AC3E}">
-        <p14:creationId xmlns:p14="http://schemas.microsoft.com/office/powerpoint/2010/main" val="137806960"/>
+        <p14:creationId xmlns:p14="http://schemas.microsoft.com/office/powerpoint/2010/main" val="4164159618"/>
       </p:ext>
     </p:extLst>
   </p:cSld>
@@ -4547,7 +5155,7 @@
           <p:cNvPr id="2" name="Title 1">
             <a:extLst>
               <a:ext uri="{FF2B5EF4-FFF2-40B4-BE49-F238E27FC236}">
-                <a16:creationId xmlns:a16="http://schemas.microsoft.com/office/drawing/2014/main" id="{626DC213-AB81-F905-0EB4-212B09DD184B}"/>
+                <a16:creationId xmlns:a16="http://schemas.microsoft.com/office/drawing/2014/main" id="{3EDC45DD-D705-330E-1E45-9CDB79651563}"/>
               </a:ext>
             </a:extLst>
           </p:cNvPr>
@@ -4565,7 +5173,7 @@
           <a:p>
             <a:r>
               <a:rPr lang="en-US" dirty="0"/>
-              <a:t>Ground-state problem</a:t>
+              <a:t>What is Hamiltonian?</a:t>
             </a:r>
           </a:p>
         </p:txBody>
@@ -4575,7 +5183,7 @@
           <p:cNvPr id="3" name="Content Placeholder 2">
             <a:extLst>
               <a:ext uri="{FF2B5EF4-FFF2-40B4-BE49-F238E27FC236}">
-                <a16:creationId xmlns:a16="http://schemas.microsoft.com/office/drawing/2014/main" id="{85CD77E3-249C-D403-4453-1F82773B76D1}"/>
+                <a16:creationId xmlns:a16="http://schemas.microsoft.com/office/drawing/2014/main" id="{AC7DBADC-0858-40DA-479A-E225B647749E}"/>
               </a:ext>
             </a:extLst>
           </p:cNvPr>
@@ -4593,21 +5201,295 @@
           <a:p>
             <a:r>
               <a:rPr lang="en-US" dirty="0"/>
-              <a:t>Why it is important</a:t>
+              <a:t>Examples </a:t>
+            </a:r>
+            <a:endParaRPr lang="fa-IR" dirty="0"/>
+          </a:p>
+          <a:p>
+            <a:r>
+              <a:rPr lang="en-US" sz="2000" dirty="0"/>
+              <a:t>Harmonic Oscillation</a:t>
             </a:r>
           </a:p>
           <a:p>
             <a:endParaRPr lang="en-US" dirty="0"/>
           </a:p>
           <a:p>
+            <a:pPr marL="0" indent="0">
+              <a:buNone/>
+            </a:pPr>
+            <a:r>
+              <a:rPr lang="en-US" sz="2000" dirty="0"/>
+              <a:t>   Canonical quantization</a:t>
+            </a:r>
+          </a:p>
+          <a:p>
             <a:endParaRPr lang="en-US" dirty="0"/>
           </a:p>
-        </p:txBody>
-      </p:sp>
+          <a:p>
+            <a:endParaRPr lang="en-US" dirty="0"/>
+          </a:p>
+          <a:p>
+            <a:r>
+              <a:rPr lang="en-US" sz="2000" dirty="0"/>
+              <a:t>LC Circuit</a:t>
+            </a:r>
+          </a:p>
+          <a:p>
+            <a:endParaRPr lang="en-US" dirty="0"/>
+          </a:p>
+        </p:txBody>
+      </p:sp>
+      <p:pic>
+        <p:nvPicPr>
+          <p:cNvPr id="5" name="Picture 4">
+            <a:extLst>
+              <a:ext uri="{FF2B5EF4-FFF2-40B4-BE49-F238E27FC236}">
+                <a16:creationId xmlns:a16="http://schemas.microsoft.com/office/drawing/2014/main" id="{F7AC37BE-CCBD-0EC5-7B85-29B54871F7BF}"/>
+              </a:ext>
+            </a:extLst>
+          </p:cNvPr>
+          <p:cNvPicPr>
+            <a:picLocks noChangeAspect="1"/>
+          </p:cNvPicPr>
+          <p:nvPr/>
+        </p:nvPicPr>
+        <p:blipFill>
+          <a:blip r:embed="rId2"/>
+          <a:stretch>
+            <a:fillRect/>
+          </a:stretch>
+        </p:blipFill>
+        <p:spPr>
+          <a:xfrm>
+            <a:off x="4913908" y="1496030"/>
+            <a:ext cx="2276475" cy="533400"/>
+          </a:xfrm>
+          <a:prstGeom prst="rect">
+            <a:avLst/>
+          </a:prstGeom>
+        </p:spPr>
+      </p:pic>
+      <p:pic>
+        <p:nvPicPr>
+          <p:cNvPr id="7" name="Picture 6">
+            <a:extLst>
+              <a:ext uri="{FF2B5EF4-FFF2-40B4-BE49-F238E27FC236}">
+                <a16:creationId xmlns:a16="http://schemas.microsoft.com/office/drawing/2014/main" id="{348095E8-E872-523E-A9B2-058EDC4A301D}"/>
+              </a:ext>
+            </a:extLst>
+          </p:cNvPr>
+          <p:cNvPicPr>
+            <a:picLocks noChangeAspect="1"/>
+          </p:cNvPicPr>
+          <p:nvPr/>
+        </p:nvPicPr>
+        <p:blipFill>
+          <a:blip r:embed="rId3"/>
+          <a:stretch>
+            <a:fillRect/>
+          </a:stretch>
+        </p:blipFill>
+        <p:spPr>
+          <a:xfrm>
+            <a:off x="4328263" y="2384575"/>
+            <a:ext cx="971550" cy="333375"/>
+          </a:xfrm>
+          <a:prstGeom prst="rect">
+            <a:avLst/>
+          </a:prstGeom>
+        </p:spPr>
+      </p:pic>
+      <p:pic>
+        <p:nvPicPr>
+          <p:cNvPr id="9" name="Picture 8">
+            <a:extLst>
+              <a:ext uri="{FF2B5EF4-FFF2-40B4-BE49-F238E27FC236}">
+                <a16:creationId xmlns:a16="http://schemas.microsoft.com/office/drawing/2014/main" id="{4471A6D7-961A-3C33-4BF1-0E4DFC8665E2}"/>
+              </a:ext>
+            </a:extLst>
+          </p:cNvPr>
+          <p:cNvPicPr>
+            <a:picLocks noChangeAspect="1"/>
+          </p:cNvPicPr>
+          <p:nvPr/>
+        </p:nvPicPr>
+        <p:blipFill>
+          <a:blip r:embed="rId4"/>
+          <a:stretch>
+            <a:fillRect/>
+          </a:stretch>
+        </p:blipFill>
+        <p:spPr>
+          <a:xfrm>
+            <a:off x="6213872" y="2333701"/>
+            <a:ext cx="1485900" cy="342900"/>
+          </a:xfrm>
+          <a:prstGeom prst="rect">
+            <a:avLst/>
+          </a:prstGeom>
+        </p:spPr>
+      </p:pic>
+      <p:pic>
+        <p:nvPicPr>
+          <p:cNvPr id="11" name="Picture 10">
+            <a:extLst>
+              <a:ext uri="{FF2B5EF4-FFF2-40B4-BE49-F238E27FC236}">
+                <a16:creationId xmlns:a16="http://schemas.microsoft.com/office/drawing/2014/main" id="{9857DEC1-DAA3-6DAA-98B1-8E3731DE4ECC}"/>
+              </a:ext>
+            </a:extLst>
+          </p:cNvPr>
+          <p:cNvPicPr>
+            <a:picLocks noChangeAspect="1"/>
+          </p:cNvPicPr>
+          <p:nvPr/>
+        </p:nvPicPr>
+        <p:blipFill>
+          <a:blip r:embed="rId5"/>
+          <a:stretch>
+            <a:fillRect/>
+          </a:stretch>
+        </p:blipFill>
+        <p:spPr>
+          <a:xfrm>
+            <a:off x="9270062" y="3831448"/>
+            <a:ext cx="2726554" cy="2062152"/>
+          </a:xfrm>
+          <a:prstGeom prst="rect">
+            <a:avLst/>
+          </a:prstGeom>
+        </p:spPr>
+      </p:pic>
+      <p:pic>
+        <p:nvPicPr>
+          <p:cNvPr id="13" name="Picture 12">
+            <a:extLst>
+              <a:ext uri="{FF2B5EF4-FFF2-40B4-BE49-F238E27FC236}">
+                <a16:creationId xmlns:a16="http://schemas.microsoft.com/office/drawing/2014/main" id="{36A8325A-957B-7BE6-33EF-2D4CAFD141C2}"/>
+              </a:ext>
+            </a:extLst>
+          </p:cNvPr>
+          <p:cNvPicPr>
+            <a:picLocks noChangeAspect="1"/>
+          </p:cNvPicPr>
+          <p:nvPr/>
+        </p:nvPicPr>
+        <p:blipFill>
+          <a:blip r:embed="rId6"/>
+          <a:stretch>
+            <a:fillRect/>
+          </a:stretch>
+        </p:blipFill>
+        <p:spPr>
+          <a:xfrm>
+            <a:off x="4071207" y="2898743"/>
+            <a:ext cx="4049585" cy="1190594"/>
+          </a:xfrm>
+          <a:prstGeom prst="rect">
+            <a:avLst/>
+          </a:prstGeom>
+        </p:spPr>
+      </p:pic>
+      <p:pic>
+        <p:nvPicPr>
+          <p:cNvPr id="15" name="Picture 14">
+            <a:extLst>
+              <a:ext uri="{FF2B5EF4-FFF2-40B4-BE49-F238E27FC236}">
+                <a16:creationId xmlns:a16="http://schemas.microsoft.com/office/drawing/2014/main" id="{9F18CA3B-8CB1-5713-D0EA-67E32F1B69CE}"/>
+              </a:ext>
+            </a:extLst>
+          </p:cNvPr>
+          <p:cNvPicPr>
+            <a:picLocks noChangeAspect="1"/>
+          </p:cNvPicPr>
+          <p:nvPr/>
+        </p:nvPicPr>
+        <p:blipFill>
+          <a:blip r:embed="rId7"/>
+          <a:stretch>
+            <a:fillRect/>
+          </a:stretch>
+        </p:blipFill>
+        <p:spPr>
+          <a:xfrm>
+            <a:off x="956813" y="5057788"/>
+            <a:ext cx="2003764" cy="1119175"/>
+          </a:xfrm>
+          <a:prstGeom prst="rect">
+            <a:avLst/>
+          </a:prstGeom>
+        </p:spPr>
+      </p:pic>
+      <p:pic>
+        <p:nvPicPr>
+          <p:cNvPr id="17" name="Picture 16">
+            <a:extLst>
+              <a:ext uri="{FF2B5EF4-FFF2-40B4-BE49-F238E27FC236}">
+                <a16:creationId xmlns:a16="http://schemas.microsoft.com/office/drawing/2014/main" id="{23B192D0-6E5E-31C0-5A32-C18F2DA5AAED}"/>
+              </a:ext>
+            </a:extLst>
+          </p:cNvPr>
+          <p:cNvPicPr>
+            <a:picLocks noChangeAspect="1"/>
+          </p:cNvPicPr>
+          <p:nvPr/>
+        </p:nvPicPr>
+        <p:blipFill>
+          <a:blip r:embed="rId8"/>
+          <a:stretch>
+            <a:fillRect/>
+          </a:stretch>
+        </p:blipFill>
+        <p:spPr>
+          <a:xfrm>
+            <a:off x="4328263" y="5341150"/>
+            <a:ext cx="1885950" cy="552450"/>
+          </a:xfrm>
+          <a:prstGeom prst="rect">
+            <a:avLst/>
+          </a:prstGeom>
+        </p:spPr>
+      </p:pic>
+      <p:cxnSp>
+        <p:nvCxnSpPr>
+          <p:cNvPr id="19" name="Straight Connector 18">
+            <a:extLst>
+              <a:ext uri="{FF2B5EF4-FFF2-40B4-BE49-F238E27FC236}">
+                <a16:creationId xmlns:a16="http://schemas.microsoft.com/office/drawing/2014/main" id="{7E91CC10-162E-64FF-73FA-65755B4054ED}"/>
+              </a:ext>
+            </a:extLst>
+          </p:cNvPr>
+          <p:cNvCxnSpPr/>
+          <p:nvPr/>
+        </p:nvCxnSpPr>
+        <p:spPr>
+          <a:xfrm>
+            <a:off x="3271837" y="4358434"/>
+            <a:ext cx="5404919" cy="0"/>
+          </a:xfrm>
+          <a:prstGeom prst="line">
+            <a:avLst/>
+          </a:prstGeom>
+        </p:spPr>
+        <p:style>
+          <a:lnRef idx="2">
+            <a:schemeClr val="accent1"/>
+          </a:lnRef>
+          <a:fillRef idx="0">
+            <a:schemeClr val="accent1"/>
+          </a:fillRef>
+          <a:effectRef idx="1">
+            <a:schemeClr val="accent1"/>
+          </a:effectRef>
+          <a:fontRef idx="minor">
+            <a:schemeClr val="tx1"/>
+          </a:fontRef>
+        </p:style>
+      </p:cxnSp>
     </p:spTree>
     <p:extLst>
       <p:ext uri="{BB962C8B-B14F-4D97-AF65-F5344CB8AC3E}">
-        <p14:creationId xmlns:p14="http://schemas.microsoft.com/office/powerpoint/2010/main" val="2931661657"/>
+        <p14:creationId xmlns:p14="http://schemas.microsoft.com/office/powerpoint/2010/main" val="3870065045"/>
       </p:ext>
     </p:extLst>
   </p:cSld>
@@ -4639,7 +5521,7 @@
           <p:cNvPr id="2" name="Title 1">
             <a:extLst>
               <a:ext uri="{FF2B5EF4-FFF2-40B4-BE49-F238E27FC236}">
-                <a16:creationId xmlns:a16="http://schemas.microsoft.com/office/drawing/2014/main" id="{4B0AD2BD-97E9-C6BE-C42F-2BE4EDA4228C}"/>
+                <a16:creationId xmlns:a16="http://schemas.microsoft.com/office/drawing/2014/main" id="{654A7263-3866-3A0D-B425-7DF1626DC632}"/>
               </a:ext>
             </a:extLst>
           </p:cNvPr>
@@ -4657,7 +5539,7 @@
           <a:p>
             <a:r>
               <a:rPr lang="en-US" dirty="0"/>
-              <a:t>Method: Adiabatic approach</a:t>
+              <a:t>Choose Question</a:t>
             </a:r>
           </a:p>
         </p:txBody>
@@ -4667,7 +5549,7 @@
           <p:cNvPr id="3" name="Content Placeholder 2">
             <a:extLst>
               <a:ext uri="{FF2B5EF4-FFF2-40B4-BE49-F238E27FC236}">
-                <a16:creationId xmlns:a16="http://schemas.microsoft.com/office/drawing/2014/main" id="{BFA1A0F1-FEE6-5A5C-D38F-337D9B11E7B5}"/>
+                <a16:creationId xmlns:a16="http://schemas.microsoft.com/office/drawing/2014/main" id="{4E07A0D5-B9F4-BCEE-91F9-48171214ED53}"/>
               </a:ext>
             </a:extLst>
           </p:cNvPr>
@@ -4683,21 +5565,9 @@
           <a:bodyPr/>
           <a:lstStyle/>
           <a:p>
-            <a:endParaRPr lang="en-US" dirty="0"/>
-          </a:p>
-          <a:p>
             <a:r>
               <a:rPr lang="en-US" dirty="0"/>
-              <a:t>Problem Scope: </a:t>
-            </a:r>
-          </a:p>
-          <a:p>
-            <a:endParaRPr lang="en-US" dirty="0"/>
-          </a:p>
-          <a:p>
-            <a:r>
-              <a:rPr lang="en-US" sz="2400" dirty="0"/>
-              <a:t>Gaps, runtime and complexity</a:t>
+              <a:t>Dynamics or Statics?</a:t>
             </a:r>
           </a:p>
         </p:txBody>
@@ -4707,7 +5577,7 @@
           <p:cNvPr id="5" name="Picture 4">
             <a:extLst>
               <a:ext uri="{FF2B5EF4-FFF2-40B4-BE49-F238E27FC236}">
-                <a16:creationId xmlns:a16="http://schemas.microsoft.com/office/drawing/2014/main" id="{4D35E65B-CF0A-A796-7D08-74FE89F69E41}"/>
+                <a16:creationId xmlns:a16="http://schemas.microsoft.com/office/drawing/2014/main" id="{A9D2E4D1-7376-71DF-FD8F-B452D7ADAEAE}"/>
               </a:ext>
             </a:extLst>
           </p:cNvPr>
@@ -4724,98 +5594,8 @@
         </p:blipFill>
         <p:spPr>
           <a:xfrm>
-            <a:off x="1476420" y="1550344"/>
-            <a:ext cx="6588643" cy="469757"/>
-          </a:xfrm>
-          <a:prstGeom prst="rect">
-            <a:avLst/>
-          </a:prstGeom>
-        </p:spPr>
-      </p:pic>
-      <p:pic>
-        <p:nvPicPr>
-          <p:cNvPr id="7" name="Picture 6">
-            <a:extLst>
-              <a:ext uri="{FF2B5EF4-FFF2-40B4-BE49-F238E27FC236}">
-                <a16:creationId xmlns:a16="http://schemas.microsoft.com/office/drawing/2014/main" id="{3E552DF6-A81B-9A2F-202C-F3BE4E01BD55}"/>
-              </a:ext>
-            </a:extLst>
-          </p:cNvPr>
-          <p:cNvPicPr>
-            <a:picLocks noChangeAspect="1"/>
-          </p:cNvPicPr>
-          <p:nvPr/>
-        </p:nvPicPr>
-        <p:blipFill>
-          <a:blip r:embed="rId3"/>
-          <a:stretch>
-            <a:fillRect/>
-          </a:stretch>
-        </p:blipFill>
-        <p:spPr>
-          <a:xfrm>
-            <a:off x="5572214" y="2940684"/>
-            <a:ext cx="5781586" cy="3379701"/>
-          </a:xfrm>
-          <a:prstGeom prst="rect">
-            <a:avLst/>
-          </a:prstGeom>
-        </p:spPr>
-      </p:pic>
-      <p:pic>
-        <p:nvPicPr>
-          <p:cNvPr id="9" name="Picture 8">
-            <a:extLst>
-              <a:ext uri="{FF2B5EF4-FFF2-40B4-BE49-F238E27FC236}">
-                <a16:creationId xmlns:a16="http://schemas.microsoft.com/office/drawing/2014/main" id="{B70021E3-3357-7CC5-5589-C3E1339A51A6}"/>
-              </a:ext>
-            </a:extLst>
-          </p:cNvPr>
-          <p:cNvPicPr>
-            <a:picLocks noChangeAspect="1"/>
-          </p:cNvPicPr>
-          <p:nvPr/>
-        </p:nvPicPr>
-        <p:blipFill>
-          <a:blip r:embed="rId4"/>
-          <a:stretch>
-            <a:fillRect/>
-          </a:stretch>
-        </p:blipFill>
-        <p:spPr>
-          <a:xfrm>
-            <a:off x="6933198" y="2078174"/>
-            <a:ext cx="2853264" cy="650234"/>
-          </a:xfrm>
-          <a:prstGeom prst="rect">
-            <a:avLst/>
-          </a:prstGeom>
-        </p:spPr>
-      </p:pic>
-      <p:pic>
-        <p:nvPicPr>
-          <p:cNvPr id="11" name="Picture 10">
-            <a:extLst>
-              <a:ext uri="{FF2B5EF4-FFF2-40B4-BE49-F238E27FC236}">
-                <a16:creationId xmlns:a16="http://schemas.microsoft.com/office/drawing/2014/main" id="{B304FA72-D3F4-FDC1-5923-EB890F271BA4}"/>
-              </a:ext>
-            </a:extLst>
-          </p:cNvPr>
-          <p:cNvPicPr>
-            <a:picLocks noChangeAspect="1"/>
-          </p:cNvPicPr>
-          <p:nvPr/>
-        </p:nvPicPr>
-        <p:blipFill>
-          <a:blip r:embed="rId5"/>
-          <a:stretch>
-            <a:fillRect/>
-          </a:stretch>
-        </p:blipFill>
-        <p:spPr>
-          <a:xfrm>
-            <a:off x="1398876" y="5068212"/>
-            <a:ext cx="1806331" cy="478888"/>
+            <a:off x="4526733" y="2252342"/>
+            <a:ext cx="7157039" cy="2497406"/>
           </a:xfrm>
           <a:prstGeom prst="rect">
             <a:avLst/>
@@ -4825,7 +5605,7 @@
     </p:spTree>
     <p:extLst>
       <p:ext uri="{BB962C8B-B14F-4D97-AF65-F5344CB8AC3E}">
-        <p14:creationId xmlns:p14="http://schemas.microsoft.com/office/powerpoint/2010/main" val="52011118"/>
+        <p14:creationId xmlns:p14="http://schemas.microsoft.com/office/powerpoint/2010/main" val="137806960"/>
       </p:ext>
     </p:extLst>
   </p:cSld>
@@ -4857,7 +5637,7 @@
           <p:cNvPr id="2" name="Title 1">
             <a:extLst>
               <a:ext uri="{FF2B5EF4-FFF2-40B4-BE49-F238E27FC236}">
-                <a16:creationId xmlns:a16="http://schemas.microsoft.com/office/drawing/2014/main" id="{EEF10A3A-CE7C-9C74-3A7C-B042F0A6230E}"/>
+                <a16:creationId xmlns:a16="http://schemas.microsoft.com/office/drawing/2014/main" id="{626DC213-AB81-F905-0EB4-212B09DD184B}"/>
               </a:ext>
             </a:extLst>
           </p:cNvPr>
@@ -4875,163 +5655,80 @@
           <a:p>
             <a:r>
               <a:rPr lang="en-US" dirty="0"/>
-              <a:t>Example: </a:t>
-            </a:r>
-            <a:r>
-              <a:rPr lang="en-US" dirty="0" err="1"/>
-              <a:t>Ising</a:t>
-            </a:r>
+              <a:t>Ground-state problem</a:t>
+            </a:r>
+          </a:p>
+        </p:txBody>
+      </p:sp>
+      <p:sp>
+        <p:nvSpPr>
+          <p:cNvPr id="3" name="Content Placeholder 2">
+            <a:extLst>
+              <a:ext uri="{FF2B5EF4-FFF2-40B4-BE49-F238E27FC236}">
+                <a16:creationId xmlns:a16="http://schemas.microsoft.com/office/drawing/2014/main" id="{85CD77E3-249C-D403-4453-1F82773B76D1}"/>
+              </a:ext>
+            </a:extLst>
+          </p:cNvPr>
+          <p:cNvSpPr>
+            <a:spLocks noGrp="1"/>
+          </p:cNvSpPr>
+          <p:nvPr>
+            <p:ph idx="1"/>
+          </p:nvPr>
+        </p:nvSpPr>
+        <p:spPr/>
+        <p:txBody>
+          <a:bodyPr/>
+          <a:lstStyle/>
+          <a:p>
             <a:r>
               <a:rPr lang="en-US" dirty="0"/>
-              <a:t> model</a:t>
-            </a:r>
-          </a:p>
-        </p:txBody>
-      </p:sp>
-      <p:sp>
-        <p:nvSpPr>
-          <p:cNvPr id="3" name="Content Placeholder 2">
-            <a:extLst>
-              <a:ext uri="{FF2B5EF4-FFF2-40B4-BE49-F238E27FC236}">
-                <a16:creationId xmlns:a16="http://schemas.microsoft.com/office/drawing/2014/main" id="{1D413609-7E52-B586-7B92-7F9D31982704}"/>
-              </a:ext>
-            </a:extLst>
-          </p:cNvPr>
-          <p:cNvSpPr>
-            <a:spLocks noGrp="1"/>
-          </p:cNvSpPr>
-          <p:nvPr>
-            <p:ph idx="1"/>
-          </p:nvPr>
-        </p:nvSpPr>
-        <p:spPr/>
-        <p:txBody>
-          <a:bodyPr/>
-          <a:lstStyle/>
+              <a:t>Why it is important</a:t>
+            </a:r>
+          </a:p>
+          <a:p>
+            <a:endParaRPr lang="en-US" dirty="0"/>
+          </a:p>
+          <a:p>
+            <a:r>
+              <a:rPr lang="en-US" sz="1800" dirty="0"/>
+              <a:t>Computational challenge: Preparing the ground state of complex systems can be difficult.</a:t>
+            </a:r>
+          </a:p>
+          <a:p>
+            <a:pPr marL="0" indent="0">
+              <a:buNone/>
+            </a:pPr>
+            <a:endParaRPr lang="en-US" dirty="0"/>
+          </a:p>
           <a:p>
             <a:r>
               <a:rPr lang="en-US" dirty="0"/>
-              <a:t>Drive Hamiltonian : </a:t>
-            </a:r>
-            <a:r>
-              <a:rPr lang="en-US" dirty="0" err="1"/>
-              <a:t>H_b</a:t>
-            </a:r>
+              <a:t> </a:t>
+            </a:r>
+            <a:r>
+              <a:rPr kumimoji="0" lang="en-US" altLang="en-US" sz="1600" b="0" i="0" u="none" strike="noStrike" cap="none" normalizeH="0" baseline="0" dirty="0">
+                <a:ln>
+                  <a:noFill/>
+                </a:ln>
+                <a:solidFill>
+                  <a:schemeClr val="tx1"/>
+                </a:solidFill>
+                <a:effectLst/>
+                <a:latin typeface="Arial" panose="020B0604020202020204" pitchFamily="34" charset="0"/>
+              </a:rPr>
+              <a:t>Solution encoding: The ground state of a properly designed Hamiltonian encodes the desired solution.</a:t>
+            </a:r>
+          </a:p>
+          <a:p>
             <a:endParaRPr lang="en-US" dirty="0"/>
           </a:p>
-          <a:p>
-            <a:endParaRPr lang="en-US" dirty="0"/>
-          </a:p>
-          <a:p>
-            <a:endParaRPr lang="en-US" dirty="0"/>
-          </a:p>
-          <a:p>
-            <a:r>
-              <a:rPr lang="en-US" dirty="0"/>
-              <a:t>Problem Hamiltonian: </a:t>
-            </a:r>
-            <a:r>
-              <a:rPr lang="en-US" dirty="0" err="1"/>
-              <a:t>H_p</a:t>
-            </a:r>
-            <a:endParaRPr lang="en-US" dirty="0"/>
-          </a:p>
-        </p:txBody>
-      </p:sp>
-      <p:pic>
-        <p:nvPicPr>
-          <p:cNvPr id="5" name="Picture 4">
-            <a:extLst>
-              <a:ext uri="{FF2B5EF4-FFF2-40B4-BE49-F238E27FC236}">
-                <a16:creationId xmlns:a16="http://schemas.microsoft.com/office/drawing/2014/main" id="{F8188D3B-E839-1E03-D447-DD932C4461FE}"/>
-              </a:ext>
-            </a:extLst>
-          </p:cNvPr>
-          <p:cNvPicPr>
-            <a:picLocks noChangeAspect="1"/>
-          </p:cNvPicPr>
-          <p:nvPr/>
-        </p:nvPicPr>
-        <p:blipFill>
-          <a:blip r:embed="rId2"/>
-          <a:stretch>
-            <a:fillRect/>
-          </a:stretch>
-        </p:blipFill>
-        <p:spPr>
-          <a:xfrm>
-            <a:off x="2162175" y="2702069"/>
-            <a:ext cx="3933825" cy="428625"/>
-          </a:xfrm>
-          <a:prstGeom prst="rect">
-            <a:avLst/>
-          </a:prstGeom>
-        </p:spPr>
-      </p:pic>
-      <p:pic>
-        <p:nvPicPr>
-          <p:cNvPr id="7" name="Picture 6">
-            <a:extLst>
-              <a:ext uri="{FF2B5EF4-FFF2-40B4-BE49-F238E27FC236}">
-                <a16:creationId xmlns:a16="http://schemas.microsoft.com/office/drawing/2014/main" id="{EC9A4141-4FB6-69BD-2661-E6D41FC5CA24}"/>
-              </a:ext>
-            </a:extLst>
-          </p:cNvPr>
-          <p:cNvPicPr>
-            <a:picLocks noChangeAspect="1"/>
-          </p:cNvPicPr>
-          <p:nvPr/>
-        </p:nvPicPr>
-        <p:blipFill>
-          <a:blip r:embed="rId3"/>
-          <a:stretch>
-            <a:fillRect/>
-          </a:stretch>
-        </p:blipFill>
-        <p:spPr>
-          <a:xfrm>
-            <a:off x="2064759" y="4045094"/>
-            <a:ext cx="5762625" cy="438150"/>
-          </a:xfrm>
-          <a:prstGeom prst="rect">
-            <a:avLst/>
-          </a:prstGeom>
-        </p:spPr>
-      </p:pic>
-      <p:pic>
-        <p:nvPicPr>
-          <p:cNvPr id="11" name="Picture 10">
-            <a:extLst>
-              <a:ext uri="{FF2B5EF4-FFF2-40B4-BE49-F238E27FC236}">
-                <a16:creationId xmlns:a16="http://schemas.microsoft.com/office/drawing/2014/main" id="{1C3B7C71-C73D-B714-484D-E6A7E9FA0EE2}"/>
-              </a:ext>
-            </a:extLst>
-          </p:cNvPr>
-          <p:cNvPicPr>
-            <a:picLocks noChangeAspect="1"/>
-          </p:cNvPicPr>
-          <p:nvPr/>
-        </p:nvPicPr>
-        <p:blipFill>
-          <a:blip r:embed="rId4"/>
-          <a:stretch>
-            <a:fillRect/>
-          </a:stretch>
-        </p:blipFill>
-        <p:spPr>
-          <a:xfrm>
-            <a:off x="5300662" y="5067156"/>
-            <a:ext cx="5857875" cy="1447800"/>
-          </a:xfrm>
-          <a:prstGeom prst="rect">
-            <a:avLst/>
-          </a:prstGeom>
-        </p:spPr>
-      </p:pic>
+        </p:txBody>
+      </p:sp>
     </p:spTree>
     <p:extLst>
       <p:ext uri="{BB962C8B-B14F-4D97-AF65-F5344CB8AC3E}">
-        <p14:creationId xmlns:p14="http://schemas.microsoft.com/office/powerpoint/2010/main" val="2811683946"/>
+        <p14:creationId xmlns:p14="http://schemas.microsoft.com/office/powerpoint/2010/main" val="2931661657"/>
       </p:ext>
     </p:extLst>
   </p:cSld>
@@ -5063,7 +5760,7 @@
           <p:cNvPr id="2" name="Title 1">
             <a:extLst>
               <a:ext uri="{FF2B5EF4-FFF2-40B4-BE49-F238E27FC236}">
-                <a16:creationId xmlns:a16="http://schemas.microsoft.com/office/drawing/2014/main" id="{86DE510A-6AA9-6B8B-42D8-2BC8D8A9D144}"/>
+                <a16:creationId xmlns:a16="http://schemas.microsoft.com/office/drawing/2014/main" id="{4B0AD2BD-97E9-C6BE-C42F-2BE4EDA4228C}"/>
               </a:ext>
             </a:extLst>
           </p:cNvPr>
@@ -5081,41 +5778,48 @@
           <a:p>
             <a:r>
               <a:rPr lang="en-US" dirty="0"/>
-              <a:t>Adiabatic computation for </a:t>
-            </a:r>
-            <a:r>
-              <a:rPr lang="en-US" dirty="0" err="1"/>
-              <a:t>Ising</a:t>
-            </a:r>
+              <a:t>Method: Adiabatic approach</a:t>
+            </a:r>
+          </a:p>
+        </p:txBody>
+      </p:sp>
+      <p:sp>
+        <p:nvSpPr>
+          <p:cNvPr id="3" name="Content Placeholder 2">
+            <a:extLst>
+              <a:ext uri="{FF2B5EF4-FFF2-40B4-BE49-F238E27FC236}">
+                <a16:creationId xmlns:a16="http://schemas.microsoft.com/office/drawing/2014/main" id="{BFA1A0F1-FEE6-5A5C-D38F-337D9B11E7B5}"/>
+              </a:ext>
+            </a:extLst>
+          </p:cNvPr>
+          <p:cNvSpPr>
+            <a:spLocks noGrp="1"/>
+          </p:cNvSpPr>
+          <p:nvPr>
+            <p:ph idx="1"/>
+          </p:nvPr>
+        </p:nvSpPr>
+        <p:spPr/>
+        <p:txBody>
+          <a:bodyPr/>
+          <a:lstStyle/>
+          <a:p>
+            <a:endParaRPr lang="en-US" dirty="0"/>
+          </a:p>
+          <a:p>
             <a:r>
               <a:rPr lang="en-US" dirty="0"/>
-              <a:t> model</a:t>
-            </a:r>
-          </a:p>
-        </p:txBody>
-      </p:sp>
-      <p:sp>
-        <p:nvSpPr>
-          <p:cNvPr id="3" name="Content Placeholder 2">
-            <a:extLst>
-              <a:ext uri="{FF2B5EF4-FFF2-40B4-BE49-F238E27FC236}">
-                <a16:creationId xmlns:a16="http://schemas.microsoft.com/office/drawing/2014/main" id="{88E89AF9-AEEA-9C6F-796C-C5CBE82C257C}"/>
-              </a:ext>
-            </a:extLst>
-          </p:cNvPr>
-          <p:cNvSpPr>
-            <a:spLocks noGrp="1"/>
-          </p:cNvSpPr>
-          <p:nvPr>
-            <p:ph idx="1"/>
-          </p:nvPr>
-        </p:nvSpPr>
-        <p:spPr/>
-        <p:txBody>
-          <a:bodyPr/>
-          <a:lstStyle/>
+              <a:t>Problem Scope: </a:t>
+            </a:r>
+          </a:p>
           <a:p>
             <a:endParaRPr lang="en-US" dirty="0"/>
+          </a:p>
+          <a:p>
+            <a:r>
+              <a:rPr lang="en-US" sz="2400" dirty="0"/>
+              <a:t>Gaps, runtime and complexity</a:t>
+            </a:r>
           </a:p>
         </p:txBody>
       </p:sp>
@@ -5124,7 +5828,7 @@
           <p:cNvPr id="5" name="Picture 4">
             <a:extLst>
               <a:ext uri="{FF2B5EF4-FFF2-40B4-BE49-F238E27FC236}">
-                <a16:creationId xmlns:a16="http://schemas.microsoft.com/office/drawing/2014/main" id="{A41F6900-AFBE-4D2C-AAAF-327CFA2F28A8}"/>
+                <a16:creationId xmlns:a16="http://schemas.microsoft.com/office/drawing/2014/main" id="{4D35E65B-CF0A-A796-7D08-74FE89F69E41}"/>
               </a:ext>
             </a:extLst>
           </p:cNvPr>
@@ -5141,28 +5845,108 @@
         </p:blipFill>
         <p:spPr>
           <a:xfrm>
-            <a:off x="4591050" y="2205038"/>
-            <a:ext cx="3009900" cy="3971925"/>
+            <a:off x="1476420" y="1550344"/>
+            <a:ext cx="6588643" cy="469757"/>
           </a:xfrm>
           <a:prstGeom prst="rect">
             <a:avLst/>
           </a:prstGeom>
-          <a:ln>
-            <a:noFill/>
-          </a:ln>
-          <a:effectLst>
-            <a:outerShdw blurRad="190500" algn="tl" rotWithShape="0">
-              <a:srgbClr val="000000">
-                <a:alpha val="70000"/>
-              </a:srgbClr>
-            </a:outerShdw>
-          </a:effectLst>
+        </p:spPr>
+      </p:pic>
+      <p:pic>
+        <p:nvPicPr>
+          <p:cNvPr id="7" name="Picture 6">
+            <a:extLst>
+              <a:ext uri="{FF2B5EF4-FFF2-40B4-BE49-F238E27FC236}">
+                <a16:creationId xmlns:a16="http://schemas.microsoft.com/office/drawing/2014/main" id="{3E552DF6-A81B-9A2F-202C-F3BE4E01BD55}"/>
+              </a:ext>
+            </a:extLst>
+          </p:cNvPr>
+          <p:cNvPicPr>
+            <a:picLocks noChangeAspect="1"/>
+          </p:cNvPicPr>
+          <p:nvPr/>
+        </p:nvPicPr>
+        <p:blipFill>
+          <a:blip r:embed="rId3"/>
+          <a:stretch>
+            <a:fillRect/>
+          </a:stretch>
+        </p:blipFill>
+        <p:spPr>
+          <a:xfrm>
+            <a:off x="5572214" y="2940684"/>
+            <a:ext cx="5781586" cy="3379701"/>
+          </a:xfrm>
+          <a:prstGeom prst="rect">
+            <a:avLst/>
+          </a:prstGeom>
+        </p:spPr>
+      </p:pic>
+      <p:pic>
+        <p:nvPicPr>
+          <p:cNvPr id="9" name="Picture 8">
+            <a:extLst>
+              <a:ext uri="{FF2B5EF4-FFF2-40B4-BE49-F238E27FC236}">
+                <a16:creationId xmlns:a16="http://schemas.microsoft.com/office/drawing/2014/main" id="{B70021E3-3357-7CC5-5589-C3E1339A51A6}"/>
+              </a:ext>
+            </a:extLst>
+          </p:cNvPr>
+          <p:cNvPicPr>
+            <a:picLocks noChangeAspect="1"/>
+          </p:cNvPicPr>
+          <p:nvPr/>
+        </p:nvPicPr>
+        <p:blipFill>
+          <a:blip r:embed="rId4"/>
+          <a:stretch>
+            <a:fillRect/>
+          </a:stretch>
+        </p:blipFill>
+        <p:spPr>
+          <a:xfrm>
+            <a:off x="6933198" y="2078174"/>
+            <a:ext cx="2853264" cy="650234"/>
+          </a:xfrm>
+          <a:prstGeom prst="rect">
+            <a:avLst/>
+          </a:prstGeom>
+        </p:spPr>
+      </p:pic>
+      <p:pic>
+        <p:nvPicPr>
+          <p:cNvPr id="11" name="Picture 10">
+            <a:extLst>
+              <a:ext uri="{FF2B5EF4-FFF2-40B4-BE49-F238E27FC236}">
+                <a16:creationId xmlns:a16="http://schemas.microsoft.com/office/drawing/2014/main" id="{B304FA72-D3F4-FDC1-5923-EB890F271BA4}"/>
+              </a:ext>
+            </a:extLst>
+          </p:cNvPr>
+          <p:cNvPicPr>
+            <a:picLocks noChangeAspect="1"/>
+          </p:cNvPicPr>
+          <p:nvPr/>
+        </p:nvPicPr>
+        <p:blipFill>
+          <a:blip r:embed="rId5"/>
+          <a:stretch>
+            <a:fillRect/>
+          </a:stretch>
+        </p:blipFill>
+        <p:spPr>
+          <a:xfrm>
+            <a:off x="1398876" y="5068212"/>
+            <a:ext cx="1806331" cy="478888"/>
+          </a:xfrm>
+          <a:prstGeom prst="rect">
+            <a:avLst/>
+          </a:prstGeom>
         </p:spPr>
       </p:pic>
     </p:spTree>
     <p:extLst>
       <p:ext uri="{BB962C8B-B14F-4D97-AF65-F5344CB8AC3E}">
-        <p14:creationId xmlns:p14="http://schemas.microsoft.com/office/powerpoint/2010/main" val="1324293167"/>
+        <p14:creationId xmlns:p14="http://schemas.microsoft.com/office/powerpoint/2010/main" val="52011118"/>
       </p:ext>
     </p:extLst>
   </p:cSld>
@@ -5194,7 +5978,7 @@
           <p:cNvPr id="2" name="Title 1">
             <a:extLst>
               <a:ext uri="{FF2B5EF4-FFF2-40B4-BE49-F238E27FC236}">
-                <a16:creationId xmlns:a16="http://schemas.microsoft.com/office/drawing/2014/main" id="{57DBC9D2-DB7A-EF6E-6380-5A1ED6D62E41}"/>
+                <a16:creationId xmlns:a16="http://schemas.microsoft.com/office/drawing/2014/main" id="{EEF10A3A-CE7C-9C74-3A7C-B042F0A6230E}"/>
               </a:ext>
             </a:extLst>
           </p:cNvPr>
@@ -5211,20 +5995,8 @@
           <a:lstStyle/>
           <a:p>
             <a:r>
-              <a:rPr lang="en-US" dirty="0" err="1"/>
-              <a:t>Qiskit</a:t>
-            </a:r>
-            <a:r>
               <a:rPr lang="en-US" dirty="0"/>
-              <a:t> </a:t>
-            </a:r>
-            <a:r>
-              <a:rPr lang="en-US" dirty="0" err="1"/>
-              <a:t>implemention</a:t>
-            </a:r>
-            <a:r>
-              <a:rPr lang="en-US" dirty="0"/>
-              <a:t> for </a:t>
+              <a:t>Example: </a:t>
             </a:r>
             <a:r>
               <a:rPr lang="en-US" dirty="0" err="1"/>
@@ -5237,21 +6009,69 @@
           </a:p>
         </p:txBody>
       </p:sp>
+      <p:sp>
+        <p:nvSpPr>
+          <p:cNvPr id="3" name="Content Placeholder 2">
+            <a:extLst>
+              <a:ext uri="{FF2B5EF4-FFF2-40B4-BE49-F238E27FC236}">
+                <a16:creationId xmlns:a16="http://schemas.microsoft.com/office/drawing/2014/main" id="{1D413609-7E52-B586-7B92-7F9D31982704}"/>
+              </a:ext>
+            </a:extLst>
+          </p:cNvPr>
+          <p:cNvSpPr>
+            <a:spLocks noGrp="1"/>
+          </p:cNvSpPr>
+          <p:nvPr>
+            <p:ph idx="1"/>
+          </p:nvPr>
+        </p:nvSpPr>
+        <p:spPr/>
+        <p:txBody>
+          <a:bodyPr/>
+          <a:lstStyle/>
+          <a:p>
+            <a:r>
+              <a:rPr lang="en-US" dirty="0"/>
+              <a:t>Drive Hamiltonian : </a:t>
+            </a:r>
+            <a:r>
+              <a:rPr lang="en-US" dirty="0" err="1"/>
+              <a:t>H_b</a:t>
+            </a:r>
+            <a:endParaRPr lang="en-US" dirty="0"/>
+          </a:p>
+          <a:p>
+            <a:endParaRPr lang="en-US" dirty="0"/>
+          </a:p>
+          <a:p>
+            <a:endParaRPr lang="en-US" dirty="0"/>
+          </a:p>
+          <a:p>
+            <a:r>
+              <a:rPr lang="en-US" dirty="0"/>
+              <a:t>Problem Hamiltonian: </a:t>
+            </a:r>
+            <a:r>
+              <a:rPr lang="en-US" dirty="0" err="1"/>
+              <a:t>H_p</a:t>
+            </a:r>
+            <a:endParaRPr lang="en-US" dirty="0"/>
+          </a:p>
+        </p:txBody>
+      </p:sp>
       <p:pic>
         <p:nvPicPr>
-          <p:cNvPr id="7" name="Content Placeholder 6">
-            <a:extLst>
-              <a:ext uri="{FF2B5EF4-FFF2-40B4-BE49-F238E27FC236}">
-                <a16:creationId xmlns:a16="http://schemas.microsoft.com/office/drawing/2014/main" id="{D32BDB70-FD48-A0EE-277B-1AB0E4CB8C87}"/>
+          <p:cNvPr id="5" name="Picture 4">
+            <a:extLst>
+              <a:ext uri="{FF2B5EF4-FFF2-40B4-BE49-F238E27FC236}">
+                <a16:creationId xmlns:a16="http://schemas.microsoft.com/office/drawing/2014/main" id="{F8188D3B-E839-1E03-D447-DD932C4461FE}"/>
               </a:ext>
             </a:extLst>
           </p:cNvPr>
           <p:cNvPicPr>
-            <a:picLocks noGrp="1" noChangeAspect="1"/>
+            <a:picLocks noChangeAspect="1"/>
           </p:cNvPicPr>
-          <p:nvPr>
-            <p:ph idx="1"/>
-          </p:nvPr>
+          <p:nvPr/>
         </p:nvPicPr>
         <p:blipFill>
           <a:blip r:embed="rId2"/>
@@ -5261,17 +6081,20 @@
         </p:blipFill>
         <p:spPr>
           <a:xfrm>
-            <a:off x="2230582" y="4107023"/>
-            <a:ext cx="7520420" cy="2833670"/>
-          </a:xfrm>
+            <a:off x="2162175" y="2702069"/>
+            <a:ext cx="3933825" cy="428625"/>
+          </a:xfrm>
+          <a:prstGeom prst="rect">
+            <a:avLst/>
+          </a:prstGeom>
         </p:spPr>
       </p:pic>
       <p:pic>
         <p:nvPicPr>
-          <p:cNvPr id="5" name="Picture 4">
-            <a:extLst>
-              <a:ext uri="{FF2B5EF4-FFF2-40B4-BE49-F238E27FC236}">
-                <a16:creationId xmlns:a16="http://schemas.microsoft.com/office/drawing/2014/main" id="{E3D1F7B8-5706-674F-718F-32D6B6D3335F}"/>
+          <p:cNvPr id="7" name="Picture 6">
+            <a:extLst>
+              <a:ext uri="{FF2B5EF4-FFF2-40B4-BE49-F238E27FC236}">
+                <a16:creationId xmlns:a16="http://schemas.microsoft.com/office/drawing/2014/main" id="{EC9A4141-4FB6-69BD-2661-E6D41FC5CA24}"/>
               </a:ext>
             </a:extLst>
           </p:cNvPr>
@@ -5288,8 +6111,8 @@
         </p:blipFill>
         <p:spPr>
           <a:xfrm>
-            <a:off x="519546" y="1455162"/>
-            <a:ext cx="5784272" cy="2484520"/>
+            <a:off x="2010438" y="4012689"/>
+            <a:ext cx="5762625" cy="438150"/>
           </a:xfrm>
           <a:prstGeom prst="rect">
             <a:avLst/>
@@ -5298,10 +6121,10 @@
       </p:pic>
       <p:pic>
         <p:nvPicPr>
-          <p:cNvPr id="9" name="Picture 8">
-            <a:extLst>
-              <a:ext uri="{FF2B5EF4-FFF2-40B4-BE49-F238E27FC236}">
-                <a16:creationId xmlns:a16="http://schemas.microsoft.com/office/drawing/2014/main" id="{662185D2-326B-29E1-C0A6-9851C5954E87}"/>
+          <p:cNvPr id="11" name="Picture 10">
+            <a:extLst>
+              <a:ext uri="{FF2B5EF4-FFF2-40B4-BE49-F238E27FC236}">
+                <a16:creationId xmlns:a16="http://schemas.microsoft.com/office/drawing/2014/main" id="{1C3B7C71-C73D-B714-484D-E6A7E9FA0EE2}"/>
               </a:ext>
             </a:extLst>
           </p:cNvPr>
@@ -5318,8 +6141,68 @@
         </p:blipFill>
         <p:spPr>
           <a:xfrm>
-            <a:off x="6484386" y="1690688"/>
-            <a:ext cx="4688845" cy="1965066"/>
+            <a:off x="5940585" y="5101421"/>
+            <a:ext cx="5062537" cy="1251229"/>
+          </a:xfrm>
+          <a:prstGeom prst="rect">
+            <a:avLst/>
+          </a:prstGeom>
+        </p:spPr>
+      </p:pic>
+      <p:pic>
+        <p:nvPicPr>
+          <p:cNvPr id="6" name="Picture 5">
+            <a:extLst>
+              <a:ext uri="{FF2B5EF4-FFF2-40B4-BE49-F238E27FC236}">
+                <a16:creationId xmlns:a16="http://schemas.microsoft.com/office/drawing/2014/main" id="{ED1D406A-2E7A-9C86-E294-3990249A9ABE}"/>
+              </a:ext>
+            </a:extLst>
+          </p:cNvPr>
+          <p:cNvPicPr>
+            <a:picLocks noChangeAspect="1"/>
+          </p:cNvPicPr>
+          <p:nvPr/>
+        </p:nvPicPr>
+        <p:blipFill>
+          <a:blip r:embed="rId5"/>
+          <a:stretch>
+            <a:fillRect/>
+          </a:stretch>
+        </p:blipFill>
+        <p:spPr>
+          <a:xfrm>
+            <a:off x="8471854" y="1152827"/>
+            <a:ext cx="2768306" cy="2243545"/>
+          </a:xfrm>
+          <a:prstGeom prst="rect">
+            <a:avLst/>
+          </a:prstGeom>
+        </p:spPr>
+      </p:pic>
+      <p:pic>
+        <p:nvPicPr>
+          <p:cNvPr id="8" name="Picture 7">
+            <a:extLst>
+              <a:ext uri="{FF2B5EF4-FFF2-40B4-BE49-F238E27FC236}">
+                <a16:creationId xmlns:a16="http://schemas.microsoft.com/office/drawing/2014/main" id="{3B12952C-228B-D83F-38E6-6F913CC348FD}"/>
+              </a:ext>
+            </a:extLst>
+          </p:cNvPr>
+          <p:cNvPicPr>
+            <a:picLocks noChangeAspect="1"/>
+          </p:cNvPicPr>
+          <p:nvPr/>
+        </p:nvPicPr>
+        <p:blipFill>
+          <a:blip r:embed="rId6"/>
+          <a:stretch>
+            <a:fillRect/>
+          </a:stretch>
+        </p:blipFill>
+        <p:spPr>
+          <a:xfrm>
+            <a:off x="1377495" y="5101421"/>
+            <a:ext cx="3839332" cy="273737"/>
           </a:xfrm>
           <a:prstGeom prst="rect">
             <a:avLst/>
@@ -5329,7 +6212,7 @@
     </p:spTree>
     <p:extLst>
       <p:ext uri="{BB962C8B-B14F-4D97-AF65-F5344CB8AC3E}">
-        <p14:creationId xmlns:p14="http://schemas.microsoft.com/office/powerpoint/2010/main" val="3304332057"/>
+        <p14:creationId xmlns:p14="http://schemas.microsoft.com/office/powerpoint/2010/main" val="2811683946"/>
       </p:ext>
     </p:extLst>
   </p:cSld>

--- a/Presentation/Main_structure_backup.pptx
+++ b/Presentation/Main_structure_backup.pptx
@@ -4,22 +4,32 @@
   <p:sldMasterIdLst>
     <p:sldMasterId id="2147483648" r:id="rId1"/>
   </p:sldMasterIdLst>
+  <p:notesMasterIdLst>
+    <p:notesMasterId r:id="rId24"/>
+  </p:notesMasterIdLst>
   <p:sldIdLst>
     <p:sldId id="256" r:id="rId2"/>
     <p:sldId id="257" r:id="rId3"/>
     <p:sldId id="258" r:id="rId4"/>
     <p:sldId id="269" r:id="rId5"/>
-    <p:sldId id="270" r:id="rId6"/>
-    <p:sldId id="260" r:id="rId7"/>
-    <p:sldId id="266" r:id="rId8"/>
-    <p:sldId id="259" r:id="rId9"/>
-    <p:sldId id="261" r:id="rId10"/>
-    <p:sldId id="267" r:id="rId11"/>
-    <p:sldId id="262" r:id="rId12"/>
-    <p:sldId id="265" r:id="rId13"/>
-    <p:sldId id="268" r:id="rId14"/>
-    <p:sldId id="264" r:id="rId15"/>
-    <p:sldId id="263" r:id="rId16"/>
+    <p:sldId id="271" r:id="rId6"/>
+    <p:sldId id="270" r:id="rId7"/>
+    <p:sldId id="273" r:id="rId8"/>
+    <p:sldId id="274" r:id="rId9"/>
+    <p:sldId id="260" r:id="rId10"/>
+    <p:sldId id="266" r:id="rId11"/>
+    <p:sldId id="259" r:id="rId12"/>
+    <p:sldId id="279" r:id="rId13"/>
+    <p:sldId id="275" r:id="rId14"/>
+    <p:sldId id="261" r:id="rId15"/>
+    <p:sldId id="267" r:id="rId16"/>
+    <p:sldId id="262" r:id="rId17"/>
+    <p:sldId id="265" r:id="rId18"/>
+    <p:sldId id="268" r:id="rId19"/>
+    <p:sldId id="263" r:id="rId20"/>
+    <p:sldId id="277" r:id="rId21"/>
+    <p:sldId id="278" r:id="rId22"/>
+    <p:sldId id="276" r:id="rId23"/>
   </p:sldIdLst>
   <p:sldSz cx="12192000" cy="6858000"/>
   <p:notesSz cx="6858000" cy="9144000"/>
@@ -126,6 +136,439 @@
 </p:presentation>
 </file>
 
+<file path=ppt/notesMasters/notesMaster1.xml><?xml version="1.0" encoding="utf-8"?>
+<p:notesMaster xmlns:a="http://schemas.openxmlformats.org/drawingml/2006/main" xmlns:r="http://schemas.openxmlformats.org/officeDocument/2006/relationships" xmlns:p="http://schemas.openxmlformats.org/presentationml/2006/main">
+  <p:cSld>
+    <p:bg>
+      <p:bgRef idx="1001">
+        <a:schemeClr val="bg1"/>
+      </p:bgRef>
+    </p:bg>
+    <p:spTree>
+      <p:nvGrpSpPr>
+        <p:cNvPr id="1" name=""/>
+        <p:cNvGrpSpPr/>
+        <p:nvPr/>
+      </p:nvGrpSpPr>
+      <p:grpSpPr>
+        <a:xfrm>
+          <a:off x="0" y="0"/>
+          <a:ext cx="0" cy="0"/>
+          <a:chOff x="0" y="0"/>
+          <a:chExt cx="0" cy="0"/>
+        </a:xfrm>
+      </p:grpSpPr>
+      <p:sp>
+        <p:nvSpPr>
+          <p:cNvPr id="2" name="Header Placeholder 1"/>
+          <p:cNvSpPr>
+            <a:spLocks noGrp="1"/>
+          </p:cNvSpPr>
+          <p:nvPr>
+            <p:ph type="hdr" sz="quarter"/>
+          </p:nvPr>
+        </p:nvSpPr>
+        <p:spPr>
+          <a:xfrm>
+            <a:off x="0" y="0"/>
+            <a:ext cx="2971800" cy="458788"/>
+          </a:xfrm>
+          <a:prstGeom prst="rect">
+            <a:avLst/>
+          </a:prstGeom>
+        </p:spPr>
+        <p:txBody>
+          <a:bodyPr vert="horz" lIns="91440" tIns="45720" rIns="91440" bIns="45720" rtlCol="0"/>
+          <a:lstStyle>
+            <a:lvl1pPr algn="l">
+              <a:defRPr sz="1200"/>
+            </a:lvl1pPr>
+          </a:lstStyle>
+          <a:p>
+            <a:endParaRPr lang="en-US"/>
+          </a:p>
+        </p:txBody>
+      </p:sp>
+      <p:sp>
+        <p:nvSpPr>
+          <p:cNvPr id="3" name="Date Placeholder 2"/>
+          <p:cNvSpPr>
+            <a:spLocks noGrp="1"/>
+          </p:cNvSpPr>
+          <p:nvPr>
+            <p:ph type="dt" idx="1"/>
+          </p:nvPr>
+        </p:nvSpPr>
+        <p:spPr>
+          <a:xfrm>
+            <a:off x="3884613" y="0"/>
+            <a:ext cx="2971800" cy="458788"/>
+          </a:xfrm>
+          <a:prstGeom prst="rect">
+            <a:avLst/>
+          </a:prstGeom>
+        </p:spPr>
+        <p:txBody>
+          <a:bodyPr vert="horz" lIns="91440" tIns="45720" rIns="91440" bIns="45720" rtlCol="0"/>
+          <a:lstStyle>
+            <a:lvl1pPr algn="r">
+              <a:defRPr sz="1200"/>
+            </a:lvl1pPr>
+          </a:lstStyle>
+          <a:p>
+            <a:fld id="{88FAE265-AF70-41C6-B8C3-623885C37987}" type="datetimeFigureOut">
+              <a:rPr lang="en-US" smtClean="0"/>
+              <a:t>10/26/2026</a:t>
+            </a:fld>
+            <a:endParaRPr lang="en-US"/>
+          </a:p>
+        </p:txBody>
+      </p:sp>
+      <p:sp>
+        <p:nvSpPr>
+          <p:cNvPr id="4" name="Slide Image Placeholder 3"/>
+          <p:cNvSpPr>
+            <a:spLocks noGrp="1" noRot="1" noChangeAspect="1"/>
+          </p:cNvSpPr>
+          <p:nvPr>
+            <p:ph type="sldImg" idx="2"/>
+          </p:nvPr>
+        </p:nvSpPr>
+        <p:spPr>
+          <a:xfrm>
+            <a:off x="685800" y="1143000"/>
+            <a:ext cx="5486400" cy="3086100"/>
+          </a:xfrm>
+          <a:prstGeom prst="rect">
+            <a:avLst/>
+          </a:prstGeom>
+          <a:noFill/>
+          <a:ln w="12700">
+            <a:solidFill>
+              <a:prstClr val="black"/>
+            </a:solidFill>
+          </a:ln>
+        </p:spPr>
+        <p:txBody>
+          <a:bodyPr vert="horz" lIns="91440" tIns="45720" rIns="91440" bIns="45720" rtlCol="0" anchor="ctr"/>
+          <a:lstStyle/>
+          <a:p>
+            <a:endParaRPr lang="en-US"/>
+          </a:p>
+        </p:txBody>
+      </p:sp>
+      <p:sp>
+        <p:nvSpPr>
+          <p:cNvPr id="5" name="Notes Placeholder 4"/>
+          <p:cNvSpPr>
+            <a:spLocks noGrp="1"/>
+          </p:cNvSpPr>
+          <p:nvPr>
+            <p:ph type="body" sz="quarter" idx="3"/>
+          </p:nvPr>
+        </p:nvSpPr>
+        <p:spPr>
+          <a:xfrm>
+            <a:off x="685800" y="4400550"/>
+            <a:ext cx="5486400" cy="3600450"/>
+          </a:xfrm>
+          <a:prstGeom prst="rect">
+            <a:avLst/>
+          </a:prstGeom>
+        </p:spPr>
+        <p:txBody>
+          <a:bodyPr vert="horz" lIns="91440" tIns="45720" rIns="91440" bIns="45720" rtlCol="0"/>
+          <a:lstStyle/>
+          <a:p>
+            <a:pPr lvl="0"/>
+            <a:r>
+              <a:rPr lang="en-US"/>
+              <a:t>Click to edit Master text styles</a:t>
+            </a:r>
+          </a:p>
+          <a:p>
+            <a:pPr lvl="1"/>
+            <a:r>
+              <a:rPr lang="en-US"/>
+              <a:t>Second level</a:t>
+            </a:r>
+          </a:p>
+          <a:p>
+            <a:pPr lvl="2"/>
+            <a:r>
+              <a:rPr lang="en-US"/>
+              <a:t>Third level</a:t>
+            </a:r>
+          </a:p>
+          <a:p>
+            <a:pPr lvl="3"/>
+            <a:r>
+              <a:rPr lang="en-US"/>
+              <a:t>Fourth level</a:t>
+            </a:r>
+          </a:p>
+          <a:p>
+            <a:pPr lvl="4"/>
+            <a:r>
+              <a:rPr lang="en-US"/>
+              <a:t>Fifth level</a:t>
+            </a:r>
+          </a:p>
+        </p:txBody>
+      </p:sp>
+      <p:sp>
+        <p:nvSpPr>
+          <p:cNvPr id="6" name="Footer Placeholder 5"/>
+          <p:cNvSpPr>
+            <a:spLocks noGrp="1"/>
+          </p:cNvSpPr>
+          <p:nvPr>
+            <p:ph type="ftr" sz="quarter" idx="4"/>
+          </p:nvPr>
+        </p:nvSpPr>
+        <p:spPr>
+          <a:xfrm>
+            <a:off x="0" y="8685213"/>
+            <a:ext cx="2971800" cy="458787"/>
+          </a:xfrm>
+          <a:prstGeom prst="rect">
+            <a:avLst/>
+          </a:prstGeom>
+        </p:spPr>
+        <p:txBody>
+          <a:bodyPr vert="horz" lIns="91440" tIns="45720" rIns="91440" bIns="45720" rtlCol="0" anchor="b"/>
+          <a:lstStyle>
+            <a:lvl1pPr algn="l">
+              <a:defRPr sz="1200"/>
+            </a:lvl1pPr>
+          </a:lstStyle>
+          <a:p>
+            <a:endParaRPr lang="en-US"/>
+          </a:p>
+        </p:txBody>
+      </p:sp>
+      <p:sp>
+        <p:nvSpPr>
+          <p:cNvPr id="7" name="Slide Number Placeholder 6"/>
+          <p:cNvSpPr>
+            <a:spLocks noGrp="1"/>
+          </p:cNvSpPr>
+          <p:nvPr>
+            <p:ph type="sldNum" sz="quarter" idx="5"/>
+          </p:nvPr>
+        </p:nvSpPr>
+        <p:spPr>
+          <a:xfrm>
+            <a:off x="3884613" y="8685213"/>
+            <a:ext cx="2971800" cy="458787"/>
+          </a:xfrm>
+          <a:prstGeom prst="rect">
+            <a:avLst/>
+          </a:prstGeom>
+        </p:spPr>
+        <p:txBody>
+          <a:bodyPr vert="horz" lIns="91440" tIns="45720" rIns="91440" bIns="45720" rtlCol="0" anchor="b"/>
+          <a:lstStyle>
+            <a:lvl1pPr algn="r">
+              <a:defRPr sz="1200"/>
+            </a:lvl1pPr>
+          </a:lstStyle>
+          <a:p>
+            <a:fld id="{34DAAA73-A1B6-4BD0-AE2B-2747D8493902}" type="slidenum">
+              <a:rPr lang="en-US" smtClean="0"/>
+              <a:t>‹#›</a:t>
+            </a:fld>
+            <a:endParaRPr lang="en-US"/>
+          </a:p>
+        </p:txBody>
+      </p:sp>
+    </p:spTree>
+    <p:extLst>
+      <p:ext uri="{BB962C8B-B14F-4D97-AF65-F5344CB8AC3E}">
+        <p14:creationId xmlns:p14="http://schemas.microsoft.com/office/powerpoint/2010/main" val="2501066219"/>
+      </p:ext>
+    </p:extLst>
+  </p:cSld>
+  <p:clrMap bg1="lt1" tx1="dk1" bg2="lt2" tx2="dk2" accent1="accent1" accent2="accent2" accent3="accent3" accent4="accent4" accent5="accent5" accent6="accent6" hlink="hlink" folHlink="folHlink"/>
+  <p:notesStyle>
+    <a:lvl1pPr marL="0" algn="l" defTabSz="914400" rtl="0" eaLnBrk="1" latinLnBrk="0" hangingPunct="1">
+      <a:defRPr sz="1200" kern="1200">
+        <a:solidFill>
+          <a:schemeClr val="tx1"/>
+        </a:solidFill>
+        <a:latin typeface="+mn-lt"/>
+        <a:ea typeface="+mn-ea"/>
+        <a:cs typeface="+mn-cs"/>
+      </a:defRPr>
+    </a:lvl1pPr>
+    <a:lvl2pPr marL="457200" algn="l" defTabSz="914400" rtl="0" eaLnBrk="1" latinLnBrk="0" hangingPunct="1">
+      <a:defRPr sz="1200" kern="1200">
+        <a:solidFill>
+          <a:schemeClr val="tx1"/>
+        </a:solidFill>
+        <a:latin typeface="+mn-lt"/>
+        <a:ea typeface="+mn-ea"/>
+        <a:cs typeface="+mn-cs"/>
+      </a:defRPr>
+    </a:lvl2pPr>
+    <a:lvl3pPr marL="914400" algn="l" defTabSz="914400" rtl="0" eaLnBrk="1" latinLnBrk="0" hangingPunct="1">
+      <a:defRPr sz="1200" kern="1200">
+        <a:solidFill>
+          <a:schemeClr val="tx1"/>
+        </a:solidFill>
+        <a:latin typeface="+mn-lt"/>
+        <a:ea typeface="+mn-ea"/>
+        <a:cs typeface="+mn-cs"/>
+      </a:defRPr>
+    </a:lvl3pPr>
+    <a:lvl4pPr marL="1371600" algn="l" defTabSz="914400" rtl="0" eaLnBrk="1" latinLnBrk="0" hangingPunct="1">
+      <a:defRPr sz="1200" kern="1200">
+        <a:solidFill>
+          <a:schemeClr val="tx1"/>
+        </a:solidFill>
+        <a:latin typeface="+mn-lt"/>
+        <a:ea typeface="+mn-ea"/>
+        <a:cs typeface="+mn-cs"/>
+      </a:defRPr>
+    </a:lvl4pPr>
+    <a:lvl5pPr marL="1828800" algn="l" defTabSz="914400" rtl="0" eaLnBrk="1" latinLnBrk="0" hangingPunct="1">
+      <a:defRPr sz="1200" kern="1200">
+        <a:solidFill>
+          <a:schemeClr val="tx1"/>
+        </a:solidFill>
+        <a:latin typeface="+mn-lt"/>
+        <a:ea typeface="+mn-ea"/>
+        <a:cs typeface="+mn-cs"/>
+      </a:defRPr>
+    </a:lvl5pPr>
+    <a:lvl6pPr marL="2286000" algn="l" defTabSz="914400" rtl="0" eaLnBrk="1" latinLnBrk="0" hangingPunct="1">
+      <a:defRPr sz="1200" kern="1200">
+        <a:solidFill>
+          <a:schemeClr val="tx1"/>
+        </a:solidFill>
+        <a:latin typeface="+mn-lt"/>
+        <a:ea typeface="+mn-ea"/>
+        <a:cs typeface="+mn-cs"/>
+      </a:defRPr>
+    </a:lvl6pPr>
+    <a:lvl7pPr marL="2743200" algn="l" defTabSz="914400" rtl="0" eaLnBrk="1" latinLnBrk="0" hangingPunct="1">
+      <a:defRPr sz="1200" kern="1200">
+        <a:solidFill>
+          <a:schemeClr val="tx1"/>
+        </a:solidFill>
+        <a:latin typeface="+mn-lt"/>
+        <a:ea typeface="+mn-ea"/>
+        <a:cs typeface="+mn-cs"/>
+      </a:defRPr>
+    </a:lvl7pPr>
+    <a:lvl8pPr marL="3200400" algn="l" defTabSz="914400" rtl="0" eaLnBrk="1" latinLnBrk="0" hangingPunct="1">
+      <a:defRPr sz="1200" kern="1200">
+        <a:solidFill>
+          <a:schemeClr val="tx1"/>
+        </a:solidFill>
+        <a:latin typeface="+mn-lt"/>
+        <a:ea typeface="+mn-ea"/>
+        <a:cs typeface="+mn-cs"/>
+      </a:defRPr>
+    </a:lvl8pPr>
+    <a:lvl9pPr marL="3657600" algn="l" defTabSz="914400" rtl="0" eaLnBrk="1" latinLnBrk="0" hangingPunct="1">
+      <a:defRPr sz="1200" kern="1200">
+        <a:solidFill>
+          <a:schemeClr val="tx1"/>
+        </a:solidFill>
+        <a:latin typeface="+mn-lt"/>
+        <a:ea typeface="+mn-ea"/>
+        <a:cs typeface="+mn-cs"/>
+      </a:defRPr>
+    </a:lvl9pPr>
+  </p:notesStyle>
+</p:notesMaster>
+</file>
+
+<file path=ppt/notesSlides/notesSlide1.xml><?xml version="1.0" encoding="utf-8"?>
+<p:notes xmlns:a="http://schemas.openxmlformats.org/drawingml/2006/main" xmlns:r="http://schemas.openxmlformats.org/officeDocument/2006/relationships" xmlns:p="http://schemas.openxmlformats.org/presentationml/2006/main">
+  <p:cSld>
+    <p:spTree>
+      <p:nvGrpSpPr>
+        <p:cNvPr id="1" name=""/>
+        <p:cNvGrpSpPr/>
+        <p:nvPr/>
+      </p:nvGrpSpPr>
+      <p:grpSpPr>
+        <a:xfrm>
+          <a:off x="0" y="0"/>
+          <a:ext cx="0" cy="0"/>
+          <a:chOff x="0" y="0"/>
+          <a:chExt cx="0" cy="0"/>
+        </a:xfrm>
+      </p:grpSpPr>
+      <p:sp>
+        <p:nvSpPr>
+          <p:cNvPr id="2" name="Slide Image Placeholder 1"/>
+          <p:cNvSpPr>
+            <a:spLocks noGrp="1" noRot="1" noChangeAspect="1"/>
+          </p:cNvSpPr>
+          <p:nvPr>
+            <p:ph type="sldImg"/>
+          </p:nvPr>
+        </p:nvSpPr>
+        <p:spPr/>
+      </p:sp>
+      <p:sp>
+        <p:nvSpPr>
+          <p:cNvPr id="3" name="Notes Placeholder 2"/>
+          <p:cNvSpPr>
+            <a:spLocks noGrp="1"/>
+          </p:cNvSpPr>
+          <p:nvPr>
+            <p:ph type="body" idx="1"/>
+          </p:nvPr>
+        </p:nvSpPr>
+        <p:spPr/>
+        <p:txBody>
+          <a:bodyPr/>
+          <a:lstStyle/>
+          <a:p>
+            <a:endParaRPr lang="en-US" dirty="0"/>
+          </a:p>
+        </p:txBody>
+      </p:sp>
+      <p:sp>
+        <p:nvSpPr>
+          <p:cNvPr id="4" name="Slide Number Placeholder 3"/>
+          <p:cNvSpPr>
+            <a:spLocks noGrp="1"/>
+          </p:cNvSpPr>
+          <p:nvPr>
+            <p:ph type="sldNum" sz="quarter" idx="5"/>
+          </p:nvPr>
+        </p:nvSpPr>
+        <p:spPr/>
+        <p:txBody>
+          <a:bodyPr/>
+          <a:lstStyle/>
+          <a:p>
+            <a:fld id="{34DAAA73-A1B6-4BD0-AE2B-2747D8493902}" type="slidenum">
+              <a:rPr lang="en-US" smtClean="0"/>
+              <a:t>9</a:t>
+            </a:fld>
+            <a:endParaRPr lang="en-US"/>
+          </a:p>
+        </p:txBody>
+      </p:sp>
+    </p:spTree>
+    <p:extLst>
+      <p:ext uri="{BB962C8B-B14F-4D97-AF65-F5344CB8AC3E}">
+        <p14:creationId xmlns:p14="http://schemas.microsoft.com/office/powerpoint/2010/main" val="706216869"/>
+      </p:ext>
+    </p:extLst>
+  </p:cSld>
+  <p:clrMapOvr>
+    <a:masterClrMapping/>
+  </p:clrMapOvr>
+</p:notes>
+</file>
+
 <file path=ppt/slideLayouts/slideLayout1.xml><?xml version="1.0" encoding="utf-8"?>
 <p:sldLayout xmlns:a="http://schemas.openxmlformats.org/drawingml/2006/main" xmlns:r="http://schemas.openxmlformats.org/officeDocument/2006/relationships" xmlns:p="http://schemas.openxmlformats.org/presentationml/2006/main" type="title" preserve="1">
   <p:cSld name="Title Slide">
@@ -273,7 +716,7 @@
           <a:p>
             <a:fld id="{D5A7CA8D-7759-4184-AF8C-A3C77124F794}" type="datetimeFigureOut">
               <a:rPr lang="en-US" smtClean="0"/>
-              <a:t>10/12/2026</a:t>
+              <a:t>10/26/2026</a:t>
             </a:fld>
             <a:endParaRPr lang="en-US"/>
           </a:p>
@@ -471,7 +914,7 @@
           <a:p>
             <a:fld id="{D5A7CA8D-7759-4184-AF8C-A3C77124F794}" type="datetimeFigureOut">
               <a:rPr lang="en-US" smtClean="0"/>
-              <a:t>10/12/2026</a:t>
+              <a:t>10/26/2026</a:t>
             </a:fld>
             <a:endParaRPr lang="en-US"/>
           </a:p>
@@ -679,7 +1122,7 @@
           <a:p>
             <a:fld id="{D5A7CA8D-7759-4184-AF8C-A3C77124F794}" type="datetimeFigureOut">
               <a:rPr lang="en-US" smtClean="0"/>
-              <a:t>10/12/2026</a:t>
+              <a:t>10/26/2026</a:t>
             </a:fld>
             <a:endParaRPr lang="en-US"/>
           </a:p>
@@ -877,7 +1320,7 @@
           <a:p>
             <a:fld id="{D5A7CA8D-7759-4184-AF8C-A3C77124F794}" type="datetimeFigureOut">
               <a:rPr lang="en-US" smtClean="0"/>
-              <a:t>10/12/2026</a:t>
+              <a:t>10/26/2026</a:t>
             </a:fld>
             <a:endParaRPr lang="en-US"/>
           </a:p>
@@ -1152,7 +1595,7 @@
           <a:p>
             <a:fld id="{D5A7CA8D-7759-4184-AF8C-A3C77124F794}" type="datetimeFigureOut">
               <a:rPr lang="en-US" smtClean="0"/>
-              <a:t>10/12/2026</a:t>
+              <a:t>10/26/2026</a:t>
             </a:fld>
             <a:endParaRPr lang="en-US"/>
           </a:p>
@@ -1417,7 +1860,7 @@
           <a:p>
             <a:fld id="{D5A7CA8D-7759-4184-AF8C-A3C77124F794}" type="datetimeFigureOut">
               <a:rPr lang="en-US" smtClean="0"/>
-              <a:t>10/12/2026</a:t>
+              <a:t>10/26/2026</a:t>
             </a:fld>
             <a:endParaRPr lang="en-US"/>
           </a:p>
@@ -1829,7 +2272,7 @@
           <a:p>
             <a:fld id="{D5A7CA8D-7759-4184-AF8C-A3C77124F794}" type="datetimeFigureOut">
               <a:rPr lang="en-US" smtClean="0"/>
-              <a:t>10/12/2026</a:t>
+              <a:t>10/26/2026</a:t>
             </a:fld>
             <a:endParaRPr lang="en-US"/>
           </a:p>
@@ -1970,7 +2413,7 @@
           <a:p>
             <a:fld id="{D5A7CA8D-7759-4184-AF8C-A3C77124F794}" type="datetimeFigureOut">
               <a:rPr lang="en-US" smtClean="0"/>
-              <a:t>10/12/2026</a:t>
+              <a:t>10/26/2026</a:t>
             </a:fld>
             <a:endParaRPr lang="en-US"/>
           </a:p>
@@ -2083,7 +2526,7 @@
           <a:p>
             <a:fld id="{D5A7CA8D-7759-4184-AF8C-A3C77124F794}" type="datetimeFigureOut">
               <a:rPr lang="en-US" smtClean="0"/>
-              <a:t>10/12/2026</a:t>
+              <a:t>10/26/2026</a:t>
             </a:fld>
             <a:endParaRPr lang="en-US"/>
           </a:p>
@@ -2394,7 +2837,7 @@
           <a:p>
             <a:fld id="{D5A7CA8D-7759-4184-AF8C-A3C77124F794}" type="datetimeFigureOut">
               <a:rPr lang="en-US" smtClean="0"/>
-              <a:t>10/12/2026</a:t>
+              <a:t>10/26/2026</a:t>
             </a:fld>
             <a:endParaRPr lang="en-US"/>
           </a:p>
@@ -2682,7 +3125,7 @@
           <a:p>
             <a:fld id="{D5A7CA8D-7759-4184-AF8C-A3C77124F794}" type="datetimeFigureOut">
               <a:rPr lang="en-US" smtClean="0"/>
-              <a:t>10/12/2026</a:t>
+              <a:t>10/26/2026</a:t>
             </a:fld>
             <a:endParaRPr lang="en-US"/>
           </a:p>
@@ -2923,7 +3366,7 @@
           <a:p>
             <a:fld id="{D5A7CA8D-7759-4184-AF8C-A3C77124F794}" type="datetimeFigureOut">
               <a:rPr lang="en-US" smtClean="0"/>
-              <a:t>10/12/2026</a:t>
+              <a:t>10/26/2026</a:t>
             </a:fld>
             <a:endParaRPr lang="en-US"/>
           </a:p>
@@ -3405,7 +3848,7 @@
           <p:cNvPr id="2" name="Title 1">
             <a:extLst>
               <a:ext uri="{FF2B5EF4-FFF2-40B4-BE49-F238E27FC236}">
-                <a16:creationId xmlns:a16="http://schemas.microsoft.com/office/drawing/2014/main" id="{86DE510A-6AA9-6B8B-42D8-2BC8D8A9D144}"/>
+                <a16:creationId xmlns:a16="http://schemas.microsoft.com/office/drawing/2014/main" id="{626DC213-AB81-F905-0EB4-212B09DD184B}"/>
               </a:ext>
             </a:extLst>
           </p:cNvPr>
@@ -3423,15 +3866,7 @@
           <a:p>
             <a:r>
               <a:rPr lang="en-US" dirty="0"/>
-              <a:t>Adiabatic computation for </a:t>
-            </a:r>
-            <a:r>
-              <a:rPr lang="en-US" dirty="0" err="1"/>
-              <a:t>Ising</a:t>
-            </a:r>
-            <a:r>
-              <a:rPr lang="en-US" dirty="0"/>
-              <a:t> model</a:t>
+              <a:t>Ground-state problem</a:t>
             </a:r>
           </a:p>
         </p:txBody>
@@ -3441,7 +3876,7 @@
           <p:cNvPr id="3" name="Content Placeholder 2">
             <a:extLst>
               <a:ext uri="{FF2B5EF4-FFF2-40B4-BE49-F238E27FC236}">
-                <a16:creationId xmlns:a16="http://schemas.microsoft.com/office/drawing/2014/main" id="{88E89AF9-AEEA-9C6F-796C-C5CBE82C257C}"/>
+                <a16:creationId xmlns:a16="http://schemas.microsoft.com/office/drawing/2014/main" id="{85CD77E3-249C-D403-4453-1F82773B76D1}"/>
               </a:ext>
             </a:extLst>
           </p:cNvPr>
@@ -3454,210 +3889,257 @@
         </p:nvSpPr>
         <p:spPr/>
         <p:txBody>
-          <a:bodyPr/>
+          <a:bodyPr>
+            <a:normAutofit/>
+          </a:bodyPr>
           <a:lstStyle/>
           <a:p>
-            <a:r>
-              <a:rPr lang="en-US" dirty="0"/>
-              <a:t>For two spins</a:t>
-            </a:r>
-          </a:p>
-        </p:txBody>
-      </p:sp>
-      <p:pic>
-        <p:nvPicPr>
-          <p:cNvPr id="5" name="Picture 4">
-            <a:extLst>
-              <a:ext uri="{FF2B5EF4-FFF2-40B4-BE49-F238E27FC236}">
-                <a16:creationId xmlns:a16="http://schemas.microsoft.com/office/drawing/2014/main" id="{A41F6900-AFBE-4D2C-AAAF-327CFA2F28A8}"/>
-              </a:ext>
-            </a:extLst>
-          </p:cNvPr>
-          <p:cNvPicPr>
-            <a:picLocks noChangeAspect="1"/>
-          </p:cNvPicPr>
-          <p:nvPr/>
-        </p:nvPicPr>
-        <p:blipFill>
-          <a:blip r:embed="rId2"/>
-          <a:stretch>
-            <a:fillRect/>
-          </a:stretch>
-        </p:blipFill>
-        <p:spPr>
-          <a:xfrm>
-            <a:off x="3848666" y="2114503"/>
-            <a:ext cx="3009900" cy="3971925"/>
-          </a:xfrm>
-          <a:prstGeom prst="rect">
-            <a:avLst/>
-          </a:prstGeom>
-          <a:ln>
-            <a:noFill/>
-          </a:ln>
-          <a:effectLst>
-            <a:outerShdw blurRad="190500" algn="tl" rotWithShape="0">
-              <a:srgbClr val="000000">
-                <a:alpha val="70000"/>
-              </a:srgbClr>
-            </a:outerShdw>
-          </a:effectLst>
-        </p:spPr>
-      </p:pic>
-      <p:pic>
-        <p:nvPicPr>
-          <p:cNvPr id="6" name="Picture 5">
-            <a:extLst>
-              <a:ext uri="{FF2B5EF4-FFF2-40B4-BE49-F238E27FC236}">
-                <a16:creationId xmlns:a16="http://schemas.microsoft.com/office/drawing/2014/main" id="{361B3122-D99A-7713-DBD1-E9A07D889EB2}"/>
-              </a:ext>
-            </a:extLst>
-          </p:cNvPr>
-          <p:cNvPicPr>
-            <a:picLocks noChangeAspect="1"/>
-          </p:cNvPicPr>
-          <p:nvPr/>
-        </p:nvPicPr>
-        <p:blipFill>
-          <a:blip r:embed="rId3"/>
-          <a:stretch>
-            <a:fillRect/>
-          </a:stretch>
-        </p:blipFill>
-        <p:spPr>
-          <a:xfrm>
-            <a:off x="10347672" y="3474138"/>
-            <a:ext cx="1360697" cy="776707"/>
-          </a:xfrm>
-          <a:prstGeom prst="rect">
-            <a:avLst/>
-          </a:prstGeom>
-        </p:spPr>
-      </p:pic>
-      <p:pic>
-        <p:nvPicPr>
-          <p:cNvPr id="8" name="Picture 7">
-            <a:extLst>
-              <a:ext uri="{FF2B5EF4-FFF2-40B4-BE49-F238E27FC236}">
-                <a16:creationId xmlns:a16="http://schemas.microsoft.com/office/drawing/2014/main" id="{67409BD3-59EF-B39B-CEC9-D611F1C1430E}"/>
-              </a:ext>
-            </a:extLst>
-          </p:cNvPr>
-          <p:cNvPicPr>
-            <a:picLocks noChangeAspect="1"/>
-          </p:cNvPicPr>
-          <p:nvPr/>
-        </p:nvPicPr>
-        <p:blipFill>
-          <a:blip r:embed="rId4"/>
-          <a:stretch>
-            <a:fillRect/>
-          </a:stretch>
-        </p:blipFill>
-        <p:spPr>
-          <a:xfrm>
-            <a:off x="7567704" y="2151927"/>
-            <a:ext cx="2371111" cy="268962"/>
-          </a:xfrm>
-          <a:prstGeom prst="rect">
-            <a:avLst/>
-          </a:prstGeom>
-        </p:spPr>
-      </p:pic>
-      <p:pic>
-        <p:nvPicPr>
-          <p:cNvPr id="10" name="Picture 9">
-            <a:extLst>
-              <a:ext uri="{FF2B5EF4-FFF2-40B4-BE49-F238E27FC236}">
-                <a16:creationId xmlns:a16="http://schemas.microsoft.com/office/drawing/2014/main" id="{49024B68-E077-BE68-7C61-DF8B5F1B22F2}"/>
-              </a:ext>
-            </a:extLst>
-          </p:cNvPr>
-          <p:cNvPicPr>
-            <a:picLocks noChangeAspect="1"/>
-          </p:cNvPicPr>
-          <p:nvPr/>
-        </p:nvPicPr>
-        <p:blipFill>
-          <a:blip r:embed="rId5"/>
-          <a:stretch>
-            <a:fillRect/>
-          </a:stretch>
-        </p:blipFill>
-        <p:spPr>
-          <a:xfrm>
-            <a:off x="10496814" y="1825625"/>
-            <a:ext cx="996106" cy="921567"/>
-          </a:xfrm>
-          <a:prstGeom prst="rect">
-            <a:avLst/>
-          </a:prstGeom>
-        </p:spPr>
-      </p:pic>
-      <p:pic>
-        <p:nvPicPr>
-          <p:cNvPr id="12" name="Picture 11">
-            <a:extLst>
-              <a:ext uri="{FF2B5EF4-FFF2-40B4-BE49-F238E27FC236}">
-                <a16:creationId xmlns:a16="http://schemas.microsoft.com/office/drawing/2014/main" id="{8378CA5C-E6FB-2C59-AF8D-5040ED231976}"/>
-              </a:ext>
-            </a:extLst>
-          </p:cNvPr>
-          <p:cNvPicPr>
-            <a:picLocks noChangeAspect="1"/>
-          </p:cNvPicPr>
-          <p:nvPr/>
-        </p:nvPicPr>
-        <p:blipFill>
-          <a:blip r:embed="rId6"/>
-          <a:stretch>
-            <a:fillRect/>
-          </a:stretch>
-        </p:blipFill>
-        <p:spPr>
-          <a:xfrm>
-            <a:off x="7450558" y="3134127"/>
-            <a:ext cx="2838541" cy="185753"/>
-          </a:xfrm>
-          <a:prstGeom prst="rect">
-            <a:avLst/>
-          </a:prstGeom>
-        </p:spPr>
-      </p:pic>
-      <p:pic>
-        <p:nvPicPr>
-          <p:cNvPr id="14" name="Picture 13">
-            <a:extLst>
-              <a:ext uri="{FF2B5EF4-FFF2-40B4-BE49-F238E27FC236}">
-                <a16:creationId xmlns:a16="http://schemas.microsoft.com/office/drawing/2014/main" id="{3D62D22C-4FDF-A686-62C7-3E0CBDBEE447}"/>
-              </a:ext>
-            </a:extLst>
-          </p:cNvPr>
-          <p:cNvPicPr>
-            <a:picLocks noChangeAspect="1"/>
-          </p:cNvPicPr>
-          <p:nvPr/>
-        </p:nvPicPr>
-        <p:blipFill>
-          <a:blip r:embed="rId7"/>
-          <a:stretch>
-            <a:fillRect/>
-          </a:stretch>
-        </p:blipFill>
-        <p:spPr>
-          <a:xfrm>
-            <a:off x="8266707" y="4605607"/>
-            <a:ext cx="2838542" cy="304130"/>
-          </a:xfrm>
-          <a:prstGeom prst="rect">
-            <a:avLst/>
-          </a:prstGeom>
-        </p:spPr>
-      </p:pic>
+            <a:pPr algn="r" rtl="1"/>
+            <a:r>
+              <a:rPr lang="fa-IR" dirty="0">
+                <a:cs typeface="B Nazanin" panose="00000400000000000000" pitchFamily="2" charset="-78"/>
+              </a:rPr>
+              <a:t>اهمیت؟</a:t>
+            </a:r>
+          </a:p>
+          <a:p>
+            <a:pPr marL="0" indent="0" algn="ctr" rtl="1">
+              <a:buNone/>
+            </a:pPr>
+            <a:r>
+              <a:rPr lang="fa-IR" dirty="0">
+                <a:cs typeface="B Nazanin" panose="00000400000000000000" pitchFamily="2" charset="-78"/>
+              </a:rPr>
+              <a:t>شبیه سازی فیزیکی: </a:t>
+            </a:r>
+            <a:r>
+              <a:rPr lang="fa-IR" dirty="0" err="1">
+                <a:cs typeface="B Nazanin" panose="00000400000000000000" pitchFamily="2" charset="-78"/>
+              </a:rPr>
+              <a:t>هامیلتونی</a:t>
+            </a:r>
+            <a:r>
+              <a:rPr lang="fa-IR" dirty="0">
+                <a:cs typeface="B Nazanin" panose="00000400000000000000" pitchFamily="2" charset="-78"/>
+              </a:rPr>
+              <a:t> نماینده فیزیک مورد نظر</a:t>
+            </a:r>
+          </a:p>
+          <a:p>
+            <a:pPr algn="r" rtl="1"/>
+            <a:endParaRPr lang="fa-IR" dirty="0">
+              <a:cs typeface="B Nazanin" panose="00000400000000000000" pitchFamily="2" charset="-78"/>
+            </a:endParaRPr>
+          </a:p>
+          <a:p>
+            <a:pPr marL="0" indent="0" algn="r" rtl="1">
+              <a:buNone/>
+            </a:pPr>
+            <a:r>
+              <a:rPr lang="fa-IR" dirty="0">
+                <a:cs typeface="B Nazanin" panose="00000400000000000000" pitchFamily="2" charset="-78"/>
+              </a:rPr>
+              <a:t> برای مثال یک مدل مغناطیسی </a:t>
+            </a:r>
+            <a:r>
+              <a:rPr lang="fa-IR" dirty="0">
+                <a:cs typeface="B Nazanin" panose="00000400000000000000" pitchFamily="2" charset="-78"/>
+                <a:sym typeface="Wingdings" panose="05000000000000000000" pitchFamily="2" charset="2"/>
+              </a:rPr>
+              <a:t> </a:t>
+            </a:r>
+            <a:r>
+              <a:rPr lang="fa-IR" dirty="0" err="1">
+                <a:cs typeface="B Nazanin" panose="00000400000000000000" pitchFamily="2" charset="-78"/>
+                <a:sym typeface="Wingdings" panose="05000000000000000000" pitchFamily="2" charset="2"/>
+              </a:rPr>
+              <a:t>مغناطش</a:t>
+            </a:r>
+            <a:endParaRPr lang="fa-IR" dirty="0">
+              <a:cs typeface="B Nazanin" panose="00000400000000000000" pitchFamily="2" charset="-78"/>
+              <a:sym typeface="Wingdings" panose="05000000000000000000" pitchFamily="2" charset="2"/>
+            </a:endParaRPr>
+          </a:p>
+          <a:p>
+            <a:pPr marL="0" indent="0" algn="r" rtl="1">
+              <a:buNone/>
+            </a:pPr>
+            <a:endParaRPr lang="fa-IR" dirty="0">
+              <a:cs typeface="B Nazanin" panose="00000400000000000000" pitchFamily="2" charset="-78"/>
+              <a:sym typeface="Wingdings" panose="05000000000000000000" pitchFamily="2" charset="2"/>
+            </a:endParaRPr>
+          </a:p>
+          <a:p>
+            <a:pPr marL="0" indent="0" algn="ctr" rtl="1">
+              <a:buNone/>
+            </a:pPr>
+            <a:r>
+              <a:rPr lang="fa-IR" dirty="0">
+                <a:cs typeface="B Nazanin" panose="00000400000000000000" pitchFamily="2" charset="-78"/>
+              </a:rPr>
+              <a:t> بهینه سازی: ‌طراحی تابع هزینه در قالب </a:t>
+            </a:r>
+            <a:r>
+              <a:rPr lang="fa-IR" dirty="0" err="1">
+                <a:cs typeface="B Nazanin" panose="00000400000000000000" pitchFamily="2" charset="-78"/>
+              </a:rPr>
+              <a:t>هامیلتونی</a:t>
+            </a:r>
+            <a:endParaRPr lang="en-US" dirty="0">
+              <a:cs typeface="B Nazanin" panose="00000400000000000000" pitchFamily="2" charset="-78"/>
+            </a:endParaRPr>
+          </a:p>
+          <a:p>
+            <a:pPr marL="0" indent="0" algn="r" rtl="1">
+              <a:buNone/>
+            </a:pPr>
+            <a:endParaRPr lang="fa-IR" dirty="0">
+              <a:cs typeface="B Nazanin" panose="00000400000000000000" pitchFamily="2" charset="-78"/>
+            </a:endParaRPr>
+          </a:p>
+          <a:p>
+            <a:pPr marL="0" indent="0" algn="r" rtl="1">
+              <a:buNone/>
+            </a:pPr>
+            <a:r>
+              <a:rPr lang="fa-IR" dirty="0">
+                <a:cs typeface="B Nazanin" panose="00000400000000000000" pitchFamily="2" charset="-78"/>
+              </a:rPr>
+              <a:t> طراحی بعضی مسایل </a:t>
+            </a:r>
+            <a:r>
+              <a:rPr lang="fa-IR" dirty="0" err="1">
+                <a:cs typeface="B Nazanin" panose="00000400000000000000" pitchFamily="2" charset="-78"/>
+              </a:rPr>
+              <a:t>محاسباتی</a:t>
+            </a:r>
+            <a:r>
+              <a:rPr lang="fa-IR" dirty="0">
+                <a:cs typeface="B Nazanin" panose="00000400000000000000" pitchFamily="2" charset="-78"/>
+              </a:rPr>
+              <a:t> </a:t>
+            </a:r>
+            <a:r>
+              <a:rPr lang="fa-IR" dirty="0">
+                <a:cs typeface="B Nazanin" panose="00000400000000000000" pitchFamily="2" charset="-78"/>
+                <a:sym typeface="Wingdings" panose="05000000000000000000" pitchFamily="2" charset="2"/>
+              </a:rPr>
+              <a:t> پاسخ مطلوب = کمترین انرژی ترین حالت </a:t>
+            </a:r>
+          </a:p>
+          <a:p>
+            <a:pPr marL="0" indent="0" algn="r" rtl="1">
+              <a:buNone/>
+            </a:pPr>
+            <a:endParaRPr lang="fa-IR" dirty="0">
+              <a:cs typeface="B Nazanin" panose="00000400000000000000" pitchFamily="2" charset="-78"/>
+              <a:sym typeface="Wingdings" panose="05000000000000000000" pitchFamily="2" charset="2"/>
+            </a:endParaRPr>
+          </a:p>
+          <a:p>
+            <a:pPr marL="0" indent="0" algn="r" rtl="1">
+              <a:buNone/>
+            </a:pPr>
+            <a:endParaRPr lang="en-US" dirty="0">
+              <a:cs typeface="B Nazanin" panose="00000400000000000000" pitchFamily="2" charset="-78"/>
+            </a:endParaRPr>
+          </a:p>
+        </p:txBody>
+      </p:sp>
+      <p:sp>
+        <p:nvSpPr>
+          <p:cNvPr id="4" name="Rectangle 3">
+            <a:extLst>
+              <a:ext uri="{FF2B5EF4-FFF2-40B4-BE49-F238E27FC236}">
+                <a16:creationId xmlns:a16="http://schemas.microsoft.com/office/drawing/2014/main" id="{CD82BEEF-CBD1-7BEF-A0BD-50A1D758888F}"/>
+              </a:ext>
+            </a:extLst>
+          </p:cNvPr>
+          <p:cNvSpPr/>
+          <p:nvPr/>
+        </p:nvSpPr>
+        <p:spPr>
+          <a:xfrm>
+            <a:off x="3025363" y="2195627"/>
+            <a:ext cx="6446067" cy="769545"/>
+          </a:xfrm>
+          <a:prstGeom prst="rect">
+            <a:avLst/>
+          </a:prstGeom>
+          <a:noFill/>
+        </p:spPr>
+        <p:style>
+          <a:lnRef idx="2">
+            <a:schemeClr val="accent1"/>
+          </a:lnRef>
+          <a:fillRef idx="1">
+            <a:schemeClr val="lt1"/>
+          </a:fillRef>
+          <a:effectRef idx="0">
+            <a:schemeClr val="accent1"/>
+          </a:effectRef>
+          <a:fontRef idx="minor">
+            <a:schemeClr val="dk1"/>
+          </a:fontRef>
+        </p:style>
+        <p:txBody>
+          <a:bodyPr rtlCol="0" anchor="ctr"/>
+          <a:lstStyle/>
+          <a:p>
+            <a:pPr algn="ctr"/>
+            <a:endParaRPr lang="en-US"/>
+          </a:p>
+        </p:txBody>
+      </p:sp>
+      <p:sp>
+        <p:nvSpPr>
+          <p:cNvPr id="5" name="Rectangle 4">
+            <a:extLst>
+              <a:ext uri="{FF2B5EF4-FFF2-40B4-BE49-F238E27FC236}">
+                <a16:creationId xmlns:a16="http://schemas.microsoft.com/office/drawing/2014/main" id="{B5CD0BA9-FFB3-8764-1A99-1EBBB18EDC54}"/>
+              </a:ext>
+            </a:extLst>
+          </p:cNvPr>
+          <p:cNvSpPr/>
+          <p:nvPr/>
+        </p:nvSpPr>
+        <p:spPr>
+          <a:xfrm>
+            <a:off x="3025364" y="4185204"/>
+            <a:ext cx="6446067" cy="769545"/>
+          </a:xfrm>
+          <a:prstGeom prst="rect">
+            <a:avLst/>
+          </a:prstGeom>
+          <a:noFill/>
+        </p:spPr>
+        <p:style>
+          <a:lnRef idx="2">
+            <a:schemeClr val="accent1"/>
+          </a:lnRef>
+          <a:fillRef idx="1">
+            <a:schemeClr val="lt1"/>
+          </a:fillRef>
+          <a:effectRef idx="0">
+            <a:schemeClr val="accent1"/>
+          </a:effectRef>
+          <a:fontRef idx="minor">
+            <a:schemeClr val="dk1"/>
+          </a:fontRef>
+        </p:style>
+        <p:txBody>
+          <a:bodyPr rtlCol="0" anchor="ctr"/>
+          <a:lstStyle/>
+          <a:p>
+            <a:pPr algn="ctr"/>
+            <a:endParaRPr lang="en-US"/>
+          </a:p>
+        </p:txBody>
+      </p:sp>
     </p:spTree>
     <p:extLst>
       <p:ext uri="{BB962C8B-B14F-4D97-AF65-F5344CB8AC3E}">
-        <p14:creationId xmlns:p14="http://schemas.microsoft.com/office/powerpoint/2010/main" val="1324293167"/>
+        <p14:creationId xmlns:p14="http://schemas.microsoft.com/office/powerpoint/2010/main" val="2931661657"/>
       </p:ext>
     </p:extLst>
   </p:cSld>
@@ -3689,7 +4171,7 @@
           <p:cNvPr id="2" name="Title 1">
             <a:extLst>
               <a:ext uri="{FF2B5EF4-FFF2-40B4-BE49-F238E27FC236}">
-                <a16:creationId xmlns:a16="http://schemas.microsoft.com/office/drawing/2014/main" id="{57DBC9D2-DB7A-EF6E-6380-5A1ED6D62E41}"/>
+                <a16:creationId xmlns:a16="http://schemas.microsoft.com/office/drawing/2014/main" id="{4B0AD2BD-97E9-C6BE-C42F-2BE4EDA4228C}"/>
               </a:ext>
             </a:extLst>
           </p:cNvPr>
@@ -3706,39 +4188,61 @@
           <a:lstStyle/>
           <a:p>
             <a:r>
-              <a:rPr lang="en-US" dirty="0" err="1"/>
-              <a:t>Qiskit</a:t>
-            </a:r>
-            <a:r>
               <a:rPr lang="en-US" dirty="0"/>
-              <a:t> implementation for </a:t>
-            </a:r>
-            <a:r>
-              <a:rPr lang="en-US" dirty="0" err="1"/>
-              <a:t>Ising</a:t>
-            </a:r>
-            <a:r>
-              <a:rPr lang="en-US" dirty="0"/>
-              <a:t> model</a:t>
-            </a:r>
-          </a:p>
-        </p:txBody>
-      </p:sp>
-      <p:pic>
-        <p:nvPicPr>
-          <p:cNvPr id="7" name="Content Placeholder 6">
-            <a:extLst>
-              <a:ext uri="{FF2B5EF4-FFF2-40B4-BE49-F238E27FC236}">
-                <a16:creationId xmlns:a16="http://schemas.microsoft.com/office/drawing/2014/main" id="{D32BDB70-FD48-A0EE-277B-1AB0E4CB8C87}"/>
-              </a:ext>
-            </a:extLst>
-          </p:cNvPr>
-          <p:cNvPicPr>
-            <a:picLocks noGrp="1" noChangeAspect="1"/>
-          </p:cNvPicPr>
+              <a:t>Method: Adiabatic approach</a:t>
+            </a:r>
+          </a:p>
+        </p:txBody>
+      </p:sp>
+      <p:sp>
+        <p:nvSpPr>
+          <p:cNvPr id="3" name="Content Placeholder 2">
+            <a:extLst>
+              <a:ext uri="{FF2B5EF4-FFF2-40B4-BE49-F238E27FC236}">
+                <a16:creationId xmlns:a16="http://schemas.microsoft.com/office/drawing/2014/main" id="{BFA1A0F1-FEE6-5A5C-D38F-337D9B11E7B5}"/>
+              </a:ext>
+            </a:extLst>
+          </p:cNvPr>
+          <p:cNvSpPr>
+            <a:spLocks noGrp="1"/>
+          </p:cNvSpPr>
           <p:nvPr>
             <p:ph idx="1"/>
           </p:nvPr>
+        </p:nvSpPr>
+        <p:spPr>
+          <a:xfrm>
+            <a:off x="1800036" y="5052563"/>
+            <a:ext cx="4380345" cy="1543160"/>
+          </a:xfrm>
+        </p:spPr>
+        <p:txBody>
+          <a:bodyPr/>
+          <a:lstStyle/>
+          <a:p>
+            <a:pPr marL="0" indent="0">
+              <a:buNone/>
+            </a:pPr>
+            <a:r>
+              <a:rPr lang="en-US" sz="1800" dirty="0"/>
+              <a:t>Gaps, runtime and complexity</a:t>
+            </a:r>
+          </a:p>
+        </p:txBody>
+      </p:sp>
+      <p:pic>
+        <p:nvPicPr>
+          <p:cNvPr id="7" name="Picture 6">
+            <a:extLst>
+              <a:ext uri="{FF2B5EF4-FFF2-40B4-BE49-F238E27FC236}">
+                <a16:creationId xmlns:a16="http://schemas.microsoft.com/office/drawing/2014/main" id="{3E552DF6-A81B-9A2F-202C-F3BE4E01BD55}"/>
+              </a:ext>
+            </a:extLst>
+          </p:cNvPr>
+          <p:cNvPicPr>
+            <a:picLocks noChangeAspect="1"/>
+          </p:cNvPicPr>
+          <p:nvPr/>
         </p:nvPicPr>
         <p:blipFill>
           <a:blip r:embed="rId2"/>
@@ -3748,77 +4252,101 @@
         </p:blipFill>
         <p:spPr>
           <a:xfrm>
-            <a:off x="838200" y="3841147"/>
-            <a:ext cx="7520420" cy="2833670"/>
-          </a:xfrm>
+            <a:off x="1223703" y="2243745"/>
+            <a:ext cx="4562476" cy="2667054"/>
+          </a:xfrm>
+          <a:prstGeom prst="rect">
+            <a:avLst/>
+          </a:prstGeom>
         </p:spPr>
       </p:pic>
+      <p:grpSp>
+        <p:nvGrpSpPr>
+          <p:cNvPr id="4" name="Group 3">
+            <a:extLst>
+              <a:ext uri="{FF2B5EF4-FFF2-40B4-BE49-F238E27FC236}">
+                <a16:creationId xmlns:a16="http://schemas.microsoft.com/office/drawing/2014/main" id="{A5F2F576-F505-1021-EBB5-75D61899DEE8}"/>
+              </a:ext>
+            </a:extLst>
+          </p:cNvPr>
+          <p:cNvGrpSpPr/>
+          <p:nvPr/>
+        </p:nvGrpSpPr>
+        <p:grpSpPr>
+          <a:xfrm>
+            <a:off x="2142326" y="1593511"/>
+            <a:ext cx="7840715" cy="650234"/>
+            <a:chOff x="2142326" y="1593511"/>
+            <a:chExt cx="7840715" cy="650234"/>
+          </a:xfrm>
+        </p:grpSpPr>
+        <p:pic>
+          <p:nvPicPr>
+            <p:cNvPr id="5" name="Picture 4">
+              <a:extLst>
+                <a:ext uri="{FF2B5EF4-FFF2-40B4-BE49-F238E27FC236}">
+                  <a16:creationId xmlns:a16="http://schemas.microsoft.com/office/drawing/2014/main" id="{4D35E65B-CF0A-A796-7D08-74FE89F69E41}"/>
+                </a:ext>
+              </a:extLst>
+            </p:cNvPr>
+            <p:cNvPicPr>
+              <a:picLocks noChangeAspect="1"/>
+            </p:cNvPicPr>
+            <p:nvPr/>
+          </p:nvPicPr>
+          <p:blipFill>
+            <a:blip r:embed="rId3"/>
+            <a:stretch>
+              <a:fillRect/>
+            </a:stretch>
+          </p:blipFill>
+          <p:spPr>
+            <a:xfrm>
+              <a:off x="2142326" y="1728051"/>
+              <a:ext cx="4619579" cy="329367"/>
+            </a:xfrm>
+            <a:prstGeom prst="rect">
+              <a:avLst/>
+            </a:prstGeom>
+          </p:spPr>
+        </p:pic>
+        <p:pic>
+          <p:nvPicPr>
+            <p:cNvPr id="9" name="Picture 8">
+              <a:extLst>
+                <a:ext uri="{FF2B5EF4-FFF2-40B4-BE49-F238E27FC236}">
+                  <a16:creationId xmlns:a16="http://schemas.microsoft.com/office/drawing/2014/main" id="{B70021E3-3357-7CC5-5589-C3E1339A51A6}"/>
+                </a:ext>
+              </a:extLst>
+            </p:cNvPr>
+            <p:cNvPicPr>
+              <a:picLocks noChangeAspect="1"/>
+            </p:cNvPicPr>
+            <p:nvPr/>
+          </p:nvPicPr>
+          <p:blipFill>
+            <a:blip r:embed="rId4"/>
+            <a:stretch>
+              <a:fillRect/>
+            </a:stretch>
+          </p:blipFill>
+          <p:spPr>
+            <a:xfrm>
+              <a:off x="7129777" y="1593511"/>
+              <a:ext cx="2853264" cy="650234"/>
+            </a:xfrm>
+            <a:prstGeom prst="rect">
+              <a:avLst/>
+            </a:prstGeom>
+          </p:spPr>
+        </p:pic>
+      </p:grpSp>
       <p:pic>
         <p:nvPicPr>
-          <p:cNvPr id="5" name="Picture 4">
-            <a:extLst>
-              <a:ext uri="{FF2B5EF4-FFF2-40B4-BE49-F238E27FC236}">
-                <a16:creationId xmlns:a16="http://schemas.microsoft.com/office/drawing/2014/main" id="{E3D1F7B8-5706-674F-718F-32D6B6D3335F}"/>
-              </a:ext>
-            </a:extLst>
-          </p:cNvPr>
-          <p:cNvPicPr>
-            <a:picLocks noChangeAspect="1"/>
-          </p:cNvPicPr>
-          <p:nvPr/>
-        </p:nvPicPr>
-        <p:blipFill>
-          <a:blip r:embed="rId3"/>
-          <a:stretch>
-            <a:fillRect/>
-          </a:stretch>
-        </p:blipFill>
-        <p:spPr>
-          <a:xfrm>
-            <a:off x="519546" y="1455162"/>
-            <a:ext cx="5127550" cy="2202438"/>
-          </a:xfrm>
-          <a:prstGeom prst="rect">
-            <a:avLst/>
-          </a:prstGeom>
-        </p:spPr>
-      </p:pic>
-      <p:pic>
-        <p:nvPicPr>
-          <p:cNvPr id="4" name="Picture 3">
-            <a:extLst>
-              <a:ext uri="{FF2B5EF4-FFF2-40B4-BE49-F238E27FC236}">
-                <a16:creationId xmlns:a16="http://schemas.microsoft.com/office/drawing/2014/main" id="{B62AC7AB-CD53-5D5B-2EA0-5D7F1AC1B8CE}"/>
-              </a:ext>
-            </a:extLst>
-          </p:cNvPr>
-          <p:cNvPicPr>
-            <a:picLocks noChangeAspect="1"/>
-          </p:cNvPicPr>
-          <p:nvPr/>
-        </p:nvPicPr>
-        <p:blipFill>
-          <a:blip r:embed="rId4"/>
-          <a:stretch>
-            <a:fillRect/>
-          </a:stretch>
-        </p:blipFill>
-        <p:spPr>
-          <a:xfrm>
-            <a:off x="8520528" y="5078570"/>
-            <a:ext cx="2833272" cy="231651"/>
-          </a:xfrm>
-          <a:prstGeom prst="rect">
-            <a:avLst/>
-          </a:prstGeom>
-        </p:spPr>
-      </p:pic>
-      <p:pic>
-        <p:nvPicPr>
-          <p:cNvPr id="8" name="Picture 7">
-            <a:extLst>
-              <a:ext uri="{FF2B5EF4-FFF2-40B4-BE49-F238E27FC236}">
-                <a16:creationId xmlns:a16="http://schemas.microsoft.com/office/drawing/2014/main" id="{C6F29AEE-4657-27AC-64A1-E48CCE7AEA50}"/>
+          <p:cNvPr id="6" name="Picture 5">
+            <a:extLst>
+              <a:ext uri="{FF2B5EF4-FFF2-40B4-BE49-F238E27FC236}">
+                <a16:creationId xmlns:a16="http://schemas.microsoft.com/office/drawing/2014/main" id="{2E4A31F6-4399-BF6C-AED5-AE7DF2179AFA}"/>
               </a:ext>
             </a:extLst>
           </p:cNvPr>
@@ -3835,8 +4363,38 @@
         </p:blipFill>
         <p:spPr>
           <a:xfrm>
-            <a:off x="6922360" y="1287713"/>
-            <a:ext cx="3965418" cy="2537336"/>
+            <a:off x="6661772" y="2691134"/>
+            <a:ext cx="4115085" cy="1134011"/>
+          </a:xfrm>
+          <a:prstGeom prst="rect">
+            <a:avLst/>
+          </a:prstGeom>
+        </p:spPr>
+      </p:pic>
+      <p:pic>
+        <p:nvPicPr>
+          <p:cNvPr id="10" name="Picture 9">
+            <a:extLst>
+              <a:ext uri="{FF2B5EF4-FFF2-40B4-BE49-F238E27FC236}">
+                <a16:creationId xmlns:a16="http://schemas.microsoft.com/office/drawing/2014/main" id="{C19F1E34-342C-83C5-BD5E-3C1A43EC9C7C}"/>
+              </a:ext>
+            </a:extLst>
+          </p:cNvPr>
+          <p:cNvPicPr>
+            <a:picLocks noChangeAspect="1"/>
+          </p:cNvPicPr>
+          <p:nvPr/>
+        </p:nvPicPr>
+        <p:blipFill>
+          <a:blip r:embed="rId6"/>
+          <a:stretch>
+            <a:fillRect/>
+          </a:stretch>
+        </p:blipFill>
+        <p:spPr>
+          <a:xfrm>
+            <a:off x="6992620" y="4200146"/>
+            <a:ext cx="3453390" cy="1292283"/>
           </a:xfrm>
           <a:prstGeom prst="rect">
             <a:avLst/>
@@ -3846,13 +4404,230 @@
     </p:spTree>
     <p:extLst>
       <p:ext uri="{BB962C8B-B14F-4D97-AF65-F5344CB8AC3E}">
-        <p14:creationId xmlns:p14="http://schemas.microsoft.com/office/powerpoint/2010/main" val="3304332057"/>
+        <p14:creationId xmlns:p14="http://schemas.microsoft.com/office/powerpoint/2010/main" val="52011118"/>
       </p:ext>
     </p:extLst>
   </p:cSld>
   <p:clrMapOvr>
     <a:masterClrMapping/>
   </p:clrMapOvr>
+  <p:timing>
+    <p:tnLst>
+      <p:par>
+        <p:cTn id="1" dur="indefinite" restart="never" nodeType="tmRoot">
+          <p:childTnLst>
+            <p:seq concurrent="1" nextAc="seek">
+              <p:cTn id="2" dur="indefinite" nodeType="mainSeq">
+                <p:childTnLst>
+                  <p:par>
+                    <p:cTn id="3" fill="hold">
+                      <p:stCondLst>
+                        <p:cond delay="indefinite"/>
+                      </p:stCondLst>
+                      <p:childTnLst>
+                        <p:par>
+                          <p:cTn id="4" fill="hold">
+                            <p:stCondLst>
+                              <p:cond delay="0"/>
+                            </p:stCondLst>
+                            <p:childTnLst>
+                              <p:par>
+                                <p:cTn id="5" presetID="1" presetClass="entr" presetSubtype="0" fill="hold" nodeType="clickEffect">
+                                  <p:stCondLst>
+                                    <p:cond delay="0"/>
+                                  </p:stCondLst>
+                                  <p:childTnLst>
+                                    <p:set>
+                                      <p:cBhvr>
+                                        <p:cTn id="6" dur="1" fill="hold">
+                                          <p:stCondLst>
+                                            <p:cond delay="0"/>
+                                          </p:stCondLst>
+                                        </p:cTn>
+                                        <p:tgtEl>
+                                          <p:spTgt spid="7"/>
+                                        </p:tgtEl>
+                                        <p:attrNameLst>
+                                          <p:attrName>style.visibility</p:attrName>
+                                        </p:attrNameLst>
+                                      </p:cBhvr>
+                                      <p:to>
+                                        <p:strVal val="visible"/>
+                                      </p:to>
+                                    </p:set>
+                                  </p:childTnLst>
+                                </p:cTn>
+                              </p:par>
+                            </p:childTnLst>
+                          </p:cTn>
+                        </p:par>
+                      </p:childTnLst>
+                    </p:cTn>
+                  </p:par>
+                  <p:par>
+                    <p:cTn id="7" fill="hold">
+                      <p:stCondLst>
+                        <p:cond delay="indefinite"/>
+                      </p:stCondLst>
+                      <p:childTnLst>
+                        <p:par>
+                          <p:cTn id="8" fill="hold">
+                            <p:stCondLst>
+                              <p:cond delay="0"/>
+                            </p:stCondLst>
+                            <p:childTnLst>
+                              <p:par>
+                                <p:cTn id="9" presetID="1" presetClass="entr" presetSubtype="0" fill="hold" nodeType="clickEffect">
+                                  <p:stCondLst>
+                                    <p:cond delay="0"/>
+                                  </p:stCondLst>
+                                  <p:childTnLst>
+                                    <p:set>
+                                      <p:cBhvr>
+                                        <p:cTn id="10" dur="1" fill="hold">
+                                          <p:stCondLst>
+                                            <p:cond delay="0"/>
+                                          </p:stCondLst>
+                                        </p:cTn>
+                                        <p:tgtEl>
+                                          <p:spTgt spid="6"/>
+                                        </p:tgtEl>
+                                        <p:attrNameLst>
+                                          <p:attrName>style.visibility</p:attrName>
+                                        </p:attrNameLst>
+                                      </p:cBhvr>
+                                      <p:to>
+                                        <p:strVal val="visible"/>
+                                      </p:to>
+                                    </p:set>
+                                  </p:childTnLst>
+                                </p:cTn>
+                              </p:par>
+                            </p:childTnLst>
+                          </p:cTn>
+                        </p:par>
+                      </p:childTnLst>
+                    </p:cTn>
+                  </p:par>
+                  <p:par>
+                    <p:cTn id="11" fill="hold">
+                      <p:stCondLst>
+                        <p:cond delay="indefinite"/>
+                      </p:stCondLst>
+                      <p:childTnLst>
+                        <p:par>
+                          <p:cTn id="12" fill="hold">
+                            <p:stCondLst>
+                              <p:cond delay="0"/>
+                            </p:stCondLst>
+                            <p:childTnLst>
+                              <p:par>
+                                <p:cTn id="13" presetID="1" presetClass="entr" presetSubtype="0" fill="hold" nodeType="clickEffect">
+                                  <p:stCondLst>
+                                    <p:cond delay="0"/>
+                                  </p:stCondLst>
+                                  <p:childTnLst>
+                                    <p:set>
+                                      <p:cBhvr>
+                                        <p:cTn id="14" dur="1" fill="hold">
+                                          <p:stCondLst>
+                                            <p:cond delay="0"/>
+                                          </p:stCondLst>
+                                        </p:cTn>
+                                        <p:tgtEl>
+                                          <p:spTgt spid="10"/>
+                                        </p:tgtEl>
+                                        <p:attrNameLst>
+                                          <p:attrName>style.visibility</p:attrName>
+                                        </p:attrNameLst>
+                                      </p:cBhvr>
+                                      <p:to>
+                                        <p:strVal val="visible"/>
+                                      </p:to>
+                                    </p:set>
+                                  </p:childTnLst>
+                                </p:cTn>
+                              </p:par>
+                            </p:childTnLst>
+                          </p:cTn>
+                        </p:par>
+                      </p:childTnLst>
+                    </p:cTn>
+                  </p:par>
+                  <p:par>
+                    <p:cTn id="15" fill="hold">
+                      <p:stCondLst>
+                        <p:cond delay="indefinite"/>
+                      </p:stCondLst>
+                      <p:childTnLst>
+                        <p:par>
+                          <p:cTn id="16" fill="hold">
+                            <p:stCondLst>
+                              <p:cond delay="0"/>
+                            </p:stCondLst>
+                            <p:childTnLst>
+                              <p:par>
+                                <p:cTn id="17" presetID="1" presetClass="entr" presetSubtype="0" fill="hold" grpId="0" nodeType="clickEffect">
+                                  <p:stCondLst>
+                                    <p:cond delay="0"/>
+                                  </p:stCondLst>
+                                  <p:childTnLst>
+                                    <p:set>
+                                      <p:cBhvr>
+                                        <p:cTn id="18" dur="1" fill="hold">
+                                          <p:stCondLst>
+                                            <p:cond delay="0"/>
+                                          </p:stCondLst>
+                                        </p:cTn>
+                                        <p:tgtEl>
+                                          <p:spTgt spid="3">
+                                            <p:txEl>
+                                              <p:pRg st="0" end="0"/>
+                                            </p:txEl>
+                                          </p:spTgt>
+                                        </p:tgtEl>
+                                        <p:attrNameLst>
+                                          <p:attrName>style.visibility</p:attrName>
+                                        </p:attrNameLst>
+                                      </p:cBhvr>
+                                      <p:to>
+                                        <p:strVal val="visible"/>
+                                      </p:to>
+                                    </p:set>
+                                  </p:childTnLst>
+                                </p:cTn>
+                              </p:par>
+                            </p:childTnLst>
+                          </p:cTn>
+                        </p:par>
+                      </p:childTnLst>
+                    </p:cTn>
+                  </p:par>
+                </p:childTnLst>
+              </p:cTn>
+              <p:prevCondLst>
+                <p:cond evt="onPrev" delay="0">
+                  <p:tgtEl>
+                    <p:sldTgt/>
+                  </p:tgtEl>
+                </p:cond>
+              </p:prevCondLst>
+              <p:nextCondLst>
+                <p:cond evt="onNext" delay="0">
+                  <p:tgtEl>
+                    <p:sldTgt/>
+                  </p:tgtEl>
+                </p:cond>
+              </p:nextCondLst>
+            </p:seq>
+          </p:childTnLst>
+        </p:cTn>
+      </p:par>
+    </p:tnLst>
+    <p:bldLst>
+      <p:bldP spid="3" grpId="0" build="p"/>
+    </p:bldLst>
+  </p:timing>
 </p:sld>
 </file>
 
@@ -3873,70 +4648,12 @@
           <a:chExt cx="0" cy="0"/>
         </a:xfrm>
       </p:grpSpPr>
-      <p:sp>
-        <p:nvSpPr>
-          <p:cNvPr id="2" name="Title 1">
-            <a:extLst>
-              <a:ext uri="{FF2B5EF4-FFF2-40B4-BE49-F238E27FC236}">
-                <a16:creationId xmlns:a16="http://schemas.microsoft.com/office/drawing/2014/main" id="{C67CD37A-98B9-ABEB-64A0-967298078782}"/>
-              </a:ext>
-            </a:extLst>
-          </p:cNvPr>
-          <p:cNvSpPr>
-            <a:spLocks noGrp="1"/>
-          </p:cNvSpPr>
-          <p:nvPr>
-            <p:ph type="title"/>
-          </p:nvPr>
-        </p:nvSpPr>
-        <p:spPr/>
-        <p:txBody>
-          <a:bodyPr/>
-          <a:lstStyle/>
-          <a:p>
-            <a:r>
-              <a:rPr lang="en-US" dirty="0"/>
-              <a:t>Challenges</a:t>
-            </a:r>
-          </a:p>
-        </p:txBody>
-      </p:sp>
-      <p:sp>
-        <p:nvSpPr>
-          <p:cNvPr id="3" name="Content Placeholder 2">
-            <a:extLst>
-              <a:ext uri="{FF2B5EF4-FFF2-40B4-BE49-F238E27FC236}">
-                <a16:creationId xmlns:a16="http://schemas.microsoft.com/office/drawing/2014/main" id="{0FD1C86C-C2EB-E9B5-81C1-EA8F880085F7}"/>
-              </a:ext>
-            </a:extLst>
-          </p:cNvPr>
-          <p:cNvSpPr>
-            <a:spLocks noGrp="1"/>
-          </p:cNvSpPr>
-          <p:nvPr>
-            <p:ph idx="1"/>
-          </p:nvPr>
-        </p:nvSpPr>
-        <p:spPr/>
-        <p:txBody>
-          <a:bodyPr>
-            <a:normAutofit/>
-          </a:bodyPr>
-          <a:lstStyle/>
-          <a:p>
-            <a:r>
-              <a:rPr lang="en-US" sz="2400" dirty="0"/>
-              <a:t>Linear Scheduling time: s(t)or nonlinear</a:t>
-            </a:r>
-          </a:p>
-        </p:txBody>
-      </p:sp>
       <p:pic>
         <p:nvPicPr>
           <p:cNvPr id="5" name="Picture 4">
             <a:extLst>
               <a:ext uri="{FF2B5EF4-FFF2-40B4-BE49-F238E27FC236}">
-                <a16:creationId xmlns:a16="http://schemas.microsoft.com/office/drawing/2014/main" id="{FEFEA785-545A-F6E1-03D4-7C237A3CB346}"/>
+                <a16:creationId xmlns:a16="http://schemas.microsoft.com/office/drawing/2014/main" id="{19A3BD88-A3CC-100D-01C8-B1CD9717DD90}"/>
               </a:ext>
             </a:extLst>
           </p:cNvPr>
@@ -3946,55 +4663,21 @@
           <p:nvPr/>
         </p:nvPicPr>
         <p:blipFill>
-          <a:blip r:embed="rId2"/>
+          <a:blip r:embed="rId2">
+            <a:extLst>
+              <a:ext uri="{28A0092B-C50C-407E-A947-70E740481C1C}">
+                <a14:useLocalDpi xmlns:a14="http://schemas.microsoft.com/office/drawing/2010/main" val="0"/>
+              </a:ext>
+            </a:extLst>
+          </a:blip>
           <a:stretch>
             <a:fillRect/>
           </a:stretch>
         </p:blipFill>
         <p:spPr>
           <a:xfrm>
-            <a:off x="4576330" y="2541010"/>
-            <a:ext cx="3371850" cy="3133725"/>
-          </a:xfrm>
-          <a:prstGeom prst="rect">
-            <a:avLst/>
-          </a:prstGeom>
-          <a:ln>
-            <a:noFill/>
-          </a:ln>
-          <a:effectLst>
-            <a:outerShdw blurRad="190500" algn="tl" rotWithShape="0">
-              <a:srgbClr val="000000">
-                <a:alpha val="70000"/>
-              </a:srgbClr>
-            </a:outerShdw>
-          </a:effectLst>
-        </p:spPr>
-      </p:pic>
-      <p:pic>
-        <p:nvPicPr>
-          <p:cNvPr id="7" name="Picture 6">
-            <a:extLst>
-              <a:ext uri="{FF2B5EF4-FFF2-40B4-BE49-F238E27FC236}">
-                <a16:creationId xmlns:a16="http://schemas.microsoft.com/office/drawing/2014/main" id="{FA424078-A66E-1AE8-87CF-DFE5AB3594EE}"/>
-              </a:ext>
-            </a:extLst>
-          </p:cNvPr>
-          <p:cNvPicPr>
-            <a:picLocks noChangeAspect="1"/>
-          </p:cNvPicPr>
-          <p:nvPr/>
-        </p:nvPicPr>
-        <p:blipFill>
-          <a:blip r:embed="rId3"/>
-          <a:stretch>
-            <a:fillRect/>
-          </a:stretch>
-        </p:blipFill>
-        <p:spPr>
-          <a:xfrm>
-            <a:off x="1488913" y="2646579"/>
-            <a:ext cx="1019175" cy="571500"/>
+            <a:off x="3239" y="0"/>
+            <a:ext cx="12185522" cy="6858000"/>
           </a:xfrm>
           <a:prstGeom prst="rect">
             <a:avLst/>
@@ -4004,7 +4687,7 @@
     </p:spTree>
     <p:extLst>
       <p:ext uri="{BB962C8B-B14F-4D97-AF65-F5344CB8AC3E}">
-        <p14:creationId xmlns:p14="http://schemas.microsoft.com/office/powerpoint/2010/main" val="2231561434"/>
+        <p14:creationId xmlns:p14="http://schemas.microsoft.com/office/powerpoint/2010/main" val="3353559758"/>
       </p:ext>
     </p:extLst>
   </p:cSld>
@@ -4036,7 +4719,7 @@
           <p:cNvPr id="2" name="Title 1">
             <a:extLst>
               <a:ext uri="{FF2B5EF4-FFF2-40B4-BE49-F238E27FC236}">
-                <a16:creationId xmlns:a16="http://schemas.microsoft.com/office/drawing/2014/main" id="{783C2165-D8E0-5031-DC45-2F60F85B9911}"/>
+                <a16:creationId xmlns:a16="http://schemas.microsoft.com/office/drawing/2014/main" id="{EEF10A3A-CE7C-9C74-3A7C-B042F0A6230E}"/>
               </a:ext>
             </a:extLst>
           </p:cNvPr>
@@ -4049,36 +4732,63 @@
         </p:nvSpPr>
         <p:spPr/>
         <p:txBody>
-          <a:bodyPr>
-            <a:normAutofit/>
-          </a:bodyPr>
+          <a:bodyPr/>
           <a:lstStyle/>
           <a:p>
             <a:r>
-              <a:rPr lang="en-US" sz="3200" dirty="0" err="1"/>
-              <a:t>Qiskit</a:t>
-            </a:r>
-            <a:r>
-              <a:rPr lang="en-US" sz="3200" dirty="0"/>
-              <a:t> implementation for </a:t>
-            </a:r>
-            <a:r>
-              <a:rPr lang="en-US" sz="3200" dirty="0" err="1"/>
+              <a:rPr lang="en-US" dirty="0"/>
+              <a:t>Example: </a:t>
+            </a:r>
+            <a:r>
+              <a:rPr lang="en-US" dirty="0" err="1"/>
               <a:t>Ising</a:t>
             </a:r>
             <a:r>
-              <a:rPr lang="en-US" sz="3200" dirty="0"/>
+              <a:rPr lang="en-US" dirty="0"/>
               <a:t> model</a:t>
             </a:r>
+          </a:p>
+        </p:txBody>
+      </p:sp>
+      <p:sp>
+        <p:nvSpPr>
+          <p:cNvPr id="3" name="Content Placeholder 2">
+            <a:extLst>
+              <a:ext uri="{FF2B5EF4-FFF2-40B4-BE49-F238E27FC236}">
+                <a16:creationId xmlns:a16="http://schemas.microsoft.com/office/drawing/2014/main" id="{1D413609-7E52-B586-7B92-7F9D31982704}"/>
+              </a:ext>
+            </a:extLst>
+          </p:cNvPr>
+          <p:cNvSpPr>
+            <a:spLocks noGrp="1"/>
+          </p:cNvSpPr>
+          <p:nvPr>
+            <p:ph idx="1"/>
+          </p:nvPr>
+        </p:nvSpPr>
+        <p:spPr/>
+        <p:txBody>
+          <a:bodyPr/>
+          <a:lstStyle/>
+          <a:p>
+            <a:r>
+              <a:rPr lang="en-US" sz="1800" dirty="0"/>
+              <a:t>Problem Hamiltonian: </a:t>
+            </a:r>
+            <a:r>
+              <a:rPr lang="en-US" sz="1800" dirty="0" err="1"/>
+              <a:t>H_p</a:t>
+            </a:r>
+            <a:endParaRPr lang="en-US" sz="1800" dirty="0"/>
           </a:p>
         </p:txBody>
       </p:sp>
       <p:pic>
         <p:nvPicPr>
-          <p:cNvPr id="5" name="Picture 4">
-            <a:extLst>
-              <a:ext uri="{FF2B5EF4-FFF2-40B4-BE49-F238E27FC236}">
-                <a16:creationId xmlns:a16="http://schemas.microsoft.com/office/drawing/2014/main" id="{8F934B46-F878-83C8-66CB-BC3BF80A70FB}"/>
+          <p:cNvPr id="7" name="Picture 6">
+            <a:extLst>
+              <a:ext uri="{FF2B5EF4-FFF2-40B4-BE49-F238E27FC236}">
+                <a16:creationId xmlns:a16="http://schemas.microsoft.com/office/drawing/2014/main" id="{EC9A4141-4FB6-69BD-2661-E6D41FC5CA24}"/>
               </a:ext>
             </a:extLst>
           </p:cNvPr>
@@ -4095,8 +4805,8 @@
         </p:blipFill>
         <p:spPr>
           <a:xfrm>
-            <a:off x="6419114" y="1659470"/>
-            <a:ext cx="4674870" cy="4747662"/>
+            <a:off x="1081383" y="2979815"/>
+            <a:ext cx="4116833" cy="313015"/>
           </a:xfrm>
           <a:prstGeom prst="rect">
             <a:avLst/>
@@ -4105,10 +4815,10 @@
       </p:pic>
       <p:pic>
         <p:nvPicPr>
-          <p:cNvPr id="7" name="Picture 6">
-            <a:extLst>
-              <a:ext uri="{FF2B5EF4-FFF2-40B4-BE49-F238E27FC236}">
-                <a16:creationId xmlns:a16="http://schemas.microsoft.com/office/drawing/2014/main" id="{F4CCA3CB-E8F1-E3E2-DD14-F547CB298A2F}"/>
+          <p:cNvPr id="9" name="Picture 8">
+            <a:extLst>
+              <a:ext uri="{FF2B5EF4-FFF2-40B4-BE49-F238E27FC236}">
+                <a16:creationId xmlns:a16="http://schemas.microsoft.com/office/drawing/2014/main" id="{D5894DEB-C2E6-B46C-0D3F-39BCBAE6D0C0}"/>
               </a:ext>
             </a:extLst>
           </p:cNvPr>
@@ -4125,8 +4835,8 @@
         </p:blipFill>
         <p:spPr>
           <a:xfrm>
-            <a:off x="10435251" y="1364289"/>
-            <a:ext cx="990600" cy="247650"/>
+            <a:off x="9052201" y="1161924"/>
+            <a:ext cx="2301599" cy="2301599"/>
           </a:xfrm>
           <a:prstGeom prst="rect">
             <a:avLst/>
@@ -4135,10 +4845,10 @@
       </p:pic>
       <p:pic>
         <p:nvPicPr>
-          <p:cNvPr id="9" name="Picture 8">
-            <a:extLst>
-              <a:ext uri="{FF2B5EF4-FFF2-40B4-BE49-F238E27FC236}">
-                <a16:creationId xmlns:a16="http://schemas.microsoft.com/office/drawing/2014/main" id="{DD8282D9-C132-1423-2D3B-3BEA8E1B30B0}"/>
+          <p:cNvPr id="12" name="Picture 11">
+            <a:extLst>
+              <a:ext uri="{FF2B5EF4-FFF2-40B4-BE49-F238E27FC236}">
+                <a16:creationId xmlns:a16="http://schemas.microsoft.com/office/drawing/2014/main" id="{3CD1E237-E791-E674-6B61-1259CEAE135F}"/>
               </a:ext>
             </a:extLst>
           </p:cNvPr>
@@ -4155,8 +4865,8 @@
         </p:blipFill>
         <p:spPr>
           <a:xfrm>
-            <a:off x="1669750" y="2130629"/>
-            <a:ext cx="3438525" cy="333375"/>
+            <a:off x="9363063" y="930023"/>
+            <a:ext cx="1885950" cy="276225"/>
           </a:xfrm>
           <a:prstGeom prst="rect">
             <a:avLst/>
@@ -4165,10 +4875,10 @@
       </p:pic>
       <p:pic>
         <p:nvPicPr>
-          <p:cNvPr id="11" name="Picture 10">
-            <a:extLst>
-              <a:ext uri="{FF2B5EF4-FFF2-40B4-BE49-F238E27FC236}">
-                <a16:creationId xmlns:a16="http://schemas.microsoft.com/office/drawing/2014/main" id="{A3B25E86-02ED-25F7-A9A9-95F6C68DC9F7}"/>
+          <p:cNvPr id="25" name="Picture 24">
+            <a:extLst>
+              <a:ext uri="{FF2B5EF4-FFF2-40B4-BE49-F238E27FC236}">
+                <a16:creationId xmlns:a16="http://schemas.microsoft.com/office/drawing/2014/main" id="{1975D6C7-E74A-F0BF-86C2-63DAB648E76F}"/>
               </a:ext>
             </a:extLst>
           </p:cNvPr>
@@ -4185,8 +4895,8 @@
         </p:blipFill>
         <p:spPr>
           <a:xfrm>
-            <a:off x="1867252" y="3065067"/>
-            <a:ext cx="3170268" cy="646830"/>
+            <a:off x="6096000" y="2664834"/>
+            <a:ext cx="1924050" cy="942975"/>
           </a:xfrm>
           <a:prstGeom prst="rect">
             <a:avLst/>
@@ -4195,10 +4905,10 @@
       </p:pic>
       <p:pic>
         <p:nvPicPr>
-          <p:cNvPr id="12" name="Picture 11">
-            <a:extLst>
-              <a:ext uri="{FF2B5EF4-FFF2-40B4-BE49-F238E27FC236}">
-                <a16:creationId xmlns:a16="http://schemas.microsoft.com/office/drawing/2014/main" id="{662185D2-326B-29E1-C0A6-9851C5954E87}"/>
+          <p:cNvPr id="6" name="Picture 5">
+            <a:extLst>
+              <a:ext uri="{FF2B5EF4-FFF2-40B4-BE49-F238E27FC236}">
+                <a16:creationId xmlns:a16="http://schemas.microsoft.com/office/drawing/2014/main" id="{9A931223-DDA9-CA97-5434-C2BDEDF4A0E1}"/>
               </a:ext>
             </a:extLst>
           </p:cNvPr>
@@ -4215,8 +4925,8 @@
         </p:blipFill>
         <p:spPr>
           <a:xfrm>
-            <a:off x="1197163" y="4189445"/>
-            <a:ext cx="4688845" cy="1965066"/>
+            <a:off x="3784696" y="4203957"/>
+            <a:ext cx="3298328" cy="484055"/>
           </a:xfrm>
           <a:prstGeom prst="rect">
             <a:avLst/>
@@ -4226,7 +4936,7 @@
     </p:spTree>
     <p:extLst>
       <p:ext uri="{BB962C8B-B14F-4D97-AF65-F5344CB8AC3E}">
-        <p14:creationId xmlns:p14="http://schemas.microsoft.com/office/powerpoint/2010/main" val="1786286864"/>
+        <p14:creationId xmlns:p14="http://schemas.microsoft.com/office/powerpoint/2010/main" val="1255673642"/>
       </p:ext>
     </p:extLst>
   </p:cSld>
@@ -4258,7 +4968,7 @@
           <p:cNvPr id="2" name="Title 1">
             <a:extLst>
               <a:ext uri="{FF2B5EF4-FFF2-40B4-BE49-F238E27FC236}">
-                <a16:creationId xmlns:a16="http://schemas.microsoft.com/office/drawing/2014/main" id="{83D4F420-D02E-D9D1-80C8-D06E12AFE97D}"/>
+                <a16:creationId xmlns:a16="http://schemas.microsoft.com/office/drawing/2014/main" id="{EEF10A3A-CE7C-9C74-3A7C-B042F0A6230E}"/>
               </a:ext>
             </a:extLst>
           </p:cNvPr>
@@ -4276,26 +4986,77 @@
           <a:p>
             <a:r>
               <a:rPr lang="en-US" dirty="0"/>
-              <a:t>Complexity</a:t>
-            </a:r>
-          </a:p>
-        </p:txBody>
-      </p:sp>
-      <p:pic>
-        <p:nvPicPr>
-          <p:cNvPr id="7" name="Content Placeholder 6">
-            <a:extLst>
-              <a:ext uri="{FF2B5EF4-FFF2-40B4-BE49-F238E27FC236}">
-                <a16:creationId xmlns:a16="http://schemas.microsoft.com/office/drawing/2014/main" id="{10250F81-CB35-A6E0-D08F-A1382C8BE5B2}"/>
-              </a:ext>
-            </a:extLst>
-          </p:cNvPr>
-          <p:cNvPicPr>
-            <a:picLocks noGrp="1" noChangeAspect="1"/>
-          </p:cNvPicPr>
+              <a:t>Example: </a:t>
+            </a:r>
+            <a:r>
+              <a:rPr lang="en-US" dirty="0" err="1"/>
+              <a:t>Ising</a:t>
+            </a:r>
+            <a:r>
+              <a:rPr lang="en-US" dirty="0"/>
+              <a:t> model</a:t>
+            </a:r>
+          </a:p>
+        </p:txBody>
+      </p:sp>
+      <p:sp>
+        <p:nvSpPr>
+          <p:cNvPr id="3" name="Content Placeholder 2">
+            <a:extLst>
+              <a:ext uri="{FF2B5EF4-FFF2-40B4-BE49-F238E27FC236}">
+                <a16:creationId xmlns:a16="http://schemas.microsoft.com/office/drawing/2014/main" id="{1D413609-7E52-B586-7B92-7F9D31982704}"/>
+              </a:ext>
+            </a:extLst>
+          </p:cNvPr>
+          <p:cNvSpPr>
+            <a:spLocks noGrp="1"/>
+          </p:cNvSpPr>
           <p:nvPr>
             <p:ph idx="1"/>
           </p:nvPr>
+        </p:nvSpPr>
+        <p:spPr/>
+        <p:txBody>
+          <a:bodyPr/>
+          <a:lstStyle/>
+          <a:p>
+            <a:r>
+              <a:rPr lang="en-US" sz="2000" dirty="0"/>
+              <a:t>Drive Hamiltonian : </a:t>
+            </a:r>
+            <a:r>
+              <a:rPr lang="en-US" sz="2000" dirty="0" err="1"/>
+              <a:t>H_b</a:t>
+            </a:r>
+            <a:endParaRPr lang="en-US" sz="2000" dirty="0"/>
+          </a:p>
+          <a:p>
+            <a:endParaRPr lang="en-US" dirty="0"/>
+          </a:p>
+          <a:p>
+            <a:endParaRPr lang="fa-IR" dirty="0"/>
+          </a:p>
+          <a:p>
+            <a:endParaRPr lang="fa-IR" dirty="0"/>
+          </a:p>
+          <a:p>
+            <a:endParaRPr lang="en-US" dirty="0"/>
+          </a:p>
+        </p:txBody>
+      </p:sp>
+      <p:pic>
+        <p:nvPicPr>
+          <p:cNvPr id="5" name="Picture 4">
+            <a:extLst>
+              <a:ext uri="{FF2B5EF4-FFF2-40B4-BE49-F238E27FC236}">
+                <a16:creationId xmlns:a16="http://schemas.microsoft.com/office/drawing/2014/main" id="{F8188D3B-E839-1E03-D447-DD932C4461FE}"/>
+              </a:ext>
+            </a:extLst>
+          </p:cNvPr>
+          <p:cNvPicPr>
+            <a:picLocks noChangeAspect="1"/>
+          </p:cNvPicPr>
+          <p:nvPr/>
         </p:nvPicPr>
         <p:blipFill>
           <a:blip r:embed="rId2"/>
@@ -4305,17 +5066,20 @@
         </p:blipFill>
         <p:spPr>
           <a:xfrm>
-            <a:off x="4186237" y="4075730"/>
-            <a:ext cx="3819525" cy="1209675"/>
-          </a:xfrm>
+            <a:off x="1268677" y="2316363"/>
+            <a:ext cx="2742334" cy="298802"/>
+          </a:xfrm>
+          <a:prstGeom prst="rect">
+            <a:avLst/>
+          </a:prstGeom>
         </p:spPr>
       </p:pic>
       <p:pic>
         <p:nvPicPr>
-          <p:cNvPr id="5" name="Picture 4">
-            <a:extLst>
-              <a:ext uri="{FF2B5EF4-FFF2-40B4-BE49-F238E27FC236}">
-                <a16:creationId xmlns:a16="http://schemas.microsoft.com/office/drawing/2014/main" id="{EE3C1065-1822-F93F-8851-8FA4E30884F4}"/>
+          <p:cNvPr id="14" name="Picture 13">
+            <a:extLst>
+              <a:ext uri="{FF2B5EF4-FFF2-40B4-BE49-F238E27FC236}">
+                <a16:creationId xmlns:a16="http://schemas.microsoft.com/office/drawing/2014/main" id="{FFCC81A4-937F-0019-E067-82885CEC9C3C}"/>
               </a:ext>
             </a:extLst>
           </p:cNvPr>
@@ -4332,56 +5096,50 @@
         </p:blipFill>
         <p:spPr>
           <a:xfrm>
-            <a:off x="5048699" y="2309506"/>
-            <a:ext cx="1831366" cy="1393681"/>
+            <a:off x="6695082" y="2007845"/>
+            <a:ext cx="2971818" cy="497938"/>
           </a:xfrm>
           <a:prstGeom prst="rect">
             <a:avLst/>
           </a:prstGeom>
         </p:spPr>
       </p:pic>
-      <p:cxnSp>
-        <p:nvCxnSpPr>
-          <p:cNvPr id="9" name="Straight Connector 8">
-            <a:extLst>
-              <a:ext uri="{FF2B5EF4-FFF2-40B4-BE49-F238E27FC236}">
-                <a16:creationId xmlns:a16="http://schemas.microsoft.com/office/drawing/2014/main" id="{670D4E61-3A32-5D7D-355C-7C3749EDE54E}"/>
-              </a:ext>
-            </a:extLst>
-          </p:cNvPr>
-          <p:cNvCxnSpPr/>
-          <p:nvPr/>
-        </p:nvCxnSpPr>
-        <p:spPr>
-          <a:xfrm>
-            <a:off x="3352800" y="3851653"/>
-            <a:ext cx="5223164" cy="0"/>
-          </a:xfrm>
-          <a:prstGeom prst="line">
-            <a:avLst/>
-          </a:prstGeom>
-        </p:spPr>
-        <p:style>
-          <a:lnRef idx="2">
-            <a:schemeClr val="accent1"/>
-          </a:lnRef>
-          <a:fillRef idx="0">
-            <a:schemeClr val="accent1"/>
-          </a:fillRef>
-          <a:effectRef idx="1">
-            <a:schemeClr val="accent1"/>
-          </a:effectRef>
-          <a:fontRef idx="minor">
-            <a:schemeClr val="tx1"/>
-          </a:fontRef>
-        </p:style>
-      </p:cxnSp>
-      <p:sp>
-        <p:nvSpPr>
-          <p:cNvPr id="8" name="TextBox 7">
-            <a:extLst>
-              <a:ext uri="{FF2B5EF4-FFF2-40B4-BE49-F238E27FC236}">
-                <a16:creationId xmlns:a16="http://schemas.microsoft.com/office/drawing/2014/main" id="{3D8174EB-073A-8276-3FA6-FF99B292B287}"/>
+      <p:pic>
+        <p:nvPicPr>
+          <p:cNvPr id="16" name="Picture 15">
+            <a:extLst>
+              <a:ext uri="{FF2B5EF4-FFF2-40B4-BE49-F238E27FC236}">
+                <a16:creationId xmlns:a16="http://schemas.microsoft.com/office/drawing/2014/main" id="{D6DD6E36-3AA1-6EA2-C361-913C48748C73}"/>
+              </a:ext>
+            </a:extLst>
+          </p:cNvPr>
+          <p:cNvPicPr>
+            <a:picLocks noChangeAspect="1"/>
+          </p:cNvPicPr>
+          <p:nvPr/>
+        </p:nvPicPr>
+        <p:blipFill>
+          <a:blip r:embed="rId4"/>
+          <a:stretch>
+            <a:fillRect/>
+          </a:stretch>
+        </p:blipFill>
+        <p:spPr>
+          <a:xfrm>
+            <a:off x="2415293" y="2901054"/>
+            <a:ext cx="2495550" cy="457200"/>
+          </a:xfrm>
+          <a:prstGeom prst="rect">
+            <a:avLst/>
+          </a:prstGeom>
+        </p:spPr>
+      </p:pic>
+      <p:sp>
+        <p:nvSpPr>
+          <p:cNvPr id="17" name="TextBox 16">
+            <a:extLst>
+              <a:ext uri="{FF2B5EF4-FFF2-40B4-BE49-F238E27FC236}">
+                <a16:creationId xmlns:a16="http://schemas.microsoft.com/office/drawing/2014/main" id="{8186BDB8-7753-FA33-0869-86F983AC0A40}"/>
               </a:ext>
             </a:extLst>
           </p:cNvPr>
@@ -4390,8 +5148,8 @@
         </p:nvSpPr>
         <p:spPr>
           <a:xfrm>
-            <a:off x="965467" y="1364363"/>
-            <a:ext cx="6097508" cy="369332"/>
+            <a:off x="5303892" y="3012845"/>
+            <a:ext cx="792108" cy="253916"/>
           </a:xfrm>
           <a:prstGeom prst="rect">
             <a:avLst/>
@@ -4399,22 +5157,87 @@
           <a:noFill/>
         </p:spPr>
         <p:txBody>
-          <a:bodyPr wrap="square">
+          <a:bodyPr wrap="square" rtlCol="0">
             <a:spAutoFit/>
           </a:bodyPr>
           <a:lstStyle/>
           <a:p>
             <a:r>
-              <a:rPr lang="en-US" dirty="0"/>
-              <a:t>Scaling size and complexity parameters</a:t>
-            </a:r>
-          </a:p>
-        </p:txBody>
-      </p:sp>
+              <a:rPr lang="fa-IR" sz="1050" dirty="0">
+                <a:cs typeface="B Nazanin" panose="00000400000000000000" pitchFamily="2" charset="-78"/>
+              </a:rPr>
+              <a:t>حالات ویژه</a:t>
+            </a:r>
+            <a:endParaRPr lang="en-US" sz="1050" dirty="0">
+              <a:cs typeface="B Nazanin" panose="00000400000000000000" pitchFamily="2" charset="-78"/>
+            </a:endParaRPr>
+          </a:p>
+        </p:txBody>
+      </p:sp>
+      <p:pic>
+        <p:nvPicPr>
+          <p:cNvPr id="19" name="Picture 18">
+            <a:extLst>
+              <a:ext uri="{FF2B5EF4-FFF2-40B4-BE49-F238E27FC236}">
+                <a16:creationId xmlns:a16="http://schemas.microsoft.com/office/drawing/2014/main" id="{0A8B5D17-7F4B-EC00-CD5D-B17F4EB233FD}"/>
+              </a:ext>
+            </a:extLst>
+          </p:cNvPr>
+          <p:cNvPicPr>
+            <a:picLocks noChangeAspect="1"/>
+          </p:cNvPicPr>
+          <p:nvPr/>
+        </p:nvPicPr>
+        <p:blipFill>
+          <a:blip r:embed="rId5"/>
+          <a:stretch>
+            <a:fillRect/>
+          </a:stretch>
+        </p:blipFill>
+        <p:spPr>
+          <a:xfrm>
+            <a:off x="6837195" y="2724546"/>
+            <a:ext cx="1405095" cy="801731"/>
+          </a:xfrm>
+          <a:prstGeom prst="rect">
+            <a:avLst/>
+          </a:prstGeom>
+        </p:spPr>
+      </p:pic>
+      <p:pic>
+        <p:nvPicPr>
+          <p:cNvPr id="6" name="Picture 5">
+            <a:extLst>
+              <a:ext uri="{FF2B5EF4-FFF2-40B4-BE49-F238E27FC236}">
+                <a16:creationId xmlns:a16="http://schemas.microsoft.com/office/drawing/2014/main" id="{3CBFA2D3-BCCD-C848-4B1C-89E201E107E4}"/>
+              </a:ext>
+            </a:extLst>
+          </p:cNvPr>
+          <p:cNvPicPr>
+            <a:picLocks noChangeAspect="1"/>
+          </p:cNvPicPr>
+          <p:nvPr/>
+        </p:nvPicPr>
+        <p:blipFill>
+          <a:blip r:embed="rId6"/>
+          <a:stretch>
+            <a:fillRect/>
+          </a:stretch>
+        </p:blipFill>
+        <p:spPr>
+          <a:xfrm>
+            <a:off x="3449956" y="3839797"/>
+            <a:ext cx="4228153" cy="1204914"/>
+          </a:xfrm>
+          <a:prstGeom prst="rect">
+            <a:avLst/>
+          </a:prstGeom>
+        </p:spPr>
+      </p:pic>
     </p:spTree>
     <p:extLst>
       <p:ext uri="{BB962C8B-B14F-4D97-AF65-F5344CB8AC3E}">
-        <p14:creationId xmlns:p14="http://schemas.microsoft.com/office/powerpoint/2010/main" val="293211359"/>
+        <p14:creationId xmlns:p14="http://schemas.microsoft.com/office/powerpoint/2010/main" val="2811683946"/>
       </p:ext>
     </p:extLst>
   </p:cSld>
@@ -4446,7 +5269,7 @@
           <p:cNvPr id="2" name="Title 1">
             <a:extLst>
               <a:ext uri="{FF2B5EF4-FFF2-40B4-BE49-F238E27FC236}">
-                <a16:creationId xmlns:a16="http://schemas.microsoft.com/office/drawing/2014/main" id="{FFD5BCF9-B143-5051-11E7-F9D60F18D8A3}"/>
+                <a16:creationId xmlns:a16="http://schemas.microsoft.com/office/drawing/2014/main" id="{86DE510A-6AA9-6B8B-42D8-2BC8D8A9D144}"/>
               </a:ext>
             </a:extLst>
           </p:cNvPr>
@@ -4464,38 +5287,16 @@
           <a:p>
             <a:r>
               <a:rPr lang="en-US" dirty="0"/>
-              <a:t>Complexity</a:t>
-            </a:r>
-          </a:p>
-        </p:txBody>
-      </p:sp>
-      <p:sp>
-        <p:nvSpPr>
-          <p:cNvPr id="3" name="Content Placeholder 2">
-            <a:extLst>
-              <a:ext uri="{FF2B5EF4-FFF2-40B4-BE49-F238E27FC236}">
-                <a16:creationId xmlns:a16="http://schemas.microsoft.com/office/drawing/2014/main" id="{1DEFFD76-C62E-659D-C71A-6A5B4AAEC1DD}"/>
-              </a:ext>
-            </a:extLst>
-          </p:cNvPr>
-          <p:cNvSpPr>
-            <a:spLocks noGrp="1"/>
-          </p:cNvSpPr>
-          <p:nvPr>
-            <p:ph idx="1"/>
-          </p:nvPr>
-        </p:nvSpPr>
-        <p:spPr>
-          <a:xfrm>
-            <a:off x="838200" y="2408221"/>
-            <a:ext cx="10515600" cy="3768741"/>
-          </a:xfrm>
-        </p:spPr>
-        <p:txBody>
-          <a:bodyPr/>
-          <a:lstStyle/>
-          <a:p>
-            <a:endParaRPr lang="en-US" dirty="0"/>
+              <a:t>Adiabatic computation for </a:t>
+            </a:r>
+            <a:r>
+              <a:rPr lang="en-US" dirty="0" err="1"/>
+              <a:t>Ising</a:t>
+            </a:r>
+            <a:r>
+              <a:rPr lang="en-US" dirty="0"/>
+              <a:t> model</a:t>
+            </a:r>
           </a:p>
         </p:txBody>
       </p:sp>
@@ -4504,7 +5305,7 @@
           <p:cNvPr id="5" name="Picture 4">
             <a:extLst>
               <a:ext uri="{FF2B5EF4-FFF2-40B4-BE49-F238E27FC236}">
-                <a16:creationId xmlns:a16="http://schemas.microsoft.com/office/drawing/2014/main" id="{2B3CC239-DA59-CBC3-59F5-7E2BE422F694}"/>
+                <a16:creationId xmlns:a16="http://schemas.microsoft.com/office/drawing/2014/main" id="{A41F6900-AFBE-4D2C-AAAF-327CFA2F28A8}"/>
               </a:ext>
             </a:extLst>
           </p:cNvPr>
@@ -4521,38 +5322,8 @@
         </p:blipFill>
         <p:spPr>
           <a:xfrm>
-            <a:off x="838200" y="2408220"/>
-            <a:ext cx="6497526" cy="1179551"/>
-          </a:xfrm>
-          <a:prstGeom prst="rect">
-            <a:avLst/>
-          </a:prstGeom>
-        </p:spPr>
-      </p:pic>
-      <p:pic>
-        <p:nvPicPr>
-          <p:cNvPr id="7" name="Picture 6">
-            <a:extLst>
-              <a:ext uri="{FF2B5EF4-FFF2-40B4-BE49-F238E27FC236}">
-                <a16:creationId xmlns:a16="http://schemas.microsoft.com/office/drawing/2014/main" id="{F9A248B5-254A-CDCC-082F-3D30BD89B0C2}"/>
-              </a:ext>
-            </a:extLst>
-          </p:cNvPr>
-          <p:cNvPicPr>
-            <a:picLocks noChangeAspect="1"/>
-          </p:cNvPicPr>
-          <p:nvPr/>
-        </p:nvPicPr>
-        <p:blipFill>
-          <a:blip r:embed="rId3"/>
-          <a:stretch>
-            <a:fillRect/>
-          </a:stretch>
-        </p:blipFill>
-        <p:spPr>
-          <a:xfrm>
-            <a:off x="5398715" y="3693266"/>
-            <a:ext cx="3874021" cy="2630187"/>
+            <a:off x="1427003" y="2063435"/>
+            <a:ext cx="3009900" cy="3971925"/>
           </a:xfrm>
           <a:prstGeom prst="rect">
             <a:avLst/>
@@ -4569,6 +5340,1377 @@
           </a:effectLst>
         </p:spPr>
       </p:pic>
+      <p:grpSp>
+        <p:nvGrpSpPr>
+          <p:cNvPr id="4" name="Group 3">
+            <a:extLst>
+              <a:ext uri="{FF2B5EF4-FFF2-40B4-BE49-F238E27FC236}">
+                <a16:creationId xmlns:a16="http://schemas.microsoft.com/office/drawing/2014/main" id="{8698A6A9-6277-B8B6-4693-ECA7444EF08A}"/>
+              </a:ext>
+            </a:extLst>
+          </p:cNvPr>
+          <p:cNvGrpSpPr/>
+          <p:nvPr/>
+        </p:nvGrpSpPr>
+        <p:grpSpPr>
+          <a:xfrm>
+            <a:off x="6907525" y="2783015"/>
+            <a:ext cx="3925216" cy="921567"/>
+            <a:chOff x="7540543" y="2024319"/>
+            <a:chExt cx="3925216" cy="921567"/>
+          </a:xfrm>
+        </p:grpSpPr>
+        <p:pic>
+          <p:nvPicPr>
+            <p:cNvPr id="8" name="Picture 7">
+              <a:extLst>
+                <a:ext uri="{FF2B5EF4-FFF2-40B4-BE49-F238E27FC236}">
+                  <a16:creationId xmlns:a16="http://schemas.microsoft.com/office/drawing/2014/main" id="{67409BD3-59EF-B39B-CEC9-D611F1C1430E}"/>
+                </a:ext>
+              </a:extLst>
+            </p:cNvPr>
+            <p:cNvPicPr>
+              <a:picLocks noChangeAspect="1"/>
+            </p:cNvPicPr>
+            <p:nvPr/>
+          </p:nvPicPr>
+          <p:blipFill>
+            <a:blip r:embed="rId3"/>
+            <a:stretch>
+              <a:fillRect/>
+            </a:stretch>
+          </p:blipFill>
+          <p:spPr>
+            <a:xfrm>
+              <a:off x="7540543" y="2350621"/>
+              <a:ext cx="2371111" cy="268962"/>
+            </a:xfrm>
+            <a:prstGeom prst="rect">
+              <a:avLst/>
+            </a:prstGeom>
+          </p:spPr>
+        </p:pic>
+        <p:pic>
+          <p:nvPicPr>
+            <p:cNvPr id="10" name="Picture 9">
+              <a:extLst>
+                <a:ext uri="{FF2B5EF4-FFF2-40B4-BE49-F238E27FC236}">
+                  <a16:creationId xmlns:a16="http://schemas.microsoft.com/office/drawing/2014/main" id="{49024B68-E077-BE68-7C61-DF8B5F1B22F2}"/>
+                </a:ext>
+              </a:extLst>
+            </p:cNvPr>
+            <p:cNvPicPr>
+              <a:picLocks noChangeAspect="1"/>
+            </p:cNvPicPr>
+            <p:nvPr/>
+          </p:nvPicPr>
+          <p:blipFill>
+            <a:blip r:embed="rId4"/>
+            <a:stretch>
+              <a:fillRect/>
+            </a:stretch>
+          </p:blipFill>
+          <p:spPr>
+            <a:xfrm>
+              <a:off x="10469653" y="2024319"/>
+              <a:ext cx="996106" cy="921567"/>
+            </a:xfrm>
+            <a:prstGeom prst="rect">
+              <a:avLst/>
+            </a:prstGeom>
+          </p:spPr>
+        </p:pic>
+      </p:grpSp>
+      <p:grpSp>
+        <p:nvGrpSpPr>
+          <p:cNvPr id="7" name="Group 6">
+            <a:extLst>
+              <a:ext uri="{FF2B5EF4-FFF2-40B4-BE49-F238E27FC236}">
+                <a16:creationId xmlns:a16="http://schemas.microsoft.com/office/drawing/2014/main" id="{BC6889A1-0E07-771D-AA41-204CC7D55677}"/>
+              </a:ext>
+            </a:extLst>
+          </p:cNvPr>
+          <p:cNvGrpSpPr/>
+          <p:nvPr/>
+        </p:nvGrpSpPr>
+        <p:grpSpPr>
+          <a:xfrm>
+            <a:off x="6889845" y="4267207"/>
+            <a:ext cx="4556401" cy="776707"/>
+            <a:chOff x="7151968" y="3474138"/>
+            <a:chExt cx="4556401" cy="776707"/>
+          </a:xfrm>
+        </p:grpSpPr>
+        <p:pic>
+          <p:nvPicPr>
+            <p:cNvPr id="6" name="Picture 5">
+              <a:extLst>
+                <a:ext uri="{FF2B5EF4-FFF2-40B4-BE49-F238E27FC236}">
+                  <a16:creationId xmlns:a16="http://schemas.microsoft.com/office/drawing/2014/main" id="{361B3122-D99A-7713-DBD1-E9A07D889EB2}"/>
+                </a:ext>
+              </a:extLst>
+            </p:cNvPr>
+            <p:cNvPicPr>
+              <a:picLocks noChangeAspect="1"/>
+            </p:cNvPicPr>
+            <p:nvPr/>
+          </p:nvPicPr>
+          <p:blipFill>
+            <a:blip r:embed="rId5"/>
+            <a:stretch>
+              <a:fillRect/>
+            </a:stretch>
+          </p:blipFill>
+          <p:spPr>
+            <a:xfrm>
+              <a:off x="10347672" y="3474138"/>
+              <a:ext cx="1360697" cy="776707"/>
+            </a:xfrm>
+            <a:prstGeom prst="rect">
+              <a:avLst/>
+            </a:prstGeom>
+          </p:spPr>
+        </p:pic>
+        <p:pic>
+          <p:nvPicPr>
+            <p:cNvPr id="12" name="Picture 11">
+              <a:extLst>
+                <a:ext uri="{FF2B5EF4-FFF2-40B4-BE49-F238E27FC236}">
+                  <a16:creationId xmlns:a16="http://schemas.microsoft.com/office/drawing/2014/main" id="{8378CA5C-E6FB-2C59-AF8D-5040ED231976}"/>
+                </a:ext>
+              </a:extLst>
+            </p:cNvPr>
+            <p:cNvPicPr>
+              <a:picLocks noChangeAspect="1"/>
+            </p:cNvPicPr>
+            <p:nvPr/>
+          </p:nvPicPr>
+          <p:blipFill>
+            <a:blip r:embed="rId6"/>
+            <a:stretch>
+              <a:fillRect/>
+            </a:stretch>
+          </p:blipFill>
+          <p:spPr>
+            <a:xfrm>
+              <a:off x="7151968" y="3719658"/>
+              <a:ext cx="2838541" cy="185753"/>
+            </a:xfrm>
+            <a:prstGeom prst="rect">
+              <a:avLst/>
+            </a:prstGeom>
+          </p:spPr>
+        </p:pic>
+      </p:grpSp>
+      <p:sp>
+        <p:nvSpPr>
+          <p:cNvPr id="9" name="TextBox 8">
+            <a:extLst>
+              <a:ext uri="{FF2B5EF4-FFF2-40B4-BE49-F238E27FC236}">
+                <a16:creationId xmlns:a16="http://schemas.microsoft.com/office/drawing/2014/main" id="{33C29B2B-B47E-5CC1-4820-EA4F78E51770}"/>
+              </a:ext>
+            </a:extLst>
+          </p:cNvPr>
+          <p:cNvSpPr txBox="1"/>
+          <p:nvPr/>
+        </p:nvSpPr>
+        <p:spPr>
+          <a:xfrm>
+            <a:off x="6518494" y="1835800"/>
+            <a:ext cx="5063125" cy="646331"/>
+          </a:xfrm>
+          <a:prstGeom prst="rect">
+            <a:avLst/>
+          </a:prstGeom>
+          <a:noFill/>
+        </p:spPr>
+        <p:txBody>
+          <a:bodyPr wrap="square" rtlCol="0">
+            <a:spAutoFit/>
+          </a:bodyPr>
+          <a:lstStyle/>
+          <a:p>
+            <a:pPr algn="r" rtl="1"/>
+            <a:r>
+              <a:rPr lang="ar-SA" dirty="0">
+                <a:cs typeface="B Nazanin" panose="00000400000000000000" pitchFamily="2" charset="-78"/>
+              </a:rPr>
+              <a:t>از حالت پایه</a:t>
+            </a:r>
+            <a:r>
+              <a:rPr lang="fa-IR" dirty="0">
+                <a:cs typeface="B Nazanin" panose="00000400000000000000" pitchFamily="2" charset="-78"/>
+              </a:rPr>
+              <a:t> </a:t>
+            </a:r>
+            <a:r>
+              <a:rPr lang="ar-SA" dirty="0">
+                <a:cs typeface="B Nazanin" panose="00000400000000000000" pitchFamily="2" charset="-78"/>
+              </a:rPr>
+              <a:t>معلوم </a:t>
+            </a:r>
+            <a:r>
+              <a:rPr lang="en-US" dirty="0">
+                <a:cs typeface="B Nazanin" panose="00000400000000000000" pitchFamily="2" charset="-78"/>
+              </a:rPr>
+              <a:t> </a:t>
+            </a:r>
+            <a:r>
+              <a:rPr lang="ar-SA" dirty="0">
+                <a:cs typeface="B Nazanin" panose="00000400000000000000" pitchFamily="2" charset="-78"/>
+              </a:rPr>
+              <a:t>شروع می‌کنیم و هامیلتونی را به‌آرامی تغییر می‌دهیم تا، با برقراری شرایط بی‌دررو، به حالت هدف</a:t>
+            </a:r>
+            <a:r>
+              <a:rPr lang="en-US" dirty="0">
+                <a:cs typeface="B Nazanin" panose="00000400000000000000" pitchFamily="2" charset="-78"/>
+              </a:rPr>
+              <a:t> </a:t>
+            </a:r>
+            <a:r>
+              <a:rPr lang="ar-SA" dirty="0">
+                <a:cs typeface="B Nazanin" panose="00000400000000000000" pitchFamily="2" charset="-78"/>
+              </a:rPr>
+              <a:t>نزدیک شویم</a:t>
+            </a:r>
+            <a:endParaRPr lang="en-US" dirty="0">
+              <a:cs typeface="B Nazanin" panose="00000400000000000000" pitchFamily="2" charset="-78"/>
+            </a:endParaRPr>
+          </a:p>
+        </p:txBody>
+      </p:sp>
+      <p:sp>
+        <p:nvSpPr>
+          <p:cNvPr id="11" name="TextBox 10">
+            <a:extLst>
+              <a:ext uri="{FF2B5EF4-FFF2-40B4-BE49-F238E27FC236}">
+                <a16:creationId xmlns:a16="http://schemas.microsoft.com/office/drawing/2014/main" id="{9A1A5E39-955F-10B5-860A-86A85E26E24F}"/>
+              </a:ext>
+            </a:extLst>
+          </p:cNvPr>
+          <p:cNvSpPr txBox="1"/>
+          <p:nvPr/>
+        </p:nvSpPr>
+        <p:spPr>
+          <a:xfrm>
+            <a:off x="10085550" y="5613149"/>
+            <a:ext cx="1268250" cy="369332"/>
+          </a:xfrm>
+          <a:prstGeom prst="rect">
+            <a:avLst/>
+          </a:prstGeom>
+          <a:noFill/>
+        </p:spPr>
+        <p:txBody>
+          <a:bodyPr wrap="square" rtlCol="0">
+            <a:spAutoFit/>
+          </a:bodyPr>
+          <a:lstStyle/>
+          <a:p>
+            <a:pPr algn="r" rtl="1"/>
+            <a:r>
+              <a:rPr lang="fa-IR" dirty="0">
+                <a:cs typeface="B Nazanin" panose="00000400000000000000" pitchFamily="2" charset="-78"/>
+              </a:rPr>
+              <a:t>چقدر آهسته؟</a:t>
+            </a:r>
+            <a:endParaRPr lang="en-US" dirty="0">
+              <a:cs typeface="B Nazanin" panose="00000400000000000000" pitchFamily="2" charset="-78"/>
+            </a:endParaRPr>
+          </a:p>
+        </p:txBody>
+      </p:sp>
+      <p:pic>
+        <p:nvPicPr>
+          <p:cNvPr id="13" name="Picture 12">
+            <a:extLst>
+              <a:ext uri="{FF2B5EF4-FFF2-40B4-BE49-F238E27FC236}">
+                <a16:creationId xmlns:a16="http://schemas.microsoft.com/office/drawing/2014/main" id="{B304FA72-D3F4-FDC1-5923-EB890F271BA4}"/>
+              </a:ext>
+            </a:extLst>
+          </p:cNvPr>
+          <p:cNvPicPr>
+            <a:picLocks noChangeAspect="1"/>
+          </p:cNvPicPr>
+          <p:nvPr/>
+        </p:nvPicPr>
+        <p:blipFill>
+          <a:blip r:embed="rId7"/>
+          <a:stretch>
+            <a:fillRect/>
+          </a:stretch>
+        </p:blipFill>
+        <p:spPr>
+          <a:xfrm>
+            <a:off x="7964593" y="5597538"/>
+            <a:ext cx="1152247" cy="305480"/>
+          </a:xfrm>
+          <a:prstGeom prst="rect">
+            <a:avLst/>
+          </a:prstGeom>
+        </p:spPr>
+      </p:pic>
+      <p:pic>
+        <p:nvPicPr>
+          <p:cNvPr id="16" name="Picture 15">
+            <a:extLst>
+              <a:ext uri="{FF2B5EF4-FFF2-40B4-BE49-F238E27FC236}">
+                <a16:creationId xmlns:a16="http://schemas.microsoft.com/office/drawing/2014/main" id="{41B30A26-5E4F-78F5-6E34-0E75A6B203DA}"/>
+              </a:ext>
+            </a:extLst>
+          </p:cNvPr>
+          <p:cNvPicPr>
+            <a:picLocks noChangeAspect="1"/>
+          </p:cNvPicPr>
+          <p:nvPr/>
+        </p:nvPicPr>
+        <p:blipFill>
+          <a:blip r:embed="rId8"/>
+          <a:stretch>
+            <a:fillRect/>
+          </a:stretch>
+        </p:blipFill>
+        <p:spPr>
+          <a:xfrm>
+            <a:off x="5044372" y="5982481"/>
+            <a:ext cx="2312751" cy="666867"/>
+          </a:xfrm>
+          <a:prstGeom prst="rect">
+            <a:avLst/>
+          </a:prstGeom>
+        </p:spPr>
+      </p:pic>
+    </p:spTree>
+    <p:extLst>
+      <p:ext uri="{BB962C8B-B14F-4D97-AF65-F5344CB8AC3E}">
+        <p14:creationId xmlns:p14="http://schemas.microsoft.com/office/powerpoint/2010/main" val="1324293167"/>
+      </p:ext>
+    </p:extLst>
+  </p:cSld>
+  <p:clrMapOvr>
+    <a:masterClrMapping/>
+  </p:clrMapOvr>
+  <p:timing>
+    <p:tnLst>
+      <p:par>
+        <p:cTn id="1" dur="indefinite" restart="never" nodeType="tmRoot">
+          <p:childTnLst>
+            <p:seq concurrent="1" nextAc="seek">
+              <p:cTn id="2" dur="indefinite" nodeType="mainSeq">
+                <p:childTnLst>
+                  <p:par>
+                    <p:cTn id="3" fill="hold">
+                      <p:stCondLst>
+                        <p:cond delay="indefinite"/>
+                        <p:cond evt="onBegin" delay="0">
+                          <p:tn val="2"/>
+                        </p:cond>
+                      </p:stCondLst>
+                      <p:childTnLst>
+                        <p:par>
+                          <p:cTn id="4" fill="hold">
+                            <p:stCondLst>
+                              <p:cond delay="0"/>
+                            </p:stCondLst>
+                            <p:childTnLst>
+                              <p:par>
+                                <p:cTn id="5" presetID="1" presetClass="entr" presetSubtype="0" fill="hold" nodeType="withEffect">
+                                  <p:stCondLst>
+                                    <p:cond delay="0"/>
+                                  </p:stCondLst>
+                                  <p:childTnLst>
+                                    <p:set>
+                                      <p:cBhvr>
+                                        <p:cTn id="6" dur="1" fill="hold">
+                                          <p:stCondLst>
+                                            <p:cond delay="0"/>
+                                          </p:stCondLst>
+                                        </p:cTn>
+                                        <p:tgtEl>
+                                          <p:spTgt spid="13"/>
+                                        </p:tgtEl>
+                                        <p:attrNameLst>
+                                          <p:attrName>style.visibility</p:attrName>
+                                        </p:attrNameLst>
+                                      </p:cBhvr>
+                                      <p:to>
+                                        <p:strVal val="visible"/>
+                                      </p:to>
+                                    </p:set>
+                                  </p:childTnLst>
+                                </p:cTn>
+                              </p:par>
+                            </p:childTnLst>
+                          </p:cTn>
+                        </p:par>
+                      </p:childTnLst>
+                    </p:cTn>
+                  </p:par>
+                  <p:par>
+                    <p:cTn id="7" fill="hold">
+                      <p:stCondLst>
+                        <p:cond delay="indefinite"/>
+                      </p:stCondLst>
+                      <p:childTnLst>
+                        <p:par>
+                          <p:cTn id="8" fill="hold">
+                            <p:stCondLst>
+                              <p:cond delay="0"/>
+                            </p:stCondLst>
+                            <p:childTnLst>
+                              <p:par>
+                                <p:cTn id="9" presetID="1" presetClass="entr" presetSubtype="0" fill="hold" nodeType="clickEffect">
+                                  <p:stCondLst>
+                                    <p:cond delay="0"/>
+                                  </p:stCondLst>
+                                  <p:childTnLst>
+                                    <p:set>
+                                      <p:cBhvr>
+                                        <p:cTn id="10" dur="1" fill="hold">
+                                          <p:stCondLst>
+                                            <p:cond delay="0"/>
+                                          </p:stCondLst>
+                                        </p:cTn>
+                                        <p:tgtEl>
+                                          <p:spTgt spid="16"/>
+                                        </p:tgtEl>
+                                        <p:attrNameLst>
+                                          <p:attrName>style.visibility</p:attrName>
+                                        </p:attrNameLst>
+                                      </p:cBhvr>
+                                      <p:to>
+                                        <p:strVal val="visible"/>
+                                      </p:to>
+                                    </p:set>
+                                  </p:childTnLst>
+                                </p:cTn>
+                              </p:par>
+                            </p:childTnLst>
+                          </p:cTn>
+                        </p:par>
+                      </p:childTnLst>
+                    </p:cTn>
+                  </p:par>
+                </p:childTnLst>
+              </p:cTn>
+              <p:prevCondLst>
+                <p:cond evt="onPrev" delay="0">
+                  <p:tgtEl>
+                    <p:sldTgt/>
+                  </p:tgtEl>
+                </p:cond>
+              </p:prevCondLst>
+              <p:nextCondLst>
+                <p:cond evt="onNext" delay="0">
+                  <p:tgtEl>
+                    <p:sldTgt/>
+                  </p:tgtEl>
+                </p:cond>
+              </p:nextCondLst>
+            </p:seq>
+          </p:childTnLst>
+        </p:cTn>
+      </p:par>
+    </p:tnLst>
+  </p:timing>
+</p:sld>
+</file>
+
+<file path=ppt/slides/slide16.xml><?xml version="1.0" encoding="utf-8"?>
+<p:sld xmlns:a="http://schemas.openxmlformats.org/drawingml/2006/main" xmlns:r="http://schemas.openxmlformats.org/officeDocument/2006/relationships" xmlns:p="http://schemas.openxmlformats.org/presentationml/2006/main">
+  <p:cSld>
+    <p:spTree>
+      <p:nvGrpSpPr>
+        <p:cNvPr id="1" name=""/>
+        <p:cNvGrpSpPr/>
+        <p:nvPr/>
+      </p:nvGrpSpPr>
+      <p:grpSpPr>
+        <a:xfrm>
+          <a:off x="0" y="0"/>
+          <a:ext cx="0" cy="0"/>
+          <a:chOff x="0" y="0"/>
+          <a:chExt cx="0" cy="0"/>
+        </a:xfrm>
+      </p:grpSpPr>
+      <p:sp>
+        <p:nvSpPr>
+          <p:cNvPr id="2" name="Title 1">
+            <a:extLst>
+              <a:ext uri="{FF2B5EF4-FFF2-40B4-BE49-F238E27FC236}">
+                <a16:creationId xmlns:a16="http://schemas.microsoft.com/office/drawing/2014/main" id="{57DBC9D2-DB7A-EF6E-6380-5A1ED6D62E41}"/>
+              </a:ext>
+            </a:extLst>
+          </p:cNvPr>
+          <p:cNvSpPr>
+            <a:spLocks noGrp="1"/>
+          </p:cNvSpPr>
+          <p:nvPr>
+            <p:ph type="title"/>
+          </p:nvPr>
+        </p:nvSpPr>
+        <p:spPr/>
+        <p:txBody>
+          <a:bodyPr/>
+          <a:lstStyle/>
+          <a:p>
+            <a:r>
+              <a:rPr lang="en-US" dirty="0" err="1"/>
+              <a:t>Qiskit</a:t>
+            </a:r>
+            <a:r>
+              <a:rPr lang="en-US" dirty="0"/>
+              <a:t> implementation for </a:t>
+            </a:r>
+            <a:r>
+              <a:rPr lang="en-US" dirty="0" err="1"/>
+              <a:t>Ising</a:t>
+            </a:r>
+            <a:r>
+              <a:rPr lang="en-US" dirty="0"/>
+              <a:t> model</a:t>
+            </a:r>
+          </a:p>
+        </p:txBody>
+      </p:sp>
+      <p:pic>
+        <p:nvPicPr>
+          <p:cNvPr id="7" name="Content Placeholder 6">
+            <a:extLst>
+              <a:ext uri="{FF2B5EF4-FFF2-40B4-BE49-F238E27FC236}">
+                <a16:creationId xmlns:a16="http://schemas.microsoft.com/office/drawing/2014/main" id="{D32BDB70-FD48-A0EE-277B-1AB0E4CB8C87}"/>
+              </a:ext>
+            </a:extLst>
+          </p:cNvPr>
+          <p:cNvPicPr>
+            <a:picLocks noGrp="1" noChangeAspect="1"/>
+          </p:cNvPicPr>
+          <p:nvPr>
+            <p:ph idx="1"/>
+          </p:nvPr>
+        </p:nvPicPr>
+        <p:blipFill>
+          <a:blip r:embed="rId2"/>
+          <a:stretch>
+            <a:fillRect/>
+          </a:stretch>
+        </p:blipFill>
+        <p:spPr>
+          <a:xfrm>
+            <a:off x="838200" y="3841147"/>
+            <a:ext cx="7520420" cy="2833670"/>
+          </a:xfrm>
+        </p:spPr>
+      </p:pic>
+      <p:pic>
+        <p:nvPicPr>
+          <p:cNvPr id="5" name="Picture 4">
+            <a:extLst>
+              <a:ext uri="{FF2B5EF4-FFF2-40B4-BE49-F238E27FC236}">
+                <a16:creationId xmlns:a16="http://schemas.microsoft.com/office/drawing/2014/main" id="{E3D1F7B8-5706-674F-718F-32D6B6D3335F}"/>
+              </a:ext>
+            </a:extLst>
+          </p:cNvPr>
+          <p:cNvPicPr>
+            <a:picLocks noChangeAspect="1"/>
+          </p:cNvPicPr>
+          <p:nvPr/>
+        </p:nvPicPr>
+        <p:blipFill>
+          <a:blip r:embed="rId3"/>
+          <a:stretch>
+            <a:fillRect/>
+          </a:stretch>
+        </p:blipFill>
+        <p:spPr>
+          <a:xfrm>
+            <a:off x="519546" y="1455162"/>
+            <a:ext cx="5127550" cy="2202438"/>
+          </a:xfrm>
+          <a:prstGeom prst="rect">
+            <a:avLst/>
+          </a:prstGeom>
+        </p:spPr>
+      </p:pic>
+      <p:pic>
+        <p:nvPicPr>
+          <p:cNvPr id="4" name="Picture 3">
+            <a:extLst>
+              <a:ext uri="{FF2B5EF4-FFF2-40B4-BE49-F238E27FC236}">
+                <a16:creationId xmlns:a16="http://schemas.microsoft.com/office/drawing/2014/main" id="{B62AC7AB-CD53-5D5B-2EA0-5D7F1AC1B8CE}"/>
+              </a:ext>
+            </a:extLst>
+          </p:cNvPr>
+          <p:cNvPicPr>
+            <a:picLocks noChangeAspect="1"/>
+          </p:cNvPicPr>
+          <p:nvPr/>
+        </p:nvPicPr>
+        <p:blipFill>
+          <a:blip r:embed="rId4"/>
+          <a:stretch>
+            <a:fillRect/>
+          </a:stretch>
+        </p:blipFill>
+        <p:spPr>
+          <a:xfrm>
+            <a:off x="8520528" y="5078570"/>
+            <a:ext cx="2833272" cy="231651"/>
+          </a:xfrm>
+          <a:prstGeom prst="rect">
+            <a:avLst/>
+          </a:prstGeom>
+        </p:spPr>
+      </p:pic>
+      <p:pic>
+        <p:nvPicPr>
+          <p:cNvPr id="8" name="Picture 7">
+            <a:extLst>
+              <a:ext uri="{FF2B5EF4-FFF2-40B4-BE49-F238E27FC236}">
+                <a16:creationId xmlns:a16="http://schemas.microsoft.com/office/drawing/2014/main" id="{C6F29AEE-4657-27AC-64A1-E48CCE7AEA50}"/>
+              </a:ext>
+            </a:extLst>
+          </p:cNvPr>
+          <p:cNvPicPr>
+            <a:picLocks noChangeAspect="1"/>
+          </p:cNvPicPr>
+          <p:nvPr/>
+        </p:nvPicPr>
+        <p:blipFill>
+          <a:blip r:embed="rId5"/>
+          <a:stretch>
+            <a:fillRect/>
+          </a:stretch>
+        </p:blipFill>
+        <p:spPr>
+          <a:xfrm>
+            <a:off x="6922360" y="1287713"/>
+            <a:ext cx="3965418" cy="2537336"/>
+          </a:xfrm>
+          <a:prstGeom prst="rect">
+            <a:avLst/>
+          </a:prstGeom>
+        </p:spPr>
+      </p:pic>
+    </p:spTree>
+    <p:extLst>
+      <p:ext uri="{BB962C8B-B14F-4D97-AF65-F5344CB8AC3E}">
+        <p14:creationId xmlns:p14="http://schemas.microsoft.com/office/powerpoint/2010/main" val="3304332057"/>
+      </p:ext>
+    </p:extLst>
+  </p:cSld>
+  <p:clrMapOvr>
+    <a:masterClrMapping/>
+  </p:clrMapOvr>
+</p:sld>
+</file>
+
+<file path=ppt/slides/slide17.xml><?xml version="1.0" encoding="utf-8"?>
+<p:sld xmlns:a="http://schemas.openxmlformats.org/drawingml/2006/main" xmlns:r="http://schemas.openxmlformats.org/officeDocument/2006/relationships" xmlns:p="http://schemas.openxmlformats.org/presentationml/2006/main">
+  <p:cSld>
+    <p:spTree>
+      <p:nvGrpSpPr>
+        <p:cNvPr id="1" name=""/>
+        <p:cNvGrpSpPr/>
+        <p:nvPr/>
+      </p:nvGrpSpPr>
+      <p:grpSpPr>
+        <a:xfrm>
+          <a:off x="0" y="0"/>
+          <a:ext cx="0" cy="0"/>
+          <a:chOff x="0" y="0"/>
+          <a:chExt cx="0" cy="0"/>
+        </a:xfrm>
+      </p:grpSpPr>
+      <p:sp>
+        <p:nvSpPr>
+          <p:cNvPr id="2" name="Title 1">
+            <a:extLst>
+              <a:ext uri="{FF2B5EF4-FFF2-40B4-BE49-F238E27FC236}">
+                <a16:creationId xmlns:a16="http://schemas.microsoft.com/office/drawing/2014/main" id="{C67CD37A-98B9-ABEB-64A0-967298078782}"/>
+              </a:ext>
+            </a:extLst>
+          </p:cNvPr>
+          <p:cNvSpPr>
+            <a:spLocks noGrp="1"/>
+          </p:cNvSpPr>
+          <p:nvPr>
+            <p:ph type="title"/>
+          </p:nvPr>
+        </p:nvSpPr>
+        <p:spPr/>
+        <p:txBody>
+          <a:bodyPr/>
+          <a:lstStyle/>
+          <a:p>
+            <a:r>
+              <a:rPr lang="en-US" dirty="0"/>
+              <a:t>Challenges</a:t>
+            </a:r>
+          </a:p>
+        </p:txBody>
+      </p:sp>
+      <p:sp>
+        <p:nvSpPr>
+          <p:cNvPr id="3" name="Content Placeholder 2">
+            <a:extLst>
+              <a:ext uri="{FF2B5EF4-FFF2-40B4-BE49-F238E27FC236}">
+                <a16:creationId xmlns:a16="http://schemas.microsoft.com/office/drawing/2014/main" id="{0FD1C86C-C2EB-E9B5-81C1-EA8F880085F7}"/>
+              </a:ext>
+            </a:extLst>
+          </p:cNvPr>
+          <p:cNvSpPr>
+            <a:spLocks noGrp="1"/>
+          </p:cNvSpPr>
+          <p:nvPr>
+            <p:ph idx="1"/>
+          </p:nvPr>
+        </p:nvSpPr>
+        <p:spPr/>
+        <p:txBody>
+          <a:bodyPr>
+            <a:normAutofit/>
+          </a:bodyPr>
+          <a:lstStyle/>
+          <a:p>
+            <a:r>
+              <a:rPr lang="en-US" sz="2400" dirty="0"/>
+              <a:t>Linear Scheduling time: s(t)or nonlinear</a:t>
+            </a:r>
+          </a:p>
+        </p:txBody>
+      </p:sp>
+      <p:pic>
+        <p:nvPicPr>
+          <p:cNvPr id="5" name="Picture 4">
+            <a:extLst>
+              <a:ext uri="{FF2B5EF4-FFF2-40B4-BE49-F238E27FC236}">
+                <a16:creationId xmlns:a16="http://schemas.microsoft.com/office/drawing/2014/main" id="{FEFEA785-545A-F6E1-03D4-7C237A3CB346}"/>
+              </a:ext>
+            </a:extLst>
+          </p:cNvPr>
+          <p:cNvPicPr>
+            <a:picLocks noChangeAspect="1"/>
+          </p:cNvPicPr>
+          <p:nvPr/>
+        </p:nvPicPr>
+        <p:blipFill>
+          <a:blip r:embed="rId2"/>
+          <a:stretch>
+            <a:fillRect/>
+          </a:stretch>
+        </p:blipFill>
+        <p:spPr>
+          <a:xfrm>
+            <a:off x="4211043" y="2846392"/>
+            <a:ext cx="3371850" cy="3133725"/>
+          </a:xfrm>
+          <a:prstGeom prst="rect">
+            <a:avLst/>
+          </a:prstGeom>
+          <a:ln>
+            <a:noFill/>
+          </a:ln>
+          <a:effectLst>
+            <a:outerShdw blurRad="190500" algn="tl" rotWithShape="0">
+              <a:srgbClr val="000000">
+                <a:alpha val="70000"/>
+              </a:srgbClr>
+            </a:outerShdw>
+          </a:effectLst>
+        </p:spPr>
+      </p:pic>
+      <p:pic>
+        <p:nvPicPr>
+          <p:cNvPr id="7" name="Picture 6">
+            <a:extLst>
+              <a:ext uri="{FF2B5EF4-FFF2-40B4-BE49-F238E27FC236}">
+                <a16:creationId xmlns:a16="http://schemas.microsoft.com/office/drawing/2014/main" id="{FA424078-A66E-1AE8-87CF-DFE5AB3594EE}"/>
+              </a:ext>
+            </a:extLst>
+          </p:cNvPr>
+          <p:cNvPicPr>
+            <a:picLocks noChangeAspect="1"/>
+          </p:cNvPicPr>
+          <p:nvPr/>
+        </p:nvPicPr>
+        <p:blipFill>
+          <a:blip r:embed="rId3"/>
+          <a:stretch>
+            <a:fillRect/>
+          </a:stretch>
+        </p:blipFill>
+        <p:spPr>
+          <a:xfrm>
+            <a:off x="1488913" y="2646579"/>
+            <a:ext cx="1019175" cy="571500"/>
+          </a:xfrm>
+          <a:prstGeom prst="rect">
+            <a:avLst/>
+          </a:prstGeom>
+        </p:spPr>
+      </p:pic>
+      <p:sp>
+        <p:nvSpPr>
+          <p:cNvPr id="4" name="TextBox 3">
+            <a:extLst>
+              <a:ext uri="{FF2B5EF4-FFF2-40B4-BE49-F238E27FC236}">
+                <a16:creationId xmlns:a16="http://schemas.microsoft.com/office/drawing/2014/main" id="{A0A57D03-EF72-4C36-6E2C-60186E850BEE}"/>
+              </a:ext>
+            </a:extLst>
+          </p:cNvPr>
+          <p:cNvSpPr txBox="1"/>
+          <p:nvPr/>
+        </p:nvSpPr>
+        <p:spPr>
+          <a:xfrm>
+            <a:off x="7161291" y="2280214"/>
+            <a:ext cx="4499572" cy="369332"/>
+          </a:xfrm>
+          <a:prstGeom prst="rect">
+            <a:avLst/>
+          </a:prstGeom>
+          <a:noFill/>
+        </p:spPr>
+        <p:txBody>
+          <a:bodyPr wrap="square" rtlCol="0">
+            <a:spAutoFit/>
+          </a:bodyPr>
+          <a:lstStyle/>
+          <a:p>
+            <a:pPr algn="r" rtl="1"/>
+            <a:r>
+              <a:rPr lang="fa-IR" dirty="0">
+                <a:cs typeface="B Nazanin" panose="00000400000000000000" pitchFamily="2" charset="-78"/>
+              </a:rPr>
+              <a:t>زمانبندی: از هر قسمت با چه سرعتی پیش می رویم؟</a:t>
+            </a:r>
+            <a:endParaRPr lang="en-US" dirty="0">
+              <a:cs typeface="B Nazanin" panose="00000400000000000000" pitchFamily="2" charset="-78"/>
+            </a:endParaRPr>
+          </a:p>
+        </p:txBody>
+      </p:sp>
+      <p:pic>
+        <p:nvPicPr>
+          <p:cNvPr id="8" name="Picture 7">
+            <a:extLst>
+              <a:ext uri="{FF2B5EF4-FFF2-40B4-BE49-F238E27FC236}">
+                <a16:creationId xmlns:a16="http://schemas.microsoft.com/office/drawing/2014/main" id="{5D98969A-187C-4482-D3F0-5391860A1546}"/>
+              </a:ext>
+            </a:extLst>
+          </p:cNvPr>
+          <p:cNvPicPr>
+            <a:picLocks noChangeAspect="1"/>
+          </p:cNvPicPr>
+          <p:nvPr/>
+        </p:nvPicPr>
+        <p:blipFill>
+          <a:blip r:embed="rId4"/>
+          <a:stretch>
+            <a:fillRect/>
+          </a:stretch>
+        </p:blipFill>
+        <p:spPr>
+          <a:xfrm>
+            <a:off x="702775" y="5233657"/>
+            <a:ext cx="2819400" cy="609600"/>
+          </a:xfrm>
+          <a:prstGeom prst="rect">
+            <a:avLst/>
+          </a:prstGeom>
+        </p:spPr>
+      </p:pic>
+    </p:spTree>
+    <p:extLst>
+      <p:ext uri="{BB962C8B-B14F-4D97-AF65-F5344CB8AC3E}">
+        <p14:creationId xmlns:p14="http://schemas.microsoft.com/office/powerpoint/2010/main" val="2231561434"/>
+      </p:ext>
+    </p:extLst>
+  </p:cSld>
+  <p:clrMapOvr>
+    <a:masterClrMapping/>
+  </p:clrMapOvr>
+  <p:timing>
+    <p:tnLst>
+      <p:par>
+        <p:cTn id="1" dur="indefinite" restart="never" nodeType="tmRoot">
+          <p:childTnLst>
+            <p:seq concurrent="1" nextAc="seek">
+              <p:cTn id="2" dur="indefinite" nodeType="mainSeq">
+                <p:childTnLst>
+                  <p:par>
+                    <p:cTn id="3" fill="hold">
+                      <p:stCondLst>
+                        <p:cond delay="indefinite"/>
+                      </p:stCondLst>
+                      <p:childTnLst>
+                        <p:par>
+                          <p:cTn id="4" fill="hold">
+                            <p:stCondLst>
+                              <p:cond delay="0"/>
+                            </p:stCondLst>
+                            <p:childTnLst>
+                              <p:par>
+                                <p:cTn id="5" presetID="1" presetClass="entr" presetSubtype="0" fill="hold" nodeType="clickEffect">
+                                  <p:stCondLst>
+                                    <p:cond delay="0"/>
+                                  </p:stCondLst>
+                                  <p:childTnLst>
+                                    <p:set>
+                                      <p:cBhvr>
+                                        <p:cTn id="6" dur="1" fill="hold">
+                                          <p:stCondLst>
+                                            <p:cond delay="0"/>
+                                          </p:stCondLst>
+                                        </p:cTn>
+                                        <p:tgtEl>
+                                          <p:spTgt spid="8"/>
+                                        </p:tgtEl>
+                                        <p:attrNameLst>
+                                          <p:attrName>style.visibility</p:attrName>
+                                        </p:attrNameLst>
+                                      </p:cBhvr>
+                                      <p:to>
+                                        <p:strVal val="visible"/>
+                                      </p:to>
+                                    </p:set>
+                                  </p:childTnLst>
+                                </p:cTn>
+                              </p:par>
+                            </p:childTnLst>
+                          </p:cTn>
+                        </p:par>
+                      </p:childTnLst>
+                    </p:cTn>
+                  </p:par>
+                </p:childTnLst>
+              </p:cTn>
+              <p:prevCondLst>
+                <p:cond evt="onPrev" delay="0">
+                  <p:tgtEl>
+                    <p:sldTgt/>
+                  </p:tgtEl>
+                </p:cond>
+              </p:prevCondLst>
+              <p:nextCondLst>
+                <p:cond evt="onNext" delay="0">
+                  <p:tgtEl>
+                    <p:sldTgt/>
+                  </p:tgtEl>
+                </p:cond>
+              </p:nextCondLst>
+            </p:seq>
+          </p:childTnLst>
+        </p:cTn>
+      </p:par>
+    </p:tnLst>
+  </p:timing>
+</p:sld>
+</file>
+
+<file path=ppt/slides/slide18.xml><?xml version="1.0" encoding="utf-8"?>
+<p:sld xmlns:a="http://schemas.openxmlformats.org/drawingml/2006/main" xmlns:r="http://schemas.openxmlformats.org/officeDocument/2006/relationships" xmlns:p="http://schemas.openxmlformats.org/presentationml/2006/main">
+  <p:cSld>
+    <p:spTree>
+      <p:nvGrpSpPr>
+        <p:cNvPr id="1" name=""/>
+        <p:cNvGrpSpPr/>
+        <p:nvPr/>
+      </p:nvGrpSpPr>
+      <p:grpSpPr>
+        <a:xfrm>
+          <a:off x="0" y="0"/>
+          <a:ext cx="0" cy="0"/>
+          <a:chOff x="0" y="0"/>
+          <a:chExt cx="0" cy="0"/>
+        </a:xfrm>
+      </p:grpSpPr>
+      <p:sp>
+        <p:nvSpPr>
+          <p:cNvPr id="2" name="Title 1">
+            <a:extLst>
+              <a:ext uri="{FF2B5EF4-FFF2-40B4-BE49-F238E27FC236}">
+                <a16:creationId xmlns:a16="http://schemas.microsoft.com/office/drawing/2014/main" id="{783C2165-D8E0-5031-DC45-2F60F85B9911}"/>
+              </a:ext>
+            </a:extLst>
+          </p:cNvPr>
+          <p:cNvSpPr>
+            <a:spLocks noGrp="1"/>
+          </p:cNvSpPr>
+          <p:nvPr>
+            <p:ph type="title"/>
+          </p:nvPr>
+        </p:nvSpPr>
+        <p:spPr>
+          <a:xfrm>
+            <a:off x="838200" y="365126"/>
+            <a:ext cx="10515600" cy="902438"/>
+          </a:xfrm>
+        </p:spPr>
+        <p:txBody>
+          <a:bodyPr>
+            <a:normAutofit/>
+          </a:bodyPr>
+          <a:lstStyle/>
+          <a:p>
+            <a:r>
+              <a:rPr lang="en-US" sz="3200" dirty="0" err="1"/>
+              <a:t>Qiskit</a:t>
+            </a:r>
+            <a:r>
+              <a:rPr lang="en-US" sz="3200" dirty="0"/>
+              <a:t> implementation for </a:t>
+            </a:r>
+            <a:r>
+              <a:rPr lang="en-US" sz="3200" dirty="0" err="1"/>
+              <a:t>Ising</a:t>
+            </a:r>
+            <a:r>
+              <a:rPr lang="en-US" sz="3200" dirty="0"/>
+              <a:t> model</a:t>
+            </a:r>
+          </a:p>
+        </p:txBody>
+      </p:sp>
+      <p:pic>
+        <p:nvPicPr>
+          <p:cNvPr id="5" name="Picture 4">
+            <a:extLst>
+              <a:ext uri="{FF2B5EF4-FFF2-40B4-BE49-F238E27FC236}">
+                <a16:creationId xmlns:a16="http://schemas.microsoft.com/office/drawing/2014/main" id="{8F934B46-F878-83C8-66CB-BC3BF80A70FB}"/>
+              </a:ext>
+            </a:extLst>
+          </p:cNvPr>
+          <p:cNvPicPr>
+            <a:picLocks noChangeAspect="1"/>
+          </p:cNvPicPr>
+          <p:nvPr/>
+        </p:nvPicPr>
+        <p:blipFill>
+          <a:blip r:embed="rId2"/>
+          <a:stretch>
+            <a:fillRect/>
+          </a:stretch>
+        </p:blipFill>
+        <p:spPr>
+          <a:xfrm>
+            <a:off x="6545863" y="1745213"/>
+            <a:ext cx="4674870" cy="4747662"/>
+          </a:xfrm>
+          <a:prstGeom prst="rect">
+            <a:avLst/>
+          </a:prstGeom>
+        </p:spPr>
+      </p:pic>
+      <p:pic>
+        <p:nvPicPr>
+          <p:cNvPr id="7" name="Picture 6">
+            <a:extLst>
+              <a:ext uri="{FF2B5EF4-FFF2-40B4-BE49-F238E27FC236}">
+                <a16:creationId xmlns:a16="http://schemas.microsoft.com/office/drawing/2014/main" id="{F4CCA3CB-E8F1-E3E2-DD14-F547CB298A2F}"/>
+              </a:ext>
+            </a:extLst>
+          </p:cNvPr>
+          <p:cNvPicPr>
+            <a:picLocks noChangeAspect="1"/>
+          </p:cNvPicPr>
+          <p:nvPr/>
+        </p:nvPicPr>
+        <p:blipFill>
+          <a:blip r:embed="rId3"/>
+          <a:stretch>
+            <a:fillRect/>
+          </a:stretch>
+        </p:blipFill>
+        <p:spPr>
+          <a:xfrm>
+            <a:off x="10435251" y="1364289"/>
+            <a:ext cx="990600" cy="247650"/>
+          </a:xfrm>
+          <a:prstGeom prst="rect">
+            <a:avLst/>
+          </a:prstGeom>
+        </p:spPr>
+      </p:pic>
+      <p:pic>
+        <p:nvPicPr>
+          <p:cNvPr id="9" name="Picture 8">
+            <a:extLst>
+              <a:ext uri="{FF2B5EF4-FFF2-40B4-BE49-F238E27FC236}">
+                <a16:creationId xmlns:a16="http://schemas.microsoft.com/office/drawing/2014/main" id="{DD8282D9-C132-1423-2D3B-3BEA8E1B30B0}"/>
+              </a:ext>
+            </a:extLst>
+          </p:cNvPr>
+          <p:cNvPicPr>
+            <a:picLocks noChangeAspect="1"/>
+          </p:cNvPicPr>
+          <p:nvPr/>
+        </p:nvPicPr>
+        <p:blipFill>
+          <a:blip r:embed="rId4"/>
+          <a:stretch>
+            <a:fillRect/>
+          </a:stretch>
+        </p:blipFill>
+        <p:spPr>
+          <a:xfrm>
+            <a:off x="1058148" y="2540034"/>
+            <a:ext cx="3438525" cy="333375"/>
+          </a:xfrm>
+          <a:prstGeom prst="rect">
+            <a:avLst/>
+          </a:prstGeom>
+        </p:spPr>
+      </p:pic>
+      <p:pic>
+        <p:nvPicPr>
+          <p:cNvPr id="11" name="Picture 10">
+            <a:extLst>
+              <a:ext uri="{FF2B5EF4-FFF2-40B4-BE49-F238E27FC236}">
+                <a16:creationId xmlns:a16="http://schemas.microsoft.com/office/drawing/2014/main" id="{A3B25E86-02ED-25F7-A9A9-95F6C68DC9F7}"/>
+              </a:ext>
+            </a:extLst>
+          </p:cNvPr>
+          <p:cNvPicPr>
+            <a:picLocks noChangeAspect="1"/>
+          </p:cNvPicPr>
+          <p:nvPr/>
+        </p:nvPicPr>
+        <p:blipFill>
+          <a:blip r:embed="rId5"/>
+          <a:stretch>
+            <a:fillRect/>
+          </a:stretch>
+        </p:blipFill>
+        <p:spPr>
+          <a:xfrm>
+            <a:off x="971267" y="5441836"/>
+            <a:ext cx="3170268" cy="646830"/>
+          </a:xfrm>
+          <a:prstGeom prst="rect">
+            <a:avLst/>
+          </a:prstGeom>
+        </p:spPr>
+      </p:pic>
+      <p:pic>
+        <p:nvPicPr>
+          <p:cNvPr id="12" name="Picture 11">
+            <a:extLst>
+              <a:ext uri="{FF2B5EF4-FFF2-40B4-BE49-F238E27FC236}">
+                <a16:creationId xmlns:a16="http://schemas.microsoft.com/office/drawing/2014/main" id="{662185D2-326B-29E1-C0A6-9851C5954E87}"/>
+              </a:ext>
+            </a:extLst>
+          </p:cNvPr>
+          <p:cNvPicPr>
+            <a:picLocks noChangeAspect="1"/>
+          </p:cNvPicPr>
+          <p:nvPr/>
+        </p:nvPicPr>
+        <p:blipFill>
+          <a:blip r:embed="rId6"/>
+          <a:stretch>
+            <a:fillRect/>
+          </a:stretch>
+        </p:blipFill>
+        <p:spPr>
+          <a:xfrm>
+            <a:off x="957293" y="3052782"/>
+            <a:ext cx="4688845" cy="1965066"/>
+          </a:xfrm>
+          <a:prstGeom prst="rect">
+            <a:avLst/>
+          </a:prstGeom>
+        </p:spPr>
+      </p:pic>
+      <p:pic>
+        <p:nvPicPr>
+          <p:cNvPr id="4" name="Picture 3">
+            <a:extLst>
+              <a:ext uri="{FF2B5EF4-FFF2-40B4-BE49-F238E27FC236}">
+                <a16:creationId xmlns:a16="http://schemas.microsoft.com/office/drawing/2014/main" id="{D619E5D5-DC5C-EF02-F669-C503E871B88F}"/>
+              </a:ext>
+            </a:extLst>
+          </p:cNvPr>
+          <p:cNvPicPr>
+            <a:picLocks noChangeAspect="1"/>
+          </p:cNvPicPr>
+          <p:nvPr/>
+        </p:nvPicPr>
+        <p:blipFill>
+          <a:blip r:embed="rId7"/>
+          <a:stretch>
+            <a:fillRect/>
+          </a:stretch>
+        </p:blipFill>
+        <p:spPr>
+          <a:xfrm>
+            <a:off x="875609" y="1459129"/>
+            <a:ext cx="4770529" cy="846250"/>
+          </a:xfrm>
+          <a:prstGeom prst="rect">
+            <a:avLst/>
+          </a:prstGeom>
+        </p:spPr>
+      </p:pic>
+      <p:pic>
+        <p:nvPicPr>
+          <p:cNvPr id="8" name="Picture 7">
+            <a:extLst>
+              <a:ext uri="{FF2B5EF4-FFF2-40B4-BE49-F238E27FC236}">
+                <a16:creationId xmlns:a16="http://schemas.microsoft.com/office/drawing/2014/main" id="{578A5C35-7895-1352-48DA-55F82FE35688}"/>
+              </a:ext>
+            </a:extLst>
+          </p:cNvPr>
+          <p:cNvPicPr>
+            <a:picLocks noChangeAspect="1"/>
+          </p:cNvPicPr>
+          <p:nvPr/>
+        </p:nvPicPr>
+        <p:blipFill>
+          <a:blip r:embed="rId8"/>
+          <a:stretch>
+            <a:fillRect/>
+          </a:stretch>
+        </p:blipFill>
+        <p:spPr>
+          <a:xfrm>
+            <a:off x="4370521" y="6296908"/>
+            <a:ext cx="1993249" cy="391931"/>
+          </a:xfrm>
+          <a:prstGeom prst="rect">
+            <a:avLst/>
+          </a:prstGeom>
+        </p:spPr>
+      </p:pic>
+    </p:spTree>
+    <p:extLst>
+      <p:ext uri="{BB962C8B-B14F-4D97-AF65-F5344CB8AC3E}">
+        <p14:creationId xmlns:p14="http://schemas.microsoft.com/office/powerpoint/2010/main" val="1786286864"/>
+      </p:ext>
+    </p:extLst>
+  </p:cSld>
+  <p:clrMapOvr>
+    <a:masterClrMapping/>
+  </p:clrMapOvr>
+</p:sld>
+</file>
+
+<file path=ppt/slides/slide19.xml><?xml version="1.0" encoding="utf-8"?>
+<p:sld xmlns:a="http://schemas.openxmlformats.org/drawingml/2006/main" xmlns:r="http://schemas.openxmlformats.org/officeDocument/2006/relationships" xmlns:p="http://schemas.openxmlformats.org/presentationml/2006/main">
+  <p:cSld>
+    <p:spTree>
+      <p:nvGrpSpPr>
+        <p:cNvPr id="1" name=""/>
+        <p:cNvGrpSpPr/>
+        <p:nvPr/>
+      </p:nvGrpSpPr>
+      <p:grpSpPr>
+        <a:xfrm>
+          <a:off x="0" y="0"/>
+          <a:ext cx="0" cy="0"/>
+          <a:chOff x="0" y="0"/>
+          <a:chExt cx="0" cy="0"/>
+        </a:xfrm>
+      </p:grpSpPr>
+      <p:sp>
+        <p:nvSpPr>
+          <p:cNvPr id="2" name="Title 1">
+            <a:extLst>
+              <a:ext uri="{FF2B5EF4-FFF2-40B4-BE49-F238E27FC236}">
+                <a16:creationId xmlns:a16="http://schemas.microsoft.com/office/drawing/2014/main" id="{FFD5BCF9-B143-5051-11E7-F9D60F18D8A3}"/>
+              </a:ext>
+            </a:extLst>
+          </p:cNvPr>
+          <p:cNvSpPr>
+            <a:spLocks noGrp="1"/>
+          </p:cNvSpPr>
+          <p:nvPr>
+            <p:ph type="title"/>
+          </p:nvPr>
+        </p:nvSpPr>
+        <p:spPr/>
+        <p:txBody>
+          <a:bodyPr/>
+          <a:lstStyle/>
+          <a:p>
+            <a:r>
+              <a:rPr lang="en-US" dirty="0"/>
+              <a:t>Complexity</a:t>
+            </a:r>
+          </a:p>
+        </p:txBody>
+      </p:sp>
+      <p:pic>
+        <p:nvPicPr>
+          <p:cNvPr id="5" name="Picture 4">
+            <a:extLst>
+              <a:ext uri="{FF2B5EF4-FFF2-40B4-BE49-F238E27FC236}">
+                <a16:creationId xmlns:a16="http://schemas.microsoft.com/office/drawing/2014/main" id="{2B3CC239-DA59-CBC3-59F5-7E2BE422F694}"/>
+              </a:ext>
+            </a:extLst>
+          </p:cNvPr>
+          <p:cNvPicPr>
+            <a:picLocks noChangeAspect="1"/>
+          </p:cNvPicPr>
+          <p:nvPr/>
+        </p:nvPicPr>
+        <p:blipFill>
+          <a:blip r:embed="rId2"/>
+          <a:stretch>
+            <a:fillRect/>
+          </a:stretch>
+        </p:blipFill>
+        <p:spPr>
+          <a:xfrm>
+            <a:off x="765772" y="4305303"/>
+            <a:ext cx="5622940" cy="1020780"/>
+          </a:xfrm>
+          <a:prstGeom prst="rect">
+            <a:avLst/>
+          </a:prstGeom>
+        </p:spPr>
+      </p:pic>
+      <p:pic>
+        <p:nvPicPr>
+          <p:cNvPr id="7" name="Picture 6">
+            <a:extLst>
+              <a:ext uri="{FF2B5EF4-FFF2-40B4-BE49-F238E27FC236}">
+                <a16:creationId xmlns:a16="http://schemas.microsoft.com/office/drawing/2014/main" id="{F9A248B5-254A-CDCC-082F-3D30BD89B0C2}"/>
+              </a:ext>
+            </a:extLst>
+          </p:cNvPr>
+          <p:cNvPicPr>
+            <a:picLocks noChangeAspect="1"/>
+          </p:cNvPicPr>
+          <p:nvPr/>
+        </p:nvPicPr>
+        <p:blipFill>
+          <a:blip r:embed="rId3"/>
+          <a:stretch>
+            <a:fillRect/>
+          </a:stretch>
+        </p:blipFill>
+        <p:spPr>
+          <a:xfrm>
+            <a:off x="6953924" y="2990210"/>
+            <a:ext cx="3874021" cy="2630187"/>
+          </a:xfrm>
+          <a:prstGeom prst="rect">
+            <a:avLst/>
+          </a:prstGeom>
+          <a:ln>
+            <a:noFill/>
+          </a:ln>
+          <a:effectLst>
+            <a:outerShdw blurRad="190500" algn="tl" rotWithShape="0">
+              <a:srgbClr val="000000">
+                <a:alpha val="70000"/>
+              </a:srgbClr>
+            </a:outerShdw>
+          </a:effectLst>
+        </p:spPr>
+      </p:pic>
       <p:sp>
         <p:nvSpPr>
           <p:cNvPr id="9" name="TextBox 8">
@@ -4604,6 +6746,77 @@
           </a:p>
         </p:txBody>
       </p:sp>
+      <p:sp>
+        <p:nvSpPr>
+          <p:cNvPr id="4" name="TextBox 3">
+            <a:extLst>
+              <a:ext uri="{FF2B5EF4-FFF2-40B4-BE49-F238E27FC236}">
+                <a16:creationId xmlns:a16="http://schemas.microsoft.com/office/drawing/2014/main" id="{613482E8-E7AC-71AD-3C23-74FD46038629}"/>
+              </a:ext>
+            </a:extLst>
+          </p:cNvPr>
+          <p:cNvSpPr txBox="1"/>
+          <p:nvPr/>
+        </p:nvSpPr>
+        <p:spPr>
+          <a:xfrm>
+            <a:off x="7070756" y="1854222"/>
+            <a:ext cx="3757189" cy="369332"/>
+          </a:xfrm>
+          <a:prstGeom prst="rect">
+            <a:avLst/>
+          </a:prstGeom>
+          <a:noFill/>
+        </p:spPr>
+        <p:txBody>
+          <a:bodyPr wrap="square" rtlCol="0">
+            <a:spAutoFit/>
+          </a:bodyPr>
+          <a:lstStyle/>
+          <a:p>
+            <a:pPr algn="r" rtl="1"/>
+            <a:r>
+              <a:rPr lang="ar-SA" dirty="0">
+                <a:cs typeface="B Nazanin" panose="00000400000000000000" pitchFamily="2" charset="-78"/>
+              </a:rPr>
+              <a:t>با افزایش تعداد اسپین‌ها چه اتفاقی می‌افتد؟</a:t>
+            </a:r>
+            <a:endParaRPr lang="en-US" dirty="0">
+              <a:cs typeface="B Nazanin" panose="00000400000000000000" pitchFamily="2" charset="-78"/>
+            </a:endParaRPr>
+          </a:p>
+        </p:txBody>
+      </p:sp>
+      <p:pic>
+        <p:nvPicPr>
+          <p:cNvPr id="6" name="Content Placeholder 6">
+            <a:extLst>
+              <a:ext uri="{FF2B5EF4-FFF2-40B4-BE49-F238E27FC236}">
+                <a16:creationId xmlns:a16="http://schemas.microsoft.com/office/drawing/2014/main" id="{C408E52C-6EAE-1CF4-8883-14CA9A6C4B04}"/>
+              </a:ext>
+            </a:extLst>
+          </p:cNvPr>
+          <p:cNvPicPr>
+            <a:picLocks noChangeAspect="1"/>
+          </p:cNvPicPr>
+          <p:nvPr/>
+        </p:nvPicPr>
+        <p:blipFill>
+          <a:blip r:embed="rId4"/>
+          <a:stretch>
+            <a:fillRect/>
+          </a:stretch>
+        </p:blipFill>
+        <p:spPr>
+          <a:xfrm>
+            <a:off x="2014984" y="2582066"/>
+            <a:ext cx="2910101" cy="921653"/>
+          </a:xfrm>
+          <a:prstGeom prst="rect">
+            <a:avLst/>
+          </a:prstGeom>
+        </p:spPr>
+      </p:pic>
     </p:spTree>
     <p:extLst>
       <p:ext uri="{BB962C8B-B14F-4D97-AF65-F5344CB8AC3E}">
@@ -4753,6 +6966,448 @@
     <p:extLst>
       <p:ext uri="{BB962C8B-B14F-4D97-AF65-F5344CB8AC3E}">
         <p14:creationId xmlns:p14="http://schemas.microsoft.com/office/powerpoint/2010/main" val="2587965871"/>
+      </p:ext>
+    </p:extLst>
+  </p:cSld>
+  <p:clrMapOvr>
+    <a:masterClrMapping/>
+  </p:clrMapOvr>
+</p:sld>
+</file>
+
+<file path=ppt/slides/slide20.xml><?xml version="1.0" encoding="utf-8"?>
+<p:sld xmlns:a="http://schemas.openxmlformats.org/drawingml/2006/main" xmlns:r="http://schemas.openxmlformats.org/officeDocument/2006/relationships" xmlns:p="http://schemas.openxmlformats.org/presentationml/2006/main">
+  <p:cSld>
+    <p:spTree>
+      <p:nvGrpSpPr>
+        <p:cNvPr id="1" name=""/>
+        <p:cNvGrpSpPr/>
+        <p:nvPr/>
+      </p:nvGrpSpPr>
+      <p:grpSpPr>
+        <a:xfrm>
+          <a:off x="0" y="0"/>
+          <a:ext cx="0" cy="0"/>
+          <a:chOff x="0" y="0"/>
+          <a:chExt cx="0" cy="0"/>
+        </a:xfrm>
+      </p:grpSpPr>
+      <p:sp>
+        <p:nvSpPr>
+          <p:cNvPr id="2" name="Title 1">
+            <a:extLst>
+              <a:ext uri="{FF2B5EF4-FFF2-40B4-BE49-F238E27FC236}">
+                <a16:creationId xmlns:a16="http://schemas.microsoft.com/office/drawing/2014/main" id="{A146352C-FF29-C089-318D-10D42825983A}"/>
+              </a:ext>
+            </a:extLst>
+          </p:cNvPr>
+          <p:cNvSpPr>
+            <a:spLocks noGrp="1"/>
+          </p:cNvSpPr>
+          <p:nvPr>
+            <p:ph type="title"/>
+          </p:nvPr>
+        </p:nvSpPr>
+        <p:spPr>
+          <a:xfrm>
+            <a:off x="8021370" y="365125"/>
+            <a:ext cx="3332430" cy="1325563"/>
+          </a:xfrm>
+        </p:spPr>
+        <p:txBody>
+          <a:bodyPr/>
+          <a:lstStyle/>
+          <a:p>
+            <a:pPr algn="r" rtl="1"/>
+            <a:r>
+              <a:rPr lang="fa-IR" dirty="0"/>
+              <a:t>سئوال پژوهشی</a:t>
+            </a:r>
+            <a:endParaRPr lang="en-US" dirty="0"/>
+          </a:p>
+        </p:txBody>
+      </p:sp>
+      <p:sp>
+        <p:nvSpPr>
+          <p:cNvPr id="4" name="TextBox 3">
+            <a:extLst>
+              <a:ext uri="{FF2B5EF4-FFF2-40B4-BE49-F238E27FC236}">
+                <a16:creationId xmlns:a16="http://schemas.microsoft.com/office/drawing/2014/main" id="{CDF37DF3-6A5F-2266-8EBE-433EC529BD37}"/>
+              </a:ext>
+            </a:extLst>
+          </p:cNvPr>
+          <p:cNvSpPr txBox="1"/>
+          <p:nvPr/>
+        </p:nvSpPr>
+        <p:spPr>
+          <a:xfrm>
+            <a:off x="2743199" y="3307770"/>
+            <a:ext cx="6346479" cy="646331"/>
+          </a:xfrm>
+          <a:prstGeom prst="rect">
+            <a:avLst/>
+          </a:prstGeom>
+          <a:noFill/>
+        </p:spPr>
+        <p:txBody>
+          <a:bodyPr wrap="square" rtlCol="0">
+            <a:spAutoFit/>
+          </a:bodyPr>
+          <a:lstStyle/>
+          <a:p>
+            <a:pPr algn="r" rtl="1"/>
+            <a:r>
+              <a:rPr lang="ar-SA" dirty="0">
+                <a:cs typeface="B Nazanin" panose="00000400000000000000" pitchFamily="2" charset="-78"/>
+              </a:rPr>
+              <a:t>برای یک مدل مشخص، آیا می‌توان با شناخت گاف و تنظیم سرعت تغییر، در زمان کمتر به همان احتمال موفقیت رسید؟ هزینه به‌دست‌آوردن این شناخت چقدر است؟</a:t>
+            </a:r>
+            <a:endParaRPr lang="en-US" dirty="0">
+              <a:cs typeface="B Nazanin" panose="00000400000000000000" pitchFamily="2" charset="-78"/>
+            </a:endParaRPr>
+          </a:p>
+        </p:txBody>
+      </p:sp>
+    </p:spTree>
+    <p:extLst>
+      <p:ext uri="{BB962C8B-B14F-4D97-AF65-F5344CB8AC3E}">
+        <p14:creationId xmlns:p14="http://schemas.microsoft.com/office/powerpoint/2010/main" val="3074500653"/>
+      </p:ext>
+    </p:extLst>
+  </p:cSld>
+  <p:clrMapOvr>
+    <a:masterClrMapping/>
+  </p:clrMapOvr>
+</p:sld>
+</file>
+
+<file path=ppt/slides/slide21.xml><?xml version="1.0" encoding="utf-8"?>
+<p:sld xmlns:a="http://schemas.openxmlformats.org/drawingml/2006/main" xmlns:r="http://schemas.openxmlformats.org/officeDocument/2006/relationships" xmlns:p="http://schemas.openxmlformats.org/presentationml/2006/main">
+  <p:cSld>
+    <p:spTree>
+      <p:nvGrpSpPr>
+        <p:cNvPr id="1" name=""/>
+        <p:cNvGrpSpPr/>
+        <p:nvPr/>
+      </p:nvGrpSpPr>
+      <p:grpSpPr>
+        <a:xfrm>
+          <a:off x="0" y="0"/>
+          <a:ext cx="0" cy="0"/>
+          <a:chOff x="0" y="0"/>
+          <a:chExt cx="0" cy="0"/>
+        </a:xfrm>
+      </p:grpSpPr>
+    </p:spTree>
+    <p:extLst>
+      <p:ext uri="{BB962C8B-B14F-4D97-AF65-F5344CB8AC3E}">
+        <p14:creationId xmlns:p14="http://schemas.microsoft.com/office/powerpoint/2010/main" val="2048526920"/>
+      </p:ext>
+    </p:extLst>
+  </p:cSld>
+  <p:clrMapOvr>
+    <a:masterClrMapping/>
+  </p:clrMapOvr>
+</p:sld>
+</file>
+
+<file path=ppt/slides/slide22.xml><?xml version="1.0" encoding="utf-8"?>
+<p:sld xmlns:a="http://schemas.openxmlformats.org/drawingml/2006/main" xmlns:r="http://schemas.openxmlformats.org/officeDocument/2006/relationships" xmlns:p="http://schemas.openxmlformats.org/presentationml/2006/main">
+  <p:cSld>
+    <p:spTree>
+      <p:nvGrpSpPr>
+        <p:cNvPr id="1" name=""/>
+        <p:cNvGrpSpPr/>
+        <p:nvPr/>
+      </p:nvGrpSpPr>
+      <p:grpSpPr>
+        <a:xfrm>
+          <a:off x="0" y="0"/>
+          <a:ext cx="0" cy="0"/>
+          <a:chOff x="0" y="0"/>
+          <a:chExt cx="0" cy="0"/>
+        </a:xfrm>
+      </p:grpSpPr>
+      <p:sp>
+        <p:nvSpPr>
+          <p:cNvPr id="2" name="Title 1">
+            <a:extLst>
+              <a:ext uri="{FF2B5EF4-FFF2-40B4-BE49-F238E27FC236}">
+                <a16:creationId xmlns:a16="http://schemas.microsoft.com/office/drawing/2014/main" id="{EEF10A3A-CE7C-9C74-3A7C-B042F0A6230E}"/>
+              </a:ext>
+            </a:extLst>
+          </p:cNvPr>
+          <p:cNvSpPr>
+            <a:spLocks noGrp="1"/>
+          </p:cNvSpPr>
+          <p:nvPr>
+            <p:ph type="title"/>
+          </p:nvPr>
+        </p:nvSpPr>
+        <p:spPr>
+          <a:xfrm>
+            <a:off x="838200" y="365125"/>
+            <a:ext cx="3344501" cy="1325563"/>
+          </a:xfrm>
+        </p:spPr>
+        <p:txBody>
+          <a:bodyPr/>
+          <a:lstStyle/>
+          <a:p>
+            <a:r>
+              <a:rPr lang="en-US" dirty="0"/>
+              <a:t>BACKUP</a:t>
+            </a:r>
+          </a:p>
+        </p:txBody>
+      </p:sp>
+      <p:sp>
+        <p:nvSpPr>
+          <p:cNvPr id="3" name="Content Placeholder 2">
+            <a:extLst>
+              <a:ext uri="{FF2B5EF4-FFF2-40B4-BE49-F238E27FC236}">
+                <a16:creationId xmlns:a16="http://schemas.microsoft.com/office/drawing/2014/main" id="{1D413609-7E52-B586-7B92-7F9D31982704}"/>
+              </a:ext>
+            </a:extLst>
+          </p:cNvPr>
+          <p:cNvSpPr>
+            <a:spLocks noGrp="1"/>
+          </p:cNvSpPr>
+          <p:nvPr>
+            <p:ph idx="1"/>
+          </p:nvPr>
+        </p:nvSpPr>
+        <p:spPr/>
+        <p:txBody>
+          <a:bodyPr/>
+          <a:lstStyle/>
+          <a:p>
+            <a:r>
+              <a:rPr lang="en-US" sz="1800" dirty="0"/>
+              <a:t>Problem Hamiltonian: </a:t>
+            </a:r>
+            <a:r>
+              <a:rPr lang="en-US" sz="1800" dirty="0" err="1"/>
+              <a:t>H_p</a:t>
+            </a:r>
+            <a:endParaRPr lang="en-US" sz="1800" dirty="0"/>
+          </a:p>
+        </p:txBody>
+      </p:sp>
+      <p:pic>
+        <p:nvPicPr>
+          <p:cNvPr id="7" name="Picture 6">
+            <a:extLst>
+              <a:ext uri="{FF2B5EF4-FFF2-40B4-BE49-F238E27FC236}">
+                <a16:creationId xmlns:a16="http://schemas.microsoft.com/office/drawing/2014/main" id="{EC9A4141-4FB6-69BD-2661-E6D41FC5CA24}"/>
+              </a:ext>
+            </a:extLst>
+          </p:cNvPr>
+          <p:cNvPicPr>
+            <a:picLocks noChangeAspect="1"/>
+          </p:cNvPicPr>
+          <p:nvPr/>
+        </p:nvPicPr>
+        <p:blipFill>
+          <a:blip r:embed="rId2"/>
+          <a:stretch>
+            <a:fillRect/>
+          </a:stretch>
+        </p:blipFill>
+        <p:spPr>
+          <a:xfrm>
+            <a:off x="1081383" y="2979815"/>
+            <a:ext cx="4116833" cy="313015"/>
+          </a:xfrm>
+          <a:prstGeom prst="rect">
+            <a:avLst/>
+          </a:prstGeom>
+        </p:spPr>
+      </p:pic>
+      <p:pic>
+        <p:nvPicPr>
+          <p:cNvPr id="11" name="Picture 10">
+            <a:extLst>
+              <a:ext uri="{FF2B5EF4-FFF2-40B4-BE49-F238E27FC236}">
+                <a16:creationId xmlns:a16="http://schemas.microsoft.com/office/drawing/2014/main" id="{1C3B7C71-C73D-B714-484D-E6A7E9FA0EE2}"/>
+              </a:ext>
+            </a:extLst>
+          </p:cNvPr>
+          <p:cNvPicPr>
+            <a:picLocks noChangeAspect="1"/>
+          </p:cNvPicPr>
+          <p:nvPr/>
+        </p:nvPicPr>
+        <p:blipFill>
+          <a:blip r:embed="rId3"/>
+          <a:stretch>
+            <a:fillRect/>
+          </a:stretch>
+        </p:blipFill>
+        <p:spPr>
+          <a:xfrm>
+            <a:off x="5159173" y="5636168"/>
+            <a:ext cx="4376169" cy="1081590"/>
+          </a:xfrm>
+          <a:prstGeom prst="rect">
+            <a:avLst/>
+          </a:prstGeom>
+        </p:spPr>
+      </p:pic>
+      <p:pic>
+        <p:nvPicPr>
+          <p:cNvPr id="8" name="Picture 7">
+            <a:extLst>
+              <a:ext uri="{FF2B5EF4-FFF2-40B4-BE49-F238E27FC236}">
+                <a16:creationId xmlns:a16="http://schemas.microsoft.com/office/drawing/2014/main" id="{3B12952C-228B-D83F-38E6-6F913CC348FD}"/>
+              </a:ext>
+            </a:extLst>
+          </p:cNvPr>
+          <p:cNvPicPr>
+            <a:picLocks noChangeAspect="1"/>
+          </p:cNvPicPr>
+          <p:nvPr/>
+        </p:nvPicPr>
+        <p:blipFill>
+          <a:blip r:embed="rId4"/>
+          <a:stretch>
+            <a:fillRect/>
+          </a:stretch>
+        </p:blipFill>
+        <p:spPr>
+          <a:xfrm>
+            <a:off x="838200" y="6065777"/>
+            <a:ext cx="3839332" cy="294666"/>
+          </a:xfrm>
+          <a:prstGeom prst="rect">
+            <a:avLst/>
+          </a:prstGeom>
+        </p:spPr>
+      </p:pic>
+      <p:pic>
+        <p:nvPicPr>
+          <p:cNvPr id="9" name="Picture 8">
+            <a:extLst>
+              <a:ext uri="{FF2B5EF4-FFF2-40B4-BE49-F238E27FC236}">
+                <a16:creationId xmlns:a16="http://schemas.microsoft.com/office/drawing/2014/main" id="{D5894DEB-C2E6-B46C-0D3F-39BCBAE6D0C0}"/>
+              </a:ext>
+            </a:extLst>
+          </p:cNvPr>
+          <p:cNvPicPr>
+            <a:picLocks noChangeAspect="1"/>
+          </p:cNvPicPr>
+          <p:nvPr/>
+        </p:nvPicPr>
+        <p:blipFill>
+          <a:blip r:embed="rId5"/>
+          <a:stretch>
+            <a:fillRect/>
+          </a:stretch>
+        </p:blipFill>
+        <p:spPr>
+          <a:xfrm>
+            <a:off x="9052201" y="1161924"/>
+            <a:ext cx="2301599" cy="2301599"/>
+          </a:xfrm>
+          <a:prstGeom prst="rect">
+            <a:avLst/>
+          </a:prstGeom>
+        </p:spPr>
+      </p:pic>
+      <p:pic>
+        <p:nvPicPr>
+          <p:cNvPr id="12" name="Picture 11">
+            <a:extLst>
+              <a:ext uri="{FF2B5EF4-FFF2-40B4-BE49-F238E27FC236}">
+                <a16:creationId xmlns:a16="http://schemas.microsoft.com/office/drawing/2014/main" id="{3CD1E237-E791-E674-6B61-1259CEAE135F}"/>
+              </a:ext>
+            </a:extLst>
+          </p:cNvPr>
+          <p:cNvPicPr>
+            <a:picLocks noChangeAspect="1"/>
+          </p:cNvPicPr>
+          <p:nvPr/>
+        </p:nvPicPr>
+        <p:blipFill>
+          <a:blip r:embed="rId6"/>
+          <a:stretch>
+            <a:fillRect/>
+          </a:stretch>
+        </p:blipFill>
+        <p:spPr>
+          <a:xfrm>
+            <a:off x="9363063" y="930023"/>
+            <a:ext cx="1885950" cy="276225"/>
+          </a:xfrm>
+          <a:prstGeom prst="rect">
+            <a:avLst/>
+          </a:prstGeom>
+        </p:spPr>
+      </p:pic>
+      <p:pic>
+        <p:nvPicPr>
+          <p:cNvPr id="25" name="Picture 24">
+            <a:extLst>
+              <a:ext uri="{FF2B5EF4-FFF2-40B4-BE49-F238E27FC236}">
+                <a16:creationId xmlns:a16="http://schemas.microsoft.com/office/drawing/2014/main" id="{1975D6C7-E74A-F0BF-86C2-63DAB648E76F}"/>
+              </a:ext>
+            </a:extLst>
+          </p:cNvPr>
+          <p:cNvPicPr>
+            <a:picLocks noChangeAspect="1"/>
+          </p:cNvPicPr>
+          <p:nvPr/>
+        </p:nvPicPr>
+        <p:blipFill>
+          <a:blip r:embed="rId7"/>
+          <a:stretch>
+            <a:fillRect/>
+          </a:stretch>
+        </p:blipFill>
+        <p:spPr>
+          <a:xfrm>
+            <a:off x="6096000" y="2664834"/>
+            <a:ext cx="1924050" cy="942975"/>
+          </a:xfrm>
+          <a:prstGeom prst="rect">
+            <a:avLst/>
+          </a:prstGeom>
+        </p:spPr>
+      </p:pic>
+      <p:pic>
+        <p:nvPicPr>
+          <p:cNvPr id="6" name="Picture 5">
+            <a:extLst>
+              <a:ext uri="{FF2B5EF4-FFF2-40B4-BE49-F238E27FC236}">
+                <a16:creationId xmlns:a16="http://schemas.microsoft.com/office/drawing/2014/main" id="{9A931223-DDA9-CA97-5434-C2BDEDF4A0E1}"/>
+              </a:ext>
+            </a:extLst>
+          </p:cNvPr>
+          <p:cNvPicPr>
+            <a:picLocks noChangeAspect="1"/>
+          </p:cNvPicPr>
+          <p:nvPr/>
+        </p:nvPicPr>
+        <p:blipFill>
+          <a:blip r:embed="rId8"/>
+          <a:stretch>
+            <a:fillRect/>
+          </a:stretch>
+        </p:blipFill>
+        <p:spPr>
+          <a:xfrm>
+            <a:off x="3784696" y="4203957"/>
+            <a:ext cx="3298328" cy="484055"/>
+          </a:xfrm>
+          <a:prstGeom prst="rect">
+            <a:avLst/>
+          </a:prstGeom>
+        </p:spPr>
+      </p:pic>
+    </p:spTree>
+    <p:extLst>
+      <p:ext uri="{BB962C8B-B14F-4D97-AF65-F5344CB8AC3E}">
+        <p14:creationId xmlns:p14="http://schemas.microsoft.com/office/powerpoint/2010/main" val="598386150"/>
       </p:ext>
     </p:extLst>
   </p:cSld>
@@ -4929,14 +7584,21 @@
             <p:ph type="title"/>
           </p:nvPr>
         </p:nvSpPr>
-        <p:spPr/>
-        <p:txBody>
-          <a:bodyPr/>
+        <p:spPr>
+          <a:xfrm>
+            <a:off x="838200" y="365125"/>
+            <a:ext cx="10515600" cy="894777"/>
+          </a:xfrm>
+        </p:spPr>
+        <p:txBody>
+          <a:bodyPr>
+            <a:normAutofit/>
+          </a:bodyPr>
           <a:lstStyle/>
           <a:p>
             <a:r>
-              <a:rPr lang="en-US" dirty="0"/>
-              <a:t>What is Hamiltonian?</a:t>
+              <a:rPr lang="en-US" sz="4000" dirty="0"/>
+              <a:t>Hamiltonian: Classical Physics</a:t>
             </a:r>
           </a:p>
         </p:txBody>
@@ -4957,7 +7619,12 @@
             <p:ph idx="1"/>
           </p:nvPr>
         </p:nvSpPr>
-        <p:spPr/>
+        <p:spPr>
+          <a:xfrm>
+            <a:off x="838200" y="1122629"/>
+            <a:ext cx="10515600" cy="5115208"/>
+          </a:xfrm>
+        </p:spPr>
         <p:txBody>
           <a:bodyPr>
             <a:normAutofit/>
@@ -4966,8 +7633,61 @@
           <a:p>
             <a:pPr algn="r" rtl="1"/>
             <a:r>
-              <a:rPr lang="fa-IR" sz="2000" dirty="0"/>
-              <a:t>در مکانیک تحلیلی وضعیت سیستم با مختصات تعمیم یافته مشخص می شود</a:t>
+              <a:rPr lang="fa-IR" sz="1900" dirty="0">
+                <a:cs typeface="B Nazanin" panose="00000400000000000000" pitchFamily="2" charset="-78"/>
+              </a:rPr>
+              <a:t>مکانیک کلاسیک: </a:t>
+            </a:r>
+            <a:r>
+              <a:rPr lang="fa-IR" sz="1900" dirty="0" err="1">
+                <a:cs typeface="B Nazanin" panose="00000400000000000000" pitchFamily="2" charset="-78"/>
+              </a:rPr>
+              <a:t>نیوتون</a:t>
+            </a:r>
+            <a:r>
+              <a:rPr lang="fa-IR" sz="1900" dirty="0">
+                <a:cs typeface="B Nazanin" panose="00000400000000000000" pitchFamily="2" charset="-78"/>
+              </a:rPr>
+              <a:t>، </a:t>
+            </a:r>
+            <a:r>
+              <a:rPr lang="fa-IR" sz="1900" dirty="0" err="1">
+                <a:cs typeface="B Nazanin" panose="00000400000000000000" pitchFamily="2" charset="-78"/>
+              </a:rPr>
+              <a:t>لاگرانژ</a:t>
+            </a:r>
+            <a:r>
+              <a:rPr lang="fa-IR" sz="1900" dirty="0">
+                <a:cs typeface="B Nazanin" panose="00000400000000000000" pitchFamily="2" charset="-78"/>
+              </a:rPr>
+              <a:t> و </a:t>
+            </a:r>
+            <a:r>
+              <a:rPr lang="fa-IR" sz="1900" dirty="0" err="1">
+                <a:cs typeface="B Nazanin" panose="00000400000000000000" pitchFamily="2" charset="-78"/>
+              </a:rPr>
+              <a:t>هامیلتون</a:t>
+            </a:r>
+            <a:r>
+              <a:rPr lang="fa-IR" sz="1900" dirty="0">
+                <a:cs typeface="B Nazanin" panose="00000400000000000000" pitchFamily="2" charset="-78"/>
+              </a:rPr>
+              <a:t> </a:t>
+            </a:r>
+          </a:p>
+          <a:p>
+            <a:pPr algn="r" rtl="1"/>
+            <a:r>
+              <a:rPr lang="fa-IR" sz="1900" dirty="0" err="1">
+                <a:cs typeface="B Nazanin" panose="00000400000000000000" pitchFamily="2" charset="-78"/>
+              </a:rPr>
+              <a:t>لاگرانژی</a:t>
+            </a:r>
+            <a:r>
+              <a:rPr lang="fa-IR" sz="1900" dirty="0">
+                <a:cs typeface="B Nazanin" panose="00000400000000000000" pitchFamily="2" charset="-78"/>
+              </a:rPr>
+              <a:t>:</a:t>
             </a:r>
           </a:p>
           <a:p>
@@ -4975,97 +7695,173 @@
               <a:buNone/>
             </a:pPr>
             <a:r>
-              <a:rPr lang="fa-IR" sz="2000" dirty="0" err="1"/>
-              <a:t>لاگرانژی</a:t>
-            </a:r>
-            <a:r>
-              <a:rPr lang="fa-IR" sz="2000" dirty="0"/>
-              <a:t> را از انرژی جنبشی و پتانسیل می سازیم، </a:t>
-            </a:r>
-            <a:r>
-              <a:rPr lang="fa-IR" sz="2000" dirty="0" err="1"/>
-              <a:t>هامیلتونی</a:t>
-            </a:r>
-            <a:r>
-              <a:rPr lang="fa-IR" sz="2000" dirty="0"/>
-              <a:t> تبدیل </a:t>
-            </a:r>
-            <a:r>
-              <a:rPr lang="fa-IR" sz="2000" dirty="0" err="1"/>
+              <a:rPr lang="fa-IR" sz="2000" dirty="0">
+                <a:cs typeface="B Nazanin" panose="00000400000000000000" pitchFamily="2" charset="-78"/>
+              </a:rPr>
+              <a:t> </a:t>
+            </a:r>
+          </a:p>
+          <a:p>
+            <a:pPr algn="r" rtl="1"/>
+            <a:r>
+              <a:rPr lang="fa-IR" sz="1900" dirty="0">
+                <a:cs typeface="B Nazanin" panose="00000400000000000000" pitchFamily="2" charset="-78"/>
+              </a:rPr>
+              <a:t>معادله </a:t>
+            </a:r>
+            <a:r>
+              <a:rPr lang="fa-IR" sz="1900" dirty="0" err="1">
+                <a:cs typeface="B Nazanin" panose="00000400000000000000" pitchFamily="2" charset="-78"/>
+              </a:rPr>
+              <a:t>اویلر</a:t>
+            </a:r>
+            <a:r>
+              <a:rPr lang="fa-IR" sz="1900" dirty="0">
+                <a:cs typeface="B Nazanin" panose="00000400000000000000" pitchFamily="2" charset="-78"/>
+              </a:rPr>
+              <a:t>- </a:t>
+            </a:r>
+            <a:r>
+              <a:rPr lang="fa-IR" sz="1900" dirty="0" err="1">
+                <a:cs typeface="B Nazanin" panose="00000400000000000000" pitchFamily="2" charset="-78"/>
+              </a:rPr>
+              <a:t>لاگرانژ</a:t>
+            </a:r>
+            <a:r>
+              <a:rPr lang="fa-IR" sz="1900" dirty="0">
+                <a:cs typeface="B Nazanin" panose="00000400000000000000" pitchFamily="2" charset="-78"/>
+              </a:rPr>
+              <a:t>:</a:t>
+            </a:r>
+          </a:p>
+          <a:p>
+            <a:pPr algn="r" rtl="1"/>
+            <a:endParaRPr lang="fa-IR" sz="2000" dirty="0">
+              <a:cs typeface="B Nazanin" panose="00000400000000000000" pitchFamily="2" charset="-78"/>
+            </a:endParaRPr>
+          </a:p>
+          <a:p>
+            <a:pPr algn="r" rtl="1"/>
+            <a:r>
+              <a:rPr lang="fa-IR" sz="1900" dirty="0">
+                <a:cs typeface="B Nazanin" panose="00000400000000000000" pitchFamily="2" charset="-78"/>
+              </a:rPr>
+              <a:t>تکانه کانونی و تبدیل </a:t>
+            </a:r>
+            <a:r>
+              <a:rPr lang="fa-IR" sz="1900" dirty="0" err="1">
+                <a:cs typeface="B Nazanin" panose="00000400000000000000" pitchFamily="2" charset="-78"/>
+              </a:rPr>
               <a:t>لژاندر</a:t>
             </a:r>
-            <a:r>
-              <a:rPr lang="fa-IR" sz="2000" dirty="0"/>
-              <a:t> آن است. </a:t>
-            </a:r>
+            <a:endParaRPr lang="fa-IR" sz="1900" dirty="0">
+              <a:cs typeface="B Nazanin" panose="00000400000000000000" pitchFamily="2" charset="-78"/>
+            </a:endParaRPr>
           </a:p>
           <a:p>
             <a:pPr marL="0" indent="0">
               <a:buNone/>
             </a:pPr>
-            <a:endParaRPr lang="en-US" sz="2000" dirty="0"/>
-          </a:p>
-          <a:p>
+            <a:endParaRPr lang="en-US" sz="2000" dirty="0">
+              <a:cs typeface="B Nazanin" panose="00000400000000000000" pitchFamily="2" charset="-78"/>
+            </a:endParaRPr>
+          </a:p>
+          <a:p>
+            <a:pPr algn="r" rtl="1"/>
+            <a:r>
+              <a:rPr lang="fa-IR" sz="1900" dirty="0" err="1">
+                <a:cs typeface="B Nazanin" panose="00000400000000000000" pitchFamily="2" charset="-78"/>
+              </a:rPr>
+              <a:t>معادلات</a:t>
+            </a:r>
+            <a:r>
+              <a:rPr lang="fa-IR" sz="1900" dirty="0">
+                <a:cs typeface="B Nazanin" panose="00000400000000000000" pitchFamily="2" charset="-78"/>
+              </a:rPr>
+              <a:t> کانونی </a:t>
+            </a:r>
+            <a:r>
+              <a:rPr lang="fa-IR" sz="1900" dirty="0" err="1">
+                <a:cs typeface="B Nazanin" panose="00000400000000000000" pitchFamily="2" charset="-78"/>
+              </a:rPr>
+              <a:t>هامیلتون</a:t>
+            </a:r>
+            <a:endParaRPr lang="fa-IR" sz="1900" dirty="0">
+              <a:cs typeface="B Nazanin" panose="00000400000000000000" pitchFamily="2" charset="-78"/>
+            </a:endParaRPr>
+          </a:p>
+          <a:p>
+            <a:pPr algn="r" rtl="1"/>
+            <a:endParaRPr lang="fa-IR" sz="2300" dirty="0">
+              <a:cs typeface="B Nazanin" panose="00000400000000000000" pitchFamily="2" charset="-78"/>
+            </a:endParaRPr>
+          </a:p>
+          <a:p>
+            <a:pPr algn="r" rtl="1"/>
+            <a:r>
+              <a:rPr lang="fa-IR" sz="1900" dirty="0">
+                <a:cs typeface="B Nazanin" panose="00000400000000000000" pitchFamily="2" charset="-78"/>
+              </a:rPr>
+              <a:t>براکت </a:t>
+            </a:r>
+            <a:r>
+              <a:rPr lang="fa-IR" sz="1900" dirty="0" err="1">
+                <a:cs typeface="B Nazanin" panose="00000400000000000000" pitchFamily="2" charset="-78"/>
+              </a:rPr>
+              <a:t>پواسون</a:t>
+            </a:r>
+            <a:r>
+              <a:rPr lang="fa-IR" sz="1900" dirty="0">
+                <a:cs typeface="B Nazanin" panose="00000400000000000000" pitchFamily="2" charset="-78"/>
+              </a:rPr>
+              <a:t> برای جفت کانونی</a:t>
+            </a:r>
+          </a:p>
+          <a:p>
+            <a:pPr algn="r" rtl="1"/>
+            <a:endParaRPr lang="fa-IR" sz="2300" dirty="0">
+              <a:cs typeface="B Nazanin" panose="00000400000000000000" pitchFamily="2" charset="-78"/>
+            </a:endParaRPr>
+          </a:p>
+          <a:p>
+            <a:pPr algn="r" rtl="1"/>
+            <a:r>
+              <a:rPr lang="fa-IR" sz="1900" dirty="0">
+                <a:cs typeface="B Nazanin" panose="00000400000000000000" pitchFamily="2" charset="-78"/>
+              </a:rPr>
+              <a:t>تحول زمانی و کمیت </a:t>
+            </a:r>
+            <a:r>
+              <a:rPr lang="fa-IR" sz="1900" dirty="0" err="1">
+                <a:cs typeface="B Nazanin" panose="00000400000000000000" pitchFamily="2" charset="-78"/>
+              </a:rPr>
+              <a:t>پایسته</a:t>
+            </a:r>
+            <a:r>
+              <a:rPr lang="fa-IR" sz="1900" dirty="0">
+                <a:cs typeface="B Nazanin" panose="00000400000000000000" pitchFamily="2" charset="-78"/>
+              </a:rPr>
+              <a:t> در مکانیک کلاسیک </a:t>
+            </a:r>
+          </a:p>
+          <a:p>
+            <a:pPr algn="r" rtl="1"/>
             <a:endParaRPr lang="fa-IR" dirty="0"/>
           </a:p>
           <a:p>
-            <a:pPr algn="r" rtl="1"/>
-            <a:r>
-              <a:rPr lang="fa-IR" sz="2000" dirty="0"/>
-              <a:t>در سامانه </a:t>
-            </a:r>
-            <a:r>
-              <a:rPr lang="fa-IR" sz="2000" dirty="0" err="1"/>
-              <a:t>پایستار</a:t>
-            </a:r>
-            <a:r>
-              <a:rPr lang="fa-IR" sz="2000" dirty="0"/>
-              <a:t> </a:t>
-            </a:r>
-            <a:r>
-              <a:rPr lang="fa-IR" sz="2000" dirty="0" err="1"/>
-              <a:t>هامیلتونی</a:t>
-            </a:r>
-            <a:r>
-              <a:rPr lang="fa-IR" sz="2000" dirty="0"/>
-              <a:t> همان انرژی کل سیستم است</a:t>
-            </a:r>
-          </a:p>
-          <a:p>
-            <a:endParaRPr lang="fa-IR" dirty="0"/>
-          </a:p>
-          <a:p>
-            <a:endParaRPr lang="fa-IR" dirty="0"/>
-          </a:p>
-          <a:p>
-            <a:pPr marL="0" indent="0">
+            <a:pPr marL="0" indent="0" algn="r" rtl="1">
               <a:buNone/>
             </a:pPr>
             <a:endParaRPr lang="en-US" dirty="0"/>
           </a:p>
-          <a:p>
-            <a:pPr algn="r" rtl="1"/>
-            <a:r>
-              <a:rPr lang="fa-IR" sz="1700" dirty="0"/>
-              <a:t>انرژی روی فضای فاز </a:t>
-            </a:r>
-          </a:p>
-          <a:p>
-            <a:pPr algn="r" rtl="1"/>
-            <a:r>
-              <a:rPr lang="fa-IR" sz="1700" dirty="0"/>
-              <a:t>مولد تحول زمانی</a:t>
-            </a:r>
-            <a:endParaRPr lang="en-US" sz="1700" dirty="0"/>
-          </a:p>
         </p:txBody>
       </p:sp>
       <p:pic>
         <p:nvPicPr>
-          <p:cNvPr id="5" name="Picture 4">
-            <a:extLst>
-              <a:ext uri="{FF2B5EF4-FFF2-40B4-BE49-F238E27FC236}">
-                <a16:creationId xmlns:a16="http://schemas.microsoft.com/office/drawing/2014/main" id="{26DD7A16-04BD-3B66-BE71-AB6229E41EFA}"/>
+          <p:cNvPr id="7" name="Picture 6">
+            <a:extLst>
+              <a:ext uri="{FF2B5EF4-FFF2-40B4-BE49-F238E27FC236}">
+                <a16:creationId xmlns:a16="http://schemas.microsoft.com/office/drawing/2014/main" id="{0024838E-F524-1F05-A9C8-FF553999A4C6}"/>
               </a:ext>
             </a:extLst>
           </p:cNvPr>
@@ -5082,8 +7878,8 @@
         </p:blipFill>
         <p:spPr>
           <a:xfrm>
-            <a:off x="4874206" y="2799973"/>
-            <a:ext cx="3457575" cy="590550"/>
+            <a:off x="5625219" y="3798518"/>
+            <a:ext cx="1979692" cy="534203"/>
           </a:xfrm>
           <a:prstGeom prst="rect">
             <a:avLst/>
@@ -5092,10 +7888,10 @@
       </p:pic>
       <p:pic>
         <p:nvPicPr>
-          <p:cNvPr id="7" name="Picture 6">
-            <a:extLst>
-              <a:ext uri="{FF2B5EF4-FFF2-40B4-BE49-F238E27FC236}">
-                <a16:creationId xmlns:a16="http://schemas.microsoft.com/office/drawing/2014/main" id="{0024838E-F524-1F05-A9C8-FF553999A4C6}"/>
+          <p:cNvPr id="9" name="Picture 8">
+            <a:extLst>
+              <a:ext uri="{FF2B5EF4-FFF2-40B4-BE49-F238E27FC236}">
+                <a16:creationId xmlns:a16="http://schemas.microsoft.com/office/drawing/2014/main" id="{5410D04C-D472-C565-FCEC-BA39068D270C}"/>
               </a:ext>
             </a:extLst>
           </p:cNvPr>
@@ -5112,14 +7908,296 @@
         </p:blipFill>
         <p:spPr>
           <a:xfrm>
-            <a:off x="5022599" y="4001294"/>
-            <a:ext cx="2400300" cy="647700"/>
+            <a:off x="7163272" y="1611548"/>
+            <a:ext cx="2114550" cy="342900"/>
           </a:xfrm>
           <a:prstGeom prst="rect">
             <a:avLst/>
           </a:prstGeom>
         </p:spPr>
       </p:pic>
+      <p:pic>
+        <p:nvPicPr>
+          <p:cNvPr id="11" name="Picture 10">
+            <a:extLst>
+              <a:ext uri="{FF2B5EF4-FFF2-40B4-BE49-F238E27FC236}">
+                <a16:creationId xmlns:a16="http://schemas.microsoft.com/office/drawing/2014/main" id="{FE19057A-97D5-5C65-0C7E-562C009B8A67}"/>
+              </a:ext>
+            </a:extLst>
+          </p:cNvPr>
+          <p:cNvPicPr>
+            <a:picLocks noChangeAspect="1"/>
+          </p:cNvPicPr>
+          <p:nvPr/>
+        </p:nvPicPr>
+        <p:blipFill>
+          <a:blip r:embed="rId4"/>
+          <a:stretch>
+            <a:fillRect/>
+          </a:stretch>
+        </p:blipFill>
+        <p:spPr>
+          <a:xfrm>
+            <a:off x="7163272" y="2183183"/>
+            <a:ext cx="1638300" cy="552450"/>
+          </a:xfrm>
+          <a:prstGeom prst="rect">
+            <a:avLst/>
+          </a:prstGeom>
+        </p:spPr>
+      </p:pic>
+      <p:pic>
+        <p:nvPicPr>
+          <p:cNvPr id="13" name="Picture 12">
+            <a:extLst>
+              <a:ext uri="{FF2B5EF4-FFF2-40B4-BE49-F238E27FC236}">
+                <a16:creationId xmlns:a16="http://schemas.microsoft.com/office/drawing/2014/main" id="{AB4C1F2C-5199-BAB2-013D-1848CC719D21}"/>
+              </a:ext>
+            </a:extLst>
+          </p:cNvPr>
+          <p:cNvPicPr>
+            <a:picLocks noChangeAspect="1"/>
+          </p:cNvPicPr>
+          <p:nvPr/>
+        </p:nvPicPr>
+        <p:blipFill>
+          <a:blip r:embed="rId5"/>
+          <a:stretch>
+            <a:fillRect/>
+          </a:stretch>
+        </p:blipFill>
+        <p:spPr>
+          <a:xfrm>
+            <a:off x="5094083" y="2954654"/>
+            <a:ext cx="3352800" cy="476250"/>
+          </a:xfrm>
+          <a:prstGeom prst="rect">
+            <a:avLst/>
+          </a:prstGeom>
+        </p:spPr>
+      </p:pic>
+      <p:pic>
+        <p:nvPicPr>
+          <p:cNvPr id="15" name="Picture 14">
+            <a:extLst>
+              <a:ext uri="{FF2B5EF4-FFF2-40B4-BE49-F238E27FC236}">
+                <a16:creationId xmlns:a16="http://schemas.microsoft.com/office/drawing/2014/main" id="{FFA39894-E08D-A30D-CC3B-22A2AE9543AE}"/>
+              </a:ext>
+            </a:extLst>
+          </p:cNvPr>
+          <p:cNvPicPr>
+            <a:picLocks noChangeAspect="1"/>
+          </p:cNvPicPr>
+          <p:nvPr/>
+        </p:nvPicPr>
+        <p:blipFill>
+          <a:blip r:embed="rId6"/>
+          <a:stretch>
+            <a:fillRect/>
+          </a:stretch>
+        </p:blipFill>
+        <p:spPr>
+          <a:xfrm>
+            <a:off x="5949331" y="4516996"/>
+            <a:ext cx="2219656" cy="577606"/>
+          </a:xfrm>
+          <a:prstGeom prst="rect">
+            <a:avLst/>
+          </a:prstGeom>
+        </p:spPr>
+      </p:pic>
+      <p:pic>
+        <p:nvPicPr>
+          <p:cNvPr id="17" name="Picture 16">
+            <a:extLst>
+              <a:ext uri="{FF2B5EF4-FFF2-40B4-BE49-F238E27FC236}">
+                <a16:creationId xmlns:a16="http://schemas.microsoft.com/office/drawing/2014/main" id="{BD159609-319F-9782-91DF-54CDBF0ECD2A}"/>
+              </a:ext>
+            </a:extLst>
+          </p:cNvPr>
+          <p:cNvPicPr>
+            <a:picLocks noChangeAspect="1"/>
+          </p:cNvPicPr>
+          <p:nvPr/>
+        </p:nvPicPr>
+        <p:blipFill>
+          <a:blip r:embed="rId7"/>
+          <a:stretch>
+            <a:fillRect/>
+          </a:stretch>
+        </p:blipFill>
+        <p:spPr>
+          <a:xfrm>
+            <a:off x="4362215" y="5448648"/>
+            <a:ext cx="2837414" cy="951418"/>
+          </a:xfrm>
+          <a:prstGeom prst="rect">
+            <a:avLst/>
+          </a:prstGeom>
+        </p:spPr>
+      </p:pic>
+      <p:pic>
+        <p:nvPicPr>
+          <p:cNvPr id="19" name="Picture 18">
+            <a:extLst>
+              <a:ext uri="{FF2B5EF4-FFF2-40B4-BE49-F238E27FC236}">
+                <a16:creationId xmlns:a16="http://schemas.microsoft.com/office/drawing/2014/main" id="{8FF8E2FC-0040-EDDF-0B13-825A049D8B2B}"/>
+              </a:ext>
+            </a:extLst>
+          </p:cNvPr>
+          <p:cNvPicPr>
+            <a:picLocks noChangeAspect="1"/>
+          </p:cNvPicPr>
+          <p:nvPr/>
+        </p:nvPicPr>
+        <p:blipFill>
+          <a:blip r:embed="rId8"/>
+          <a:stretch>
+            <a:fillRect/>
+          </a:stretch>
+        </p:blipFill>
+        <p:spPr>
+          <a:xfrm>
+            <a:off x="1073638" y="5193183"/>
+            <a:ext cx="2514600" cy="1019175"/>
+          </a:xfrm>
+          <a:prstGeom prst="rect">
+            <a:avLst/>
+          </a:prstGeom>
+        </p:spPr>
+      </p:pic>
+      <p:sp>
+        <p:nvSpPr>
+          <p:cNvPr id="21" name="TextBox 20">
+            <a:extLst>
+              <a:ext uri="{FF2B5EF4-FFF2-40B4-BE49-F238E27FC236}">
+                <a16:creationId xmlns:a16="http://schemas.microsoft.com/office/drawing/2014/main" id="{C15A2551-47C7-6172-60B1-2F56307DAFC2}"/>
+              </a:ext>
+            </a:extLst>
+          </p:cNvPr>
+          <p:cNvSpPr txBox="1"/>
+          <p:nvPr/>
+        </p:nvSpPr>
+        <p:spPr>
+          <a:xfrm>
+            <a:off x="418015" y="4771436"/>
+            <a:ext cx="3041965" cy="646331"/>
+          </a:xfrm>
+          <a:prstGeom prst="rect">
+            <a:avLst/>
+          </a:prstGeom>
+          <a:noFill/>
+        </p:spPr>
+        <p:txBody>
+          <a:bodyPr wrap="square" rtlCol="0">
+            <a:spAutoFit/>
+          </a:bodyPr>
+          <a:lstStyle/>
+          <a:p>
+            <a:pPr algn="r" rtl="1"/>
+            <a:r>
+              <a:rPr lang="fa-IR" sz="1800" dirty="0" err="1">
+                <a:cs typeface="B Nazanin" panose="00000400000000000000" pitchFamily="2" charset="-78"/>
+              </a:rPr>
+              <a:t>هاملیتونی</a:t>
+            </a:r>
+            <a:r>
+              <a:rPr lang="fa-IR" sz="1800" dirty="0">
+                <a:cs typeface="B Nazanin" panose="00000400000000000000" pitchFamily="2" charset="-78"/>
+              </a:rPr>
+              <a:t> </a:t>
+            </a:r>
+            <a:r>
+              <a:rPr lang="fa-IR" sz="1800" dirty="0" err="1">
+                <a:cs typeface="B Nazanin" panose="00000400000000000000" pitchFamily="2" charset="-78"/>
+              </a:rPr>
+              <a:t>پایسته</a:t>
+            </a:r>
+            <a:r>
+              <a:rPr lang="fa-IR" sz="1800" dirty="0">
+                <a:cs typeface="B Nazanin" panose="00000400000000000000" pitchFamily="2" charset="-78"/>
+              </a:rPr>
+              <a:t> به طور خاص:</a:t>
+            </a:r>
+          </a:p>
+          <a:p>
+            <a:pPr algn="r" rtl="1"/>
+            <a:endParaRPr lang="en-US" dirty="0"/>
+          </a:p>
+        </p:txBody>
+      </p:sp>
+      <p:cxnSp>
+        <p:nvCxnSpPr>
+          <p:cNvPr id="23" name="Straight Connector 22">
+            <a:extLst>
+              <a:ext uri="{FF2B5EF4-FFF2-40B4-BE49-F238E27FC236}">
+                <a16:creationId xmlns:a16="http://schemas.microsoft.com/office/drawing/2014/main" id="{12A36239-DDC7-536A-6ADC-9357718CE54B}"/>
+              </a:ext>
+            </a:extLst>
+          </p:cNvPr>
+          <p:cNvCxnSpPr/>
+          <p:nvPr/>
+        </p:nvCxnSpPr>
+        <p:spPr>
+          <a:xfrm>
+            <a:off x="3911097" y="4538898"/>
+            <a:ext cx="0" cy="2073927"/>
+          </a:xfrm>
+          <a:prstGeom prst="line">
+            <a:avLst/>
+          </a:prstGeom>
+        </p:spPr>
+        <p:style>
+          <a:lnRef idx="2">
+            <a:schemeClr val="accent1"/>
+          </a:lnRef>
+          <a:fillRef idx="0">
+            <a:schemeClr val="accent1"/>
+          </a:fillRef>
+          <a:effectRef idx="1">
+            <a:schemeClr val="accent1"/>
+          </a:effectRef>
+          <a:fontRef idx="minor">
+            <a:schemeClr val="tx1"/>
+          </a:fontRef>
+        </p:style>
+      </p:cxnSp>
+      <p:cxnSp>
+        <p:nvCxnSpPr>
+          <p:cNvPr id="25" name="Straight Connector 24">
+            <a:extLst>
+              <a:ext uri="{FF2B5EF4-FFF2-40B4-BE49-F238E27FC236}">
+                <a16:creationId xmlns:a16="http://schemas.microsoft.com/office/drawing/2014/main" id="{90C0B49F-700E-3E01-6F5F-844953B2E1D9}"/>
+              </a:ext>
+            </a:extLst>
+          </p:cNvPr>
+          <p:cNvCxnSpPr/>
+          <p:nvPr/>
+        </p:nvCxnSpPr>
+        <p:spPr>
+          <a:xfrm flipH="1">
+            <a:off x="2527473" y="3548779"/>
+            <a:ext cx="5919410" cy="0"/>
+          </a:xfrm>
+          <a:prstGeom prst="line">
+            <a:avLst/>
+          </a:prstGeom>
+        </p:spPr>
+        <p:style>
+          <a:lnRef idx="2">
+            <a:schemeClr val="accent1"/>
+          </a:lnRef>
+          <a:fillRef idx="0">
+            <a:schemeClr val="accent1"/>
+          </a:fillRef>
+          <a:effectRef idx="1">
+            <a:schemeClr val="accent1"/>
+          </a:effectRef>
+          <a:fontRef idx="minor">
+            <a:schemeClr val="tx1"/>
+          </a:fontRef>
+        </p:style>
+      </p:cxnSp>
     </p:spTree>
     <p:extLst>
       <p:ext uri="{BB962C8B-B14F-4D97-AF65-F5344CB8AC3E}">
@@ -5155,7 +8233,7 @@
           <p:cNvPr id="2" name="Title 1">
             <a:extLst>
               <a:ext uri="{FF2B5EF4-FFF2-40B4-BE49-F238E27FC236}">
-                <a16:creationId xmlns:a16="http://schemas.microsoft.com/office/drawing/2014/main" id="{3EDC45DD-D705-330E-1E45-9CDB79651563}"/>
+                <a16:creationId xmlns:a16="http://schemas.microsoft.com/office/drawing/2014/main" id="{A5A172B7-CDF5-F8FE-6402-97374FEBA7E0}"/>
               </a:ext>
             </a:extLst>
           </p:cNvPr>
@@ -5166,14 +8244,19 @@
             <p:ph type="title"/>
           </p:nvPr>
         </p:nvSpPr>
-        <p:spPr/>
+        <p:spPr>
+          <a:xfrm>
+            <a:off x="838200" y="365125"/>
+            <a:ext cx="10515600" cy="1056269"/>
+          </a:xfrm>
+        </p:spPr>
         <p:txBody>
           <a:bodyPr/>
           <a:lstStyle/>
           <a:p>
             <a:r>
               <a:rPr lang="en-US" dirty="0"/>
-              <a:t>What is Hamiltonian?</a:t>
+              <a:t>Hamiltonian: Quantum Physics</a:t>
             </a:r>
           </a:p>
         </p:txBody>
@@ -5183,7 +8266,7 @@
           <p:cNvPr id="3" name="Content Placeholder 2">
             <a:extLst>
               <a:ext uri="{FF2B5EF4-FFF2-40B4-BE49-F238E27FC236}">
-                <a16:creationId xmlns:a16="http://schemas.microsoft.com/office/drawing/2014/main" id="{AC7DBADC-0858-40DA-479A-E225B647749E}"/>
+                <a16:creationId xmlns:a16="http://schemas.microsoft.com/office/drawing/2014/main" id="{AC69A8C9-27D2-A1D8-873F-A88DF035247F}"/>
               </a:ext>
             </a:extLst>
           </p:cNvPr>
@@ -5194,58 +8277,128 @@
             <p:ph idx="1"/>
           </p:nvPr>
         </p:nvSpPr>
-        <p:spPr/>
+        <p:spPr>
+          <a:xfrm>
+            <a:off x="838200" y="1620570"/>
+            <a:ext cx="10515600" cy="4556393"/>
+          </a:xfrm>
+        </p:spPr>
         <p:txBody>
           <a:bodyPr/>
           <a:lstStyle/>
           <a:p>
-            <a:r>
-              <a:rPr lang="en-US" dirty="0"/>
-              <a:t>Examples </a:t>
-            </a:r>
-            <a:endParaRPr lang="fa-IR" dirty="0"/>
-          </a:p>
-          <a:p>
-            <a:r>
-              <a:rPr lang="en-US" sz="2000" dirty="0"/>
-              <a:t>Harmonic Oscillation</a:t>
-            </a:r>
-          </a:p>
-          <a:p>
-            <a:endParaRPr lang="en-US" dirty="0"/>
-          </a:p>
-          <a:p>
-            <a:pPr marL="0" indent="0">
+            <a:pPr algn="r" rtl="1"/>
+            <a:r>
+              <a:rPr lang="fa-IR" sz="1800" dirty="0">
+                <a:cs typeface="B Nazanin" panose="00000400000000000000" pitchFamily="2" charset="-78"/>
+              </a:rPr>
+              <a:t>کلاسیک حالت با نقطه ای در فضای فاز، در </a:t>
+            </a:r>
+            <a:r>
+              <a:rPr lang="fa-IR" sz="1800" dirty="0" err="1">
+                <a:cs typeface="B Nazanin" panose="00000400000000000000" pitchFamily="2" charset="-78"/>
+              </a:rPr>
+              <a:t>کوانتوم</a:t>
+            </a:r>
+            <a:r>
+              <a:rPr lang="fa-IR" sz="1800" dirty="0">
+                <a:cs typeface="B Nazanin" panose="00000400000000000000" pitchFamily="2" charset="-78"/>
+              </a:rPr>
+              <a:t> با بردار نرمال شده در فضای </a:t>
+            </a:r>
+            <a:r>
+              <a:rPr lang="fa-IR" sz="1800" dirty="0" err="1">
+                <a:cs typeface="B Nazanin" panose="00000400000000000000" pitchFamily="2" charset="-78"/>
+              </a:rPr>
+              <a:t>هیلبرت</a:t>
+            </a:r>
+            <a:endParaRPr lang="fa-IR" sz="1800" dirty="0">
+              <a:cs typeface="B Nazanin" panose="00000400000000000000" pitchFamily="2" charset="-78"/>
+            </a:endParaRPr>
+          </a:p>
+          <a:p>
+            <a:pPr algn="r" rtl="1"/>
+            <a:r>
+              <a:rPr lang="fa-IR" sz="1800" dirty="0" err="1">
+                <a:cs typeface="B Nazanin" panose="00000400000000000000" pitchFamily="2" charset="-78"/>
+              </a:rPr>
+              <a:t>هامیلتونی</a:t>
+            </a:r>
+            <a:r>
+              <a:rPr lang="fa-IR" sz="1800" dirty="0">
+                <a:cs typeface="B Nazanin" panose="00000400000000000000" pitchFamily="2" charset="-78"/>
+              </a:rPr>
+              <a:t> به عنوان مولد تحول زمانی</a:t>
+            </a:r>
+          </a:p>
+          <a:p>
+            <a:pPr algn="r" rtl="1"/>
+            <a:endParaRPr lang="fa-IR" sz="1800" dirty="0"/>
+          </a:p>
+          <a:p>
+            <a:pPr algn="r" rtl="1"/>
+            <a:endParaRPr lang="fa-IR" sz="1800" dirty="0"/>
+          </a:p>
+          <a:p>
+            <a:pPr algn="r" rtl="1"/>
+            <a:endParaRPr lang="fa-IR" sz="1800" dirty="0"/>
+          </a:p>
+          <a:p>
+            <a:pPr algn="r" rtl="1"/>
+            <a:endParaRPr lang="fa-IR" sz="1800" dirty="0"/>
+          </a:p>
+          <a:p>
+            <a:pPr algn="r" rtl="1"/>
+            <a:r>
+              <a:rPr lang="fa-IR" sz="1800" dirty="0">
+                <a:cs typeface="B Nazanin" panose="00000400000000000000" pitchFamily="2" charset="-78"/>
+              </a:rPr>
+              <a:t>شرط </a:t>
+            </a:r>
+            <a:r>
+              <a:rPr lang="fa-IR" sz="1800" dirty="0" err="1">
+                <a:cs typeface="B Nazanin" panose="00000400000000000000" pitchFamily="2" charset="-78"/>
+              </a:rPr>
+              <a:t>پایستگی</a:t>
+            </a:r>
+            <a:r>
+              <a:rPr lang="fa-IR" sz="1800" dirty="0">
+                <a:cs typeface="B Nazanin" panose="00000400000000000000" pitchFamily="2" charset="-78"/>
+              </a:rPr>
+              <a:t> در تحول </a:t>
+            </a:r>
+            <a:r>
+              <a:rPr lang="fa-IR" sz="1800" dirty="0" err="1">
+                <a:cs typeface="B Nazanin" panose="00000400000000000000" pitchFamily="2" charset="-78"/>
+              </a:rPr>
+              <a:t>یکانی</a:t>
+            </a:r>
+            <a:endParaRPr lang="fa-IR" sz="1800" dirty="0">
+              <a:cs typeface="B Nazanin" panose="00000400000000000000" pitchFamily="2" charset="-78"/>
+            </a:endParaRPr>
+          </a:p>
+          <a:p>
+            <a:pPr algn="r" rtl="1"/>
+            <a:endParaRPr lang="fa-IR" sz="1800" dirty="0"/>
+          </a:p>
+          <a:p>
+            <a:pPr algn="r" rtl="1"/>
+            <a:endParaRPr lang="fa-IR" sz="1800" dirty="0"/>
+          </a:p>
+          <a:p>
+            <a:pPr marL="0" indent="0" algn="r" rtl="1">
               <a:buNone/>
             </a:pPr>
-            <a:r>
-              <a:rPr lang="en-US" sz="2000" dirty="0"/>
-              <a:t>   Canonical quantization</a:t>
-            </a:r>
-          </a:p>
-          <a:p>
-            <a:endParaRPr lang="en-US" dirty="0"/>
-          </a:p>
-          <a:p>
-            <a:endParaRPr lang="en-US" dirty="0"/>
-          </a:p>
-          <a:p>
-            <a:r>
-              <a:rPr lang="en-US" sz="2000" dirty="0"/>
-              <a:t>LC Circuit</a:t>
-            </a:r>
-          </a:p>
-          <a:p>
-            <a:endParaRPr lang="en-US" dirty="0"/>
+            <a:endParaRPr lang="fa-IR" sz="1800" dirty="0"/>
           </a:p>
         </p:txBody>
       </p:sp>
       <p:pic>
         <p:nvPicPr>
-          <p:cNvPr id="5" name="Picture 4">
-            <a:extLst>
-              <a:ext uri="{FF2B5EF4-FFF2-40B4-BE49-F238E27FC236}">
-                <a16:creationId xmlns:a16="http://schemas.microsoft.com/office/drawing/2014/main" id="{F7AC37BE-CCBD-0EC5-7B85-29B54871F7BF}"/>
+          <p:cNvPr id="9" name="Picture 8">
+            <a:extLst>
+              <a:ext uri="{FF2B5EF4-FFF2-40B4-BE49-F238E27FC236}">
+                <a16:creationId xmlns:a16="http://schemas.microsoft.com/office/drawing/2014/main" id="{9069F335-530C-4DCB-9034-31CF09F10BCD}"/>
               </a:ext>
             </a:extLst>
           </p:cNvPr>
@@ -5262,8 +8415,8 @@
         </p:blipFill>
         <p:spPr>
           <a:xfrm>
-            <a:off x="4913908" y="1496030"/>
-            <a:ext cx="2276475" cy="533400"/>
+            <a:off x="7410874" y="2390265"/>
+            <a:ext cx="2326101" cy="1274703"/>
           </a:xfrm>
           <a:prstGeom prst="rect">
             <a:avLst/>
@@ -5272,10 +8425,10 @@
       </p:pic>
       <p:pic>
         <p:nvPicPr>
-          <p:cNvPr id="7" name="Picture 6">
-            <a:extLst>
-              <a:ext uri="{FF2B5EF4-FFF2-40B4-BE49-F238E27FC236}">
-                <a16:creationId xmlns:a16="http://schemas.microsoft.com/office/drawing/2014/main" id="{348095E8-E872-523E-A9B2-058EDC4A301D}"/>
+          <p:cNvPr id="11" name="Picture 10">
+            <a:extLst>
+              <a:ext uri="{FF2B5EF4-FFF2-40B4-BE49-F238E27FC236}">
+                <a16:creationId xmlns:a16="http://schemas.microsoft.com/office/drawing/2014/main" id="{DE3B71FB-D852-D07C-E0BD-C345D2EC5D67}"/>
               </a:ext>
             </a:extLst>
           </p:cNvPr>
@@ -5292,20 +8445,72 @@
         </p:blipFill>
         <p:spPr>
           <a:xfrm>
-            <a:off x="4328263" y="2384575"/>
-            <a:ext cx="971550" cy="333375"/>
+            <a:off x="2435995" y="2566840"/>
+            <a:ext cx="2571074" cy="883453"/>
           </a:xfrm>
           <a:prstGeom prst="rect">
             <a:avLst/>
           </a:prstGeom>
         </p:spPr>
       </p:pic>
+      <p:sp>
+        <p:nvSpPr>
+          <p:cNvPr id="13" name="TextBox 12">
+            <a:extLst>
+              <a:ext uri="{FF2B5EF4-FFF2-40B4-BE49-F238E27FC236}">
+                <a16:creationId xmlns:a16="http://schemas.microsoft.com/office/drawing/2014/main" id="{FF418AA7-3663-EB3F-B06C-B274E6E4AE95}"/>
+              </a:ext>
+            </a:extLst>
+          </p:cNvPr>
+          <p:cNvSpPr txBox="1"/>
+          <p:nvPr/>
+        </p:nvSpPr>
+        <p:spPr>
+          <a:xfrm>
+            <a:off x="1965104" y="2076782"/>
+            <a:ext cx="3041965" cy="646331"/>
+          </a:xfrm>
+          <a:prstGeom prst="rect">
+            <a:avLst/>
+          </a:prstGeom>
+          <a:noFill/>
+        </p:spPr>
+        <p:txBody>
+          <a:bodyPr wrap="square" rtlCol="0">
+            <a:spAutoFit/>
+          </a:bodyPr>
+          <a:lstStyle/>
+          <a:p>
+            <a:pPr algn="r" rtl="1"/>
+            <a:r>
+              <a:rPr lang="fa-IR" sz="1800" dirty="0" err="1"/>
+              <a:t>هاملیتونی</a:t>
+            </a:r>
+            <a:r>
+              <a:rPr lang="fa-IR" sz="1800" dirty="0"/>
+              <a:t> به عنوان </a:t>
+            </a:r>
+            <a:r>
+              <a:rPr lang="fa-IR" sz="1800" dirty="0" err="1"/>
+              <a:t>عملگر</a:t>
+            </a:r>
+            <a:r>
+              <a:rPr lang="fa-IR" sz="1800" dirty="0"/>
+              <a:t> انرژی</a:t>
+            </a:r>
+          </a:p>
+          <a:p>
+            <a:pPr algn="r" rtl="1"/>
+            <a:endParaRPr lang="en-US" dirty="0"/>
+          </a:p>
+        </p:txBody>
+      </p:sp>
       <p:pic>
         <p:nvPicPr>
-          <p:cNvPr id="9" name="Picture 8">
-            <a:extLst>
-              <a:ext uri="{FF2B5EF4-FFF2-40B4-BE49-F238E27FC236}">
-                <a16:creationId xmlns:a16="http://schemas.microsoft.com/office/drawing/2014/main" id="{4471A6D7-961A-3C33-4BF1-0E4DFC8665E2}"/>
+          <p:cNvPr id="15" name="Picture 14">
+            <a:extLst>
+              <a:ext uri="{FF2B5EF4-FFF2-40B4-BE49-F238E27FC236}">
+                <a16:creationId xmlns:a16="http://schemas.microsoft.com/office/drawing/2014/main" id="{F52D0871-691D-F536-760D-8E57D1493EE0}"/>
               </a:ext>
             </a:extLst>
           </p:cNvPr>
@@ -5322,128 +8527,8 @@
         </p:blipFill>
         <p:spPr>
           <a:xfrm>
-            <a:off x="6213872" y="2333701"/>
-            <a:ext cx="1485900" cy="342900"/>
-          </a:xfrm>
-          <a:prstGeom prst="rect">
-            <a:avLst/>
-          </a:prstGeom>
-        </p:spPr>
-      </p:pic>
-      <p:pic>
-        <p:nvPicPr>
-          <p:cNvPr id="11" name="Picture 10">
-            <a:extLst>
-              <a:ext uri="{FF2B5EF4-FFF2-40B4-BE49-F238E27FC236}">
-                <a16:creationId xmlns:a16="http://schemas.microsoft.com/office/drawing/2014/main" id="{9857DEC1-DAA3-6DAA-98B1-8E3731DE4ECC}"/>
-              </a:ext>
-            </a:extLst>
-          </p:cNvPr>
-          <p:cNvPicPr>
-            <a:picLocks noChangeAspect="1"/>
-          </p:cNvPicPr>
-          <p:nvPr/>
-        </p:nvPicPr>
-        <p:blipFill>
-          <a:blip r:embed="rId5"/>
-          <a:stretch>
-            <a:fillRect/>
-          </a:stretch>
-        </p:blipFill>
-        <p:spPr>
-          <a:xfrm>
-            <a:off x="9270062" y="3831448"/>
-            <a:ext cx="2726554" cy="2062152"/>
-          </a:xfrm>
-          <a:prstGeom prst="rect">
-            <a:avLst/>
-          </a:prstGeom>
-        </p:spPr>
-      </p:pic>
-      <p:pic>
-        <p:nvPicPr>
-          <p:cNvPr id="13" name="Picture 12">
-            <a:extLst>
-              <a:ext uri="{FF2B5EF4-FFF2-40B4-BE49-F238E27FC236}">
-                <a16:creationId xmlns:a16="http://schemas.microsoft.com/office/drawing/2014/main" id="{36A8325A-957B-7BE6-33EF-2D4CAFD141C2}"/>
-              </a:ext>
-            </a:extLst>
-          </p:cNvPr>
-          <p:cNvPicPr>
-            <a:picLocks noChangeAspect="1"/>
-          </p:cNvPicPr>
-          <p:nvPr/>
-        </p:nvPicPr>
-        <p:blipFill>
-          <a:blip r:embed="rId6"/>
-          <a:stretch>
-            <a:fillRect/>
-          </a:stretch>
-        </p:blipFill>
-        <p:spPr>
-          <a:xfrm>
-            <a:off x="4071207" y="2898743"/>
-            <a:ext cx="4049585" cy="1190594"/>
-          </a:xfrm>
-          <a:prstGeom prst="rect">
-            <a:avLst/>
-          </a:prstGeom>
-        </p:spPr>
-      </p:pic>
-      <p:pic>
-        <p:nvPicPr>
-          <p:cNvPr id="15" name="Picture 14">
-            <a:extLst>
-              <a:ext uri="{FF2B5EF4-FFF2-40B4-BE49-F238E27FC236}">
-                <a16:creationId xmlns:a16="http://schemas.microsoft.com/office/drawing/2014/main" id="{9F18CA3B-8CB1-5713-D0EA-67E32F1B69CE}"/>
-              </a:ext>
-            </a:extLst>
-          </p:cNvPr>
-          <p:cNvPicPr>
-            <a:picLocks noChangeAspect="1"/>
-          </p:cNvPicPr>
-          <p:nvPr/>
-        </p:nvPicPr>
-        <p:blipFill>
-          <a:blip r:embed="rId7"/>
-          <a:stretch>
-            <a:fillRect/>
-          </a:stretch>
-        </p:blipFill>
-        <p:spPr>
-          <a:xfrm>
-            <a:off x="956813" y="5057788"/>
-            <a:ext cx="2003764" cy="1119175"/>
-          </a:xfrm>
-          <a:prstGeom prst="rect">
-            <a:avLst/>
-          </a:prstGeom>
-        </p:spPr>
-      </p:pic>
-      <p:pic>
-        <p:nvPicPr>
-          <p:cNvPr id="17" name="Picture 16">
-            <a:extLst>
-              <a:ext uri="{FF2B5EF4-FFF2-40B4-BE49-F238E27FC236}">
-                <a16:creationId xmlns:a16="http://schemas.microsoft.com/office/drawing/2014/main" id="{23B192D0-6E5E-31C0-5A32-C18F2DA5AAED}"/>
-              </a:ext>
-            </a:extLst>
-          </p:cNvPr>
-          <p:cNvPicPr>
-            <a:picLocks noChangeAspect="1"/>
-          </p:cNvPicPr>
-          <p:nvPr/>
-        </p:nvPicPr>
-        <p:blipFill>
-          <a:blip r:embed="rId8"/>
-          <a:stretch>
-            <a:fillRect/>
-          </a:stretch>
-        </p:blipFill>
-        <p:spPr>
-          <a:xfrm>
-            <a:off x="4328263" y="5341150"/>
-            <a:ext cx="1885950" cy="552450"/>
+            <a:off x="4766036" y="4987389"/>
+            <a:ext cx="2219325" cy="1276350"/>
           </a:xfrm>
           <a:prstGeom prst="rect">
             <a:avLst/>
@@ -5452,10 +8537,46 @@
       </p:pic>
       <p:cxnSp>
         <p:nvCxnSpPr>
+          <p:cNvPr id="17" name="Straight Connector 16">
+            <a:extLst>
+              <a:ext uri="{FF2B5EF4-FFF2-40B4-BE49-F238E27FC236}">
+                <a16:creationId xmlns:a16="http://schemas.microsoft.com/office/drawing/2014/main" id="{30DEE88B-9434-6E91-ABB5-287BB7E01CD6}"/>
+              </a:ext>
+            </a:extLst>
+          </p:cNvPr>
+          <p:cNvCxnSpPr/>
+          <p:nvPr/>
+        </p:nvCxnSpPr>
+        <p:spPr>
+          <a:xfrm flipH="1">
+            <a:off x="3558011" y="4010347"/>
+            <a:ext cx="5214796" cy="0"/>
+          </a:xfrm>
+          <a:prstGeom prst="line">
+            <a:avLst/>
+          </a:prstGeom>
+        </p:spPr>
+        <p:style>
+          <a:lnRef idx="2">
+            <a:schemeClr val="accent2"/>
+          </a:lnRef>
+          <a:fillRef idx="0">
+            <a:schemeClr val="accent2"/>
+          </a:fillRef>
+          <a:effectRef idx="1">
+            <a:schemeClr val="accent2"/>
+          </a:effectRef>
+          <a:fontRef idx="minor">
+            <a:schemeClr val="tx1"/>
+          </a:fontRef>
+        </p:style>
+      </p:cxnSp>
+      <p:cxnSp>
+        <p:nvCxnSpPr>
           <p:cNvPr id="19" name="Straight Connector 18">
             <a:extLst>
               <a:ext uri="{FF2B5EF4-FFF2-40B4-BE49-F238E27FC236}">
-                <a16:creationId xmlns:a16="http://schemas.microsoft.com/office/drawing/2014/main" id="{7E91CC10-162E-64FF-73FA-65755B4054ED}"/>
+                <a16:creationId xmlns:a16="http://schemas.microsoft.com/office/drawing/2014/main" id="{9D17DE49-0B22-0881-9789-510DA5567DFD}"/>
               </a:ext>
             </a:extLst>
           </p:cNvPr>
@@ -5464,8 +8585,8 @@
         </p:nvCxnSpPr>
         <p:spPr>
           <a:xfrm>
-            <a:off x="3271837" y="4358434"/>
-            <a:ext cx="5404919" cy="0"/>
+            <a:off x="6301212" y="2290527"/>
+            <a:ext cx="0" cy="1710767"/>
           </a:xfrm>
           <a:prstGeom prst="line">
             <a:avLst/>
@@ -5489,7 +8610,7 @@
     </p:spTree>
     <p:extLst>
       <p:ext uri="{BB962C8B-B14F-4D97-AF65-F5344CB8AC3E}">
-        <p14:creationId xmlns:p14="http://schemas.microsoft.com/office/powerpoint/2010/main" val="3870065045"/>
+        <p14:creationId xmlns:p14="http://schemas.microsoft.com/office/powerpoint/2010/main" val="2998528547"/>
       </p:ext>
     </p:extLst>
   </p:cSld>
@@ -5521,7 +8642,7 @@
           <p:cNvPr id="2" name="Title 1">
             <a:extLst>
               <a:ext uri="{FF2B5EF4-FFF2-40B4-BE49-F238E27FC236}">
-                <a16:creationId xmlns:a16="http://schemas.microsoft.com/office/drawing/2014/main" id="{654A7263-3866-3A0D-B425-7DF1626DC632}"/>
+                <a16:creationId xmlns:a16="http://schemas.microsoft.com/office/drawing/2014/main" id="{3EDC45DD-D705-330E-1E45-9CDB79651563}"/>
               </a:ext>
             </a:extLst>
           </p:cNvPr>
@@ -5532,52 +8653,31 @@
             <p:ph type="title"/>
           </p:nvPr>
         </p:nvSpPr>
-        <p:spPr/>
-        <p:txBody>
-          <a:bodyPr/>
+        <p:spPr>
+          <a:xfrm>
+            <a:off x="838200" y="365125"/>
+            <a:ext cx="10515600" cy="928243"/>
+          </a:xfrm>
+        </p:spPr>
+        <p:txBody>
+          <a:bodyPr>
+            <a:normAutofit/>
+          </a:bodyPr>
           <a:lstStyle/>
           <a:p>
             <a:r>
-              <a:rPr lang="en-US" dirty="0"/>
-              <a:t>Choose Question</a:t>
-            </a:r>
-          </a:p>
-        </p:txBody>
-      </p:sp>
-      <p:sp>
-        <p:nvSpPr>
-          <p:cNvPr id="3" name="Content Placeholder 2">
-            <a:extLst>
-              <a:ext uri="{FF2B5EF4-FFF2-40B4-BE49-F238E27FC236}">
-                <a16:creationId xmlns:a16="http://schemas.microsoft.com/office/drawing/2014/main" id="{4E07A0D5-B9F4-BCEE-91F9-48171214ED53}"/>
-              </a:ext>
-            </a:extLst>
-          </p:cNvPr>
-          <p:cNvSpPr>
-            <a:spLocks noGrp="1"/>
-          </p:cNvSpPr>
-          <p:nvPr>
-            <p:ph idx="1"/>
-          </p:nvPr>
-        </p:nvSpPr>
-        <p:spPr/>
-        <p:txBody>
-          <a:bodyPr/>
-          <a:lstStyle/>
-          <a:p>
-            <a:r>
-              <a:rPr lang="en-US" dirty="0"/>
-              <a:t>Dynamics or Statics?</a:t>
+              <a:rPr lang="en-US" sz="3600" dirty="0"/>
+              <a:t>Example: Harmonic oscillator</a:t>
             </a:r>
           </a:p>
         </p:txBody>
       </p:sp>
       <p:pic>
         <p:nvPicPr>
-          <p:cNvPr id="5" name="Picture 4">
-            <a:extLst>
-              <a:ext uri="{FF2B5EF4-FFF2-40B4-BE49-F238E27FC236}">
-                <a16:creationId xmlns:a16="http://schemas.microsoft.com/office/drawing/2014/main" id="{A9D2E4D1-7376-71DF-FD8F-B452D7ADAEAE}"/>
+          <p:cNvPr id="13" name="Picture 12">
+            <a:extLst>
+              <a:ext uri="{FF2B5EF4-FFF2-40B4-BE49-F238E27FC236}">
+                <a16:creationId xmlns:a16="http://schemas.microsoft.com/office/drawing/2014/main" id="{36A8325A-957B-7BE6-33EF-2D4CAFD141C2}"/>
               </a:ext>
             </a:extLst>
           </p:cNvPr>
@@ -5594,8 +8694,755 @@
         </p:blipFill>
         <p:spPr>
           <a:xfrm>
-            <a:off x="4526733" y="2252342"/>
-            <a:ext cx="7157039" cy="2497406"/>
+            <a:off x="635916" y="5575798"/>
+            <a:ext cx="2468607" cy="725780"/>
+          </a:xfrm>
+          <a:prstGeom prst="rect">
+            <a:avLst/>
+          </a:prstGeom>
+        </p:spPr>
+      </p:pic>
+      <p:cxnSp>
+        <p:nvCxnSpPr>
+          <p:cNvPr id="19" name="Straight Connector 18">
+            <a:extLst>
+              <a:ext uri="{FF2B5EF4-FFF2-40B4-BE49-F238E27FC236}">
+                <a16:creationId xmlns:a16="http://schemas.microsoft.com/office/drawing/2014/main" id="{7E91CC10-162E-64FF-73FA-65755B4054ED}"/>
+              </a:ext>
+            </a:extLst>
+          </p:cNvPr>
+          <p:cNvCxnSpPr/>
+          <p:nvPr/>
+        </p:nvCxnSpPr>
+        <p:spPr>
+          <a:xfrm>
+            <a:off x="3132692" y="4663215"/>
+            <a:ext cx="5404919" cy="0"/>
+          </a:xfrm>
+          <a:prstGeom prst="line">
+            <a:avLst/>
+          </a:prstGeom>
+        </p:spPr>
+        <p:style>
+          <a:lnRef idx="2">
+            <a:schemeClr val="accent1"/>
+          </a:lnRef>
+          <a:fillRef idx="0">
+            <a:schemeClr val="accent1"/>
+          </a:fillRef>
+          <a:effectRef idx="1">
+            <a:schemeClr val="accent1"/>
+          </a:effectRef>
+          <a:fontRef idx="minor">
+            <a:schemeClr val="tx1"/>
+          </a:fontRef>
+        </p:style>
+      </p:cxnSp>
+      <p:sp>
+        <p:nvSpPr>
+          <p:cNvPr id="8" name="TextBox 7">
+            <a:extLst>
+              <a:ext uri="{FF2B5EF4-FFF2-40B4-BE49-F238E27FC236}">
+                <a16:creationId xmlns:a16="http://schemas.microsoft.com/office/drawing/2014/main" id="{3A755B45-3BC3-EADC-F3E9-11998B6920FD}"/>
+              </a:ext>
+            </a:extLst>
+          </p:cNvPr>
+          <p:cNvSpPr txBox="1"/>
+          <p:nvPr/>
+        </p:nvSpPr>
+        <p:spPr>
+          <a:xfrm>
+            <a:off x="6872474" y="1258402"/>
+            <a:ext cx="4227970" cy="307777"/>
+          </a:xfrm>
+          <a:prstGeom prst="rect">
+            <a:avLst/>
+          </a:prstGeom>
+          <a:noFill/>
+        </p:spPr>
+        <p:txBody>
+          <a:bodyPr wrap="square" rtlCol="0">
+            <a:spAutoFit/>
+          </a:bodyPr>
+          <a:lstStyle/>
+          <a:p>
+            <a:pPr algn="r" rtl="1"/>
+            <a:r>
+              <a:rPr lang="fa-IR" sz="1400" dirty="0">
+                <a:cs typeface="B Nazanin" panose="00000400000000000000" pitchFamily="2" charset="-78"/>
+              </a:rPr>
+              <a:t>حالت کلاسیک- تقریب حرکت های کوچک حول نقطه تعادل پایدار</a:t>
+            </a:r>
+            <a:endParaRPr lang="en-US" sz="1400" dirty="0">
+              <a:cs typeface="B Nazanin" panose="00000400000000000000" pitchFamily="2" charset="-78"/>
+            </a:endParaRPr>
+          </a:p>
+        </p:txBody>
+      </p:sp>
+      <p:sp>
+        <p:nvSpPr>
+          <p:cNvPr id="10" name="TextBox 9">
+            <a:extLst>
+              <a:ext uri="{FF2B5EF4-FFF2-40B4-BE49-F238E27FC236}">
+                <a16:creationId xmlns:a16="http://schemas.microsoft.com/office/drawing/2014/main" id="{9256B059-2381-6A38-71A1-264E6317FBF2}"/>
+              </a:ext>
+            </a:extLst>
+          </p:cNvPr>
+          <p:cNvSpPr txBox="1"/>
+          <p:nvPr/>
+        </p:nvSpPr>
+        <p:spPr>
+          <a:xfrm>
+            <a:off x="9533299" y="1652233"/>
+            <a:ext cx="1596458" cy="276999"/>
+          </a:xfrm>
+          <a:prstGeom prst="rect">
+            <a:avLst/>
+          </a:prstGeom>
+          <a:noFill/>
+        </p:spPr>
+        <p:txBody>
+          <a:bodyPr wrap="square" rtlCol="0">
+            <a:spAutoFit/>
+          </a:bodyPr>
+          <a:lstStyle/>
+          <a:p>
+            <a:pPr algn="r" rtl="1"/>
+            <a:r>
+              <a:rPr lang="fa-IR" sz="1200" dirty="0">
+                <a:cs typeface="B Nazanin" panose="00000400000000000000" pitchFamily="2" charset="-78"/>
+              </a:rPr>
+              <a:t>نیروی </a:t>
+            </a:r>
+            <a:r>
+              <a:rPr lang="fa-IR" sz="1200" dirty="0" err="1">
+                <a:cs typeface="B Nazanin" panose="00000400000000000000" pitchFamily="2" charset="-78"/>
+              </a:rPr>
+              <a:t>پایستار</a:t>
+            </a:r>
+            <a:r>
+              <a:rPr lang="fa-IR" sz="1200" dirty="0">
+                <a:cs typeface="B Nazanin" panose="00000400000000000000" pitchFamily="2" charset="-78"/>
+              </a:rPr>
+              <a:t>(یک </a:t>
+            </a:r>
+            <a:r>
+              <a:rPr lang="fa-IR" sz="1200" dirty="0" err="1">
+                <a:cs typeface="B Nazanin" panose="00000400000000000000" pitchFamily="2" charset="-78"/>
+              </a:rPr>
+              <a:t>بُعد</a:t>
+            </a:r>
+            <a:r>
+              <a:rPr lang="fa-IR" sz="1200" dirty="0">
+                <a:cs typeface="B Nazanin" panose="00000400000000000000" pitchFamily="2" charset="-78"/>
+              </a:rPr>
+              <a:t>)</a:t>
+            </a:r>
+            <a:endParaRPr lang="en-US" sz="1200" dirty="0">
+              <a:cs typeface="B Nazanin" panose="00000400000000000000" pitchFamily="2" charset="-78"/>
+            </a:endParaRPr>
+          </a:p>
+        </p:txBody>
+      </p:sp>
+      <p:pic>
+        <p:nvPicPr>
+          <p:cNvPr id="14" name="Picture 13">
+            <a:extLst>
+              <a:ext uri="{FF2B5EF4-FFF2-40B4-BE49-F238E27FC236}">
+                <a16:creationId xmlns:a16="http://schemas.microsoft.com/office/drawing/2014/main" id="{261F804E-B2F5-F0A1-DB9F-ECF484559C25}"/>
+              </a:ext>
+            </a:extLst>
+          </p:cNvPr>
+          <p:cNvPicPr>
+            <a:picLocks noChangeAspect="1"/>
+          </p:cNvPicPr>
+          <p:nvPr/>
+        </p:nvPicPr>
+        <p:blipFill>
+          <a:blip r:embed="rId3"/>
+          <a:stretch>
+            <a:fillRect/>
+          </a:stretch>
+        </p:blipFill>
+        <p:spPr>
+          <a:xfrm>
+            <a:off x="10027944" y="1952763"/>
+            <a:ext cx="1019175" cy="438150"/>
+          </a:xfrm>
+          <a:prstGeom prst="rect">
+            <a:avLst/>
+          </a:prstGeom>
+        </p:spPr>
+      </p:pic>
+      <p:pic>
+        <p:nvPicPr>
+          <p:cNvPr id="18" name="Picture 17">
+            <a:extLst>
+              <a:ext uri="{FF2B5EF4-FFF2-40B4-BE49-F238E27FC236}">
+                <a16:creationId xmlns:a16="http://schemas.microsoft.com/office/drawing/2014/main" id="{0FAFE7B8-3E58-F4B0-C861-0856C90C6F54}"/>
+              </a:ext>
+            </a:extLst>
+          </p:cNvPr>
+          <p:cNvPicPr>
+            <a:picLocks noChangeAspect="1"/>
+          </p:cNvPicPr>
+          <p:nvPr/>
+        </p:nvPicPr>
+        <p:blipFill>
+          <a:blip r:embed="rId4"/>
+          <a:stretch>
+            <a:fillRect/>
+          </a:stretch>
+        </p:blipFill>
+        <p:spPr>
+          <a:xfrm>
+            <a:off x="5460373" y="2800418"/>
+            <a:ext cx="3187426" cy="288993"/>
+          </a:xfrm>
+          <a:prstGeom prst="rect">
+            <a:avLst/>
+          </a:prstGeom>
+        </p:spPr>
+      </p:pic>
+      <p:sp>
+        <p:nvSpPr>
+          <p:cNvPr id="20" name="TextBox 19">
+            <a:extLst>
+              <a:ext uri="{FF2B5EF4-FFF2-40B4-BE49-F238E27FC236}">
+                <a16:creationId xmlns:a16="http://schemas.microsoft.com/office/drawing/2014/main" id="{6DC1B6F3-9881-C04C-A460-FF2E0BC8AD1A}"/>
+              </a:ext>
+            </a:extLst>
+          </p:cNvPr>
+          <p:cNvSpPr txBox="1"/>
+          <p:nvPr/>
+        </p:nvSpPr>
+        <p:spPr>
+          <a:xfrm>
+            <a:off x="9258038" y="2638359"/>
+            <a:ext cx="1700532" cy="338554"/>
+          </a:xfrm>
+          <a:prstGeom prst="rect">
+            <a:avLst/>
+          </a:prstGeom>
+          <a:noFill/>
+        </p:spPr>
+        <p:txBody>
+          <a:bodyPr wrap="square" rtlCol="0">
+            <a:spAutoFit/>
+          </a:bodyPr>
+          <a:lstStyle/>
+          <a:p>
+            <a:pPr algn="r" rtl="1"/>
+            <a:r>
+              <a:rPr lang="fa-IR" sz="1600" dirty="0"/>
+              <a:t>بسط </a:t>
+            </a:r>
+            <a:r>
+              <a:rPr lang="fa-IR" sz="1600" dirty="0" err="1"/>
+              <a:t>تیلور</a:t>
+            </a:r>
+            <a:endParaRPr lang="en-US" sz="1600" dirty="0"/>
+          </a:p>
+        </p:txBody>
+      </p:sp>
+      <p:sp>
+        <p:nvSpPr>
+          <p:cNvPr id="21" name="TextBox 20">
+            <a:extLst>
+              <a:ext uri="{FF2B5EF4-FFF2-40B4-BE49-F238E27FC236}">
+                <a16:creationId xmlns:a16="http://schemas.microsoft.com/office/drawing/2014/main" id="{C1A08141-6A2B-C1D9-A3C3-CCC4EBE6C3F2}"/>
+              </a:ext>
+            </a:extLst>
+          </p:cNvPr>
+          <p:cNvSpPr txBox="1"/>
+          <p:nvPr/>
+        </p:nvSpPr>
+        <p:spPr>
+          <a:xfrm>
+            <a:off x="8943523" y="3378263"/>
+            <a:ext cx="2329561" cy="307777"/>
+          </a:xfrm>
+          <a:prstGeom prst="rect">
+            <a:avLst/>
+          </a:prstGeom>
+          <a:noFill/>
+        </p:spPr>
+        <p:txBody>
+          <a:bodyPr wrap="square" rtlCol="0">
+            <a:spAutoFit/>
+          </a:bodyPr>
+          <a:lstStyle/>
+          <a:p>
+            <a:pPr algn="r" rtl="1"/>
+            <a:r>
+              <a:rPr lang="fa-IR" sz="1400" dirty="0">
+                <a:cs typeface="B Nazanin" panose="00000400000000000000" pitchFamily="2" charset="-78"/>
+              </a:rPr>
+              <a:t>برای یک کمینه پایدار با انحنای ثابت</a:t>
+            </a:r>
+            <a:endParaRPr lang="en-US" sz="1400" dirty="0">
+              <a:cs typeface="B Nazanin" panose="00000400000000000000" pitchFamily="2" charset="-78"/>
+            </a:endParaRPr>
+          </a:p>
+        </p:txBody>
+      </p:sp>
+      <p:pic>
+        <p:nvPicPr>
+          <p:cNvPr id="23" name="Picture 22">
+            <a:extLst>
+              <a:ext uri="{FF2B5EF4-FFF2-40B4-BE49-F238E27FC236}">
+                <a16:creationId xmlns:a16="http://schemas.microsoft.com/office/drawing/2014/main" id="{FE73758A-1997-BC9B-AF24-1C8B41A0CB8B}"/>
+              </a:ext>
+            </a:extLst>
+          </p:cNvPr>
+          <p:cNvPicPr>
+            <a:picLocks noChangeAspect="1"/>
+          </p:cNvPicPr>
+          <p:nvPr/>
+        </p:nvPicPr>
+        <p:blipFill>
+          <a:blip r:embed="rId5"/>
+          <a:stretch>
+            <a:fillRect/>
+          </a:stretch>
+        </p:blipFill>
+        <p:spPr>
+          <a:xfrm>
+            <a:off x="5462254" y="3123528"/>
+            <a:ext cx="2702459" cy="523057"/>
+          </a:xfrm>
+          <a:prstGeom prst="rect">
+            <a:avLst/>
+          </a:prstGeom>
+        </p:spPr>
+      </p:pic>
+      <p:pic>
+        <p:nvPicPr>
+          <p:cNvPr id="25" name="Picture 24">
+            <a:extLst>
+              <a:ext uri="{FF2B5EF4-FFF2-40B4-BE49-F238E27FC236}">
+                <a16:creationId xmlns:a16="http://schemas.microsoft.com/office/drawing/2014/main" id="{FEABA137-05E8-D863-3C09-701240F2A4EC}"/>
+              </a:ext>
+            </a:extLst>
+          </p:cNvPr>
+          <p:cNvPicPr>
+            <a:picLocks noChangeAspect="1"/>
+          </p:cNvPicPr>
+          <p:nvPr/>
+        </p:nvPicPr>
+        <p:blipFill>
+          <a:blip r:embed="rId6"/>
+          <a:stretch>
+            <a:fillRect/>
+          </a:stretch>
+        </p:blipFill>
+        <p:spPr>
+          <a:xfrm>
+            <a:off x="5399203" y="3665410"/>
+            <a:ext cx="1809750" cy="428625"/>
+          </a:xfrm>
+          <a:prstGeom prst="rect">
+            <a:avLst/>
+          </a:prstGeom>
+        </p:spPr>
+      </p:pic>
+      <p:pic>
+        <p:nvPicPr>
+          <p:cNvPr id="27" name="Picture 26">
+            <a:extLst>
+              <a:ext uri="{FF2B5EF4-FFF2-40B4-BE49-F238E27FC236}">
+                <a16:creationId xmlns:a16="http://schemas.microsoft.com/office/drawing/2014/main" id="{1E17E77B-AA9F-6CDF-8FBC-8A97808BE218}"/>
+              </a:ext>
+            </a:extLst>
+          </p:cNvPr>
+          <p:cNvPicPr>
+            <a:picLocks noChangeAspect="1"/>
+          </p:cNvPicPr>
+          <p:nvPr/>
+        </p:nvPicPr>
+        <p:blipFill>
+          <a:blip r:embed="rId7"/>
+          <a:stretch>
+            <a:fillRect/>
+          </a:stretch>
+        </p:blipFill>
+        <p:spPr>
+          <a:xfrm>
+            <a:off x="7986045" y="3758596"/>
+            <a:ext cx="914400" cy="209550"/>
+          </a:xfrm>
+          <a:prstGeom prst="rect">
+            <a:avLst/>
+          </a:prstGeom>
+        </p:spPr>
+      </p:pic>
+      <p:sp>
+        <p:nvSpPr>
+          <p:cNvPr id="28" name="Arrow: Right 27">
+            <a:extLst>
+              <a:ext uri="{FF2B5EF4-FFF2-40B4-BE49-F238E27FC236}">
+                <a16:creationId xmlns:a16="http://schemas.microsoft.com/office/drawing/2014/main" id="{C69F0443-A98D-FEC8-8001-A247394E01DC}"/>
+              </a:ext>
+            </a:extLst>
+          </p:cNvPr>
+          <p:cNvSpPr/>
+          <p:nvPr/>
+        </p:nvSpPr>
+        <p:spPr>
+          <a:xfrm>
+            <a:off x="7557190" y="3844948"/>
+            <a:ext cx="235551" cy="108837"/>
+          </a:xfrm>
+          <a:prstGeom prst="rightArrow">
+            <a:avLst/>
+          </a:prstGeom>
+        </p:spPr>
+        <p:style>
+          <a:lnRef idx="2">
+            <a:schemeClr val="accent1">
+              <a:shade val="15000"/>
+            </a:schemeClr>
+          </a:lnRef>
+          <a:fillRef idx="1">
+            <a:schemeClr val="accent1"/>
+          </a:fillRef>
+          <a:effectRef idx="0">
+            <a:schemeClr val="accent1"/>
+          </a:effectRef>
+          <a:fontRef idx="minor">
+            <a:schemeClr val="lt1"/>
+          </a:fontRef>
+        </p:style>
+        <p:txBody>
+          <a:bodyPr rtlCol="0" anchor="ctr"/>
+          <a:lstStyle/>
+          <a:p>
+            <a:pPr algn="ctr"/>
+            <a:endParaRPr lang="en-US"/>
+          </a:p>
+        </p:txBody>
+      </p:sp>
+      <p:sp>
+        <p:nvSpPr>
+          <p:cNvPr id="29" name="Arrow: Right 28">
+            <a:extLst>
+              <a:ext uri="{FF2B5EF4-FFF2-40B4-BE49-F238E27FC236}">
+                <a16:creationId xmlns:a16="http://schemas.microsoft.com/office/drawing/2014/main" id="{3A9CCD76-CC26-44E6-5164-5E7B581A33AD}"/>
+              </a:ext>
+            </a:extLst>
+          </p:cNvPr>
+          <p:cNvSpPr/>
+          <p:nvPr/>
+        </p:nvSpPr>
+        <p:spPr>
+          <a:xfrm>
+            <a:off x="9048411" y="3839909"/>
+            <a:ext cx="235551" cy="108837"/>
+          </a:xfrm>
+          <a:prstGeom prst="rightArrow">
+            <a:avLst/>
+          </a:prstGeom>
+        </p:spPr>
+        <p:style>
+          <a:lnRef idx="2">
+            <a:schemeClr val="accent1">
+              <a:shade val="15000"/>
+            </a:schemeClr>
+          </a:lnRef>
+          <a:fillRef idx="1">
+            <a:schemeClr val="accent1"/>
+          </a:fillRef>
+          <a:effectRef idx="0">
+            <a:schemeClr val="accent1"/>
+          </a:effectRef>
+          <a:fontRef idx="minor">
+            <a:schemeClr val="lt1"/>
+          </a:fontRef>
+        </p:style>
+        <p:txBody>
+          <a:bodyPr rtlCol="0" anchor="ctr"/>
+          <a:lstStyle/>
+          <a:p>
+            <a:pPr algn="ctr"/>
+            <a:endParaRPr lang="en-US"/>
+          </a:p>
+        </p:txBody>
+      </p:sp>
+      <p:pic>
+        <p:nvPicPr>
+          <p:cNvPr id="31" name="Picture 30">
+            <a:extLst>
+              <a:ext uri="{FF2B5EF4-FFF2-40B4-BE49-F238E27FC236}">
+                <a16:creationId xmlns:a16="http://schemas.microsoft.com/office/drawing/2014/main" id="{50D3CDBE-727C-5C4F-40C3-7BDA3000ADBB}"/>
+              </a:ext>
+            </a:extLst>
+          </p:cNvPr>
+          <p:cNvPicPr>
+            <a:picLocks noChangeAspect="1"/>
+          </p:cNvPicPr>
+          <p:nvPr/>
+        </p:nvPicPr>
+        <p:blipFill>
+          <a:blip r:embed="rId8"/>
+          <a:stretch>
+            <a:fillRect/>
+          </a:stretch>
+        </p:blipFill>
+        <p:spPr>
+          <a:xfrm>
+            <a:off x="9431929" y="3745425"/>
+            <a:ext cx="1524000" cy="247650"/>
+          </a:xfrm>
+          <a:prstGeom prst="rect">
+            <a:avLst/>
+          </a:prstGeom>
+        </p:spPr>
+      </p:pic>
+      <p:pic>
+        <p:nvPicPr>
+          <p:cNvPr id="33" name="Picture 32">
+            <a:extLst>
+              <a:ext uri="{FF2B5EF4-FFF2-40B4-BE49-F238E27FC236}">
+                <a16:creationId xmlns:a16="http://schemas.microsoft.com/office/drawing/2014/main" id="{C6AE4736-C791-79CA-F70A-BFB6BFF3085C}"/>
+              </a:ext>
+            </a:extLst>
+          </p:cNvPr>
+          <p:cNvPicPr>
+            <a:picLocks noChangeAspect="1"/>
+          </p:cNvPicPr>
+          <p:nvPr/>
+        </p:nvPicPr>
+        <p:blipFill>
+          <a:blip r:embed="rId9"/>
+          <a:stretch>
+            <a:fillRect/>
+          </a:stretch>
+        </p:blipFill>
+        <p:spPr>
+          <a:xfrm>
+            <a:off x="7250662" y="4092074"/>
+            <a:ext cx="1190625" cy="495300"/>
+          </a:xfrm>
+          <a:prstGeom prst="rect">
+            <a:avLst/>
+          </a:prstGeom>
+        </p:spPr>
+      </p:pic>
+      <p:cxnSp>
+        <p:nvCxnSpPr>
+          <p:cNvPr id="35" name="Straight Connector 34">
+            <a:extLst>
+              <a:ext uri="{FF2B5EF4-FFF2-40B4-BE49-F238E27FC236}">
+                <a16:creationId xmlns:a16="http://schemas.microsoft.com/office/drawing/2014/main" id="{1DB17A94-5468-FEE7-9DC6-407E3D6F0BB2}"/>
+              </a:ext>
+            </a:extLst>
+          </p:cNvPr>
+          <p:cNvCxnSpPr/>
+          <p:nvPr/>
+        </p:nvCxnSpPr>
+        <p:spPr>
+          <a:xfrm>
+            <a:off x="5113894" y="1543494"/>
+            <a:ext cx="15914" cy="3110795"/>
+          </a:xfrm>
+          <a:prstGeom prst="line">
+            <a:avLst/>
+          </a:prstGeom>
+        </p:spPr>
+        <p:style>
+          <a:lnRef idx="2">
+            <a:schemeClr val="accent1"/>
+          </a:lnRef>
+          <a:fillRef idx="0">
+            <a:schemeClr val="accent1"/>
+          </a:fillRef>
+          <a:effectRef idx="1">
+            <a:schemeClr val="accent1"/>
+          </a:effectRef>
+          <a:fontRef idx="minor">
+            <a:schemeClr val="tx1"/>
+          </a:fontRef>
+        </p:style>
+      </p:cxnSp>
+      <p:sp>
+        <p:nvSpPr>
+          <p:cNvPr id="38" name="TextBox 37">
+            <a:extLst>
+              <a:ext uri="{FF2B5EF4-FFF2-40B4-BE49-F238E27FC236}">
+                <a16:creationId xmlns:a16="http://schemas.microsoft.com/office/drawing/2014/main" id="{695878E4-C8AF-5788-A4EE-547F6478C4B5}"/>
+              </a:ext>
+            </a:extLst>
+          </p:cNvPr>
+          <p:cNvSpPr txBox="1"/>
+          <p:nvPr/>
+        </p:nvSpPr>
+        <p:spPr>
+          <a:xfrm>
+            <a:off x="1892293" y="1255022"/>
+            <a:ext cx="3212751" cy="307777"/>
+          </a:xfrm>
+          <a:prstGeom prst="rect">
+            <a:avLst/>
+          </a:prstGeom>
+          <a:noFill/>
+        </p:spPr>
+        <p:txBody>
+          <a:bodyPr wrap="square" rtlCol="0">
+            <a:spAutoFit/>
+          </a:bodyPr>
+          <a:lstStyle/>
+          <a:p>
+            <a:pPr algn="r" rtl="1"/>
+            <a:r>
+              <a:rPr lang="fa-IR" sz="1400" dirty="0">
+                <a:cs typeface="B Nazanin" panose="00000400000000000000" pitchFamily="2" charset="-78"/>
+              </a:rPr>
+              <a:t>حالت </a:t>
+            </a:r>
+            <a:r>
+              <a:rPr lang="fa-IR" sz="1400" dirty="0" err="1">
+                <a:cs typeface="B Nazanin" panose="00000400000000000000" pitchFamily="2" charset="-78"/>
+              </a:rPr>
+              <a:t>کوانتومی</a:t>
+            </a:r>
+            <a:r>
+              <a:rPr lang="fa-IR" sz="1400" dirty="0">
+                <a:cs typeface="B Nazanin" panose="00000400000000000000" pitchFamily="2" charset="-78"/>
+              </a:rPr>
+              <a:t>- استفاده از اصل </a:t>
+            </a:r>
+            <a:r>
+              <a:rPr lang="fa-IR" sz="1400" dirty="0" err="1">
+                <a:cs typeface="B Nazanin" panose="00000400000000000000" pitchFamily="2" charset="-78"/>
+              </a:rPr>
+              <a:t>کوانتش</a:t>
+            </a:r>
+            <a:r>
+              <a:rPr lang="fa-IR" sz="1400" dirty="0">
+                <a:cs typeface="B Nazanin" panose="00000400000000000000" pitchFamily="2" charset="-78"/>
+              </a:rPr>
+              <a:t> کانونی</a:t>
+            </a:r>
+            <a:endParaRPr lang="en-US" sz="1400" dirty="0">
+              <a:cs typeface="B Nazanin" panose="00000400000000000000" pitchFamily="2" charset="-78"/>
+            </a:endParaRPr>
+          </a:p>
+        </p:txBody>
+      </p:sp>
+      <p:pic>
+        <p:nvPicPr>
+          <p:cNvPr id="40" name="Picture 39">
+            <a:extLst>
+              <a:ext uri="{FF2B5EF4-FFF2-40B4-BE49-F238E27FC236}">
+                <a16:creationId xmlns:a16="http://schemas.microsoft.com/office/drawing/2014/main" id="{5FEA69F5-E336-6908-DB70-95C32E1E321C}"/>
+              </a:ext>
+            </a:extLst>
+          </p:cNvPr>
+          <p:cNvPicPr>
+            <a:picLocks noChangeAspect="1"/>
+          </p:cNvPicPr>
+          <p:nvPr/>
+        </p:nvPicPr>
+        <p:blipFill>
+          <a:blip r:embed="rId10"/>
+          <a:stretch>
+            <a:fillRect/>
+          </a:stretch>
+        </p:blipFill>
+        <p:spPr>
+          <a:xfrm>
+            <a:off x="805491" y="1543494"/>
+            <a:ext cx="2023421" cy="2404514"/>
+          </a:xfrm>
+          <a:prstGeom prst="rect">
+            <a:avLst/>
+          </a:prstGeom>
+        </p:spPr>
+      </p:pic>
+      <p:pic>
+        <p:nvPicPr>
+          <p:cNvPr id="42" name="Picture 41">
+            <a:extLst>
+              <a:ext uri="{FF2B5EF4-FFF2-40B4-BE49-F238E27FC236}">
+                <a16:creationId xmlns:a16="http://schemas.microsoft.com/office/drawing/2014/main" id="{3DB30562-9F7B-9B0A-6A24-712FC45AA9B5}"/>
+              </a:ext>
+            </a:extLst>
+          </p:cNvPr>
+          <p:cNvPicPr>
+            <a:picLocks noChangeAspect="1"/>
+          </p:cNvPicPr>
+          <p:nvPr/>
+        </p:nvPicPr>
+        <p:blipFill>
+          <a:blip r:embed="rId11"/>
+          <a:stretch>
+            <a:fillRect/>
+          </a:stretch>
+        </p:blipFill>
+        <p:spPr>
+          <a:xfrm>
+            <a:off x="1148045" y="4037166"/>
+            <a:ext cx="2828925" cy="542925"/>
+          </a:xfrm>
+          <a:prstGeom prst="rect">
+            <a:avLst/>
+          </a:prstGeom>
+        </p:spPr>
+      </p:pic>
+      <p:pic>
+        <p:nvPicPr>
+          <p:cNvPr id="44" name="Picture 43">
+            <a:extLst>
+              <a:ext uri="{FF2B5EF4-FFF2-40B4-BE49-F238E27FC236}">
+                <a16:creationId xmlns:a16="http://schemas.microsoft.com/office/drawing/2014/main" id="{8250193B-C5BE-8271-D89C-859275B95579}"/>
+              </a:ext>
+            </a:extLst>
+          </p:cNvPr>
+          <p:cNvPicPr>
+            <a:picLocks noChangeAspect="1"/>
+          </p:cNvPicPr>
+          <p:nvPr/>
+        </p:nvPicPr>
+        <p:blipFill>
+          <a:blip r:embed="rId12"/>
+          <a:stretch>
+            <a:fillRect/>
+          </a:stretch>
+        </p:blipFill>
+        <p:spPr>
+          <a:xfrm>
+            <a:off x="5102751" y="1332324"/>
+            <a:ext cx="3434860" cy="1493495"/>
+          </a:xfrm>
+          <a:prstGeom prst="rect">
+            <a:avLst/>
+          </a:prstGeom>
+        </p:spPr>
+      </p:pic>
+      <p:pic>
+        <p:nvPicPr>
+          <p:cNvPr id="46" name="Picture 45">
+            <a:extLst>
+              <a:ext uri="{FF2B5EF4-FFF2-40B4-BE49-F238E27FC236}">
+                <a16:creationId xmlns:a16="http://schemas.microsoft.com/office/drawing/2014/main" id="{5EE03566-AA65-5CEE-F199-9502FF88E3A1}"/>
+              </a:ext>
+            </a:extLst>
+          </p:cNvPr>
+          <p:cNvPicPr>
+            <a:picLocks noChangeAspect="1"/>
+          </p:cNvPicPr>
+          <p:nvPr/>
+        </p:nvPicPr>
+        <p:blipFill>
+          <a:blip r:embed="rId13"/>
+          <a:stretch>
+            <a:fillRect/>
+          </a:stretch>
+        </p:blipFill>
+        <p:spPr>
+          <a:xfrm>
+            <a:off x="3279103" y="4697896"/>
+            <a:ext cx="4726034" cy="2071891"/>
           </a:xfrm>
           <a:prstGeom prst="rect">
             <a:avLst/>
@@ -5605,7 +9452,7 @@
     </p:spTree>
     <p:extLst>
       <p:ext uri="{BB962C8B-B14F-4D97-AF65-F5344CB8AC3E}">
-        <p14:creationId xmlns:p14="http://schemas.microsoft.com/office/powerpoint/2010/main" val="137806960"/>
+        <p14:creationId xmlns:p14="http://schemas.microsoft.com/office/powerpoint/2010/main" val="3870065045"/>
       </p:ext>
     </p:extLst>
   </p:cSld>
@@ -5637,7 +9484,7 @@
           <p:cNvPr id="2" name="Title 1">
             <a:extLst>
               <a:ext uri="{FF2B5EF4-FFF2-40B4-BE49-F238E27FC236}">
-                <a16:creationId xmlns:a16="http://schemas.microsoft.com/office/drawing/2014/main" id="{626DC213-AB81-F905-0EB4-212B09DD184B}"/>
+                <a16:creationId xmlns:a16="http://schemas.microsoft.com/office/drawing/2014/main" id="{3EDC45DD-D705-330E-1E45-9CDB79651563}"/>
               </a:ext>
             </a:extLst>
           </p:cNvPr>
@@ -5648,87 +9495,776 @@
             <p:ph type="title"/>
           </p:nvPr>
         </p:nvSpPr>
-        <p:spPr/>
-        <p:txBody>
-          <a:bodyPr/>
+        <p:spPr>
+          <a:xfrm>
+            <a:off x="838200" y="365125"/>
+            <a:ext cx="10515600" cy="928243"/>
+          </a:xfrm>
+        </p:spPr>
+        <p:txBody>
+          <a:bodyPr>
+            <a:normAutofit/>
+          </a:bodyPr>
           <a:lstStyle/>
           <a:p>
             <a:r>
-              <a:rPr lang="en-US" dirty="0"/>
-              <a:t>Ground-state problem</a:t>
-            </a:r>
-          </a:p>
-        </p:txBody>
-      </p:sp>
-      <p:sp>
-        <p:nvSpPr>
-          <p:cNvPr id="3" name="Content Placeholder 2">
-            <a:extLst>
-              <a:ext uri="{FF2B5EF4-FFF2-40B4-BE49-F238E27FC236}">
-                <a16:creationId xmlns:a16="http://schemas.microsoft.com/office/drawing/2014/main" id="{85CD77E3-249C-D403-4453-1F82773B76D1}"/>
-              </a:ext>
-            </a:extLst>
-          </p:cNvPr>
-          <p:cNvSpPr>
-            <a:spLocks noGrp="1"/>
-          </p:cNvSpPr>
-          <p:nvPr>
-            <p:ph idx="1"/>
-          </p:nvPr>
-        </p:nvSpPr>
-        <p:spPr/>
-        <p:txBody>
-          <a:bodyPr/>
+              <a:rPr lang="en-US" sz="3600" dirty="0"/>
+              <a:t>Example: LC Circuit</a:t>
+            </a:r>
+          </a:p>
+        </p:txBody>
+      </p:sp>
+      <p:pic>
+        <p:nvPicPr>
+          <p:cNvPr id="13" name="Picture 12">
+            <a:extLst>
+              <a:ext uri="{FF2B5EF4-FFF2-40B4-BE49-F238E27FC236}">
+                <a16:creationId xmlns:a16="http://schemas.microsoft.com/office/drawing/2014/main" id="{36A8325A-957B-7BE6-33EF-2D4CAFD141C2}"/>
+              </a:ext>
+            </a:extLst>
+          </p:cNvPr>
+          <p:cNvPicPr>
+            <a:picLocks noChangeAspect="1"/>
+          </p:cNvPicPr>
+          <p:nvPr/>
+        </p:nvPicPr>
+        <p:blipFill>
+          <a:blip r:embed="rId2"/>
+          <a:stretch>
+            <a:fillRect/>
+          </a:stretch>
+        </p:blipFill>
+        <p:spPr>
+          <a:xfrm>
+            <a:off x="635916" y="5575798"/>
+            <a:ext cx="2468607" cy="725780"/>
+          </a:xfrm>
+          <a:prstGeom prst="rect">
+            <a:avLst/>
+          </a:prstGeom>
+        </p:spPr>
+      </p:pic>
+      <p:cxnSp>
+        <p:nvCxnSpPr>
+          <p:cNvPr id="19" name="Straight Connector 18">
+            <a:extLst>
+              <a:ext uri="{FF2B5EF4-FFF2-40B4-BE49-F238E27FC236}">
+                <a16:creationId xmlns:a16="http://schemas.microsoft.com/office/drawing/2014/main" id="{7E91CC10-162E-64FF-73FA-65755B4054ED}"/>
+              </a:ext>
+            </a:extLst>
+          </p:cNvPr>
+          <p:cNvCxnSpPr/>
+          <p:nvPr/>
+        </p:nvCxnSpPr>
+        <p:spPr>
+          <a:xfrm>
+            <a:off x="3132692" y="4663215"/>
+            <a:ext cx="5404919" cy="0"/>
+          </a:xfrm>
+          <a:prstGeom prst="line">
+            <a:avLst/>
+          </a:prstGeom>
+        </p:spPr>
+        <p:style>
+          <a:lnRef idx="2">
+            <a:schemeClr val="accent1"/>
+          </a:lnRef>
+          <a:fillRef idx="0">
+            <a:schemeClr val="accent1"/>
+          </a:fillRef>
+          <a:effectRef idx="1">
+            <a:schemeClr val="accent1"/>
+          </a:effectRef>
+          <a:fontRef idx="minor">
+            <a:schemeClr val="tx1"/>
+          </a:fontRef>
+        </p:style>
+      </p:cxnSp>
+      <p:sp>
+        <p:nvSpPr>
+          <p:cNvPr id="8" name="TextBox 7">
+            <a:extLst>
+              <a:ext uri="{FF2B5EF4-FFF2-40B4-BE49-F238E27FC236}">
+                <a16:creationId xmlns:a16="http://schemas.microsoft.com/office/drawing/2014/main" id="{3A755B45-3BC3-EADC-F3E9-11998B6920FD}"/>
+              </a:ext>
+            </a:extLst>
+          </p:cNvPr>
+          <p:cNvSpPr txBox="1"/>
+          <p:nvPr/>
+        </p:nvSpPr>
+        <p:spPr>
+          <a:xfrm>
+            <a:off x="6872474" y="1258402"/>
+            <a:ext cx="4227970" cy="307777"/>
+          </a:xfrm>
+          <a:prstGeom prst="rect">
+            <a:avLst/>
+          </a:prstGeom>
+          <a:noFill/>
+        </p:spPr>
+        <p:txBody>
+          <a:bodyPr wrap="square" rtlCol="0">
+            <a:spAutoFit/>
+          </a:bodyPr>
           <a:lstStyle/>
           <a:p>
-            <a:r>
-              <a:rPr lang="en-US" dirty="0"/>
-              <a:t>Why it is important</a:t>
-            </a:r>
-          </a:p>
-          <a:p>
-            <a:endParaRPr lang="en-US" dirty="0"/>
-          </a:p>
-          <a:p>
-            <a:r>
-              <a:rPr lang="en-US" sz="1800" dirty="0"/>
-              <a:t>Computational challenge: Preparing the ground state of complex systems can be difficult.</a:t>
-            </a:r>
-          </a:p>
-          <a:p>
-            <a:pPr marL="0" indent="0">
-              <a:buNone/>
-            </a:pPr>
-            <a:endParaRPr lang="en-US" dirty="0"/>
-          </a:p>
-          <a:p>
-            <a:r>
-              <a:rPr lang="en-US" dirty="0"/>
-              <a:t> </a:t>
-            </a:r>
-            <a:r>
-              <a:rPr kumimoji="0" lang="en-US" altLang="en-US" sz="1600" b="0" i="0" u="none" strike="noStrike" cap="none" normalizeH="0" baseline="0" dirty="0">
-                <a:ln>
-                  <a:noFill/>
-                </a:ln>
-                <a:solidFill>
-                  <a:schemeClr val="tx1"/>
-                </a:solidFill>
-                <a:effectLst/>
-                <a:latin typeface="Arial" panose="020B0604020202020204" pitchFamily="34" charset="0"/>
+            <a:pPr algn="r" rtl="1"/>
+            <a:r>
+              <a:rPr lang="fa-IR" sz="1400" dirty="0">
+                <a:cs typeface="B Nazanin" panose="00000400000000000000" pitchFamily="2" charset="-78"/>
               </a:rPr>
-              <a:t>Solution encoding: The ground state of a properly designed Hamiltonian encodes the desired solution.</a:t>
-            </a:r>
-          </a:p>
-          <a:p>
-            <a:endParaRPr lang="en-US" dirty="0"/>
-          </a:p>
-        </p:txBody>
-      </p:sp>
+              <a:t>حالت کلاسیک- تقریب حرکت های کوچک حول نقطه تعادل پایدار</a:t>
+            </a:r>
+            <a:endParaRPr lang="en-US" sz="1400" dirty="0">
+              <a:cs typeface="B Nazanin" panose="00000400000000000000" pitchFamily="2" charset="-78"/>
+            </a:endParaRPr>
+          </a:p>
+        </p:txBody>
+      </p:sp>
+      <p:sp>
+        <p:nvSpPr>
+          <p:cNvPr id="10" name="TextBox 9">
+            <a:extLst>
+              <a:ext uri="{FF2B5EF4-FFF2-40B4-BE49-F238E27FC236}">
+                <a16:creationId xmlns:a16="http://schemas.microsoft.com/office/drawing/2014/main" id="{9256B059-2381-6A38-71A1-264E6317FBF2}"/>
+              </a:ext>
+            </a:extLst>
+          </p:cNvPr>
+          <p:cNvSpPr txBox="1"/>
+          <p:nvPr/>
+        </p:nvSpPr>
+        <p:spPr>
+          <a:xfrm>
+            <a:off x="9533299" y="1652233"/>
+            <a:ext cx="1596458" cy="276999"/>
+          </a:xfrm>
+          <a:prstGeom prst="rect">
+            <a:avLst/>
+          </a:prstGeom>
+          <a:noFill/>
+        </p:spPr>
+        <p:txBody>
+          <a:bodyPr wrap="square" rtlCol="0">
+            <a:spAutoFit/>
+          </a:bodyPr>
+          <a:lstStyle/>
+          <a:p>
+            <a:pPr algn="r" rtl="1"/>
+            <a:r>
+              <a:rPr lang="fa-IR" sz="1200" dirty="0">
+                <a:cs typeface="B Nazanin" panose="00000400000000000000" pitchFamily="2" charset="-78"/>
+              </a:rPr>
+              <a:t>نیروی </a:t>
+            </a:r>
+            <a:r>
+              <a:rPr lang="fa-IR" sz="1200" dirty="0" err="1">
+                <a:cs typeface="B Nazanin" panose="00000400000000000000" pitchFamily="2" charset="-78"/>
+              </a:rPr>
+              <a:t>پایستار</a:t>
+            </a:r>
+            <a:r>
+              <a:rPr lang="fa-IR" sz="1200" dirty="0">
+                <a:cs typeface="B Nazanin" panose="00000400000000000000" pitchFamily="2" charset="-78"/>
+              </a:rPr>
+              <a:t>(یک </a:t>
+            </a:r>
+            <a:r>
+              <a:rPr lang="fa-IR" sz="1200" dirty="0" err="1">
+                <a:cs typeface="B Nazanin" panose="00000400000000000000" pitchFamily="2" charset="-78"/>
+              </a:rPr>
+              <a:t>بُعد</a:t>
+            </a:r>
+            <a:r>
+              <a:rPr lang="fa-IR" sz="1200" dirty="0">
+                <a:cs typeface="B Nazanin" panose="00000400000000000000" pitchFamily="2" charset="-78"/>
+              </a:rPr>
+              <a:t>)</a:t>
+            </a:r>
+            <a:endParaRPr lang="en-US" sz="1200" dirty="0">
+              <a:cs typeface="B Nazanin" panose="00000400000000000000" pitchFamily="2" charset="-78"/>
+            </a:endParaRPr>
+          </a:p>
+        </p:txBody>
+      </p:sp>
+      <p:pic>
+        <p:nvPicPr>
+          <p:cNvPr id="14" name="Picture 13">
+            <a:extLst>
+              <a:ext uri="{FF2B5EF4-FFF2-40B4-BE49-F238E27FC236}">
+                <a16:creationId xmlns:a16="http://schemas.microsoft.com/office/drawing/2014/main" id="{261F804E-B2F5-F0A1-DB9F-ECF484559C25}"/>
+              </a:ext>
+            </a:extLst>
+          </p:cNvPr>
+          <p:cNvPicPr>
+            <a:picLocks noChangeAspect="1"/>
+          </p:cNvPicPr>
+          <p:nvPr/>
+        </p:nvPicPr>
+        <p:blipFill>
+          <a:blip r:embed="rId3"/>
+          <a:stretch>
+            <a:fillRect/>
+          </a:stretch>
+        </p:blipFill>
+        <p:spPr>
+          <a:xfrm>
+            <a:off x="10027944" y="1952763"/>
+            <a:ext cx="1019175" cy="438150"/>
+          </a:xfrm>
+          <a:prstGeom prst="rect">
+            <a:avLst/>
+          </a:prstGeom>
+        </p:spPr>
+      </p:pic>
+      <p:pic>
+        <p:nvPicPr>
+          <p:cNvPr id="18" name="Picture 17">
+            <a:extLst>
+              <a:ext uri="{FF2B5EF4-FFF2-40B4-BE49-F238E27FC236}">
+                <a16:creationId xmlns:a16="http://schemas.microsoft.com/office/drawing/2014/main" id="{0FAFE7B8-3E58-F4B0-C861-0856C90C6F54}"/>
+              </a:ext>
+            </a:extLst>
+          </p:cNvPr>
+          <p:cNvPicPr>
+            <a:picLocks noChangeAspect="1"/>
+          </p:cNvPicPr>
+          <p:nvPr/>
+        </p:nvPicPr>
+        <p:blipFill>
+          <a:blip r:embed="rId4"/>
+          <a:stretch>
+            <a:fillRect/>
+          </a:stretch>
+        </p:blipFill>
+        <p:spPr>
+          <a:xfrm>
+            <a:off x="5460373" y="2800418"/>
+            <a:ext cx="3187426" cy="288993"/>
+          </a:xfrm>
+          <a:prstGeom prst="rect">
+            <a:avLst/>
+          </a:prstGeom>
+        </p:spPr>
+      </p:pic>
+      <p:sp>
+        <p:nvSpPr>
+          <p:cNvPr id="20" name="TextBox 19">
+            <a:extLst>
+              <a:ext uri="{FF2B5EF4-FFF2-40B4-BE49-F238E27FC236}">
+                <a16:creationId xmlns:a16="http://schemas.microsoft.com/office/drawing/2014/main" id="{6DC1B6F3-9881-C04C-A460-FF2E0BC8AD1A}"/>
+              </a:ext>
+            </a:extLst>
+          </p:cNvPr>
+          <p:cNvSpPr txBox="1"/>
+          <p:nvPr/>
+        </p:nvSpPr>
+        <p:spPr>
+          <a:xfrm>
+            <a:off x="9258038" y="2638359"/>
+            <a:ext cx="1700532" cy="338554"/>
+          </a:xfrm>
+          <a:prstGeom prst="rect">
+            <a:avLst/>
+          </a:prstGeom>
+          <a:noFill/>
+        </p:spPr>
+        <p:txBody>
+          <a:bodyPr wrap="square" rtlCol="0">
+            <a:spAutoFit/>
+          </a:bodyPr>
+          <a:lstStyle/>
+          <a:p>
+            <a:pPr algn="r" rtl="1"/>
+            <a:r>
+              <a:rPr lang="fa-IR" sz="1600" dirty="0"/>
+              <a:t>بسط </a:t>
+            </a:r>
+            <a:r>
+              <a:rPr lang="fa-IR" sz="1600" dirty="0" err="1"/>
+              <a:t>تیلور</a:t>
+            </a:r>
+            <a:endParaRPr lang="en-US" sz="1600" dirty="0"/>
+          </a:p>
+        </p:txBody>
+      </p:sp>
+      <p:sp>
+        <p:nvSpPr>
+          <p:cNvPr id="21" name="TextBox 20">
+            <a:extLst>
+              <a:ext uri="{FF2B5EF4-FFF2-40B4-BE49-F238E27FC236}">
+                <a16:creationId xmlns:a16="http://schemas.microsoft.com/office/drawing/2014/main" id="{C1A08141-6A2B-C1D9-A3C3-CCC4EBE6C3F2}"/>
+              </a:ext>
+            </a:extLst>
+          </p:cNvPr>
+          <p:cNvSpPr txBox="1"/>
+          <p:nvPr/>
+        </p:nvSpPr>
+        <p:spPr>
+          <a:xfrm>
+            <a:off x="8943523" y="3378263"/>
+            <a:ext cx="2329561" cy="307777"/>
+          </a:xfrm>
+          <a:prstGeom prst="rect">
+            <a:avLst/>
+          </a:prstGeom>
+          <a:noFill/>
+        </p:spPr>
+        <p:txBody>
+          <a:bodyPr wrap="square" rtlCol="0">
+            <a:spAutoFit/>
+          </a:bodyPr>
+          <a:lstStyle/>
+          <a:p>
+            <a:pPr algn="r" rtl="1"/>
+            <a:r>
+              <a:rPr lang="fa-IR" sz="1400" dirty="0">
+                <a:cs typeface="B Nazanin" panose="00000400000000000000" pitchFamily="2" charset="-78"/>
+              </a:rPr>
+              <a:t>برای یک کمینه پایدار با انحنای ثابت</a:t>
+            </a:r>
+            <a:endParaRPr lang="en-US" sz="1400" dirty="0">
+              <a:cs typeface="B Nazanin" panose="00000400000000000000" pitchFamily="2" charset="-78"/>
+            </a:endParaRPr>
+          </a:p>
+        </p:txBody>
+      </p:sp>
+      <p:pic>
+        <p:nvPicPr>
+          <p:cNvPr id="23" name="Picture 22">
+            <a:extLst>
+              <a:ext uri="{FF2B5EF4-FFF2-40B4-BE49-F238E27FC236}">
+                <a16:creationId xmlns:a16="http://schemas.microsoft.com/office/drawing/2014/main" id="{FE73758A-1997-BC9B-AF24-1C8B41A0CB8B}"/>
+              </a:ext>
+            </a:extLst>
+          </p:cNvPr>
+          <p:cNvPicPr>
+            <a:picLocks noChangeAspect="1"/>
+          </p:cNvPicPr>
+          <p:nvPr/>
+        </p:nvPicPr>
+        <p:blipFill>
+          <a:blip r:embed="rId5"/>
+          <a:stretch>
+            <a:fillRect/>
+          </a:stretch>
+        </p:blipFill>
+        <p:spPr>
+          <a:xfrm>
+            <a:off x="5462254" y="3123528"/>
+            <a:ext cx="2702459" cy="523057"/>
+          </a:xfrm>
+          <a:prstGeom prst="rect">
+            <a:avLst/>
+          </a:prstGeom>
+        </p:spPr>
+      </p:pic>
+      <p:pic>
+        <p:nvPicPr>
+          <p:cNvPr id="25" name="Picture 24">
+            <a:extLst>
+              <a:ext uri="{FF2B5EF4-FFF2-40B4-BE49-F238E27FC236}">
+                <a16:creationId xmlns:a16="http://schemas.microsoft.com/office/drawing/2014/main" id="{FEABA137-05E8-D863-3C09-701240F2A4EC}"/>
+              </a:ext>
+            </a:extLst>
+          </p:cNvPr>
+          <p:cNvPicPr>
+            <a:picLocks noChangeAspect="1"/>
+          </p:cNvPicPr>
+          <p:nvPr/>
+        </p:nvPicPr>
+        <p:blipFill>
+          <a:blip r:embed="rId6"/>
+          <a:stretch>
+            <a:fillRect/>
+          </a:stretch>
+        </p:blipFill>
+        <p:spPr>
+          <a:xfrm>
+            <a:off x="5399203" y="3665410"/>
+            <a:ext cx="1809750" cy="428625"/>
+          </a:xfrm>
+          <a:prstGeom prst="rect">
+            <a:avLst/>
+          </a:prstGeom>
+        </p:spPr>
+      </p:pic>
+      <p:pic>
+        <p:nvPicPr>
+          <p:cNvPr id="27" name="Picture 26">
+            <a:extLst>
+              <a:ext uri="{FF2B5EF4-FFF2-40B4-BE49-F238E27FC236}">
+                <a16:creationId xmlns:a16="http://schemas.microsoft.com/office/drawing/2014/main" id="{1E17E77B-AA9F-6CDF-8FBC-8A97808BE218}"/>
+              </a:ext>
+            </a:extLst>
+          </p:cNvPr>
+          <p:cNvPicPr>
+            <a:picLocks noChangeAspect="1"/>
+          </p:cNvPicPr>
+          <p:nvPr/>
+        </p:nvPicPr>
+        <p:blipFill>
+          <a:blip r:embed="rId7"/>
+          <a:stretch>
+            <a:fillRect/>
+          </a:stretch>
+        </p:blipFill>
+        <p:spPr>
+          <a:xfrm>
+            <a:off x="7986045" y="3758596"/>
+            <a:ext cx="914400" cy="209550"/>
+          </a:xfrm>
+          <a:prstGeom prst="rect">
+            <a:avLst/>
+          </a:prstGeom>
+        </p:spPr>
+      </p:pic>
+      <p:sp>
+        <p:nvSpPr>
+          <p:cNvPr id="28" name="Arrow: Right 27">
+            <a:extLst>
+              <a:ext uri="{FF2B5EF4-FFF2-40B4-BE49-F238E27FC236}">
+                <a16:creationId xmlns:a16="http://schemas.microsoft.com/office/drawing/2014/main" id="{C69F0443-A98D-FEC8-8001-A247394E01DC}"/>
+              </a:ext>
+            </a:extLst>
+          </p:cNvPr>
+          <p:cNvSpPr/>
+          <p:nvPr/>
+        </p:nvSpPr>
+        <p:spPr>
+          <a:xfrm>
+            <a:off x="7557190" y="3844948"/>
+            <a:ext cx="235551" cy="108837"/>
+          </a:xfrm>
+          <a:prstGeom prst="rightArrow">
+            <a:avLst/>
+          </a:prstGeom>
+        </p:spPr>
+        <p:style>
+          <a:lnRef idx="2">
+            <a:schemeClr val="accent1">
+              <a:shade val="15000"/>
+            </a:schemeClr>
+          </a:lnRef>
+          <a:fillRef idx="1">
+            <a:schemeClr val="accent1"/>
+          </a:fillRef>
+          <a:effectRef idx="0">
+            <a:schemeClr val="accent1"/>
+          </a:effectRef>
+          <a:fontRef idx="minor">
+            <a:schemeClr val="lt1"/>
+          </a:fontRef>
+        </p:style>
+        <p:txBody>
+          <a:bodyPr rtlCol="0" anchor="ctr"/>
+          <a:lstStyle/>
+          <a:p>
+            <a:pPr algn="ctr"/>
+            <a:endParaRPr lang="en-US"/>
+          </a:p>
+        </p:txBody>
+      </p:sp>
+      <p:sp>
+        <p:nvSpPr>
+          <p:cNvPr id="29" name="Arrow: Right 28">
+            <a:extLst>
+              <a:ext uri="{FF2B5EF4-FFF2-40B4-BE49-F238E27FC236}">
+                <a16:creationId xmlns:a16="http://schemas.microsoft.com/office/drawing/2014/main" id="{3A9CCD76-CC26-44E6-5164-5E7B581A33AD}"/>
+              </a:ext>
+            </a:extLst>
+          </p:cNvPr>
+          <p:cNvSpPr/>
+          <p:nvPr/>
+        </p:nvSpPr>
+        <p:spPr>
+          <a:xfrm>
+            <a:off x="9048411" y="3839909"/>
+            <a:ext cx="235551" cy="108837"/>
+          </a:xfrm>
+          <a:prstGeom prst="rightArrow">
+            <a:avLst/>
+          </a:prstGeom>
+        </p:spPr>
+        <p:style>
+          <a:lnRef idx="2">
+            <a:schemeClr val="accent1">
+              <a:shade val="15000"/>
+            </a:schemeClr>
+          </a:lnRef>
+          <a:fillRef idx="1">
+            <a:schemeClr val="accent1"/>
+          </a:fillRef>
+          <a:effectRef idx="0">
+            <a:schemeClr val="accent1"/>
+          </a:effectRef>
+          <a:fontRef idx="minor">
+            <a:schemeClr val="lt1"/>
+          </a:fontRef>
+        </p:style>
+        <p:txBody>
+          <a:bodyPr rtlCol="0" anchor="ctr"/>
+          <a:lstStyle/>
+          <a:p>
+            <a:pPr algn="ctr"/>
+            <a:endParaRPr lang="en-US"/>
+          </a:p>
+        </p:txBody>
+      </p:sp>
+      <p:pic>
+        <p:nvPicPr>
+          <p:cNvPr id="31" name="Picture 30">
+            <a:extLst>
+              <a:ext uri="{FF2B5EF4-FFF2-40B4-BE49-F238E27FC236}">
+                <a16:creationId xmlns:a16="http://schemas.microsoft.com/office/drawing/2014/main" id="{50D3CDBE-727C-5C4F-40C3-7BDA3000ADBB}"/>
+              </a:ext>
+            </a:extLst>
+          </p:cNvPr>
+          <p:cNvPicPr>
+            <a:picLocks noChangeAspect="1"/>
+          </p:cNvPicPr>
+          <p:nvPr/>
+        </p:nvPicPr>
+        <p:blipFill>
+          <a:blip r:embed="rId8"/>
+          <a:stretch>
+            <a:fillRect/>
+          </a:stretch>
+        </p:blipFill>
+        <p:spPr>
+          <a:xfrm>
+            <a:off x="9431929" y="3745425"/>
+            <a:ext cx="1524000" cy="247650"/>
+          </a:xfrm>
+          <a:prstGeom prst="rect">
+            <a:avLst/>
+          </a:prstGeom>
+        </p:spPr>
+      </p:pic>
+      <p:pic>
+        <p:nvPicPr>
+          <p:cNvPr id="33" name="Picture 32">
+            <a:extLst>
+              <a:ext uri="{FF2B5EF4-FFF2-40B4-BE49-F238E27FC236}">
+                <a16:creationId xmlns:a16="http://schemas.microsoft.com/office/drawing/2014/main" id="{C6AE4736-C791-79CA-F70A-BFB6BFF3085C}"/>
+              </a:ext>
+            </a:extLst>
+          </p:cNvPr>
+          <p:cNvPicPr>
+            <a:picLocks noChangeAspect="1"/>
+          </p:cNvPicPr>
+          <p:nvPr/>
+        </p:nvPicPr>
+        <p:blipFill>
+          <a:blip r:embed="rId9"/>
+          <a:stretch>
+            <a:fillRect/>
+          </a:stretch>
+        </p:blipFill>
+        <p:spPr>
+          <a:xfrm>
+            <a:off x="7250662" y="4092074"/>
+            <a:ext cx="1190625" cy="495300"/>
+          </a:xfrm>
+          <a:prstGeom prst="rect">
+            <a:avLst/>
+          </a:prstGeom>
+        </p:spPr>
+      </p:pic>
+      <p:cxnSp>
+        <p:nvCxnSpPr>
+          <p:cNvPr id="35" name="Straight Connector 34">
+            <a:extLst>
+              <a:ext uri="{FF2B5EF4-FFF2-40B4-BE49-F238E27FC236}">
+                <a16:creationId xmlns:a16="http://schemas.microsoft.com/office/drawing/2014/main" id="{1DB17A94-5468-FEE7-9DC6-407E3D6F0BB2}"/>
+              </a:ext>
+            </a:extLst>
+          </p:cNvPr>
+          <p:cNvCxnSpPr/>
+          <p:nvPr/>
+        </p:nvCxnSpPr>
+        <p:spPr>
+          <a:xfrm>
+            <a:off x="5113894" y="1543494"/>
+            <a:ext cx="15914" cy="3110795"/>
+          </a:xfrm>
+          <a:prstGeom prst="line">
+            <a:avLst/>
+          </a:prstGeom>
+        </p:spPr>
+        <p:style>
+          <a:lnRef idx="2">
+            <a:schemeClr val="accent1"/>
+          </a:lnRef>
+          <a:fillRef idx="0">
+            <a:schemeClr val="accent1"/>
+          </a:fillRef>
+          <a:effectRef idx="1">
+            <a:schemeClr val="accent1"/>
+          </a:effectRef>
+          <a:fontRef idx="minor">
+            <a:schemeClr val="tx1"/>
+          </a:fontRef>
+        </p:style>
+      </p:cxnSp>
+      <p:sp>
+        <p:nvSpPr>
+          <p:cNvPr id="38" name="TextBox 37">
+            <a:extLst>
+              <a:ext uri="{FF2B5EF4-FFF2-40B4-BE49-F238E27FC236}">
+                <a16:creationId xmlns:a16="http://schemas.microsoft.com/office/drawing/2014/main" id="{695878E4-C8AF-5788-A4EE-547F6478C4B5}"/>
+              </a:ext>
+            </a:extLst>
+          </p:cNvPr>
+          <p:cNvSpPr txBox="1"/>
+          <p:nvPr/>
+        </p:nvSpPr>
+        <p:spPr>
+          <a:xfrm>
+            <a:off x="1892293" y="1255022"/>
+            <a:ext cx="3212751" cy="307777"/>
+          </a:xfrm>
+          <a:prstGeom prst="rect">
+            <a:avLst/>
+          </a:prstGeom>
+          <a:noFill/>
+        </p:spPr>
+        <p:txBody>
+          <a:bodyPr wrap="square" rtlCol="0">
+            <a:spAutoFit/>
+          </a:bodyPr>
+          <a:lstStyle/>
+          <a:p>
+            <a:pPr algn="r" rtl="1"/>
+            <a:r>
+              <a:rPr lang="fa-IR" sz="1400" dirty="0">
+                <a:cs typeface="B Nazanin" panose="00000400000000000000" pitchFamily="2" charset="-78"/>
+              </a:rPr>
+              <a:t>حالت </a:t>
+            </a:r>
+            <a:r>
+              <a:rPr lang="fa-IR" sz="1400" dirty="0" err="1">
+                <a:cs typeface="B Nazanin" panose="00000400000000000000" pitchFamily="2" charset="-78"/>
+              </a:rPr>
+              <a:t>کوانتومی</a:t>
+            </a:r>
+            <a:r>
+              <a:rPr lang="fa-IR" sz="1400" dirty="0">
+                <a:cs typeface="B Nazanin" panose="00000400000000000000" pitchFamily="2" charset="-78"/>
+              </a:rPr>
+              <a:t>- استفاده از اصل </a:t>
+            </a:r>
+            <a:r>
+              <a:rPr lang="fa-IR" sz="1400" dirty="0" err="1">
+                <a:cs typeface="B Nazanin" panose="00000400000000000000" pitchFamily="2" charset="-78"/>
+              </a:rPr>
+              <a:t>کوانتش</a:t>
+            </a:r>
+            <a:r>
+              <a:rPr lang="fa-IR" sz="1400" dirty="0">
+                <a:cs typeface="B Nazanin" panose="00000400000000000000" pitchFamily="2" charset="-78"/>
+              </a:rPr>
+              <a:t> کانونی</a:t>
+            </a:r>
+            <a:endParaRPr lang="en-US" sz="1400" dirty="0">
+              <a:cs typeface="B Nazanin" panose="00000400000000000000" pitchFamily="2" charset="-78"/>
+            </a:endParaRPr>
+          </a:p>
+        </p:txBody>
+      </p:sp>
+      <p:pic>
+        <p:nvPicPr>
+          <p:cNvPr id="40" name="Picture 39">
+            <a:extLst>
+              <a:ext uri="{FF2B5EF4-FFF2-40B4-BE49-F238E27FC236}">
+                <a16:creationId xmlns:a16="http://schemas.microsoft.com/office/drawing/2014/main" id="{5FEA69F5-E336-6908-DB70-95C32E1E321C}"/>
+              </a:ext>
+            </a:extLst>
+          </p:cNvPr>
+          <p:cNvPicPr>
+            <a:picLocks noChangeAspect="1"/>
+          </p:cNvPicPr>
+          <p:nvPr/>
+        </p:nvPicPr>
+        <p:blipFill>
+          <a:blip r:embed="rId10"/>
+          <a:stretch>
+            <a:fillRect/>
+          </a:stretch>
+        </p:blipFill>
+        <p:spPr>
+          <a:xfrm>
+            <a:off x="805491" y="1543494"/>
+            <a:ext cx="2023421" cy="2404514"/>
+          </a:xfrm>
+          <a:prstGeom prst="rect">
+            <a:avLst/>
+          </a:prstGeom>
+        </p:spPr>
+      </p:pic>
+      <p:pic>
+        <p:nvPicPr>
+          <p:cNvPr id="42" name="Picture 41">
+            <a:extLst>
+              <a:ext uri="{FF2B5EF4-FFF2-40B4-BE49-F238E27FC236}">
+                <a16:creationId xmlns:a16="http://schemas.microsoft.com/office/drawing/2014/main" id="{3DB30562-9F7B-9B0A-6A24-712FC45AA9B5}"/>
+              </a:ext>
+            </a:extLst>
+          </p:cNvPr>
+          <p:cNvPicPr>
+            <a:picLocks noChangeAspect="1"/>
+          </p:cNvPicPr>
+          <p:nvPr/>
+        </p:nvPicPr>
+        <p:blipFill>
+          <a:blip r:embed="rId11"/>
+          <a:stretch>
+            <a:fillRect/>
+          </a:stretch>
+        </p:blipFill>
+        <p:spPr>
+          <a:xfrm>
+            <a:off x="1148045" y="4037166"/>
+            <a:ext cx="2828925" cy="542925"/>
+          </a:xfrm>
+          <a:prstGeom prst="rect">
+            <a:avLst/>
+          </a:prstGeom>
+        </p:spPr>
+      </p:pic>
+      <p:pic>
+        <p:nvPicPr>
+          <p:cNvPr id="46" name="Picture 45">
+            <a:extLst>
+              <a:ext uri="{FF2B5EF4-FFF2-40B4-BE49-F238E27FC236}">
+                <a16:creationId xmlns:a16="http://schemas.microsoft.com/office/drawing/2014/main" id="{5EE03566-AA65-5CEE-F199-9502FF88E3A1}"/>
+              </a:ext>
+            </a:extLst>
+          </p:cNvPr>
+          <p:cNvPicPr>
+            <a:picLocks noChangeAspect="1"/>
+          </p:cNvPicPr>
+          <p:nvPr/>
+        </p:nvPicPr>
+        <p:blipFill>
+          <a:blip r:embed="rId12"/>
+          <a:stretch>
+            <a:fillRect/>
+          </a:stretch>
+        </p:blipFill>
+        <p:spPr>
+          <a:xfrm>
+            <a:off x="3279103" y="4697896"/>
+            <a:ext cx="4726034" cy="2071891"/>
+          </a:xfrm>
+          <a:prstGeom prst="rect">
+            <a:avLst/>
+          </a:prstGeom>
+        </p:spPr>
+      </p:pic>
     </p:spTree>
     <p:extLst>
       <p:ext uri="{BB962C8B-B14F-4D97-AF65-F5344CB8AC3E}">
-        <p14:creationId xmlns:p14="http://schemas.microsoft.com/office/powerpoint/2010/main" val="2931661657"/>
+        <p14:creationId xmlns:p14="http://schemas.microsoft.com/office/powerpoint/2010/main" val="1265612552"/>
       </p:ext>
     </p:extLst>
   </p:cSld>
@@ -5760,7 +10296,7 @@
           <p:cNvPr id="2" name="Title 1">
             <a:extLst>
               <a:ext uri="{FF2B5EF4-FFF2-40B4-BE49-F238E27FC236}">
-                <a16:creationId xmlns:a16="http://schemas.microsoft.com/office/drawing/2014/main" id="{4B0AD2BD-97E9-C6BE-C42F-2BE4EDA4228C}"/>
+                <a16:creationId xmlns:a16="http://schemas.microsoft.com/office/drawing/2014/main" id="{3EDC45DD-D705-330E-1E45-9CDB79651563}"/>
               </a:ext>
             </a:extLst>
           </p:cNvPr>
@@ -5771,64 +10307,209 @@
             <p:ph type="title"/>
           </p:nvPr>
         </p:nvSpPr>
-        <p:spPr/>
-        <p:txBody>
-          <a:bodyPr/>
+        <p:spPr>
+          <a:xfrm>
+            <a:off x="839575" y="338159"/>
+            <a:ext cx="10515600" cy="928243"/>
+          </a:xfrm>
+        </p:spPr>
+        <p:txBody>
+          <a:bodyPr>
+            <a:normAutofit/>
+          </a:bodyPr>
           <a:lstStyle/>
           <a:p>
             <a:r>
-              <a:rPr lang="en-US" dirty="0"/>
-              <a:t>Method: Adiabatic approach</a:t>
-            </a:r>
-          </a:p>
-        </p:txBody>
-      </p:sp>
-      <p:sp>
-        <p:nvSpPr>
-          <p:cNvPr id="3" name="Content Placeholder 2">
-            <a:extLst>
-              <a:ext uri="{FF2B5EF4-FFF2-40B4-BE49-F238E27FC236}">
-                <a16:creationId xmlns:a16="http://schemas.microsoft.com/office/drawing/2014/main" id="{BFA1A0F1-FEE6-5A5C-D38F-337D9B11E7B5}"/>
-              </a:ext>
-            </a:extLst>
-          </p:cNvPr>
-          <p:cNvSpPr>
-            <a:spLocks noGrp="1"/>
-          </p:cNvSpPr>
-          <p:nvPr>
-            <p:ph idx="1"/>
-          </p:nvPr>
-        </p:nvSpPr>
-        <p:spPr/>
-        <p:txBody>
-          <a:bodyPr/>
+              <a:rPr lang="en-US" sz="3600" dirty="0"/>
+              <a:t>Example: Harmonic oscillator</a:t>
+            </a:r>
+          </a:p>
+        </p:txBody>
+      </p:sp>
+      <p:cxnSp>
+        <p:nvCxnSpPr>
+          <p:cNvPr id="19" name="Straight Connector 18">
+            <a:extLst>
+              <a:ext uri="{FF2B5EF4-FFF2-40B4-BE49-F238E27FC236}">
+                <a16:creationId xmlns:a16="http://schemas.microsoft.com/office/drawing/2014/main" id="{7E91CC10-162E-64FF-73FA-65755B4054ED}"/>
+              </a:ext>
+            </a:extLst>
+          </p:cNvPr>
+          <p:cNvCxnSpPr/>
+          <p:nvPr/>
+        </p:nvCxnSpPr>
+        <p:spPr>
+          <a:xfrm>
+            <a:off x="5612887" y="5363032"/>
+            <a:ext cx="5404919" cy="0"/>
+          </a:xfrm>
+          <a:prstGeom prst="line">
+            <a:avLst/>
+          </a:prstGeom>
+        </p:spPr>
+        <p:style>
+          <a:lnRef idx="2">
+            <a:schemeClr val="accent1"/>
+          </a:lnRef>
+          <a:fillRef idx="0">
+            <a:schemeClr val="accent1"/>
+          </a:fillRef>
+          <a:effectRef idx="1">
+            <a:schemeClr val="accent1"/>
+          </a:effectRef>
+          <a:fontRef idx="minor">
+            <a:schemeClr val="tx1"/>
+          </a:fontRef>
+        </p:style>
+      </p:cxnSp>
+      <p:sp>
+        <p:nvSpPr>
+          <p:cNvPr id="8" name="TextBox 7">
+            <a:extLst>
+              <a:ext uri="{FF2B5EF4-FFF2-40B4-BE49-F238E27FC236}">
+                <a16:creationId xmlns:a16="http://schemas.microsoft.com/office/drawing/2014/main" id="{3A755B45-3BC3-EADC-F3E9-11998B6920FD}"/>
+              </a:ext>
+            </a:extLst>
+          </p:cNvPr>
+          <p:cNvSpPr txBox="1"/>
+          <p:nvPr/>
+        </p:nvSpPr>
+        <p:spPr>
+          <a:xfrm>
+            <a:off x="9975495" y="906118"/>
+            <a:ext cx="1134452" cy="307777"/>
+          </a:xfrm>
+          <a:prstGeom prst="rect">
+            <a:avLst/>
+          </a:prstGeom>
+          <a:noFill/>
+        </p:spPr>
+        <p:txBody>
+          <a:bodyPr wrap="square" rtlCol="0">
+            <a:spAutoFit/>
+          </a:bodyPr>
           <a:lstStyle/>
           <a:p>
-            <a:endParaRPr lang="en-US" dirty="0"/>
-          </a:p>
-          <a:p>
-            <a:r>
-              <a:rPr lang="en-US" dirty="0"/>
-              <a:t>Problem Scope: </a:t>
-            </a:r>
-          </a:p>
-          <a:p>
-            <a:endParaRPr lang="en-US" dirty="0"/>
-          </a:p>
-          <a:p>
-            <a:r>
-              <a:rPr lang="en-US" sz="2400" dirty="0"/>
-              <a:t>Gaps, runtime and complexity</a:t>
-            </a:r>
+            <a:pPr algn="r" rtl="1"/>
+            <a:r>
+              <a:rPr lang="fa-IR" sz="1400" dirty="0">
+                <a:cs typeface="B Nazanin" panose="00000400000000000000" pitchFamily="2" charset="-78"/>
+              </a:rPr>
+              <a:t>حالت کلاسیک</a:t>
+            </a:r>
+            <a:endParaRPr lang="en-US" sz="1400" dirty="0">
+              <a:cs typeface="B Nazanin" panose="00000400000000000000" pitchFamily="2" charset="-78"/>
+            </a:endParaRPr>
+          </a:p>
+        </p:txBody>
+      </p:sp>
+      <p:cxnSp>
+        <p:nvCxnSpPr>
+          <p:cNvPr id="35" name="Straight Connector 34">
+            <a:extLst>
+              <a:ext uri="{FF2B5EF4-FFF2-40B4-BE49-F238E27FC236}">
+                <a16:creationId xmlns:a16="http://schemas.microsoft.com/office/drawing/2014/main" id="{1DB17A94-5468-FEE7-9DC6-407E3D6F0BB2}"/>
+              </a:ext>
+            </a:extLst>
+          </p:cNvPr>
+          <p:cNvCxnSpPr/>
+          <p:nvPr/>
+        </p:nvCxnSpPr>
+        <p:spPr>
+          <a:xfrm>
+            <a:off x="5243747" y="1776639"/>
+            <a:ext cx="15914" cy="3110795"/>
+          </a:xfrm>
+          <a:prstGeom prst="line">
+            <a:avLst/>
+          </a:prstGeom>
+        </p:spPr>
+        <p:style>
+          <a:lnRef idx="2">
+            <a:schemeClr val="accent1"/>
+          </a:lnRef>
+          <a:fillRef idx="0">
+            <a:schemeClr val="accent1"/>
+          </a:fillRef>
+          <a:effectRef idx="1">
+            <a:schemeClr val="accent1"/>
+          </a:effectRef>
+          <a:fontRef idx="minor">
+            <a:schemeClr val="tx1"/>
+          </a:fontRef>
+        </p:style>
+      </p:cxnSp>
+      <p:sp>
+        <p:nvSpPr>
+          <p:cNvPr id="38" name="TextBox 37">
+            <a:extLst>
+              <a:ext uri="{FF2B5EF4-FFF2-40B4-BE49-F238E27FC236}">
+                <a16:creationId xmlns:a16="http://schemas.microsoft.com/office/drawing/2014/main" id="{695878E4-C8AF-5788-A4EE-547F6478C4B5}"/>
+              </a:ext>
+            </a:extLst>
+          </p:cNvPr>
+          <p:cNvSpPr txBox="1"/>
+          <p:nvPr/>
+        </p:nvSpPr>
+        <p:spPr>
+          <a:xfrm>
+            <a:off x="1892293" y="1255022"/>
+            <a:ext cx="3212751" cy="307777"/>
+          </a:xfrm>
+          <a:prstGeom prst="rect">
+            <a:avLst/>
+          </a:prstGeom>
+          <a:noFill/>
+        </p:spPr>
+        <p:txBody>
+          <a:bodyPr wrap="square" rtlCol="0">
+            <a:spAutoFit/>
+          </a:bodyPr>
+          <a:lstStyle/>
+          <a:p>
+            <a:pPr algn="r" rtl="1"/>
+            <a:r>
+              <a:rPr lang="fa-IR" sz="1400" dirty="0">
+                <a:cs typeface="B Nazanin" panose="00000400000000000000" pitchFamily="2" charset="-78"/>
+              </a:rPr>
+              <a:t>حالت </a:t>
+            </a:r>
+            <a:r>
+              <a:rPr lang="fa-IR" sz="1400" dirty="0" err="1">
+                <a:cs typeface="B Nazanin" panose="00000400000000000000" pitchFamily="2" charset="-78"/>
+              </a:rPr>
+              <a:t>کوانتومی</a:t>
+            </a:r>
+            <a:r>
+              <a:rPr lang="fa-IR" sz="1400" dirty="0">
+                <a:cs typeface="B Nazanin" panose="00000400000000000000" pitchFamily="2" charset="-78"/>
+              </a:rPr>
+              <a:t>- استفاده از اصل </a:t>
+            </a:r>
+            <a:r>
+              <a:rPr lang="fa-IR" sz="1400" dirty="0" err="1">
+                <a:cs typeface="B Nazanin" panose="00000400000000000000" pitchFamily="2" charset="-78"/>
+              </a:rPr>
+              <a:t>کوانتش</a:t>
+            </a:r>
+            <a:r>
+              <a:rPr lang="fa-IR" sz="1400" dirty="0">
+                <a:cs typeface="B Nazanin" panose="00000400000000000000" pitchFamily="2" charset="-78"/>
+              </a:rPr>
+              <a:t> کانونی</a:t>
+            </a:r>
+            <a:endParaRPr lang="en-US" sz="1400" dirty="0">
+              <a:cs typeface="B Nazanin" panose="00000400000000000000" pitchFamily="2" charset="-78"/>
+            </a:endParaRPr>
           </a:p>
         </p:txBody>
       </p:sp>
       <p:pic>
         <p:nvPicPr>
-          <p:cNvPr id="5" name="Picture 4">
-            <a:extLst>
-              <a:ext uri="{FF2B5EF4-FFF2-40B4-BE49-F238E27FC236}">
-                <a16:creationId xmlns:a16="http://schemas.microsoft.com/office/drawing/2014/main" id="{4D35E65B-CF0A-A796-7D08-74FE89F69E41}"/>
+          <p:cNvPr id="4" name="Picture 3">
+            <a:extLst>
+              <a:ext uri="{FF2B5EF4-FFF2-40B4-BE49-F238E27FC236}">
+                <a16:creationId xmlns:a16="http://schemas.microsoft.com/office/drawing/2014/main" id="{7003E96E-EBF5-6242-C416-8D086B7EAA6A}"/>
               </a:ext>
             </a:extLst>
           </p:cNvPr>
@@ -5845,50 +10526,151 @@
         </p:blipFill>
         <p:spPr>
           <a:xfrm>
-            <a:off x="1476420" y="1550344"/>
-            <a:ext cx="6588643" cy="469757"/>
+            <a:off x="5346651" y="983192"/>
+            <a:ext cx="1914853" cy="1641479"/>
           </a:xfrm>
           <a:prstGeom prst="rect">
             <a:avLst/>
           </a:prstGeom>
         </p:spPr>
       </p:pic>
+      <p:grpSp>
+        <p:nvGrpSpPr>
+          <p:cNvPr id="11" name="Group 10">
+            <a:extLst>
+              <a:ext uri="{FF2B5EF4-FFF2-40B4-BE49-F238E27FC236}">
+                <a16:creationId xmlns:a16="http://schemas.microsoft.com/office/drawing/2014/main" id="{E87D9762-DACF-602D-0E5E-81AD2C642AC1}"/>
+              </a:ext>
+            </a:extLst>
+          </p:cNvPr>
+          <p:cNvGrpSpPr/>
+          <p:nvPr/>
+        </p:nvGrpSpPr>
+        <p:grpSpPr>
+          <a:xfrm>
+            <a:off x="7261504" y="1252862"/>
+            <a:ext cx="3953883" cy="760537"/>
+            <a:chOff x="7563483" y="1448743"/>
+            <a:chExt cx="3953883" cy="760537"/>
+          </a:xfrm>
+        </p:grpSpPr>
+        <p:pic>
+          <p:nvPicPr>
+            <p:cNvPr id="6" name="Picture 5">
+              <a:extLst>
+                <a:ext uri="{FF2B5EF4-FFF2-40B4-BE49-F238E27FC236}">
+                  <a16:creationId xmlns:a16="http://schemas.microsoft.com/office/drawing/2014/main" id="{01B90E16-7EC4-BF2D-F3A0-CF871A29E7B5}"/>
+                </a:ext>
+              </a:extLst>
+            </p:cNvPr>
+            <p:cNvPicPr>
+              <a:picLocks noChangeAspect="1"/>
+            </p:cNvPicPr>
+            <p:nvPr/>
+          </p:nvPicPr>
+          <p:blipFill>
+            <a:blip r:embed="rId3"/>
+            <a:stretch>
+              <a:fillRect/>
+            </a:stretch>
+          </p:blipFill>
+          <p:spPr>
+            <a:xfrm>
+              <a:off x="7563483" y="1735761"/>
+              <a:ext cx="3953883" cy="473519"/>
+            </a:xfrm>
+            <a:prstGeom prst="rect">
+              <a:avLst/>
+            </a:prstGeom>
+          </p:spPr>
+        </p:pic>
+        <p:sp>
+          <p:nvSpPr>
+            <p:cNvPr id="7" name="TextBox 6">
+              <a:extLst>
+                <a:ext uri="{FF2B5EF4-FFF2-40B4-BE49-F238E27FC236}">
+                  <a16:creationId xmlns:a16="http://schemas.microsoft.com/office/drawing/2014/main" id="{075A065A-1764-241E-7277-5BEA8F3C4817}"/>
+                </a:ext>
+              </a:extLst>
+            </p:cNvPr>
+            <p:cNvSpPr txBox="1"/>
+            <p:nvPr/>
+          </p:nvSpPr>
+          <p:spPr>
+            <a:xfrm>
+              <a:off x="8164713" y="1477818"/>
+              <a:ext cx="535942" cy="307777"/>
+            </a:xfrm>
+            <a:prstGeom prst="rect">
+              <a:avLst/>
+            </a:prstGeom>
+            <a:noFill/>
+          </p:spPr>
+          <p:txBody>
+            <a:bodyPr wrap="square" rtlCol="0">
+              <a:spAutoFit/>
+            </a:bodyPr>
+            <a:lstStyle/>
+            <a:p>
+              <a:r>
+                <a:rPr lang="fa-IR" sz="1400" dirty="0">
+                  <a:cs typeface="B Nazanin" panose="00000400000000000000" pitchFamily="2" charset="-78"/>
+                </a:rPr>
+                <a:t>خازن</a:t>
+              </a:r>
+              <a:endParaRPr lang="en-US" sz="1400" dirty="0">
+                <a:cs typeface="B Nazanin" panose="00000400000000000000" pitchFamily="2" charset="-78"/>
+              </a:endParaRPr>
+            </a:p>
+          </p:txBody>
+        </p:sp>
+        <p:sp>
+          <p:nvSpPr>
+            <p:cNvPr id="9" name="TextBox 8">
+              <a:extLst>
+                <a:ext uri="{FF2B5EF4-FFF2-40B4-BE49-F238E27FC236}">
+                  <a16:creationId xmlns:a16="http://schemas.microsoft.com/office/drawing/2014/main" id="{6B45E610-9A48-55A4-6DDC-C5BB7DDD2E1B}"/>
+                </a:ext>
+              </a:extLst>
+            </p:cNvPr>
+            <p:cNvSpPr txBox="1"/>
+            <p:nvPr/>
+          </p:nvSpPr>
+          <p:spPr>
+            <a:xfrm>
+              <a:off x="10193929" y="1448743"/>
+              <a:ext cx="535942" cy="307777"/>
+            </a:xfrm>
+            <a:prstGeom prst="rect">
+              <a:avLst/>
+            </a:prstGeom>
+            <a:noFill/>
+          </p:spPr>
+          <p:txBody>
+            <a:bodyPr wrap="square" rtlCol="0">
+              <a:spAutoFit/>
+            </a:bodyPr>
+            <a:lstStyle/>
+            <a:p>
+              <a:r>
+                <a:rPr lang="fa-IR" sz="1400" dirty="0" err="1">
+                  <a:cs typeface="B Nazanin" panose="00000400000000000000" pitchFamily="2" charset="-78"/>
+                </a:rPr>
+                <a:t>القاگر</a:t>
+              </a:r>
+              <a:endParaRPr lang="en-US" sz="1400" dirty="0">
+                <a:cs typeface="B Nazanin" panose="00000400000000000000" pitchFamily="2" charset="-78"/>
+              </a:endParaRPr>
+            </a:p>
+          </p:txBody>
+        </p:sp>
+      </p:grpSp>
       <p:pic>
         <p:nvPicPr>
-          <p:cNvPr id="7" name="Picture 6">
-            <a:extLst>
-              <a:ext uri="{FF2B5EF4-FFF2-40B4-BE49-F238E27FC236}">
-                <a16:creationId xmlns:a16="http://schemas.microsoft.com/office/drawing/2014/main" id="{3E552DF6-A81B-9A2F-202C-F3BE4E01BD55}"/>
-              </a:ext>
-            </a:extLst>
-          </p:cNvPr>
-          <p:cNvPicPr>
-            <a:picLocks noChangeAspect="1"/>
-          </p:cNvPicPr>
-          <p:nvPr/>
-        </p:nvPicPr>
-        <p:blipFill>
-          <a:blip r:embed="rId3"/>
-          <a:stretch>
-            <a:fillRect/>
-          </a:stretch>
-        </p:blipFill>
-        <p:spPr>
-          <a:xfrm>
-            <a:off x="5572214" y="2940684"/>
-            <a:ext cx="5781586" cy="3379701"/>
-          </a:xfrm>
-          <a:prstGeom prst="rect">
-            <a:avLst/>
-          </a:prstGeom>
-        </p:spPr>
-      </p:pic>
-      <p:pic>
-        <p:nvPicPr>
-          <p:cNvPr id="9" name="Picture 8">
-            <a:extLst>
-              <a:ext uri="{FF2B5EF4-FFF2-40B4-BE49-F238E27FC236}">
-                <a16:creationId xmlns:a16="http://schemas.microsoft.com/office/drawing/2014/main" id="{B70021E3-3357-7CC5-5589-C3E1339A51A6}"/>
+          <p:cNvPr id="15" name="Picture 14">
+            <a:extLst>
+              <a:ext uri="{FF2B5EF4-FFF2-40B4-BE49-F238E27FC236}">
+                <a16:creationId xmlns:a16="http://schemas.microsoft.com/office/drawing/2014/main" id="{FE0A34ED-FDE5-F2EE-EF74-E188B240AC7C}"/>
               </a:ext>
             </a:extLst>
           </p:cNvPr>
@@ -5905,8 +10687,8 @@
         </p:blipFill>
         <p:spPr>
           <a:xfrm>
-            <a:off x="6933198" y="2078174"/>
-            <a:ext cx="2853264" cy="650234"/>
+            <a:off x="9431928" y="2130844"/>
+            <a:ext cx="1752699" cy="310212"/>
           </a:xfrm>
           <a:prstGeom prst="rect">
             <a:avLst/>
@@ -5915,10 +10697,10 @@
       </p:pic>
       <p:pic>
         <p:nvPicPr>
-          <p:cNvPr id="11" name="Picture 10">
-            <a:extLst>
-              <a:ext uri="{FF2B5EF4-FFF2-40B4-BE49-F238E27FC236}">
-                <a16:creationId xmlns:a16="http://schemas.microsoft.com/office/drawing/2014/main" id="{B304FA72-D3F4-FDC1-5923-EB890F271BA4}"/>
+          <p:cNvPr id="17" name="Picture 16">
+            <a:extLst>
+              <a:ext uri="{FF2B5EF4-FFF2-40B4-BE49-F238E27FC236}">
+                <a16:creationId xmlns:a16="http://schemas.microsoft.com/office/drawing/2014/main" id="{F59582B4-07AC-ABA2-E153-5D81BF8AF51A}"/>
               </a:ext>
             </a:extLst>
           </p:cNvPr>
@@ -5935,8 +10717,181 @@
         </p:blipFill>
         <p:spPr>
           <a:xfrm>
-            <a:off x="1398876" y="5068212"/>
-            <a:ext cx="1806331" cy="478888"/>
+            <a:off x="8025615" y="2421261"/>
+            <a:ext cx="1718913" cy="362365"/>
+          </a:xfrm>
+          <a:prstGeom prst="rect">
+            <a:avLst/>
+          </a:prstGeom>
+        </p:spPr>
+      </p:pic>
+      <p:sp>
+        <p:nvSpPr>
+          <p:cNvPr id="22" name="TextBox 21">
+            <a:extLst>
+              <a:ext uri="{FF2B5EF4-FFF2-40B4-BE49-F238E27FC236}">
+                <a16:creationId xmlns:a16="http://schemas.microsoft.com/office/drawing/2014/main" id="{D91085A1-84F7-BF49-1CD7-A733B34424F9}"/>
+              </a:ext>
+            </a:extLst>
+          </p:cNvPr>
+          <p:cNvSpPr txBox="1"/>
+          <p:nvPr/>
+        </p:nvSpPr>
+        <p:spPr>
+          <a:xfrm>
+            <a:off x="6301642" y="2773433"/>
+            <a:ext cx="4913745" cy="307777"/>
+          </a:xfrm>
+          <a:prstGeom prst="rect">
+            <a:avLst/>
+          </a:prstGeom>
+          <a:noFill/>
+        </p:spPr>
+        <p:txBody>
+          <a:bodyPr wrap="square" rtlCol="0">
+            <a:spAutoFit/>
+          </a:bodyPr>
+          <a:lstStyle/>
+          <a:p>
+            <a:pPr algn="r" rtl="1"/>
+            <a:r>
+              <a:rPr lang="fa-IR" sz="1400" dirty="0">
+                <a:cs typeface="B Nazanin" panose="00000400000000000000" pitchFamily="2" charset="-78"/>
+              </a:rPr>
+              <a:t>انتگرال زمانی ولتاژ به عنوان شار گره ای - بار خازن به عنوان تکانه کانونی هم </a:t>
+            </a:r>
+            <a:r>
+              <a:rPr lang="fa-IR" sz="1400" dirty="0" err="1">
+                <a:cs typeface="B Nazanin" panose="00000400000000000000" pitchFamily="2" charset="-78"/>
+              </a:rPr>
+              <a:t>یوغ</a:t>
+            </a:r>
+            <a:r>
+              <a:rPr lang="fa-IR" sz="1400" dirty="0">
+                <a:cs typeface="B Nazanin" panose="00000400000000000000" pitchFamily="2" charset="-78"/>
+              </a:rPr>
+              <a:t> آن</a:t>
+            </a:r>
+            <a:endParaRPr lang="en-US" sz="1400" dirty="0">
+              <a:cs typeface="B Nazanin" panose="00000400000000000000" pitchFamily="2" charset="-78"/>
+            </a:endParaRPr>
+          </a:p>
+        </p:txBody>
+      </p:sp>
+      <p:pic>
+        <p:nvPicPr>
+          <p:cNvPr id="26" name="Picture 25">
+            <a:extLst>
+              <a:ext uri="{FF2B5EF4-FFF2-40B4-BE49-F238E27FC236}">
+                <a16:creationId xmlns:a16="http://schemas.microsoft.com/office/drawing/2014/main" id="{1F035C6C-9817-08B4-3DE1-BA91FA011E3C}"/>
+              </a:ext>
+            </a:extLst>
+          </p:cNvPr>
+          <p:cNvPicPr>
+            <a:picLocks noChangeAspect="1"/>
+          </p:cNvPicPr>
+          <p:nvPr/>
+        </p:nvPicPr>
+        <p:blipFill>
+          <a:blip r:embed="rId6"/>
+          <a:stretch>
+            <a:fillRect/>
+          </a:stretch>
+        </p:blipFill>
+        <p:spPr>
+          <a:xfrm>
+            <a:off x="6283375" y="3201090"/>
+            <a:ext cx="4144517" cy="1914766"/>
+          </a:xfrm>
+          <a:prstGeom prst="rect">
+            <a:avLst/>
+          </a:prstGeom>
+        </p:spPr>
+      </p:pic>
+      <p:pic>
+        <p:nvPicPr>
+          <p:cNvPr id="32" name="Picture 31">
+            <a:extLst>
+              <a:ext uri="{FF2B5EF4-FFF2-40B4-BE49-F238E27FC236}">
+                <a16:creationId xmlns:a16="http://schemas.microsoft.com/office/drawing/2014/main" id="{6C7BCCE8-AFC8-0037-19B6-9A9172E94E58}"/>
+              </a:ext>
+            </a:extLst>
+          </p:cNvPr>
+          <p:cNvPicPr>
+            <a:picLocks noChangeAspect="1"/>
+          </p:cNvPicPr>
+          <p:nvPr/>
+        </p:nvPicPr>
+        <p:blipFill>
+          <a:blip r:embed="rId7"/>
+          <a:stretch>
+            <a:fillRect/>
+          </a:stretch>
+        </p:blipFill>
+        <p:spPr>
+          <a:xfrm>
+            <a:off x="2563365" y="1606639"/>
+            <a:ext cx="2220859" cy="920844"/>
+          </a:xfrm>
+          <a:prstGeom prst="rect">
+            <a:avLst/>
+          </a:prstGeom>
+        </p:spPr>
+      </p:pic>
+      <p:pic>
+        <p:nvPicPr>
+          <p:cNvPr id="36" name="Picture 35">
+            <a:extLst>
+              <a:ext uri="{FF2B5EF4-FFF2-40B4-BE49-F238E27FC236}">
+                <a16:creationId xmlns:a16="http://schemas.microsoft.com/office/drawing/2014/main" id="{358153DE-FD03-F28E-275B-B9EB300E0519}"/>
+              </a:ext>
+            </a:extLst>
+          </p:cNvPr>
+          <p:cNvPicPr>
+            <a:picLocks noChangeAspect="1"/>
+          </p:cNvPicPr>
+          <p:nvPr/>
+        </p:nvPicPr>
+        <p:blipFill>
+          <a:blip r:embed="rId8"/>
+          <a:stretch>
+            <a:fillRect/>
+          </a:stretch>
+        </p:blipFill>
+        <p:spPr>
+          <a:xfrm>
+            <a:off x="1746113" y="2584795"/>
+            <a:ext cx="1474670" cy="1625489"/>
+          </a:xfrm>
+          <a:prstGeom prst="rect">
+            <a:avLst/>
+          </a:prstGeom>
+        </p:spPr>
+      </p:pic>
+      <p:pic>
+        <p:nvPicPr>
+          <p:cNvPr id="39" name="Picture 38">
+            <a:extLst>
+              <a:ext uri="{FF2B5EF4-FFF2-40B4-BE49-F238E27FC236}">
+                <a16:creationId xmlns:a16="http://schemas.microsoft.com/office/drawing/2014/main" id="{1AA9EA30-6E6E-2A50-98C0-38AD7083D37C}"/>
+              </a:ext>
+            </a:extLst>
+          </p:cNvPr>
+          <p:cNvPicPr>
+            <a:picLocks noChangeAspect="1"/>
+          </p:cNvPicPr>
+          <p:nvPr/>
+        </p:nvPicPr>
+        <p:blipFill>
+          <a:blip r:embed="rId9"/>
+          <a:stretch>
+            <a:fillRect/>
+          </a:stretch>
+        </p:blipFill>
+        <p:spPr>
+          <a:xfrm>
+            <a:off x="917134" y="4694148"/>
+            <a:ext cx="4152900" cy="1114425"/>
           </a:xfrm>
           <a:prstGeom prst="rect">
             <a:avLst/>
@@ -5946,7 +10901,7 @@
     </p:spTree>
     <p:extLst>
       <p:ext uri="{BB962C8B-B14F-4D97-AF65-F5344CB8AC3E}">
-        <p14:creationId xmlns:p14="http://schemas.microsoft.com/office/powerpoint/2010/main" val="52011118"/>
+        <p14:creationId xmlns:p14="http://schemas.microsoft.com/office/powerpoint/2010/main" val="1362729689"/>
       </p:ext>
     </p:extLst>
   </p:cSld>
@@ -5978,7 +10933,7 @@
           <p:cNvPr id="2" name="Title 1">
             <a:extLst>
               <a:ext uri="{FF2B5EF4-FFF2-40B4-BE49-F238E27FC236}">
-                <a16:creationId xmlns:a16="http://schemas.microsoft.com/office/drawing/2014/main" id="{EEF10A3A-CE7C-9C74-3A7C-B042F0A6230E}"/>
+                <a16:creationId xmlns:a16="http://schemas.microsoft.com/office/drawing/2014/main" id="{654A7263-3866-3A0D-B425-7DF1626DC632}"/>
               </a:ext>
             </a:extLst>
           </p:cNvPr>
@@ -5996,15 +10951,7 @@
           <a:p>
             <a:r>
               <a:rPr lang="en-US" dirty="0"/>
-              <a:t>Example: </a:t>
-            </a:r>
-            <a:r>
-              <a:rPr lang="en-US" dirty="0" err="1"/>
-              <a:t>Ising</a:t>
-            </a:r>
-            <a:r>
-              <a:rPr lang="en-US" dirty="0"/>
-              <a:t> model</a:t>
+              <a:t>Choose Question</a:t>
             </a:r>
           </a:p>
         </p:txBody>
@@ -6014,7 +10961,7 @@
           <p:cNvPr id="3" name="Content Placeholder 2">
             <a:extLst>
               <a:ext uri="{FF2B5EF4-FFF2-40B4-BE49-F238E27FC236}">
-                <a16:creationId xmlns:a16="http://schemas.microsoft.com/office/drawing/2014/main" id="{1D413609-7E52-B586-7B92-7F9D31982704}"/>
+                <a16:creationId xmlns:a16="http://schemas.microsoft.com/office/drawing/2014/main" id="{4E07A0D5-B9F4-BCEE-91F9-48171214ED53}"/>
               </a:ext>
             </a:extLst>
           </p:cNvPr>
@@ -6025,37 +10972,48 @@
             <p:ph idx="1"/>
           </p:nvPr>
         </p:nvSpPr>
-        <p:spPr/>
-        <p:txBody>
-          <a:bodyPr/>
+        <p:spPr>
+          <a:xfrm>
+            <a:off x="8772807" y="2755611"/>
+            <a:ext cx="2390869" cy="361950"/>
+          </a:xfrm>
+        </p:spPr>
+        <p:txBody>
+          <a:bodyPr>
+            <a:normAutofit fontScale="92500" lnSpcReduction="20000"/>
+          </a:bodyPr>
           <a:lstStyle/>
           <a:p>
-            <a:r>
-              <a:rPr lang="en-US" dirty="0"/>
-              <a:t>Drive Hamiltonian : </a:t>
-            </a:r>
-            <a:r>
-              <a:rPr lang="en-US" dirty="0" err="1"/>
-              <a:t>H_b</a:t>
-            </a:r>
-            <a:endParaRPr lang="en-US" dirty="0"/>
-          </a:p>
-          <a:p>
-            <a:endParaRPr lang="en-US" dirty="0"/>
-          </a:p>
-          <a:p>
-            <a:endParaRPr lang="en-US" dirty="0"/>
-          </a:p>
-          <a:p>
-            <a:r>
-              <a:rPr lang="en-US" dirty="0"/>
-              <a:t>Problem Hamiltonian: </a:t>
-            </a:r>
-            <a:r>
-              <a:rPr lang="en-US" dirty="0" err="1"/>
-              <a:t>H_p</a:t>
-            </a:r>
-            <a:endParaRPr lang="en-US" dirty="0"/>
+            <a:pPr marL="0" indent="0" algn="r" rtl="1">
+              <a:buNone/>
+            </a:pPr>
+            <a:r>
+              <a:rPr lang="fa-IR" sz="2400" dirty="0" err="1">
+                <a:cs typeface="B Nazanin" panose="00000400000000000000" pitchFamily="2" charset="-78"/>
+              </a:rPr>
+              <a:t>دینامیک</a:t>
+            </a:r>
+            <a:r>
+              <a:rPr lang="fa-IR" sz="2400" dirty="0">
+                <a:cs typeface="B Nazanin" panose="00000400000000000000" pitchFamily="2" charset="-78"/>
+              </a:rPr>
+              <a:t> یا </a:t>
+            </a:r>
+            <a:r>
+              <a:rPr lang="fa-IR" sz="2400" dirty="0" err="1">
+                <a:cs typeface="B Nazanin" panose="00000400000000000000" pitchFamily="2" charset="-78"/>
+              </a:rPr>
+              <a:t>استاتیک</a:t>
+            </a:r>
+            <a:r>
+              <a:rPr lang="fa-IR" sz="2400" dirty="0">
+                <a:cs typeface="B Nazanin" panose="00000400000000000000" pitchFamily="2" charset="-78"/>
+              </a:rPr>
+              <a:t>؟</a:t>
+            </a:r>
+            <a:endParaRPr lang="en-US" sz="2400" dirty="0">
+              <a:cs typeface="B Nazanin" panose="00000400000000000000" pitchFamily="2" charset="-78"/>
+            </a:endParaRPr>
           </a:p>
         </p:txBody>
       </p:sp>
@@ -6064,37 +11022,7 @@
           <p:cNvPr id="5" name="Picture 4">
             <a:extLst>
               <a:ext uri="{FF2B5EF4-FFF2-40B4-BE49-F238E27FC236}">
-                <a16:creationId xmlns:a16="http://schemas.microsoft.com/office/drawing/2014/main" id="{F8188D3B-E839-1E03-D447-DD932C4461FE}"/>
-              </a:ext>
-            </a:extLst>
-          </p:cNvPr>
-          <p:cNvPicPr>
-            <a:picLocks noChangeAspect="1"/>
-          </p:cNvPicPr>
-          <p:nvPr/>
-        </p:nvPicPr>
-        <p:blipFill>
-          <a:blip r:embed="rId2"/>
-          <a:stretch>
-            <a:fillRect/>
-          </a:stretch>
-        </p:blipFill>
-        <p:spPr>
-          <a:xfrm>
-            <a:off x="2162175" y="2702069"/>
-            <a:ext cx="3933825" cy="428625"/>
-          </a:xfrm>
-          <a:prstGeom prst="rect">
-            <a:avLst/>
-          </a:prstGeom>
-        </p:spPr>
-      </p:pic>
-      <p:pic>
-        <p:nvPicPr>
-          <p:cNvPr id="7" name="Picture 6">
-            <a:extLst>
-              <a:ext uri="{FF2B5EF4-FFF2-40B4-BE49-F238E27FC236}">
-                <a16:creationId xmlns:a16="http://schemas.microsoft.com/office/drawing/2014/main" id="{EC9A4141-4FB6-69BD-2661-E6D41FC5CA24}"/>
+                <a16:creationId xmlns:a16="http://schemas.microsoft.com/office/drawing/2014/main" id="{A9D2E4D1-7376-71DF-FD8F-B452D7ADAEAE}"/>
               </a:ext>
             </a:extLst>
           </p:cNvPr>
@@ -6111,8 +11039,8 @@
         </p:blipFill>
         <p:spPr>
           <a:xfrm>
-            <a:off x="2010438" y="4012689"/>
-            <a:ext cx="5762625" cy="438150"/>
+            <a:off x="3789355" y="3679557"/>
+            <a:ext cx="7157039" cy="2497406"/>
           </a:xfrm>
           <a:prstGeom prst="rect">
             <a:avLst/>
@@ -6121,10 +11049,10 @@
       </p:pic>
       <p:pic>
         <p:nvPicPr>
-          <p:cNvPr id="11" name="Picture 10">
-            <a:extLst>
-              <a:ext uri="{FF2B5EF4-FFF2-40B4-BE49-F238E27FC236}">
-                <a16:creationId xmlns:a16="http://schemas.microsoft.com/office/drawing/2014/main" id="{1C3B7C71-C73D-B714-484D-E6A7E9FA0EE2}"/>
+          <p:cNvPr id="6" name="Picture 5">
+            <a:extLst>
+              <a:ext uri="{FF2B5EF4-FFF2-40B4-BE49-F238E27FC236}">
+                <a16:creationId xmlns:a16="http://schemas.microsoft.com/office/drawing/2014/main" id="{E84A9844-0631-6546-CFB1-0118FC361B63}"/>
               </a:ext>
             </a:extLst>
           </p:cNvPr>
@@ -6141,8 +11069,8 @@
         </p:blipFill>
         <p:spPr>
           <a:xfrm>
-            <a:off x="5940585" y="5101421"/>
-            <a:ext cx="5062537" cy="1251229"/>
+            <a:off x="1124901" y="1807436"/>
+            <a:ext cx="2914650" cy="361950"/>
           </a:xfrm>
           <a:prstGeom prst="rect">
             <a:avLst/>
@@ -6151,10 +11079,10 @@
       </p:pic>
       <p:pic>
         <p:nvPicPr>
-          <p:cNvPr id="6" name="Picture 5">
-            <a:extLst>
-              <a:ext uri="{FF2B5EF4-FFF2-40B4-BE49-F238E27FC236}">
-                <a16:creationId xmlns:a16="http://schemas.microsoft.com/office/drawing/2014/main" id="{ED1D406A-2E7A-9C86-E294-3990249A9ABE}"/>
+          <p:cNvPr id="8" name="Picture 7">
+            <a:extLst>
+              <a:ext uri="{FF2B5EF4-FFF2-40B4-BE49-F238E27FC236}">
+                <a16:creationId xmlns:a16="http://schemas.microsoft.com/office/drawing/2014/main" id="{AE11F473-CBAB-32CC-6E88-FA8A69F12343}"/>
               </a:ext>
             </a:extLst>
           </p:cNvPr>
@@ -6171,48 +11099,107 @@
         </p:blipFill>
         <p:spPr>
           <a:xfrm>
-            <a:off x="8471854" y="1152827"/>
-            <a:ext cx="2768306" cy="2243545"/>
+            <a:off x="1124901" y="2533650"/>
+            <a:ext cx="2981325" cy="895350"/>
           </a:xfrm>
           <a:prstGeom prst="rect">
             <a:avLst/>
           </a:prstGeom>
         </p:spPr>
       </p:pic>
-      <p:pic>
-        <p:nvPicPr>
-          <p:cNvPr id="8" name="Picture 7">
-            <a:extLst>
-              <a:ext uri="{FF2B5EF4-FFF2-40B4-BE49-F238E27FC236}">
-                <a16:creationId xmlns:a16="http://schemas.microsoft.com/office/drawing/2014/main" id="{3B12952C-228B-D83F-38E6-6F913CC348FD}"/>
-              </a:ext>
-            </a:extLst>
-          </p:cNvPr>
-          <p:cNvPicPr>
-            <a:picLocks noChangeAspect="1"/>
-          </p:cNvPicPr>
-          <p:nvPr/>
-        </p:nvPicPr>
-        <p:blipFill>
-          <a:blip r:embed="rId6"/>
-          <a:stretch>
-            <a:fillRect/>
-          </a:stretch>
-        </p:blipFill>
-        <p:spPr>
-          <a:xfrm>
-            <a:off x="1377495" y="5101421"/>
-            <a:ext cx="3839332" cy="273737"/>
-          </a:xfrm>
-          <a:prstGeom prst="rect">
-            <a:avLst/>
-          </a:prstGeom>
-        </p:spPr>
-      </p:pic>
+      <p:cxnSp>
+        <p:nvCxnSpPr>
+          <p:cNvPr id="10" name="Straight Connector 9">
+            <a:extLst>
+              <a:ext uri="{FF2B5EF4-FFF2-40B4-BE49-F238E27FC236}">
+                <a16:creationId xmlns:a16="http://schemas.microsoft.com/office/drawing/2014/main" id="{6D026930-FDBF-C2CD-7676-25519F79AC0F}"/>
+              </a:ext>
+            </a:extLst>
+          </p:cNvPr>
+          <p:cNvCxnSpPr/>
+          <p:nvPr/>
+        </p:nvCxnSpPr>
+        <p:spPr>
+          <a:xfrm>
+            <a:off x="3648364" y="3565236"/>
+            <a:ext cx="5671127" cy="0"/>
+          </a:xfrm>
+          <a:prstGeom prst="line">
+            <a:avLst/>
+          </a:prstGeom>
+        </p:spPr>
+        <p:style>
+          <a:lnRef idx="2">
+            <a:schemeClr val="accent1"/>
+          </a:lnRef>
+          <a:fillRef idx="0">
+            <a:schemeClr val="accent1"/>
+          </a:fillRef>
+          <a:effectRef idx="1">
+            <a:schemeClr val="accent1"/>
+          </a:effectRef>
+          <a:fontRef idx="minor">
+            <a:schemeClr val="tx1"/>
+          </a:fontRef>
+        </p:style>
+      </p:cxnSp>
+      <p:sp>
+        <p:nvSpPr>
+          <p:cNvPr id="4" name="TextBox 3">
+            <a:extLst>
+              <a:ext uri="{FF2B5EF4-FFF2-40B4-BE49-F238E27FC236}">
+                <a16:creationId xmlns:a16="http://schemas.microsoft.com/office/drawing/2014/main" id="{44148F36-F4A5-C337-84C9-E007E547A6E3}"/>
+              </a:ext>
+            </a:extLst>
+          </p:cNvPr>
+          <p:cNvSpPr txBox="1"/>
+          <p:nvPr/>
+        </p:nvSpPr>
+        <p:spPr>
+          <a:xfrm>
+            <a:off x="5558828" y="1240325"/>
+            <a:ext cx="5794973" cy="369332"/>
+          </a:xfrm>
+          <a:prstGeom prst="rect">
+            <a:avLst/>
+          </a:prstGeom>
+          <a:noFill/>
+        </p:spPr>
+        <p:txBody>
+          <a:bodyPr wrap="square" rtlCol="0">
+            <a:spAutoFit/>
+          </a:bodyPr>
+          <a:lstStyle/>
+          <a:p>
+            <a:pPr algn="r" rtl="1"/>
+            <a:r>
+              <a:rPr lang="fa-IR" b="1" dirty="0">
+                <a:cs typeface="B Nazanin" panose="00000400000000000000" pitchFamily="2" charset="-78"/>
+              </a:rPr>
+              <a:t>چگونه از حالتی که </a:t>
+            </a:r>
+            <a:r>
+              <a:rPr lang="fa-IR" b="1" dirty="0" err="1">
+                <a:cs typeface="B Nazanin" panose="00000400000000000000" pitchFamily="2" charset="-78"/>
+              </a:rPr>
+              <a:t>ساختنش</a:t>
+            </a:r>
+            <a:r>
+              <a:rPr lang="fa-IR" b="1" dirty="0">
+                <a:cs typeface="B Nazanin" panose="00000400000000000000" pitchFamily="2" charset="-78"/>
+              </a:rPr>
+              <a:t> آسان است به حالت پایه مسئله برویم؟</a:t>
+            </a:r>
+            <a:endParaRPr lang="en-US" b="1" dirty="0">
+              <a:cs typeface="B Nazanin" panose="00000400000000000000" pitchFamily="2" charset="-78"/>
+            </a:endParaRPr>
+          </a:p>
+        </p:txBody>
+      </p:sp>
     </p:spTree>
     <p:extLst>
       <p:ext uri="{BB962C8B-B14F-4D97-AF65-F5344CB8AC3E}">
-        <p14:creationId xmlns:p14="http://schemas.microsoft.com/office/powerpoint/2010/main" val="2811683946"/>
+        <p14:creationId xmlns:p14="http://schemas.microsoft.com/office/powerpoint/2010/main" val="137806960"/>
       </p:ext>
     </p:extLst>
   </p:cSld>
@@ -6535,4 +11522,319 @@
     </a:ext>
   </a:extLst>
 </a:theme>
+</file>
+
+<file path=ppt/theme/theme2.xml><?xml version="1.0" encoding="utf-8"?>
+<a:theme xmlns:a="http://schemas.openxmlformats.org/drawingml/2006/main" name="Office Theme">
+  <a:themeElements>
+    <a:clrScheme name="Office">
+      <a:dk1>
+        <a:sysClr val="windowText" lastClr="000000"/>
+      </a:dk1>
+      <a:lt1>
+        <a:sysClr val="window" lastClr="FFFFFF"/>
+      </a:lt1>
+      <a:dk2>
+        <a:srgbClr val="0E2841"/>
+      </a:dk2>
+      <a:lt2>
+        <a:srgbClr val="E8E8E8"/>
+      </a:lt2>
+      <a:accent1>
+        <a:srgbClr val="156082"/>
+      </a:accent1>
+      <a:accent2>
+        <a:srgbClr val="E97132"/>
+      </a:accent2>
+      <a:accent3>
+        <a:srgbClr val="196B24"/>
+      </a:accent3>
+      <a:accent4>
+        <a:srgbClr val="0F9ED5"/>
+      </a:accent4>
+      <a:accent5>
+        <a:srgbClr val="A02B93"/>
+      </a:accent5>
+      <a:accent6>
+        <a:srgbClr val="4EA72E"/>
+      </a:accent6>
+      <a:hlink>
+        <a:srgbClr val="467886"/>
+      </a:hlink>
+      <a:folHlink>
+        <a:srgbClr val="96607D"/>
+      </a:folHlink>
+    </a:clrScheme>
+    <a:fontScheme name="Office">
+      <a:majorFont>
+        <a:latin typeface="Aptos Display" panose="02110004020202020204"/>
+        <a:ea typeface=""/>
+        <a:cs typeface=""/>
+        <a:font script="Jpan" typeface="游ゴシック Light"/>
+        <a:font script="Hang" typeface="맑은 고딕"/>
+        <a:font script="Hans" typeface="等线 Light"/>
+        <a:font script="Hant" typeface="新細明體"/>
+        <a:font script="Arab" typeface="Times New Roman"/>
+        <a:font script="Hebr" typeface="Times New Roman"/>
+        <a:font script="Thai" typeface="Angsana New"/>
+        <a:font script="Ethi" typeface="Nyala"/>
+        <a:font script="Beng" typeface="Vrinda"/>
+        <a:font script="Gujr" typeface="Shruti"/>
+        <a:font script="Khmr" typeface="MoolBoran"/>
+        <a:font script="Knda" typeface="Tunga"/>
+        <a:font script="Guru" typeface="Raavi"/>
+        <a:font script="Cans" typeface="Euphemia"/>
+        <a:font script="Cher" typeface="Plantagenet Cherokee"/>
+        <a:font script="Yiii" typeface="Microsoft Yi Baiti"/>
+        <a:font script="Tibt" typeface="Microsoft Himalaya"/>
+        <a:font script="Thaa" typeface="MV Boli"/>
+        <a:font script="Deva" typeface="Mangal"/>
+        <a:font script="Telu" typeface="Gautami"/>
+        <a:font script="Taml" typeface="Latha"/>
+        <a:font script="Syrc" typeface="Estrangelo Edessa"/>
+        <a:font script="Orya" typeface="Kalinga"/>
+        <a:font script="Mlym" typeface="Kartika"/>
+        <a:font script="Laoo" typeface="DokChampa"/>
+        <a:font script="Sinh" typeface="Iskoola Pota"/>
+        <a:font script="Mong" typeface="Mongolian Baiti"/>
+        <a:font script="Viet" typeface="Times New Roman"/>
+        <a:font script="Uigh" typeface="Microsoft Uighur"/>
+        <a:font script="Geor" typeface="Sylfaen"/>
+        <a:font script="Armn" typeface="Arial"/>
+        <a:font script="Bugi" typeface="Leelawadee UI"/>
+        <a:font script="Bopo" typeface="Microsoft JhengHei"/>
+        <a:font script="Java" typeface="Javanese Text"/>
+        <a:font script="Lisu" typeface="Segoe UI"/>
+        <a:font script="Mymr" typeface="Myanmar Text"/>
+        <a:font script="Nkoo" typeface="Ebrima"/>
+        <a:font script="Olck" typeface="Nirmala UI"/>
+        <a:font script="Osma" typeface="Ebrima"/>
+        <a:font script="Phag" typeface="Phagspa"/>
+        <a:font script="Syrn" typeface="Estrangelo Edessa"/>
+        <a:font script="Syrj" typeface="Estrangelo Edessa"/>
+        <a:font script="Syre" typeface="Estrangelo Edessa"/>
+        <a:font script="Sora" typeface="Nirmala UI"/>
+        <a:font script="Tale" typeface="Microsoft Tai Le"/>
+        <a:font script="Talu" typeface="Microsoft New Tai Lue"/>
+        <a:font script="Tfng" typeface="Ebrima"/>
+      </a:majorFont>
+      <a:minorFont>
+        <a:latin typeface="Aptos" panose="02110004020202020204"/>
+        <a:ea typeface=""/>
+        <a:cs typeface=""/>
+        <a:font script="Jpan" typeface="游ゴシック"/>
+        <a:font script="Hang" typeface="맑은 고딕"/>
+        <a:font script="Hans" typeface="等线"/>
+        <a:font script="Hant" typeface="新細明體"/>
+        <a:font script="Arab" typeface="Arial"/>
+        <a:font script="Hebr" typeface="Arial"/>
+        <a:font script="Thai" typeface="Cordia New"/>
+        <a:font script="Ethi" typeface="Nyala"/>
+        <a:font script="Beng" typeface="Vrinda"/>
+        <a:font script="Gujr" typeface="Shruti"/>
+        <a:font script="Khmr" typeface="DaunPenh"/>
+        <a:font script="Knda" typeface="Tunga"/>
+        <a:font script="Guru" typeface="Raavi"/>
+        <a:font script="Cans" typeface="Euphemia"/>
+        <a:font script="Cher" typeface="Plantagenet Cherokee"/>
+        <a:font script="Yiii" typeface="Microsoft Yi Baiti"/>
+        <a:font script="Tibt" typeface="Microsoft Himalaya"/>
+        <a:font script="Thaa" typeface="MV Boli"/>
+        <a:font script="Deva" typeface="Mangal"/>
+        <a:font script="Telu" typeface="Gautami"/>
+        <a:font script="Taml" typeface="Latha"/>
+        <a:font script="Syrc" typeface="Estrangelo Edessa"/>
+        <a:font script="Orya" typeface="Kalinga"/>
+        <a:font script="Mlym" typeface="Kartika"/>
+        <a:font script="Laoo" typeface="DokChampa"/>
+        <a:font script="Sinh" typeface="Iskoola Pota"/>
+        <a:font script="Mong" typeface="Mongolian Baiti"/>
+        <a:font script="Viet" typeface="Arial"/>
+        <a:font script="Uigh" typeface="Microsoft Uighur"/>
+        <a:font script="Geor" typeface="Sylfaen"/>
+        <a:font script="Armn" typeface="Arial"/>
+        <a:font script="Bugi" typeface="Leelawadee UI"/>
+        <a:font script="Bopo" typeface="Microsoft JhengHei"/>
+        <a:font script="Java" typeface="Javanese Text"/>
+        <a:font script="Lisu" typeface="Segoe UI"/>
+        <a:font script="Mymr" typeface="Myanmar Text"/>
+        <a:font script="Nkoo" typeface="Ebrima"/>
+        <a:font script="Olck" typeface="Nirmala UI"/>
+        <a:font script="Osma" typeface="Ebrima"/>
+        <a:font script="Phag" typeface="Phagspa"/>
+        <a:font script="Syrn" typeface="Estrangelo Edessa"/>
+        <a:font script="Syrj" typeface="Estrangelo Edessa"/>
+        <a:font script="Syre" typeface="Estrangelo Edessa"/>
+        <a:font script="Sora" typeface="Nirmala UI"/>
+        <a:font script="Tale" typeface="Microsoft Tai Le"/>
+        <a:font script="Talu" typeface="Microsoft New Tai Lue"/>
+        <a:font script="Tfng" typeface="Ebrima"/>
+      </a:minorFont>
+    </a:fontScheme>
+    <a:fmtScheme name="Office">
+      <a:fillStyleLst>
+        <a:solidFill>
+          <a:schemeClr val="phClr"/>
+        </a:solidFill>
+        <a:gradFill rotWithShape="1">
+          <a:gsLst>
+            <a:gs pos="0">
+              <a:schemeClr val="phClr">
+                <a:lumMod val="110000"/>
+                <a:satMod val="105000"/>
+                <a:tint val="67000"/>
+              </a:schemeClr>
+            </a:gs>
+            <a:gs pos="50000">
+              <a:schemeClr val="phClr">
+                <a:lumMod val="105000"/>
+                <a:satMod val="103000"/>
+                <a:tint val="73000"/>
+              </a:schemeClr>
+            </a:gs>
+            <a:gs pos="100000">
+              <a:schemeClr val="phClr">
+                <a:lumMod val="105000"/>
+                <a:satMod val="109000"/>
+                <a:tint val="81000"/>
+              </a:schemeClr>
+            </a:gs>
+          </a:gsLst>
+          <a:lin ang="5400000" scaled="0"/>
+        </a:gradFill>
+        <a:gradFill rotWithShape="1">
+          <a:gsLst>
+            <a:gs pos="0">
+              <a:schemeClr val="phClr">
+                <a:satMod val="103000"/>
+                <a:lumMod val="102000"/>
+                <a:tint val="94000"/>
+              </a:schemeClr>
+            </a:gs>
+            <a:gs pos="50000">
+              <a:schemeClr val="phClr">
+                <a:satMod val="110000"/>
+                <a:lumMod val="100000"/>
+                <a:shade val="100000"/>
+              </a:schemeClr>
+            </a:gs>
+            <a:gs pos="100000">
+              <a:schemeClr val="phClr">
+                <a:lumMod val="99000"/>
+                <a:satMod val="120000"/>
+                <a:shade val="78000"/>
+              </a:schemeClr>
+            </a:gs>
+          </a:gsLst>
+          <a:lin ang="5400000" scaled="0"/>
+        </a:gradFill>
+      </a:fillStyleLst>
+      <a:lnStyleLst>
+        <a:ln w="12700" cap="flat" cmpd="sng" algn="ctr">
+          <a:solidFill>
+            <a:schemeClr val="phClr"/>
+          </a:solidFill>
+          <a:prstDash val="solid"/>
+          <a:miter lim="800000"/>
+        </a:ln>
+        <a:ln w="19050" cap="flat" cmpd="sng" algn="ctr">
+          <a:solidFill>
+            <a:schemeClr val="phClr"/>
+          </a:solidFill>
+          <a:prstDash val="solid"/>
+          <a:miter lim="800000"/>
+        </a:ln>
+        <a:ln w="25400" cap="flat" cmpd="sng" algn="ctr">
+          <a:solidFill>
+            <a:schemeClr val="phClr"/>
+          </a:solidFill>
+          <a:prstDash val="solid"/>
+          <a:miter lim="800000"/>
+        </a:ln>
+      </a:lnStyleLst>
+      <a:effectStyleLst>
+        <a:effectStyle>
+          <a:effectLst/>
+        </a:effectStyle>
+        <a:effectStyle>
+          <a:effectLst/>
+        </a:effectStyle>
+        <a:effectStyle>
+          <a:effectLst>
+            <a:outerShdw blurRad="57150" dist="19050" dir="5400000" algn="ctr" rotWithShape="0">
+              <a:srgbClr val="000000">
+                <a:alpha val="63000"/>
+              </a:srgbClr>
+            </a:outerShdw>
+          </a:effectLst>
+        </a:effectStyle>
+      </a:effectStyleLst>
+      <a:bgFillStyleLst>
+        <a:solidFill>
+          <a:schemeClr val="phClr"/>
+        </a:solidFill>
+        <a:solidFill>
+          <a:schemeClr val="phClr">
+            <a:tint val="95000"/>
+            <a:satMod val="170000"/>
+          </a:schemeClr>
+        </a:solidFill>
+        <a:gradFill rotWithShape="1">
+          <a:gsLst>
+            <a:gs pos="0">
+              <a:schemeClr val="phClr">
+                <a:tint val="93000"/>
+                <a:satMod val="150000"/>
+                <a:shade val="98000"/>
+                <a:lumMod val="102000"/>
+              </a:schemeClr>
+            </a:gs>
+            <a:gs pos="50000">
+              <a:schemeClr val="phClr">
+                <a:tint val="98000"/>
+                <a:satMod val="130000"/>
+                <a:shade val="90000"/>
+                <a:lumMod val="103000"/>
+              </a:schemeClr>
+            </a:gs>
+            <a:gs pos="100000">
+              <a:schemeClr val="phClr">
+                <a:shade val="63000"/>
+                <a:satMod val="120000"/>
+              </a:schemeClr>
+            </a:gs>
+          </a:gsLst>
+          <a:lin ang="5400000" scaled="0"/>
+        </a:gradFill>
+      </a:bgFillStyleLst>
+    </a:fmtScheme>
+  </a:themeElements>
+  <a:objectDefaults>
+    <a:lnDef>
+      <a:spPr/>
+      <a:bodyPr/>
+      <a:lstStyle/>
+      <a:style>
+        <a:lnRef idx="2">
+          <a:schemeClr val="accent1"/>
+        </a:lnRef>
+        <a:fillRef idx="0">
+          <a:schemeClr val="accent1"/>
+        </a:fillRef>
+        <a:effectRef idx="1">
+          <a:schemeClr val="accent1"/>
+        </a:effectRef>
+        <a:fontRef idx="minor">
+          <a:schemeClr val="tx1"/>
+        </a:fontRef>
+      </a:style>
+    </a:lnDef>
+  </a:objectDefaults>
+  <a:extraClrSchemeLst/>
+  <a:extLst>
+    <a:ext uri="{05A4C25C-085E-4340-85A3-A5531E510DB2}">
+      <thm15:themeFamily xmlns:thm15="http://schemas.microsoft.com/office/thememl/2012/main" name="Office Theme" id="{2E142A2C-CD16-42D6-873A-C26D2A0506FA}" vid="{1BDDFF52-6CD6-40A5-AB3C-68EB2F1E4D0A}"/>
+    </a:ext>
+  </a:extLst>
+</a:theme>
 </file>